--- a/decks/Entre Amis - Event Mode pack - DRAFT.pptx
+++ b/decks/Entre Amis - Event Mode pack - DRAFT.pptx
@@ -121,13 +121,13 @@
   <p:extLst>
     <p:ext uri="{521415D9-36F7-43E2-AB2F-B90AF26B5E84}">
       <p14:sectionLst xmlns:p14="http://schemas.microsoft.com/office/powerpoint/2010/main">
-        <p14:section name="Introduction" id="{733f4a7c-84d6-e14e-b85b-34da76baac3b}">
+        <p14:section name="Introduction" id="{46cc0697-0e51-d675-a9d0-1e4d9deca65f}">
           <p14:sldIdLst>
             <p14:sldId id="256"/>
             <p14:sldId id="257"/>
           </p14:sldIdLst>
         </p14:section>
-        <p14:section name="Event Mode" id="{5c06281f-40ef-6ac5-95fb-06289d15b9f4}">
+        <p14:section name="Event Mode" id="{ca67fd7e-22e2-a15c-872d-56c97c85cf14}">
           <p14:sldIdLst>
             <p14:sldId id="258"/>
             <p14:sldId id="259"/>
@@ -137,21 +137,21 @@
             <p14:sldId id="263"/>
           </p14:sldIdLst>
         </p14:section>
-        <p14:section name="Working together" id="{90f776cc-7feb-77f4-985f-7a8ec8a44a68}">
+        <p14:section name="Working together" id="{0af013f5-d6bc-e853-3f9a-ed154621ee08}">
           <p14:sldIdLst>
             <p14:sldId id="264"/>
             <p14:sldId id="265"/>
             <p14:sldId id="266"/>
           </p14:sldIdLst>
         </p14:section>
-        <p14:section name="About us" id="{2b71a44f-8b6c-8b3c-9c62-dd1154a10944}">
+        <p14:section name="About us" id="{ec7c7bf8-d1ff-97de-e2f1-7e5d43783ca3}">
           <p14:sldIdLst>
             <p14:sldId id="267"/>
             <p14:sldId id="268"/>
             <p14:sldId id="269"/>
           </p14:sldIdLst>
         </p14:section>
-        <p14:section name="Working notes — delete before sharing" id="{257337bf-78b8-6f9e-12fa-8561940db1cc}">
+        <p14:section name="Working notes — delete before sharing" id="{5fe85ec4-f169-ec1a-8239-fff1bb542b94}">
           <p14:sldIdLst>
             <p14:sldId id="270"/>
           </p14:sldIdLst>
@@ -560,7 +560,7 @@
           <a:p>
             <a:r>
               <a:rPr lang="en-US" dirty="0"/>
-              <a:t>Event Mode pack, for organisers of combined events and marketing areas. Built from slides 14–22 of the October deck, in the same style as the core brand story. Named events (Fizz Fest Hampshire, Wine Garden of England, Festive Fizz Fest Winchester) are kept out so the pack can go to any organiser; put them in each organiser's own proposal.</a:t>
+              <a:t>Written to organisers: wine festivals and tasting events, and regional wine bodies that take on a marketing role for an area (organisations like Vineyards of Hampshire or Vins de Provence). 'Marketing areas' replaced, as it's too generic. Named events and organisations are kept out so the pack can go to anyone; use names in each organiser's own proposal.</a:t>
             </a:r>
             <a:endParaRPr lang="en-US" dirty="0"/>
           </a:p>
@@ -648,7 +648,7 @@
           <a:p>
             <a:r>
               <a:rPr lang="en-US" dirty="0"/>
-              <a:t>Heading typo fixed: 'foundering' (sinking) is now 'founding'. 'Two year insight benefit' renamed (internal language).</a:t>
+              <a:t>Heading typo fixed: 'foundering' (sinking) is now 'founding'. 'Insight' restored, as it's allowed in partner materials (proposed).</a:t>
             </a:r>
             <a:endParaRPr lang="en-US" dirty="0"/>
           </a:p>
@@ -736,7 +736,7 @@
           <a:p>
             <a:r>
               <a:rPr lang="en-US" dirty="0"/>
-              <a:t>From 'Before we build event partner mode'. The 'Ecosystem story' card was a note about this deck itself, so it's left out. 'Commercial pilot' is now 'First event pilot'.</a:t>
+              <a:t>From 'Before we build event partner mode'. The 'Ecosystem story' card was a note about the deck itself, so it's left out.</a:t>
             </a:r>
             <a:endParaRPr lang="en-US" dirty="0"/>
           </a:p>
@@ -1176,7 +1176,7 @@
           <a:p>
             <a:r>
               <a:rPr lang="en-US" dirty="0"/>
-              <a:t>A one-slide introduction for organisers who haven't seen the core brand story.</a:t>
+              <a:t>Made explicit that this is the brand, before the pack turns to Event Mode. Every line uses confirmed content apart from the third card's 'an honest view of what people think', drawn from the Partner Mode data rule ('helps partners understand what people genuinely think').</a:t>
             </a:r>
             <a:endParaRPr lang="en-US" dirty="0"/>
           </a:p>
@@ -1264,7 +1264,7 @@
           <a:p>
             <a:r>
               <a:rPr lang="en-US" dirty="0"/>
-              <a:t>Heading and question swapped, as on the partner slide. 'Save wines in seconds' changed to 'save the wines you like as you go': a speed claim, and it suggests wine recognition, which isn't claimable yet.</a:t>
+              <a:t>Rewritten from 'The event opportunity: a real gap' so it speaks to the organiser's problem first. Ticket buyers and 'one person may buy eight tickets' are your points. 'Where do all the wines you discovered go?' becomes the third card.</a:t>
             </a:r>
             <a:endParaRPr lang="en-US" dirty="0"/>
           </a:p>
@@ -1352,7 +1352,7 @@
           <a:p>
             <a:r>
               <a:rPr lang="en-US" dirty="0"/>
-              <a:t>Generic versions of the three named formats in the October deck (Fizz Fest Hampshire; Wine Garden of England, Kent; Festive Fizz Fest, Winchester). Use the names in that organiser's proposal, not in this pack.</a:t>
+              <a:t>New spine for the pack, as you suggested. Visitor side from the October 'During / Personal / After' slide. Quizzes and prizes left off until decided: quizzes need to fit 'no wrong answers', and prizes near alcohol need checking against CAP and Portman Group rules. 'Save wines in seconds' isn't used: it's a speed claim and suggests wine recognition, which isn't claimable yet.</a:t>
             </a:r>
             <a:endParaRPr lang="en-US" dirty="0"/>
           </a:p>
@@ -1440,7 +1440,7 @@
           <a:p>
             <a:r>
               <a:rPr lang="en-US" dirty="0"/>
-              <a:t>Card bodies expand the October line: 'Quick to use. Optional questions. No compulsory tasting. Able to be tailored to enhance physical experience and help create lasting memories.' 'Enhance' and 'lasting memories' were benefit claims, so they're reworded.</a:t>
+              <a:t>Replaces 'The Entre Amis table' and 'One platform. Different event formats.' The table is no longer front and centre: it's one small way Entre Amis shows up. 'Comfortable seats... a place to connect and find comfort, never a sales space' is your wording. The fee line ('Staffing, furniture, transport, setup and operational support must be covered by the agreed event fee') moves to each organiser's proposal.</a:t>
             </a:r>
             <a:endParaRPr lang="en-US" dirty="0"/>
           </a:p>
@@ -1528,7 +1528,7 @@
           <a:p>
             <a:r>
               <a:rPr lang="en-US" dirty="0"/>
-              <a:t>The cost line appeared on two slides in the October deck. It's a commercial term, so it reads better in each organiser's proposal.</a:t>
+              <a:t>Subtitle and cards now speak to the organiser. 'Enhance' and 'lasting memories' were benefit claims, so they're out.</a:t>
             </a:r>
             <a:endParaRPr lang="en-US" dirty="0"/>
           </a:p>
@@ -1616,7 +1616,7 @@
           <a:p>
             <a:r>
               <a:rPr lang="en-US" dirty="0"/>
-              <a:t>'Useful insight' renamed 'What visitors think': 'insight' as a product is internal language. 'A gateway to enhanced experiences, relationships and insights' shortened. Contacts: in Event Mode they go to the organiser by default; vineyards only where each is named in the visitor's permission (proposed, Brand Brain 03).</a:t>
+              <a:t>'Three layers of insight' with the labels fixed to match their descriptions (they were swapped in the October deck). Event Mode contacts go to the organiser by default; individual vineyards only where each is named in the visitor's permission (proposed, Brand Brain 03).</a:t>
             </a:r>
             <a:endParaRPr lang="en-US" dirty="0"/>
           </a:p>
@@ -1704,7 +1704,7 @@
           <a:p>
             <a:r>
               <a:rPr lang="en-US" dirty="0"/>
-              <a:t>In the October deck the labels and descriptions didn't match ('Event insight' described wider trends). Renamed 'Your event', 'Visitor contacts' and 'Wider trends'. 'Insight' removed from headings (internal language). 'Remove re-identification risk' reworded as 'No risk of identifying anyone'.</a:t>
+              <a:t>New slide built from the confirmed Partner Mode data rules ('That trust is the brand — Say what you really think only works if people are safe to do so') and the promises from 'Three layers of insight'. It answers the organiser's likely first question about data.</a:t>
             </a:r>
             <a:endParaRPr lang="en-US" dirty="0"/>
           </a:p>
@@ -1792,7 +1792,7 @@
           <a:p>
             <a:r>
               <a:rPr lang="en-US" dirty="0"/>
-              <a:t>'Aggregate insight' is now 'combined reporting' (internal language).</a:t>
+              <a:t>'Hosted Entre Amis Table' is now 'a small Entre Amis corner', in line with how Entre Amis shows up at events.</a:t>
             </a:r>
             <a:endParaRPr lang="en-US" dirty="0"/>
           </a:p>
@@ -2564,7 +2564,7 @@
                   <a:schemeClr val="tx1"/>
                 </a:solidFill>
               </a:rPr>
-              <a:t>For wine events, festivals and marketing areas</a:t>
+              <a:t>For wine festivals, tasting events and regional wine bodies</a:t>
             </a:r>
             <a:endParaRPr lang="en-US" sz="2800" dirty="0"/>
           </a:p>
@@ -2578,7 +2578,7 @@
         </p:nvSpPr>
         <p:spPr>
           <a:xfrm>
-            <a:off x="548640" y="4069080"/>
+            <a:off x="548640" y="4114800"/>
             <a:ext cx="11094415" cy="365760"/>
           </a:xfrm>
           <a:prstGeom prst="rect">
@@ -2603,7 +2603,7 @@
                   <a:schemeClr val="tx1"/>
                 </a:solidFill>
               </a:rPr>
-              <a:t>The setting changes. The spirit never does.</a:t>
+              <a:t>What your visitors really think, and what it tells you.</a:t>
             </a:r>
             <a:endParaRPr lang="en-US" sz="1600" dirty="0"/>
           </a:p>
@@ -2659,7 +2659,7 @@
                   <a:schemeClr val="tx1"/>
                 </a:solidFill>
               </a:rPr>
-              <a:t>Event Mode is proposed in the Brand Brain. Its stage, and how it differs from Partner Mode, are still to decide.</a:t>
+              <a:t>Event Mode is proposed in the Brand Brain. Its stage, and how it differs from Partner Mode, are still to decide. The italic line is new descriptive copy: keep or change.</a:t>
             </a:r>
             <a:endParaRPr lang="en-US" sz="1100" dirty="0"/>
           </a:p>
@@ -2980,7 +2980,7 @@
                   <a:schemeClr val="tx1"/>
                 </a:solidFill>
               </a:rPr>
-              <a:t>Co-design input, launch recognition, a tailored event set-up and a shared post-event learning review.</a:t>
+              <a:t>Co-design input, launch recognition, a set-up tailored to your event and a shared post-event learning review.</a:t>
             </a:r>
             <a:endParaRPr lang="en-US" sz="1500" dirty="0"/>
           </a:p>
@@ -2988,7 +2988,7 @@
       </p:sp>
       <p:sp>
         <p:nvSpPr>
-          <p:cNvPr id="8" name="Founding: TWO-YEAR REPORTING BENEFIT"/>
+          <p:cNvPr id="8" name="Founding: TWO-YEAR INSIGHT BENEFIT"/>
           <p:cNvSpPr/>
           <p:nvPr/>
         </p:nvSpPr>
@@ -3056,7 +3056,7 @@
                 <a:ea typeface="Raleway SemiBold" pitchFamily="34" charset="-122"/>
                 <a:cs typeface="Raleway SemiBold" pitchFamily="34" charset="-120"/>
               </a:rPr>
-              <a:t>TWO-YEAR REPORTING BENEFIT</a:t>
+              <a:t>TWO-YEAR INSIGHT BENEFIT</a:t>
             </a:r>
             <a:endParaRPr lang="en-US" sz="1300" dirty="0"/>
           </a:p>
@@ -3095,7 +3095,7 @@
                   <a:schemeClr val="tx1"/>
                 </a:solidFill>
               </a:rPr>
-              <a:t>Enhanced reporting and strategic conversations about what visitors think, within agreed deliverables and data-quality thresholds.</a:t>
+              <a:t>Enhanced reporting and strategic insight conversations, within agreed deliverables and data-quality thresholds.</a:t>
             </a:r>
             <a:endParaRPr lang="en-US" sz="1500" dirty="0"/>
           </a:p>
@@ -3630,7 +3630,7 @@
                   <a:schemeClr val="tx1"/>
                 </a:solidFill>
               </a:rPr>
-              <a:t>Visitor screens: discover, Meet the Maker, tasting prompts, save, crown, join in, memories and consent.</a:t>
+              <a:t>Your visitors' screens: discover, Meet the Maker, tasting prompts, save, crown, join in, memories and consent.</a:t>
             </a:r>
             <a:endParaRPr lang="en-US" sz="1500" dirty="0"/>
           </a:p>
@@ -3638,7 +3638,7 @@
       </p:sp>
       <p:sp>
         <p:nvSpPr>
-          <p:cNvPr id="7" name="Card: EXAMPLE ORGANISER REPORT"/>
+          <p:cNvPr id="7" name="Card: EXAMPLE INSIGHT REPORT"/>
           <p:cNvSpPr/>
           <p:nvPr/>
         </p:nvSpPr>
@@ -3706,7 +3706,7 @@
                 <a:ea typeface="Raleway SemiBold" pitchFamily="34" charset="-122"/>
                 <a:cs typeface="Raleway SemiBold" pitchFamily="34" charset="-120"/>
               </a:rPr>
-              <a:t>EXAMPLE ORGANISER REPORT</a:t>
+              <a:t>EXAMPLE INSIGHT REPORT</a:t>
             </a:r>
             <a:endParaRPr lang="en-US" sz="1500" dirty="0"/>
           </a:p>
@@ -3850,7 +3850,7 @@
                   <a:schemeClr val="tx1"/>
                 </a:solidFill>
               </a:rPr>
-              <a:t>Defined scope, costs, responsibilities, no exclusivity, and measures of success for the first event.</a:t>
+              <a:t>Defined scope, costs, responsibilities, no exclusivity, and measures of success for your first event.</a:t>
             </a:r>
             <a:endParaRPr lang="en-US" sz="1500" dirty="0"/>
           </a:p>
@@ -5629,7 +5629,7 @@
           <a:p>
             <a:pPr marL="203200" indent="-203200">
               <a:spcAft>
-                <a:spcPts val="700"/>
+                <a:spcPts val="600"/>
               </a:spcAft>
               <a:buSzPct val="100000"/>
               <a:buChar char="•"/>
@@ -5640,14 +5640,14 @@
                   <a:schemeClr val="tx1"/>
                 </a:solidFill>
               </a:rPr>
-              <a:t>Event Mode: confirm, and set its stage and differences from Partner Mode</a:t>
+              <a:t>Event Mode: confirm, set its stage and how it differs from Partner Mode</a:t>
             </a:r>
             <a:endParaRPr lang="en-US" sz="1400" dirty="0"/>
           </a:p>
           <a:p>
             <a:pPr marL="203200" indent="-203200">
               <a:spcAft>
-                <a:spcPts val="700"/>
+                <a:spcPts val="600"/>
               </a:spcAft>
               <a:buSzPct val="100000"/>
               <a:buChar char="•"/>
@@ -5658,14 +5658,14 @@
                   <a:schemeClr val="tx1"/>
                 </a:solidFill>
               </a:rPr>
-              <a:t>Quizzes and prizes (slide 3)</a:t>
+              <a:t>Cover line (slide 1)</a:t>
             </a:r>
             <a:endParaRPr lang="en-US" sz="1400" dirty="0"/>
           </a:p>
           <a:p>
             <a:pPr marL="203200" indent="-203200">
               <a:spcAft>
-                <a:spcPts val="700"/>
+                <a:spcPts val="600"/>
               </a:spcAft>
               <a:buSzPct val="100000"/>
               <a:buChar char="•"/>
@@ -5676,14 +5676,14 @@
                   <a:schemeClr val="tx1"/>
                 </a:solidFill>
               </a:rPr>
-              <a:t>Where the cost line sits (slide 6)</a:t>
+              <a:t>Conversations as a source of learning and connection (slide 2)</a:t>
             </a:r>
             <a:endParaRPr lang="en-US" sz="1400" dirty="0"/>
           </a:p>
           <a:p>
             <a:pPr marL="203200" indent="-203200">
               <a:spcAft>
-                <a:spcPts val="700"/>
+                <a:spcPts val="600"/>
               </a:spcAft>
               <a:buSzPct val="100000"/>
               <a:buChar char="•"/>
@@ -5694,14 +5694,14 @@
                   <a:schemeClr val="tx1"/>
                 </a:solidFill>
               </a:rPr>
-              <a:t>Contacts rule, legal review; reporting crowned wines (slides 7, 8)</a:t>
+              <a:t>Quizzes and prizes (slide 4)</a:t>
             </a:r>
             <a:endParaRPr lang="en-US" sz="1400" dirty="0"/>
           </a:p>
           <a:p>
             <a:pPr marL="203200" indent="-203200">
               <a:spcAft>
-                <a:spcPts val="700"/>
+                <a:spcPts val="600"/>
               </a:spcAft>
               <a:buSzPct val="100000"/>
               <a:buChar char="•"/>
@@ -5712,14 +5712,14 @@
                   <a:schemeClr val="tx1"/>
                 </a:solidFill>
               </a:rPr>
-              <a:t>'By default' and 'automatic' in the promises (slide 8)</a:t>
+              <a:t>QR joining at every event (slide 5)</a:t>
             </a:r>
             <a:endParaRPr lang="en-US" sz="1400" dirty="0"/>
           </a:p>
           <a:p>
             <a:pPr marL="203200" indent="-203200">
               <a:spcAft>
-                <a:spcPts val="700"/>
+                <a:spcPts val="600"/>
               </a:spcAft>
               <a:buSzPct val="100000"/>
               <a:buChar char="•"/>
@@ -5730,14 +5730,14 @@
                   <a:schemeClr val="tx1"/>
                 </a:solidFill>
               </a:rPr>
-              <a:t>Pricing and preferential rates, launch recognition (slides 9, 10)</a:t>
+              <a:t>Contacts rule, legal review; reporting crowns (slides 4, 7)</a:t>
             </a:r>
             <a:endParaRPr lang="en-US" sz="1400" dirty="0"/>
           </a:p>
           <a:p>
             <a:pPr marL="203200" indent="-203200">
               <a:spcAft>
-                <a:spcPts val="700"/>
+                <a:spcPts val="600"/>
               </a:spcAft>
               <a:buSzPct val="100000"/>
               <a:buChar char="•"/>
@@ -5748,7 +5748,25 @@
                   <a:schemeClr val="tx1"/>
                 </a:solidFill>
               </a:rPr>
-              <a:t>Claim: 'richer experiences' (slide 7)</a:t>
+              <a:t>'By default' and 'automatic' (slide 8)</a:t>
+            </a:r>
+            <a:endParaRPr lang="en-US" sz="1400" dirty="0"/>
+          </a:p>
+          <a:p>
+            <a:pPr marL="203200" indent="-203200">
+              <a:spcAft>
+                <a:spcPts val="600"/>
+              </a:spcAft>
+              <a:buSzPct val="100000"/>
+              <a:buChar char="•"/>
+            </a:pPr>
+            <a:r>
+              <a:rPr lang="en-US" sz="1400" dirty="0">
+                <a:solidFill>
+                  <a:schemeClr val="tx1"/>
+                </a:solidFill>
+              </a:rPr>
+              <a:t>Pricing, preferential rates, launch recognition (slides 9, 10)</a:t>
             </a:r>
             <a:endParaRPr lang="en-US" sz="1400" dirty="0"/>
           </a:p>
@@ -5848,7 +5866,7 @@
           <a:p>
             <a:pPr marL="203200" indent="-203200">
               <a:spcAft>
-                <a:spcPts val="700"/>
+                <a:spcPts val="600"/>
               </a:spcAft>
               <a:buSzPct val="100000"/>
               <a:buChar char="•"/>
@@ -5866,7 +5884,7 @@
           <a:p>
             <a:pPr marL="203200" indent="-203200">
               <a:spcAft>
-                <a:spcPts val="700"/>
+                <a:spcPts val="600"/>
               </a:spcAft>
               <a:buSzPct val="100000"/>
               <a:buChar char="•"/>
@@ -5877,14 +5895,14 @@
                   <a:schemeClr val="tx1"/>
                 </a:solidFill>
               </a:rPr>
-              <a:t>Visitor screens and journey screens (slides 3, 5)</a:t>
+              <a:t>Organiser evidence for slide 3</a:t>
             </a:r>
             <a:endParaRPr lang="en-US" sz="1400" dirty="0"/>
           </a:p>
           <a:p>
             <a:pPr marL="203200" indent="-203200">
               <a:spcAft>
-                <a:spcPts val="700"/>
+                <a:spcPts val="600"/>
               </a:spcAft>
               <a:buSzPct val="100000"/>
               <a:buChar char="•"/>
@@ -5895,14 +5913,14 @@
                   <a:schemeClr val="tx1"/>
                 </a:solidFill>
               </a:rPr>
-              <a:t>Event and table photography (slides 4, 6)</a:t>
+              <a:t>Visitor screens and photos (slides 5, 6)</a:t>
             </a:r>
             <a:endParaRPr lang="en-US" sz="1400" dirty="0"/>
           </a:p>
           <a:p>
             <a:pPr marL="203200" indent="-203200">
               <a:spcAft>
-                <a:spcPts val="700"/>
+                <a:spcPts val="600"/>
               </a:spcAft>
               <a:buSzPct val="100000"/>
               <a:buChar char="•"/>
@@ -5920,7 +5938,7 @@
           <a:p>
             <a:pPr marL="203200" indent="-203200">
               <a:spcAft>
-                <a:spcPts val="700"/>
+                <a:spcPts val="600"/>
               </a:spcAft>
               <a:buSzPct val="100000"/>
               <a:buChar char="•"/>
@@ -5938,7 +5956,7 @@
           <a:p>
             <a:pPr marL="203200" indent="-203200">
               <a:spcAft>
-                <a:spcPts val="700"/>
+                <a:spcPts val="600"/>
               </a:spcAft>
               <a:buSzPct val="100000"/>
               <a:buChar char="•"/>
@@ -6063,7 +6081,7 @@
                 <a:ea typeface="Raleway Light" pitchFamily="34" charset="-122"/>
                 <a:cs typeface="Raleway Light" pitchFamily="34" charset="-120"/>
               </a:rPr>
-              <a:t>Conversation, not knowledge.</a:t>
+              <a:t>The brand behind Event Mode</a:t>
             </a:r>
             <a:endParaRPr lang="en-US" sz="3600" dirty="0"/>
           </a:p>
@@ -6104,7 +6122,7 @@
                 <a:ea typeface="Raleway Light" pitchFamily="34" charset="-122"/>
                 <a:cs typeface="Raleway Light" pitchFamily="34" charset="-120"/>
               </a:rPr>
-              <a:t>Who we are</a:t>
+              <a:t>Conversation, not knowledge.</a:t>
             </a:r>
             <a:endParaRPr lang="en-US" sz="1800" dirty="0"/>
           </a:p>
@@ -6119,11 +6137,11 @@
         <p:spPr>
           <a:xfrm>
             <a:off x="548640" y="1783080"/>
-            <a:ext cx="11094415" cy="1188720"/>
+            <a:ext cx="11094415" cy="1097280"/>
           </a:xfrm>
           <a:prstGeom prst="roundRect">
             <a:avLst>
-              <a:gd name="adj" fmla="val 9231"/>
+              <a:gd name="adj" fmla="val 10000"/>
             </a:avLst>
           </a:prstGeom>
           <a:solidFill>
@@ -6146,7 +6164,7 @@
         <p:spPr>
           <a:xfrm>
             <a:off x="1005840" y="1783080"/>
-            <a:ext cx="10180015" cy="1188720"/>
+            <a:ext cx="10180015" cy="1097280"/>
           </a:xfrm>
           <a:prstGeom prst="rect">
             <a:avLst/>
@@ -6165,31 +6183,31 @@
               <a:buNone/>
             </a:pPr>
             <a:r>
-              <a:rPr lang="en-US" sz="2400" dirty="0">
+              <a:rPr lang="en-US" sz="2200" dirty="0">
                 <a:solidFill>
                   <a:schemeClr val="bg2"/>
                 </a:solidFill>
               </a:rPr>
               <a:t>We start with a simple belief: conversation flows when nobody is worried about getting it right.</a:t>
             </a:r>
-            <a:endParaRPr lang="en-US" sz="2400" dirty="0"/>
-          </a:p>
-        </p:txBody>
-      </p:sp>
-      <p:sp>
-        <p:nvSpPr>
-          <p:cNvPr id="6" name="Card: BETWEEN FRIENDS"/>
+            <a:endParaRPr lang="en-US" sz="2200" dirty="0"/>
+          </a:p>
+        </p:txBody>
+      </p:sp>
+      <p:sp>
+        <p:nvSpPr>
+          <p:cNvPr id="6" name="Card: WHO WE ARE"/>
           <p:cNvSpPr/>
           <p:nvPr/>
         </p:nvSpPr>
         <p:spPr>
           <a:xfrm>
-            <a:off x="548640" y="3291840"/>
-            <a:ext cx="3515258" cy="2194560"/>
+            <a:off x="548640" y="3108960"/>
+            <a:ext cx="3515258" cy="1874520"/>
           </a:xfrm>
           <a:prstGeom prst="roundRect">
             <a:avLst>
-              <a:gd name="adj" fmla="val 5000"/>
+              <a:gd name="adj" fmla="val 5854"/>
             </a:avLst>
           </a:prstGeom>
           <a:solidFill>
@@ -6218,8 +6236,8 @@
         </p:nvSpPr>
         <p:spPr>
           <a:xfrm>
-            <a:off x="777240" y="3520440"/>
-            <a:ext cx="3058058" cy="1828800"/>
+            <a:off x="777240" y="3337560"/>
+            <a:ext cx="3058058" cy="1508760"/>
           </a:xfrm>
           <a:prstGeom prst="rect">
             <a:avLst/>
@@ -6246,7 +6264,7 @@
                 <a:ea typeface="Raleway SemiBold" pitchFamily="34" charset="-122"/>
                 <a:cs typeface="Raleway SemiBold" pitchFamily="34" charset="-120"/>
               </a:rPr>
-              <a:t>BETWEEN FRIENDS</a:t>
+              <a:t>WHO WE ARE</a:t>
             </a:r>
             <a:endParaRPr lang="en-US" sz="1500" dirty="0"/>
           </a:p>
@@ -6280,7 +6298,7 @@
                   <a:schemeClr val="tx1"/>
                 </a:solidFill>
               </a:rPr>
-              <a:t>Entre Amis is French for "between friends". Any wine. Any table. Everyone has something worth saying.</a:t>
+              <a:t>Entre Amis is French for "between friends". A wine brand where everyone has something worth saying, whatever they know.</a:t>
             </a:r>
             <a:endParaRPr lang="en-US" sz="1500" dirty="0"/>
           </a:p>
@@ -6288,18 +6306,18 @@
       </p:sp>
       <p:sp>
         <p:nvSpPr>
-          <p:cNvPr id="8" name="Card: WHAT WE ADD"/>
+          <p:cNvPr id="8" name="Card: WHAT WE MAKE"/>
           <p:cNvSpPr/>
           <p:nvPr/>
         </p:nvSpPr>
         <p:spPr>
           <a:xfrm>
-            <a:off x="4338218" y="3291840"/>
-            <a:ext cx="3515258" cy="2194560"/>
+            <a:off x="4338218" y="3108960"/>
+            <a:ext cx="3515258" cy="1874520"/>
           </a:xfrm>
           <a:prstGeom prst="roundRect">
             <a:avLst>
-              <a:gd name="adj" fmla="val 5000"/>
+              <a:gd name="adj" fmla="val 5854"/>
             </a:avLst>
           </a:prstGeom>
           <a:solidFill>
@@ -6328,8 +6346,8 @@
         </p:nvSpPr>
         <p:spPr>
           <a:xfrm>
-            <a:off x="4566818" y="3520440"/>
-            <a:ext cx="3058058" cy="1828800"/>
+            <a:off x="4566818" y="3337560"/>
+            <a:ext cx="3058058" cy="1508760"/>
           </a:xfrm>
           <a:prstGeom prst="rect">
             <a:avLst/>
@@ -6356,7 +6374,7 @@
                 <a:ea typeface="Raleway SemiBold" pitchFamily="34" charset="-122"/>
                 <a:cs typeface="Raleway SemiBold" pitchFamily="34" charset="-120"/>
               </a:rPr>
-              <a:t>WHAT WE ADD</a:t>
+              <a:t>WHAT WE MAKE</a:t>
             </a:r>
             <a:endParaRPr lang="en-US" sz="1500" dirty="0"/>
           </a:p>
@@ -6390,7 +6408,7 @@
                   <a:schemeClr val="tx1"/>
                 </a:solidFill>
               </a:rPr>
-              <a:t>What we add isn't content. It's connection. We help capture what people say and really think, and help them remember.</a:t>
+              <a:t>A table game and an app that turn any wine into conversation, and Partner Mode and Event Mode for the wine world.</a:t>
             </a:r>
             <a:endParaRPr lang="en-US" sz="1500" dirty="0"/>
           </a:p>
@@ -6398,18 +6416,18 @@
       </p:sp>
       <p:sp>
         <p:nvSpPr>
-          <p:cNvPr id="10" name="Card: THE FRIEND AT THE TABLE"/>
+          <p:cNvPr id="10" name="Card: WHAT WE BRING YOU"/>
           <p:cNvSpPr/>
           <p:nvPr/>
         </p:nvSpPr>
         <p:spPr>
           <a:xfrm>
-            <a:off x="8127797" y="3291840"/>
-            <a:ext cx="3515258" cy="2194560"/>
+            <a:off x="8127797" y="3108960"/>
+            <a:ext cx="3515258" cy="1874520"/>
           </a:xfrm>
           <a:prstGeom prst="roundRect">
             <a:avLst>
-              <a:gd name="adj" fmla="val 5000"/>
+              <a:gd name="adj" fmla="val 5854"/>
             </a:avLst>
           </a:prstGeom>
           <a:solidFill>
@@ -6438,8 +6456,8 @@
         </p:nvSpPr>
         <p:spPr>
           <a:xfrm>
-            <a:off x="8356397" y="3520440"/>
-            <a:ext cx="3058058" cy="1828800"/>
+            <a:off x="8356397" y="3337560"/>
+            <a:ext cx="3058058" cy="1508760"/>
           </a:xfrm>
           <a:prstGeom prst="rect">
             <a:avLst/>
@@ -6466,7 +6484,7 @@
                 <a:ea typeface="Raleway SemiBold" pitchFamily="34" charset="-122"/>
                 <a:cs typeface="Raleway SemiBold" pitchFamily="34" charset="-120"/>
               </a:rPr>
-              <a:t>THE FRIEND AT THE TABLE</a:t>
+              <a:t>WHAT WE BRING YOU</a:t>
             </a:r>
             <a:endParaRPr lang="en-US" sz="1500" dirty="0"/>
           </a:p>
@@ -6500,9 +6518,65 @@
                   <a:schemeClr val="tx1"/>
                 </a:solidFill>
               </a:rPr>
-              <a:t>Knows enough to make things interesting. Never makes anyone feel left out.</a:t>
+              <a:t>What we add isn't content. It's connection, and an honest view of what people think.</a:t>
             </a:r>
             <a:endParaRPr lang="en-US" sz="1500" dirty="0"/>
+          </a:p>
+        </p:txBody>
+      </p:sp>
+      <p:sp>
+        <p:nvSpPr>
+          <p:cNvPr id="12" name="FLAG — delete before sharing"/>
+          <p:cNvSpPr txBox="1"/>
+          <p:nvPr/>
+        </p:nvSpPr>
+        <p:spPr>
+          <a:xfrm>
+            <a:off x="548640" y="5212080"/>
+            <a:ext cx="11094415" cy="731520"/>
+          </a:xfrm>
+          <a:prstGeom prst="rect">
+            <a:avLst/>
+          </a:prstGeom>
+          <a:solidFill>
+            <a:schemeClr val="bg1"/>
+          </a:solidFill>
+          <a:ln w="25400">
+            <a:solidFill>
+              <a:schemeClr val="accent4"/>
+            </a:solidFill>
+          </a:ln>
+        </p:spPr>
+        <p:txBody>
+          <a:bodyPr wrap="square" lIns="38100" tIns="76200" rIns="76200" bIns="38100" rtlCol="0" anchor="ctr"/>
+          <a:lstStyle/>
+          <a:p>
+            <a:pPr indent="0" marL="0">
+              <a:buNone/>
+            </a:pPr>
+            <a:r>
+              <a:rPr lang="en-US" sz="1100" dirty="0">
+                <a:solidFill>
+                  <a:schemeClr val="tx1"/>
+                </a:solidFill>
+                <a:latin typeface="Raleway SemiBold" pitchFamily="34" charset="0"/>
+                <a:ea typeface="Raleway SemiBold" pitchFamily="34" charset="-122"/>
+                <a:cs typeface="Raleway SemiBold" pitchFamily="34" charset="-120"/>
+              </a:rPr>
+              <a:t>TO DISCUSS  </a:t>
+            </a:r>
+            <a:pPr indent="0" marL="0">
+              <a:buNone/>
+            </a:pPr>
+            <a:r>
+              <a:rPr lang="en-US" sz="1100" dirty="0">
+                <a:solidFill>
+                  <a:schemeClr val="tx1"/>
+                </a:solidFill>
+              </a:rPr>
+              <a:t>Your new thought: conversations are a source of rich learning and connection. It could be the bridge from the brand to insight on this slide. Not used yet; let's work out the wording together.</a:t>
+            </a:r>
+            <a:endParaRPr lang="en-US" sz="1100" dirty="0"/>
           </a:p>
         </p:txBody>
       </p:sp>
@@ -6614,7 +6688,7 @@
                 <a:ea typeface="Raleway Light" pitchFamily="34" charset="-122"/>
                 <a:cs typeface="Raleway Light" pitchFamily="34" charset="-120"/>
               </a:rPr>
-              <a:t>The event opportunity</a:t>
+              <a:t>What you know after a tasting day</a:t>
             </a:r>
             <a:endParaRPr lang="en-US" sz="3600" dirty="0"/>
           </a:p>
@@ -6655,7 +6729,7 @@
                 <a:ea typeface="Raleway Light" pitchFamily="34" charset="-122"/>
                 <a:cs typeface="Raleway Light" pitchFamily="34" charset="-120"/>
               </a:rPr>
-              <a:t>After a wonderful tasting day, where do all the wines you discovered go?</a:t>
+              <a:t>Often, only who bought the tickets.</a:t>
             </a:r>
             <a:endParaRPr lang="en-US" sz="1800" dirty="0"/>
           </a:p>
@@ -6706,18 +6780,18 @@
       </p:sp>
       <p:sp>
         <p:nvSpPr>
-          <p:cNvPr id="5" name="Moment: DURING"/>
+          <p:cNvPr id="5" name="Card: WHO CAME"/>
           <p:cNvSpPr/>
           <p:nvPr/>
         </p:nvSpPr>
         <p:spPr>
           <a:xfrm>
             <a:off x="548640" y="1783080"/>
-            <a:ext cx="7863840" cy="822960"/>
+            <a:ext cx="3515258" cy="2103120"/>
           </a:xfrm>
           <a:prstGeom prst="roundRect">
             <a:avLst>
-              <a:gd name="adj" fmla="val 13333"/>
+              <a:gd name="adj" fmla="val 5217"/>
             </a:avLst>
           </a:prstGeom>
           <a:solidFill>
@@ -6746,8 +6820,8 @@
         </p:nvSpPr>
         <p:spPr>
           <a:xfrm>
-            <a:off x="822960" y="1783080"/>
-            <a:ext cx="1463040" cy="822960"/>
+            <a:off x="777240" y="2011680"/>
+            <a:ext cx="3058058" cy="1737360"/>
           </a:xfrm>
           <a:prstGeom prst="rect">
             <a:avLst/>
@@ -6756,7 +6830,7 @@
           <a:ln/>
         </p:spPr>
         <p:txBody>
-          <a:bodyPr wrap="square" lIns="0" tIns="0" rIns="0" bIns="0" rtlCol="0" anchor="ctr"/>
+          <a:bodyPr wrap="square" lIns="0" tIns="0" rIns="0" bIns="0" rtlCol="0" anchor="t"/>
           <a:lstStyle/>
           <a:p>
             <a:pPr indent="0" marL="0">
@@ -6766,7 +6840,7 @@
               <a:buNone/>
             </a:pPr>
             <a:r>
-              <a:rPr lang="en-US" sz="1400" spc="150" kern="0" dirty="0">
+              <a:rPr lang="en-US" sz="1200" spc="150" kern="0" dirty="0">
                 <a:solidFill>
                   <a:schemeClr val="tx1"/>
                 </a:solidFill>
@@ -6774,32 +6848,10 @@
                 <a:ea typeface="Raleway SemiBold" pitchFamily="34" charset="-122"/>
                 <a:cs typeface="Raleway SemiBold" pitchFamily="34" charset="-120"/>
               </a:rPr>
-              <a:t>DURING</a:t>
-            </a:r>
-            <a:endParaRPr lang="en-US" sz="1400" dirty="0"/>
-          </a:p>
-        </p:txBody>
-      </p:sp>
-      <p:sp>
-        <p:nvSpPr>
-          <p:cNvPr id="7" name="Text 5"/>
-          <p:cNvSpPr txBox="1"/>
-          <p:nvPr/>
-        </p:nvSpPr>
-        <p:spPr>
-          <a:xfrm>
-            <a:off x="2377440" y="1783080"/>
-            <a:ext cx="5852160" cy="822960"/>
-          </a:xfrm>
-          <a:prstGeom prst="rect">
-            <a:avLst/>
-          </a:prstGeom>
-          <a:noFill/>
-          <a:ln/>
-        </p:spPr>
-        <p:txBody>
-          <a:bodyPr wrap="square" lIns="0" tIns="0" rIns="0" bIns="0" rtlCol="0" anchor="ctr"/>
-          <a:lstStyle/>
+              <a:t>WHO CAME</a:t>
+            </a:r>
+            <a:endParaRPr lang="en-US" sz="1600" dirty="0"/>
+          </a:p>
           <a:p>
             <a:pPr indent="0" marL="0">
               <a:spcAft>
@@ -6808,31 +6860,48 @@
               <a:buNone/>
             </a:pPr>
             <a:r>
-              <a:rPr lang="en-US" sz="1500" dirty="0">
-                <a:solidFill>
-                  <a:schemeClr val="tx1"/>
-                </a:solidFill>
-              </a:rPr>
-              <a:t>Meet the Maker, vineyard and wine information, tasting prompts, polls, quizzes, comments and prizes.</a:t>
-            </a:r>
-            <a:endParaRPr lang="en-US" sz="1500" dirty="0"/>
-          </a:p>
-        </p:txBody>
-      </p:sp>
-      <p:sp>
-        <p:nvSpPr>
-          <p:cNvPr id="8" name="Moment: PERSONAL"/>
+              <a:rPr lang="en-US" sz="600" dirty="0">
+                <a:solidFill>
+                  <a:schemeClr val="tx1"/>
+                </a:solidFill>
+              </a:rPr>
+              <a:t> </a:t>
+            </a:r>
+            <a:endParaRPr lang="en-US" sz="1600" dirty="0"/>
+          </a:p>
+          <a:p>
+            <a:pPr indent="0" marL="0">
+              <a:spcAft>
+                <a:spcPts val="400"/>
+              </a:spcAft>
+              <a:buNone/>
+            </a:pPr>
+            <a:r>
+              <a:rPr lang="en-US" sz="1600" dirty="0">
+                <a:solidFill>
+                  <a:schemeClr val="tx1"/>
+                </a:solidFill>
+              </a:rPr>
+              <a:t>You often know the ticket buyer, not everyone with them. One person may buy eight tickets.</a:t>
+            </a:r>
+            <a:endParaRPr lang="en-US" sz="1600" dirty="0"/>
+          </a:p>
+        </p:txBody>
+      </p:sp>
+      <p:sp>
+        <p:nvSpPr>
+          <p:cNvPr id="7" name="Card: WHAT THEY THOUGHT"/>
           <p:cNvSpPr/>
           <p:nvPr/>
         </p:nvSpPr>
         <p:spPr>
           <a:xfrm>
-            <a:off x="548640" y="2743200"/>
-            <a:ext cx="7863840" cy="822960"/>
+            <a:off x="4338218" y="1783080"/>
+            <a:ext cx="3515258" cy="2103120"/>
           </a:xfrm>
           <a:prstGeom prst="roundRect">
             <a:avLst>
-              <a:gd name="adj" fmla="val 13333"/>
+              <a:gd name="adj" fmla="val 5217"/>
             </a:avLst>
           </a:prstGeom>
           <a:solidFill>
@@ -6855,14 +6924,14 @@
       </p:sp>
       <p:sp>
         <p:nvSpPr>
-          <p:cNvPr id="9" name="Text 7"/>
+          <p:cNvPr id="8" name="Text 6"/>
           <p:cNvSpPr txBox="1"/>
           <p:nvPr/>
         </p:nvSpPr>
         <p:spPr>
           <a:xfrm>
-            <a:off x="822960" y="2743200"/>
-            <a:ext cx="1463040" cy="822960"/>
+            <a:off x="4566818" y="2011680"/>
+            <a:ext cx="3058058" cy="1737360"/>
           </a:xfrm>
           <a:prstGeom prst="rect">
             <a:avLst/>
@@ -6871,7 +6940,7 @@
           <a:ln/>
         </p:spPr>
         <p:txBody>
-          <a:bodyPr wrap="square" lIns="0" tIns="0" rIns="0" bIns="0" rtlCol="0" anchor="ctr"/>
+          <a:bodyPr wrap="square" lIns="0" tIns="0" rIns="0" bIns="0" rtlCol="0" anchor="t"/>
           <a:lstStyle/>
           <a:p>
             <a:pPr indent="0" marL="0">
@@ -6881,7 +6950,7 @@
               <a:buNone/>
             </a:pPr>
             <a:r>
-              <a:rPr lang="en-US" sz="1400" spc="150" kern="0" dirty="0">
+              <a:rPr lang="en-US" sz="1200" spc="150" kern="0" dirty="0">
                 <a:solidFill>
                   <a:schemeClr val="tx1"/>
                 </a:solidFill>
@@ -6889,32 +6958,10 @@
                 <a:ea typeface="Raleway SemiBold" pitchFamily="34" charset="-122"/>
                 <a:cs typeface="Raleway SemiBold" pitchFamily="34" charset="-120"/>
               </a:rPr>
-              <a:t>PERSONAL</a:t>
-            </a:r>
-            <a:endParaRPr lang="en-US" sz="1400" dirty="0"/>
-          </a:p>
-        </p:txBody>
-      </p:sp>
-      <p:sp>
-        <p:nvSpPr>
-          <p:cNvPr id="10" name="Text 8"/>
-          <p:cNvSpPr txBox="1"/>
-          <p:nvPr/>
-        </p:nvSpPr>
-        <p:spPr>
-          <a:xfrm>
-            <a:off x="2377440" y="2743200"/>
-            <a:ext cx="5852160" cy="822960"/>
-          </a:xfrm>
-          <a:prstGeom prst="rect">
-            <a:avLst/>
-          </a:prstGeom>
-          <a:noFill/>
-          <a:ln/>
-        </p:spPr>
-        <p:txBody>
-          <a:bodyPr wrap="square" lIns="0" tIns="0" rIns="0" bIns="0" rtlCol="0" anchor="ctr"/>
-          <a:lstStyle/>
+              <a:t>WHAT THEY THOUGHT</a:t>
+            </a:r>
+            <a:endParaRPr lang="en-US" sz="1600" dirty="0"/>
+          </a:p>
           <a:p>
             <a:pPr indent="0" marL="0">
               <a:spcAft>
@@ -6923,31 +6970,48 @@
               <a:buNone/>
             </a:pPr>
             <a:r>
-              <a:rPr lang="en-US" sz="1500" dirty="0">
-                <a:solidFill>
-                  <a:schemeClr val="tx1"/>
-                </a:solidFill>
-              </a:rPr>
-              <a:t>Save the wines you like as you go, keep your notes in one place, understand what you enjoy, and crown your own Wine of the Day.</a:t>
-            </a:r>
-            <a:endParaRPr lang="en-US" sz="1500" dirty="0"/>
-          </a:p>
-        </p:txBody>
-      </p:sp>
-      <p:sp>
-        <p:nvSpPr>
-          <p:cNvPr id="11" name="Moment: AFTER"/>
+              <a:rPr lang="en-US" sz="600" dirty="0">
+                <a:solidFill>
+                  <a:schemeClr val="tx1"/>
+                </a:solidFill>
+              </a:rPr>
+              <a:t> </a:t>
+            </a:r>
+            <a:endParaRPr lang="en-US" sz="1600" dirty="0"/>
+          </a:p>
+          <a:p>
+            <a:pPr indent="0" marL="0">
+              <a:spcAft>
+                <a:spcPts val="400"/>
+              </a:spcAft>
+              <a:buNone/>
+            </a:pPr>
+            <a:r>
+              <a:rPr lang="en-US" sz="1600" dirty="0">
+                <a:solidFill>
+                  <a:schemeClr val="tx1"/>
+                </a:solidFill>
+              </a:rPr>
+              <a:t>Visitors talk about the wines all day. Most of what they say isn't captured.</a:t>
+            </a:r>
+            <a:endParaRPr lang="en-US" sz="1600" dirty="0"/>
+          </a:p>
+        </p:txBody>
+      </p:sp>
+      <p:sp>
+        <p:nvSpPr>
+          <p:cNvPr id="9" name="Card: WHAT HAPPENS NEXT"/>
           <p:cNvSpPr/>
           <p:nvPr/>
         </p:nvSpPr>
         <p:spPr>
           <a:xfrm>
-            <a:off x="548640" y="3703320"/>
-            <a:ext cx="7863840" cy="822960"/>
+            <a:off x="8127797" y="1783080"/>
+            <a:ext cx="3515258" cy="2103120"/>
           </a:xfrm>
           <a:prstGeom prst="roundRect">
             <a:avLst>
-              <a:gd name="adj" fmla="val 13333"/>
+              <a:gd name="adj" fmla="val 5217"/>
             </a:avLst>
           </a:prstGeom>
           <a:solidFill>
@@ -6970,14 +7034,14 @@
       </p:sp>
       <p:sp>
         <p:nvSpPr>
-          <p:cNvPr id="12" name="Text 10"/>
+          <p:cNvPr id="10" name="Text 8"/>
           <p:cNvSpPr txBox="1"/>
           <p:nvPr/>
         </p:nvSpPr>
         <p:spPr>
           <a:xfrm>
-            <a:off x="822960" y="3703320"/>
-            <a:ext cx="1463040" cy="822960"/>
+            <a:off x="8356397" y="2011680"/>
+            <a:ext cx="3058058" cy="1737360"/>
           </a:xfrm>
           <a:prstGeom prst="rect">
             <a:avLst/>
@@ -6986,7 +7050,7 @@
           <a:ln/>
         </p:spPr>
         <p:txBody>
-          <a:bodyPr wrap="square" lIns="0" tIns="0" rIns="0" bIns="0" rtlCol="0" anchor="ctr"/>
+          <a:bodyPr wrap="square" lIns="0" tIns="0" rIns="0" bIns="0" rtlCol="0" anchor="t"/>
           <a:lstStyle/>
           <a:p>
             <a:pPr indent="0" marL="0">
@@ -6996,7 +7060,7 @@
               <a:buNone/>
             </a:pPr>
             <a:r>
-              <a:rPr lang="en-US" sz="1400" spc="150" kern="0" dirty="0">
+              <a:rPr lang="en-US" sz="1200" spc="150" kern="0" dirty="0">
                 <a:solidFill>
                   <a:schemeClr val="tx1"/>
                 </a:solidFill>
@@ -7004,32 +7068,10 @@
                 <a:ea typeface="Raleway SemiBold" pitchFamily="34" charset="-122"/>
                 <a:cs typeface="Raleway SemiBold" pitchFamily="34" charset="-120"/>
               </a:rPr>
-              <a:t>AFTER</a:t>
-            </a:r>
-            <a:endParaRPr lang="en-US" sz="1400" dirty="0"/>
-          </a:p>
-        </p:txBody>
-      </p:sp>
-      <p:sp>
-        <p:nvSpPr>
-          <p:cNvPr id="13" name="Text 11"/>
-          <p:cNvSpPr txBox="1"/>
-          <p:nvPr/>
-        </p:nvSpPr>
-        <p:spPr>
-          <a:xfrm>
-            <a:off x="2377440" y="3703320"/>
-            <a:ext cx="5852160" cy="822960"/>
-          </a:xfrm>
-          <a:prstGeom prst="rect">
-            <a:avLst/>
-          </a:prstGeom>
-          <a:noFill/>
-          <a:ln/>
-        </p:spPr>
-        <p:txBody>
-          <a:bodyPr wrap="square" lIns="0" tIns="0" rIns="0" bIns="0" rtlCol="0" anchor="ctr"/>
-          <a:lstStyle/>
+              <a:t>WHAT HAPPENS NEXT</a:t>
+            </a:r>
+            <a:endParaRPr lang="en-US" sz="1600" dirty="0"/>
+          </a:p>
           <a:p>
             <a:pPr indent="0" marL="0">
               <a:spcAft>
@@ -7038,54 +7080,71 @@
               <a:buNone/>
             </a:pPr>
             <a:r>
-              <a:rPr lang="en-US" sz="1500" dirty="0">
-                <a:solidFill>
-                  <a:schemeClr val="tx1"/>
-                </a:solidFill>
-              </a:rPr>
-              <a:t>A personal record of discoveries, producers and favourites to revisit long after the event.</a:t>
-            </a:r>
-            <a:endParaRPr lang="en-US" sz="1500" dirty="0"/>
-          </a:p>
-        </p:txBody>
-      </p:sp>
-      <p:sp>
-        <p:nvSpPr>
-          <p:cNvPr id="14" name="Image placeholder"/>
+              <a:rPr lang="en-US" sz="600" dirty="0">
+                <a:solidFill>
+                  <a:schemeClr val="tx1"/>
+                </a:solidFill>
+              </a:rPr>
+              <a:t> </a:t>
+            </a:r>
+            <a:endParaRPr lang="en-US" sz="1600" dirty="0"/>
+          </a:p>
+          <a:p>
+            <a:pPr indent="0" marL="0">
+              <a:spcAft>
+                <a:spcPts val="400"/>
+              </a:spcAft>
+              <a:buNone/>
+            </a:pPr>
+            <a:r>
+              <a:rPr lang="en-US" sz="1600" dirty="0">
+                <a:solidFill>
+                  <a:schemeClr val="tx1"/>
+                </a:solidFill>
+              </a:rPr>
+              <a:t>The wines and producers visitors discovered are easily forgotten once the day ends.</a:t>
+            </a:r>
+            <a:endParaRPr lang="en-US" sz="1600" dirty="0"/>
+          </a:p>
+        </p:txBody>
+      </p:sp>
+      <p:sp>
+        <p:nvSpPr>
+          <p:cNvPr id="11" name="Event Mode answer"/>
           <p:cNvSpPr/>
           <p:nvPr/>
         </p:nvSpPr>
         <p:spPr>
           <a:xfrm>
-            <a:off x="8686800" y="1783080"/>
-            <a:ext cx="2956255" cy="2743200"/>
+            <a:off x="548640" y="4160520"/>
+            <a:ext cx="11094415" cy="914400"/>
           </a:xfrm>
           <a:prstGeom prst="roundRect">
             <a:avLst>
-              <a:gd name="adj" fmla="val 4000"/>
+              <a:gd name="adj" fmla="val 12000"/>
             </a:avLst>
           </a:prstGeom>
           <a:solidFill>
-            <a:schemeClr val="accent3"/>
+            <a:schemeClr val="tx1"/>
           </a:solidFill>
           <a:ln w="12700">
             <a:solidFill>
               <a:schemeClr val="tx1"/>
             </a:solidFill>
-            <a:prstDash val="dash"/>
+            <a:prstDash val="solid"/>
           </a:ln>
         </p:spPr>
       </p:sp>
       <p:sp>
         <p:nvSpPr>
-          <p:cNvPr id="15" name="Text 13"/>
+          <p:cNvPr id="12" name="Text 10"/>
           <p:cNvSpPr txBox="1"/>
           <p:nvPr/>
         </p:nvSpPr>
         <p:spPr>
           <a:xfrm>
-            <a:off x="8961120" y="1783080"/>
-            <a:ext cx="2407615" cy="2743200"/>
+            <a:off x="1005840" y="4160520"/>
+            <a:ext cx="10180015" cy="914400"/>
           </a:xfrm>
           <a:prstGeom prst="rect">
             <a:avLst/>
@@ -7104,30 +7163,27 @@
               <a:buNone/>
             </a:pPr>
             <a:r>
-              <a:rPr lang="en-US" sz="1400" dirty="0">
-                <a:solidFill>
-                  <a:schemeClr val="tx1"/>
-                </a:solidFill>
-                <a:latin typeface="Raleway SemiBold" pitchFamily="34" charset="0"/>
-                <a:ea typeface="Raleway SemiBold" pitchFamily="34" charset="-122"/>
-                <a:cs typeface="Raleway SemiBold" pitchFamily="34" charset="-120"/>
-              </a:rPr>
-              <a:t>Visitor screens — to add</a:t>
-            </a:r>
-            <a:endParaRPr lang="en-US" sz="1400" dirty="0"/>
-          </a:p>
-        </p:txBody>
-      </p:sp>
-      <p:sp>
-        <p:nvSpPr>
-          <p:cNvPr id="16" name="FLAG — delete before sharing"/>
+              <a:rPr lang="en-US" sz="1800" dirty="0">
+                <a:solidFill>
+                  <a:schemeClr val="bg2"/>
+                </a:solidFill>
+              </a:rPr>
+              <a:t>Event Mode turns the conversations at your event into insight you can use, and gives visitors a reason to remember the day.</a:t>
+            </a:r>
+            <a:endParaRPr lang="en-US" sz="1800" dirty="0"/>
+          </a:p>
+        </p:txBody>
+      </p:sp>
+      <p:sp>
+        <p:nvSpPr>
+          <p:cNvPr id="13" name="FLAG — delete before sharing"/>
           <p:cNvSpPr txBox="1"/>
           <p:nvPr/>
         </p:nvSpPr>
         <p:spPr>
           <a:xfrm>
-            <a:off x="548640" y="4754880"/>
-            <a:ext cx="5394960" cy="868680"/>
+            <a:off x="548640" y="5257800"/>
+            <a:ext cx="11094415" cy="640080"/>
           </a:xfrm>
           <a:prstGeom prst="rect">
             <a:avLst/>
@@ -7157,7 +7213,7 @@
                 <a:ea typeface="Raleway SemiBold" pitchFamily="34" charset="-122"/>
                 <a:cs typeface="Raleway SemiBold" pitchFamily="34" charset="-120"/>
               </a:rPr>
-              <a:t>TO DECIDE  </a:t>
+              <a:t>TO ADD  </a:t>
             </a:r>
             <a:pPr indent="0" marL="0">
               <a:buNone/>
@@ -7168,63 +7224,7 @@
                   <a:schemeClr val="tx1"/>
                 </a:solidFill>
               </a:rPr>
-              <a:t>Quizzes: how they stay true to 'no wrong answers'. Prizes: check against alcohol promotion rules (CAP, Portman Group).</a:t>
-            </a:r>
-            <a:endParaRPr lang="en-US" sz="1100" dirty="0"/>
-          </a:p>
-        </p:txBody>
-      </p:sp>
-      <p:sp>
-        <p:nvSpPr>
-          <p:cNvPr id="17" name="FLAG — delete before sharing"/>
-          <p:cNvSpPr txBox="1"/>
-          <p:nvPr/>
-        </p:nvSpPr>
-        <p:spPr>
-          <a:xfrm>
-            <a:off x="6217920" y="4754880"/>
-            <a:ext cx="5425135" cy="868680"/>
-          </a:xfrm>
-          <a:prstGeom prst="rect">
-            <a:avLst/>
-          </a:prstGeom>
-          <a:solidFill>
-            <a:schemeClr val="bg1"/>
-          </a:solidFill>
-          <a:ln w="25400">
-            <a:solidFill>
-              <a:schemeClr val="accent4"/>
-            </a:solidFill>
-          </a:ln>
-        </p:spPr>
-        <p:txBody>
-          <a:bodyPr wrap="square" lIns="38100" tIns="76200" rIns="76200" bIns="38100" rtlCol="0" anchor="ctr"/>
-          <a:lstStyle/>
-          <a:p>
-            <a:pPr indent="0" marL="0">
-              <a:buNone/>
-            </a:pPr>
-            <a:r>
-              <a:rPr lang="en-US" sz="1100" dirty="0">
-                <a:solidFill>
-                  <a:schemeClr val="tx1"/>
-                </a:solidFill>
-                <a:latin typeface="Raleway SemiBold" pitchFamily="34" charset="0"/>
-                <a:ea typeface="Raleway SemiBold" pitchFamily="34" charset="-122"/>
-                <a:cs typeface="Raleway SemiBold" pitchFamily="34" charset="-120"/>
-              </a:rPr>
-              <a:t>TO DECIDE  </a:t>
-            </a:r>
-            <a:pPr indent="0" marL="0">
-              <a:buNone/>
-            </a:pPr>
-            <a:r>
-              <a:rPr lang="en-US" sz="1100" dirty="0">
-                <a:solidFill>
-                  <a:schemeClr val="tx1"/>
-                </a:solidFill>
-              </a:rPr>
-              <a:t>Original heading 'a real gap' is a claim. Kept as 'The event opportunity' until there's evidence.</a:t>
+              <a:t>Evidence for 'most of what they say isn't captured' and 'easily forgotten' from organiser conversations, so these read as findings, not assumptions.</a:t>
             </a:r>
             <a:endParaRPr lang="en-US" sz="1100" dirty="0"/>
           </a:p>
@@ -7338,7 +7338,7 @@
                 <a:ea typeface="Raleway Light" pitchFamily="34" charset="-122"/>
                 <a:cs typeface="Raleway Light" pitchFamily="34" charset="-120"/>
               </a:rPr>
-              <a:t>One idea. Different event formats.</a:t>
+              <a:t>What your visitors get. What you get.</a:t>
             </a:r>
             <a:endParaRPr lang="en-US" sz="3600" dirty="0"/>
           </a:p>
@@ -7379,7 +7379,7 @@
                 <a:ea typeface="Raleway Light" pitchFamily="34" charset="-122"/>
                 <a:cs typeface="Raleway Light" pitchFamily="34" charset="-120"/>
               </a:rPr>
-              <a:t>Each event is a different expression of the same idea.</a:t>
+              <a:t>One experience, two sets of benefits.</a:t>
             </a:r>
             <a:endParaRPr lang="en-US" sz="1800" dirty="0"/>
           </a:p>
@@ -7430,18 +7430,18 @@
       </p:sp>
       <p:sp>
         <p:nvSpPr>
-          <p:cNvPr id="5" name="Card: LARGE FESTIVALS"/>
+          <p:cNvPr id="5" name="Your visitors get"/>
           <p:cNvSpPr/>
           <p:nvPr/>
         </p:nvSpPr>
         <p:spPr>
           <a:xfrm>
             <a:off x="548640" y="1783080"/>
-            <a:ext cx="3515258" cy="2377440"/>
+            <a:ext cx="5410048" cy="3657600"/>
           </a:xfrm>
           <a:prstGeom prst="roundRect">
             <a:avLst>
-              <a:gd name="adj" fmla="val 4615"/>
+              <a:gd name="adj" fmla="val 3000"/>
             </a:avLst>
           </a:prstGeom>
           <a:solidFill>
@@ -7470,8 +7470,8 @@
         </p:nvSpPr>
         <p:spPr>
           <a:xfrm>
-            <a:off x="777240" y="2011680"/>
-            <a:ext cx="3058058" cy="2011680"/>
+            <a:off x="868680" y="2057400"/>
+            <a:ext cx="4769968" cy="3200400"/>
           </a:xfrm>
           <a:prstGeom prst="rect">
             <a:avLst/>
@@ -7490,7 +7490,7 @@
               <a:buNone/>
             </a:pPr>
             <a:r>
-              <a:rPr lang="en-US" sz="1200" spc="150" kern="0" dirty="0">
+              <a:rPr lang="en-US" sz="1400" spc="150" kern="0" dirty="0">
                 <a:solidFill>
                   <a:schemeClr val="tx1"/>
                 </a:solidFill>
@@ -7498,7 +7498,7 @@
                 <a:ea typeface="Raleway SemiBold" pitchFamily="34" charset="-122"/>
                 <a:cs typeface="Raleway SemiBold" pitchFamily="34" charset="-120"/>
               </a:rPr>
-              <a:t>LARGE FESTIVALS</a:t>
+              <a:t>YOUR VISITORS GET</a:t>
             </a:r>
             <a:endParaRPr lang="en-US" sz="1600" dirty="0"/>
           </a:p>
@@ -7510,7 +7510,7 @@
               <a:buNone/>
             </a:pPr>
             <a:r>
-              <a:rPr lang="en-US" sz="600" dirty="0">
+              <a:rPr lang="en-US" sz="800" dirty="0">
                 <a:solidFill>
                   <a:schemeClr val="tx1"/>
                 </a:solidFill>
@@ -7520,11 +7520,12 @@
             <a:endParaRPr lang="en-US" sz="1600" dirty="0"/>
           </a:p>
           <a:p>
-            <a:pPr indent="0" marL="0">
-              <a:spcAft>
-                <a:spcPts val="400"/>
-              </a:spcAft>
-              <a:buNone/>
+            <a:pPr marL="203200" indent="-203200">
+              <a:spcAft>
+                <a:spcPts val="800"/>
+              </a:spcAft>
+              <a:buSzPct val="100000"/>
+              <a:buChar char="•"/>
             </a:pPr>
             <a:r>
               <a:rPr lang="en-US" sz="1600" dirty="0">
@@ -7532,269 +7533,121 @@
                   <a:schemeClr val="tx1"/>
                 </a:solidFill>
               </a:rPr>
-              <a:t>An existing main screen offers live shared questions, results and prize moments. The visitor experience lives on the phone.</a:t>
+              <a:t>Meet the Maker: producer stories and videos.</a:t>
             </a:r>
             <a:endParaRPr lang="en-US" sz="1600" dirty="0"/>
           </a:p>
-        </p:txBody>
-      </p:sp>
-      <p:sp>
-        <p:nvSpPr>
-          <p:cNvPr id="7" name="Card: TENTED TASTINGS"/>
+          <a:p>
+            <a:pPr marL="203200" indent="-203200">
+              <a:spcAft>
+                <a:spcPts val="800"/>
+              </a:spcAft>
+              <a:buSzPct val="100000"/>
+              <a:buChar char="•"/>
+            </a:pPr>
+            <a:r>
+              <a:rPr lang="en-US" sz="1600" dirty="0">
+                <a:solidFill>
+                  <a:schemeClr val="tx1"/>
+                </a:solidFill>
+              </a:rPr>
+              <a:t>Tasting prompts, polls and questions, with no wrong answers.</a:t>
+            </a:r>
+            <a:endParaRPr lang="en-US" sz="1600" dirty="0"/>
+          </a:p>
+          <a:p>
+            <a:pPr marL="203200" indent="-203200">
+              <a:spcAft>
+                <a:spcPts val="800"/>
+              </a:spcAft>
+              <a:buSzPct val="100000"/>
+              <a:buChar char="•"/>
+            </a:pPr>
+            <a:r>
+              <a:rPr lang="en-US" sz="1600" dirty="0">
+                <a:solidFill>
+                  <a:schemeClr val="tx1"/>
+                </a:solidFill>
+              </a:rPr>
+              <a:t>Their wines and notes saved as they go.</a:t>
+            </a:r>
+            <a:endParaRPr lang="en-US" sz="1600" dirty="0"/>
+          </a:p>
+          <a:p>
+            <a:pPr marL="203200" indent="-203200">
+              <a:spcAft>
+                <a:spcPts val="800"/>
+              </a:spcAft>
+              <a:buSzPct val="100000"/>
+              <a:buChar char="•"/>
+            </a:pPr>
+            <a:r>
+              <a:rPr lang="en-US" sz="1600" dirty="0">
+                <a:solidFill>
+                  <a:schemeClr val="tx1"/>
+                </a:solidFill>
+              </a:rPr>
+              <a:t>Their own Wine of the Day, crowned.</a:t>
+            </a:r>
+            <a:endParaRPr lang="en-US" sz="1600" dirty="0"/>
+          </a:p>
+          <a:p>
+            <a:pPr marL="203200" indent="-203200">
+              <a:spcAft>
+                <a:spcPts val="800"/>
+              </a:spcAft>
+              <a:buSzPct val="100000"/>
+              <a:buChar char="•"/>
+            </a:pPr>
+            <a:r>
+              <a:rPr lang="en-US" sz="1600" dirty="0">
+                <a:solidFill>
+                  <a:schemeClr val="tx1"/>
+                </a:solidFill>
+              </a:rPr>
+              <a:t>A personal record to revisit after the event.</a:t>
+            </a:r>
+            <a:endParaRPr lang="en-US" sz="1600" dirty="0"/>
+          </a:p>
+        </p:txBody>
+      </p:sp>
+      <p:sp>
+        <p:nvSpPr>
+          <p:cNvPr id="7" name="You get"/>
           <p:cNvSpPr/>
           <p:nvPr/>
         </p:nvSpPr>
         <p:spPr>
           <a:xfrm>
-            <a:off x="4338218" y="1783080"/>
-            <a:ext cx="3515258" cy="2377440"/>
+            <a:off x="6233008" y="1783080"/>
+            <a:ext cx="5410048" cy="3657600"/>
           </a:xfrm>
           <a:prstGeom prst="roundRect">
             <a:avLst>
-              <a:gd name="adj" fmla="val 4615"/>
+              <a:gd name="adj" fmla="val 3000"/>
             </a:avLst>
           </a:prstGeom>
           <a:solidFill>
-            <a:schemeClr val="bg1"/>
-          </a:solidFill>
-          <a:ln w="12700">
-            <a:solidFill>
-              <a:schemeClr val="bg1"/>
-            </a:solidFill>
-            <a:prstDash val="solid"/>
-          </a:ln>
-          <a:effectLst>
-            <a:outerShdw sx="100000" sy="100000" kx="0" ky="0" algn="bl" rotWithShape="0" blurRad="76200" dist="25400" dir="5400000">
-              <a:srgbClr val="565A32">
-                <a:alpha val="12000"/>
-              </a:srgbClr>
-            </a:outerShdw>
-          </a:effectLst>
-        </p:spPr>
-      </p:sp>
-      <p:sp>
-        <p:nvSpPr>
-          <p:cNvPr id="8" name="Text 6"/>
-          <p:cNvSpPr txBox="1"/>
-          <p:nvPr/>
-        </p:nvSpPr>
-        <p:spPr>
-          <a:xfrm>
-            <a:off x="4566818" y="2011680"/>
-            <a:ext cx="3058058" cy="2011680"/>
-          </a:xfrm>
-          <a:prstGeom prst="rect">
-            <a:avLst/>
-          </a:prstGeom>
-          <a:noFill/>
-          <a:ln/>
-        </p:spPr>
-        <p:txBody>
-          <a:bodyPr wrap="square" lIns="0" tIns="0" rIns="0" bIns="0" rtlCol="0" anchor="t"/>
-          <a:lstStyle/>
-          <a:p>
-            <a:pPr indent="0" marL="0">
-              <a:spcAft>
-                <a:spcPts val="400"/>
-              </a:spcAft>
-              <a:buNone/>
-            </a:pPr>
-            <a:r>
-              <a:rPr lang="en-US" sz="1200" spc="150" kern="0" dirty="0">
-                <a:solidFill>
-                  <a:schemeClr val="tx1"/>
-                </a:solidFill>
-                <a:latin typeface="Raleway SemiBold" pitchFamily="34" charset="0"/>
-                <a:ea typeface="Raleway SemiBold" pitchFamily="34" charset="-122"/>
-                <a:cs typeface="Raleway SemiBold" pitchFamily="34" charset="-120"/>
-              </a:rPr>
-              <a:t>TENTED TASTINGS</a:t>
-            </a:r>
-            <a:endParaRPr lang="en-US" sz="1600" dirty="0"/>
-          </a:p>
-          <a:p>
-            <a:pPr indent="0" marL="0">
-              <a:spcAft>
-                <a:spcPts val="400"/>
-              </a:spcAft>
-              <a:buNone/>
-            </a:pPr>
-            <a:r>
-              <a:rPr lang="en-US" sz="600" dirty="0">
-                <a:solidFill>
-                  <a:schemeClr val="tx1"/>
-                </a:solidFill>
-              </a:rPr>
-              <a:t> </a:t>
-            </a:r>
-            <a:endParaRPr lang="en-US" sz="1600" dirty="0"/>
-          </a:p>
-          <a:p>
-            <a:pPr indent="0" marL="0">
-              <a:spcAft>
-                <a:spcPts val="400"/>
-              </a:spcAft>
-              <a:buNone/>
-            </a:pPr>
-            <a:r>
-              <a:rPr lang="en-US" sz="1600" dirty="0">
-                <a:solidFill>
-                  <a:schemeClr val="tx1"/>
-                </a:solidFill>
-              </a:rPr>
-              <a:t>Quieter moments between tastings create time to explore, reflect and take part. QR access in tents, with no installed screens.</a:t>
-            </a:r>
-            <a:endParaRPr lang="en-US" sz="1600" dirty="0"/>
-          </a:p>
-        </p:txBody>
-      </p:sp>
-      <p:sp>
-        <p:nvSpPr>
-          <p:cNvPr id="9" name="Card: SEASONAL FOLLOW-UP"/>
-          <p:cNvSpPr/>
-          <p:nvPr/>
-        </p:nvSpPr>
-        <p:spPr>
-          <a:xfrm>
-            <a:off x="8127797" y="1783080"/>
-            <a:ext cx="3515258" cy="2377440"/>
-          </a:xfrm>
-          <a:prstGeom prst="roundRect">
-            <a:avLst>
-              <a:gd name="adj" fmla="val 4615"/>
-            </a:avLst>
-          </a:prstGeom>
-          <a:solidFill>
-            <a:schemeClr val="bg1"/>
-          </a:solidFill>
-          <a:ln w="12700">
-            <a:solidFill>
-              <a:schemeClr val="bg1"/>
-            </a:solidFill>
-            <a:prstDash val="solid"/>
-          </a:ln>
-          <a:effectLst>
-            <a:outerShdw sx="100000" sy="100000" kx="0" ky="0" algn="bl" rotWithShape="0" blurRad="76200" dist="25400" dir="5400000">
-              <a:srgbClr val="565A32">
-                <a:alpha val="12000"/>
-              </a:srgbClr>
-            </a:outerShdw>
-          </a:effectLst>
-        </p:spPr>
-      </p:sp>
-      <p:sp>
-        <p:nvSpPr>
-          <p:cNvPr id="10" name="Text 8"/>
-          <p:cNvSpPr txBox="1"/>
-          <p:nvPr/>
-        </p:nvSpPr>
-        <p:spPr>
-          <a:xfrm>
-            <a:off x="8356397" y="2011680"/>
-            <a:ext cx="3058058" cy="2011680"/>
-          </a:xfrm>
-          <a:prstGeom prst="rect">
-            <a:avLst/>
-          </a:prstGeom>
-          <a:noFill/>
-          <a:ln/>
-        </p:spPr>
-        <p:txBody>
-          <a:bodyPr wrap="square" lIns="0" tIns="0" rIns="0" bIns="0" rtlCol="0" anchor="t"/>
-          <a:lstStyle/>
-          <a:p>
-            <a:pPr indent="0" marL="0">
-              <a:spcAft>
-                <a:spcPts val="400"/>
-              </a:spcAft>
-              <a:buNone/>
-            </a:pPr>
-            <a:r>
-              <a:rPr lang="en-US" sz="1200" spc="150" kern="0" dirty="0">
-                <a:solidFill>
-                  <a:schemeClr val="tx1"/>
-                </a:solidFill>
-                <a:latin typeface="Raleway SemiBold" pitchFamily="34" charset="0"/>
-                <a:ea typeface="Raleway SemiBold" pitchFamily="34" charset="-122"/>
-                <a:cs typeface="Raleway SemiBold" pitchFamily="34" charset="-120"/>
-              </a:rPr>
-              <a:t>SEASONAL FOLLOW-UP</a:t>
-            </a:r>
-            <a:endParaRPr lang="en-US" sz="1600" dirty="0"/>
-          </a:p>
-          <a:p>
-            <a:pPr indent="0" marL="0">
-              <a:spcAft>
-                <a:spcPts val="400"/>
-              </a:spcAft>
-              <a:buNone/>
-            </a:pPr>
-            <a:r>
-              <a:rPr lang="en-US" sz="600" dirty="0">
-                <a:solidFill>
-                  <a:schemeClr val="tx1"/>
-                </a:solidFill>
-              </a:rPr>
-              <a:t> </a:t>
-            </a:r>
-            <a:endParaRPr lang="en-US" sz="1600" dirty="0"/>
-          </a:p>
-          <a:p>
-            <a:pPr indent="0" marL="0">
-              <a:spcAft>
-                <a:spcPts val="400"/>
-              </a:spcAft>
-              <a:buNone/>
-            </a:pPr>
-            <a:r>
-              <a:rPr lang="en-US" sz="1600" dirty="0">
-                <a:solidFill>
-                  <a:schemeClr val="tx1"/>
-                </a:solidFill>
-              </a:rPr>
-              <a:t>A smaller second activation, reconnecting with visitors and extending the annual partnership.</a:t>
-            </a:r>
-            <a:endParaRPr lang="en-US" sz="1600" dirty="0"/>
-          </a:p>
-        </p:txBody>
-      </p:sp>
-      <p:sp>
-        <p:nvSpPr>
-          <p:cNvPr id="11" name="Image placeholder"/>
-          <p:cNvSpPr/>
-          <p:nvPr/>
-        </p:nvSpPr>
-        <p:spPr>
-          <a:xfrm>
-            <a:off x="548640" y="4434840"/>
-            <a:ext cx="11094415" cy="1463040"/>
-          </a:xfrm>
-          <a:prstGeom prst="roundRect">
-            <a:avLst>
-              <a:gd name="adj" fmla="val 7500"/>
-            </a:avLst>
-          </a:prstGeom>
-          <a:solidFill>
-            <a:schemeClr val="accent3"/>
+            <a:schemeClr val="tx1"/>
           </a:solidFill>
           <a:ln w="12700">
             <a:solidFill>
               <a:schemeClr val="tx1"/>
             </a:solidFill>
-            <a:prstDash val="dash"/>
+            <a:prstDash val="solid"/>
           </a:ln>
         </p:spPr>
       </p:sp>
       <p:sp>
         <p:nvSpPr>
-          <p:cNvPr id="12" name="Text 10"/>
+          <p:cNvPr id="8" name="Text 6"/>
           <p:cNvSpPr txBox="1"/>
           <p:nvPr/>
         </p:nvSpPr>
         <p:spPr>
           <a:xfrm>
-            <a:off x="822960" y="4434840"/>
-            <a:ext cx="10545775" cy="1463040"/>
+            <a:off x="6553048" y="2057400"/>
+            <a:ext cx="4769968" cy="3200400"/>
           </a:xfrm>
           <a:prstGeom prst="rect">
             <a:avLst/>
@@ -7803,27 +7656,246 @@
           <a:ln/>
         </p:spPr>
         <p:txBody>
-          <a:bodyPr wrap="square" lIns="0" tIns="0" rIns="0" bIns="0" rtlCol="0" anchor="ctr"/>
-          <a:lstStyle/>
-          <a:p>
-            <a:pPr algn="ctr" indent="0" marL="0">
+          <a:bodyPr wrap="square" lIns="0" tIns="0" rIns="0" bIns="0" rtlCol="0" anchor="t"/>
+          <a:lstStyle/>
+          <a:p>
+            <a:pPr indent="0" marL="0">
               <a:spcAft>
                 <a:spcPts val="400"/>
               </a:spcAft>
               <a:buNone/>
             </a:pPr>
             <a:r>
-              <a:rPr lang="en-US" sz="1400" dirty="0">
-                <a:solidFill>
-                  <a:schemeClr val="tx1"/>
+              <a:rPr lang="en-US" sz="1400" spc="150" kern="0" dirty="0">
+                <a:solidFill>
+                  <a:schemeClr val="bg2"/>
                 </a:solidFill>
                 <a:latin typeface="Raleway SemiBold" pitchFamily="34" charset="0"/>
                 <a:ea typeface="Raleway SemiBold" pitchFamily="34" charset="-122"/>
                 <a:cs typeface="Raleway SemiBold" pitchFamily="34" charset="-120"/>
               </a:rPr>
-              <a:t>Event photography — to add</a:t>
-            </a:r>
-            <a:endParaRPr lang="en-US" sz="1400" dirty="0"/>
+              <a:t>YOU GET</a:t>
+            </a:r>
+            <a:endParaRPr lang="en-US" sz="1600" dirty="0"/>
+          </a:p>
+          <a:p>
+            <a:pPr indent="0" marL="0">
+              <a:spcAft>
+                <a:spcPts val="400"/>
+              </a:spcAft>
+              <a:buNone/>
+            </a:pPr>
+            <a:r>
+              <a:rPr lang="en-US" sz="800" dirty="0">
+                <a:solidFill>
+                  <a:schemeClr val="bg2"/>
+                </a:solidFill>
+              </a:rPr>
+              <a:t> </a:t>
+            </a:r>
+            <a:endParaRPr lang="en-US" sz="1600" dirty="0"/>
+          </a:p>
+          <a:p>
+            <a:pPr marL="203200" indent="-203200">
+              <a:spcAft>
+                <a:spcPts val="800"/>
+              </a:spcAft>
+              <a:buSzPct val="100000"/>
+              <a:buChar char="•"/>
+            </a:pPr>
+            <a:r>
+              <a:rPr lang="en-US" sz="1600" dirty="0">
+                <a:solidFill>
+                  <a:schemeClr val="bg2"/>
+                </a:solidFill>
+              </a:rPr>
+              <a:t>Insight into what visitors really think, in their own words.</a:t>
+            </a:r>
+            <a:endParaRPr lang="en-US" sz="1600" dirty="0"/>
+          </a:p>
+          <a:p>
+            <a:pPr marL="203200" indent="-203200">
+              <a:spcAft>
+                <a:spcPts val="800"/>
+              </a:spcAft>
+              <a:buSzPct val="100000"/>
+              <a:buChar char="•"/>
+            </a:pPr>
+            <a:r>
+              <a:rPr lang="en-US" sz="1600" dirty="0">
+                <a:solidFill>
+                  <a:schemeClr val="bg2"/>
+                </a:solidFill>
+              </a:rPr>
+              <a:t>Combined, anonymised reporting on saved wines, crowns, polls and tasting responses.</a:t>
+            </a:r>
+            <a:endParaRPr lang="en-US" sz="1600" dirty="0"/>
+          </a:p>
+          <a:p>
+            <a:pPr marL="203200" indent="-203200">
+              <a:spcAft>
+                <a:spcPts val="800"/>
+              </a:spcAft>
+              <a:buSzPct val="100000"/>
+              <a:buChar char="•"/>
+            </a:pPr>
+            <a:r>
+              <a:rPr lang="en-US" sz="1600" dirty="0">
+                <a:solidFill>
+                  <a:schemeClr val="bg2"/>
+                </a:solidFill>
+              </a:rPr>
+              <a:t>A home for your producers' stories, and a view of how visitors use them.</a:t>
+            </a:r>
+            <a:endParaRPr lang="en-US" sz="1600" dirty="0"/>
+          </a:p>
+          <a:p>
+            <a:pPr marL="203200" indent="-203200">
+              <a:spcAft>
+                <a:spcPts val="800"/>
+              </a:spcAft>
+              <a:buSzPct val="100000"/>
+              <a:buChar char="•"/>
+            </a:pPr>
+            <a:r>
+              <a:rPr lang="en-US" sz="1600" dirty="0">
+                <a:solidFill>
+                  <a:schemeClr val="bg2"/>
+                </a:solidFill>
+              </a:rPr>
+              <a:t>New contacts, where visitors choose to hear from you.</a:t>
+            </a:r>
+            <a:endParaRPr lang="en-US" sz="1600" dirty="0"/>
+          </a:p>
+          <a:p>
+            <a:pPr marL="203200" indent="-203200">
+              <a:spcAft>
+                <a:spcPts val="800"/>
+              </a:spcAft>
+              <a:buSzPct val="100000"/>
+              <a:buChar char="•"/>
+            </a:pPr>
+            <a:r>
+              <a:rPr lang="en-US" sz="1600" dirty="0">
+                <a:solidFill>
+                  <a:schemeClr val="bg2"/>
+                </a:solidFill>
+              </a:rPr>
+              <a:t>A reason to reconnect after the event.</a:t>
+            </a:r>
+            <a:endParaRPr lang="en-US" sz="1600" dirty="0"/>
+          </a:p>
+        </p:txBody>
+      </p:sp>
+      <p:sp>
+        <p:nvSpPr>
+          <p:cNvPr id="9" name="FLAG — delete before sharing"/>
+          <p:cNvSpPr txBox="1"/>
+          <p:nvPr/>
+        </p:nvSpPr>
+        <p:spPr>
+          <a:xfrm>
+            <a:off x="548640" y="5577840"/>
+            <a:ext cx="5410048" cy="502920"/>
+          </a:xfrm>
+          <a:prstGeom prst="rect">
+            <a:avLst/>
+          </a:prstGeom>
+          <a:solidFill>
+            <a:schemeClr val="bg1"/>
+          </a:solidFill>
+          <a:ln w="25400">
+            <a:solidFill>
+              <a:schemeClr val="accent4"/>
+            </a:solidFill>
+          </a:ln>
+        </p:spPr>
+        <p:txBody>
+          <a:bodyPr wrap="square" lIns="38100" tIns="76200" rIns="76200" bIns="38100" rtlCol="0" anchor="ctr"/>
+          <a:lstStyle/>
+          <a:p>
+            <a:pPr indent="0" marL="0">
+              <a:buNone/>
+            </a:pPr>
+            <a:r>
+              <a:rPr lang="en-US" sz="1100" dirty="0">
+                <a:solidFill>
+                  <a:schemeClr val="tx1"/>
+                </a:solidFill>
+                <a:latin typeface="Raleway SemiBold" pitchFamily="34" charset="0"/>
+                <a:ea typeface="Raleway SemiBold" pitchFamily="34" charset="-122"/>
+                <a:cs typeface="Raleway SemiBold" pitchFamily="34" charset="-120"/>
+              </a:rPr>
+              <a:t>TO DECIDE  </a:t>
+            </a:r>
+            <a:pPr indent="0" marL="0">
+              <a:buNone/>
+            </a:pPr>
+            <a:r>
+              <a:rPr lang="en-US" sz="1100" dirty="0">
+                <a:solidFill>
+                  <a:schemeClr val="tx1"/>
+                </a:solidFill>
+              </a:rPr>
+              <a:t>Quizzes and prizes (in the October deck): keep, and how?</a:t>
+            </a:r>
+            <a:endParaRPr lang="en-US" sz="1100" dirty="0"/>
+          </a:p>
+        </p:txBody>
+      </p:sp>
+      <p:sp>
+        <p:nvSpPr>
+          <p:cNvPr id="10" name="FLAG — delete before sharing"/>
+          <p:cNvSpPr txBox="1"/>
+          <p:nvPr/>
+        </p:nvSpPr>
+        <p:spPr>
+          <a:xfrm>
+            <a:off x="6233008" y="5577840"/>
+            <a:ext cx="5410048" cy="502920"/>
+          </a:xfrm>
+          <a:prstGeom prst="rect">
+            <a:avLst/>
+          </a:prstGeom>
+          <a:solidFill>
+            <a:schemeClr val="bg1"/>
+          </a:solidFill>
+          <a:ln w="25400">
+            <a:solidFill>
+              <a:schemeClr val="accent4"/>
+            </a:solidFill>
+          </a:ln>
+        </p:spPr>
+        <p:txBody>
+          <a:bodyPr wrap="square" lIns="38100" tIns="76200" rIns="76200" bIns="38100" rtlCol="0" anchor="ctr"/>
+          <a:lstStyle/>
+          <a:p>
+            <a:pPr indent="0" marL="0">
+              <a:buNone/>
+            </a:pPr>
+            <a:r>
+              <a:rPr lang="en-US" sz="1100" dirty="0">
+                <a:solidFill>
+                  <a:schemeClr val="tx1"/>
+                </a:solidFill>
+                <a:latin typeface="Raleway SemiBold" pitchFamily="34" charset="0"/>
+                <a:ea typeface="Raleway SemiBold" pitchFamily="34" charset="-122"/>
+                <a:cs typeface="Raleway SemiBold" pitchFamily="34" charset="-120"/>
+              </a:rPr>
+              <a:t>TO CONFIRM  </a:t>
+            </a:r>
+            <a:pPr indent="0" marL="0">
+              <a:buNone/>
+            </a:pPr>
+            <a:r>
+              <a:rPr lang="en-US" sz="1100" dirty="0">
+                <a:solidFill>
+                  <a:schemeClr val="tx1"/>
+                </a:solidFill>
+              </a:rPr>
+              <a:t>Contacts: proposed rule, needs legal review.</a:t>
+            </a:r>
+            <a:endParaRPr lang="en-US" sz="1100" dirty="0"/>
           </a:p>
         </p:txBody>
       </p:sp>
@@ -7935,7 +8007,7 @@
                 <a:ea typeface="Raleway Light" pitchFamily="34" charset="-122"/>
                 <a:cs typeface="Raleway Light" pitchFamily="34" charset="-120"/>
               </a:rPr>
-              <a:t>The visitor journey</a:t>
+              <a:t>How we show up at your event</a:t>
             </a:r>
             <a:endParaRPr lang="en-US" sz="3600" dirty="0"/>
           </a:p>
@@ -7976,7 +8048,7 @@
                 <a:ea typeface="Raleway Light" pitchFamily="34" charset="-122"/>
                 <a:cs typeface="Raleway Light" pitchFamily="34" charset="-120"/>
               </a:rPr>
-              <a:t>Designed around what actually happens at a discovery day.</a:t>
+              <a:t>Mostly on visitors' phones and through the tasting itself.</a:t>
             </a:r>
             <a:endParaRPr lang="en-US" sz="1800" dirty="0"/>
           </a:p>
@@ -8027,469 +8099,18 @@
       </p:sp>
       <p:sp>
         <p:nvSpPr>
-          <p:cNvPr id="5" name="Journey: Arrive"/>
-          <p:cNvSpPr txBox="1"/>
-          <p:nvPr/>
-        </p:nvSpPr>
-        <p:spPr>
-          <a:xfrm>
-            <a:off x="548640" y="1828800"/>
-            <a:ext cx="1334110" cy="685800"/>
+          <p:cNvPr id="5" name="Card: ON VISITORS' PHONES"/>
+          <p:cNvSpPr/>
+          <p:nvPr/>
+        </p:nvSpPr>
+        <p:spPr>
+          <a:xfrm>
+            <a:off x="548640" y="1783080"/>
+            <a:ext cx="3515258" cy="2148840"/>
           </a:xfrm>
           <a:prstGeom prst="roundRect">
             <a:avLst>
-              <a:gd name="adj" fmla="val 49333"/>
-            </a:avLst>
-          </a:prstGeom>
-          <a:solidFill>
-            <a:schemeClr val="tx1"/>
-          </a:solidFill>
-          <a:ln/>
-        </p:spPr>
-        <p:txBody>
-          <a:bodyPr wrap="square" lIns="0" tIns="0" rIns="0" bIns="0" rtlCol="0" anchor="ctr"/>
-          <a:lstStyle/>
-          <a:p>
-            <a:pPr algn="ctr" indent="0" marL="0">
-              <a:buNone/>
-            </a:pPr>
-            <a:r>
-              <a:rPr lang="en-US" sz="1500" dirty="0">
-                <a:solidFill>
-                  <a:schemeClr val="bg2"/>
-                </a:solidFill>
-                <a:latin typeface="Raleway SemiBold" pitchFamily="34" charset="0"/>
-                <a:ea typeface="Raleway SemiBold" pitchFamily="34" charset="-122"/>
-                <a:cs typeface="Raleway SemiBold" pitchFamily="34" charset="-120"/>
-              </a:rPr>
-              <a:t>Arrive</a:t>
-            </a:r>
-            <a:endParaRPr lang="en-US" sz="1500" dirty="0"/>
-          </a:p>
-        </p:txBody>
-      </p:sp>
-      <p:sp>
-        <p:nvSpPr>
-          <p:cNvPr id="6" name="Shape 4"/>
-          <p:cNvSpPr/>
-          <p:nvPr/>
-        </p:nvSpPr>
-        <p:spPr>
-          <a:xfrm>
-            <a:off x="1937614" y="2075688"/>
-            <a:ext cx="182880" cy="182880"/>
-          </a:xfrm>
-          <a:prstGeom prst="rightArrow">
-            <a:avLst/>
-          </a:prstGeom>
-          <a:solidFill>
-            <a:schemeClr val="accent2"/>
-          </a:solidFill>
-          <a:ln w="12700">
-            <a:solidFill>
-              <a:schemeClr val="accent2"/>
-            </a:solidFill>
-            <a:prstDash val="solid"/>
-          </a:ln>
-        </p:spPr>
-      </p:sp>
-      <p:sp>
-        <p:nvSpPr>
-          <p:cNvPr id="7" name="Journey: Explore"/>
-          <p:cNvSpPr txBox="1"/>
-          <p:nvPr/>
-        </p:nvSpPr>
-        <p:spPr>
-          <a:xfrm>
-            <a:off x="2175358" y="1828800"/>
-            <a:ext cx="1334110" cy="685800"/>
-          </a:xfrm>
-          <a:prstGeom prst="roundRect">
-            <a:avLst>
-              <a:gd name="adj" fmla="val 49333"/>
-            </a:avLst>
-          </a:prstGeom>
-          <a:solidFill>
-            <a:schemeClr val="tx1"/>
-          </a:solidFill>
-          <a:ln/>
-        </p:spPr>
-        <p:txBody>
-          <a:bodyPr wrap="square" lIns="0" tIns="0" rIns="0" bIns="0" rtlCol="0" anchor="ctr"/>
-          <a:lstStyle/>
-          <a:p>
-            <a:pPr algn="ctr" indent="0" marL="0">
-              <a:buNone/>
-            </a:pPr>
-            <a:r>
-              <a:rPr lang="en-US" sz="1500" dirty="0">
-                <a:solidFill>
-                  <a:schemeClr val="bg2"/>
-                </a:solidFill>
-                <a:latin typeface="Raleway SemiBold" pitchFamily="34" charset="0"/>
-                <a:ea typeface="Raleway SemiBold" pitchFamily="34" charset="-122"/>
-                <a:cs typeface="Raleway SemiBold" pitchFamily="34" charset="-120"/>
-              </a:rPr>
-              <a:t>Explore</a:t>
-            </a:r>
-            <a:endParaRPr lang="en-US" sz="1500" dirty="0"/>
-          </a:p>
-        </p:txBody>
-      </p:sp>
-      <p:sp>
-        <p:nvSpPr>
-          <p:cNvPr id="8" name="Shape 6"/>
-          <p:cNvSpPr/>
-          <p:nvPr/>
-        </p:nvSpPr>
-        <p:spPr>
-          <a:xfrm>
-            <a:off x="3564331" y="2075688"/>
-            <a:ext cx="182880" cy="182880"/>
-          </a:xfrm>
-          <a:prstGeom prst="rightArrow">
-            <a:avLst/>
-          </a:prstGeom>
-          <a:solidFill>
-            <a:schemeClr val="accent2"/>
-          </a:solidFill>
-          <a:ln w="12700">
-            <a:solidFill>
-              <a:schemeClr val="accent2"/>
-            </a:solidFill>
-            <a:prstDash val="solid"/>
-          </a:ln>
-        </p:spPr>
-      </p:sp>
-      <p:sp>
-        <p:nvSpPr>
-          <p:cNvPr id="9" name="Journey: Taste"/>
-          <p:cNvSpPr txBox="1"/>
-          <p:nvPr/>
-        </p:nvSpPr>
-        <p:spPr>
-          <a:xfrm>
-            <a:off x="3802075" y="1828800"/>
-            <a:ext cx="1334110" cy="685800"/>
-          </a:xfrm>
-          <a:prstGeom prst="roundRect">
-            <a:avLst>
-              <a:gd name="adj" fmla="val 49333"/>
-            </a:avLst>
-          </a:prstGeom>
-          <a:solidFill>
-            <a:schemeClr val="tx1"/>
-          </a:solidFill>
-          <a:ln/>
-        </p:spPr>
-        <p:txBody>
-          <a:bodyPr wrap="square" lIns="0" tIns="0" rIns="0" bIns="0" rtlCol="0" anchor="ctr"/>
-          <a:lstStyle/>
-          <a:p>
-            <a:pPr algn="ctr" indent="0" marL="0">
-              <a:buNone/>
-            </a:pPr>
-            <a:r>
-              <a:rPr lang="en-US" sz="1500" dirty="0">
-                <a:solidFill>
-                  <a:schemeClr val="bg2"/>
-                </a:solidFill>
-                <a:latin typeface="Raleway SemiBold" pitchFamily="34" charset="0"/>
-                <a:ea typeface="Raleway SemiBold" pitchFamily="34" charset="-122"/>
-                <a:cs typeface="Raleway SemiBold" pitchFamily="34" charset="-120"/>
-              </a:rPr>
-              <a:t>Taste</a:t>
-            </a:r>
-            <a:endParaRPr lang="en-US" sz="1500" dirty="0"/>
-          </a:p>
-        </p:txBody>
-      </p:sp>
-      <p:sp>
-        <p:nvSpPr>
-          <p:cNvPr id="10" name="Shape 8"/>
-          <p:cNvSpPr/>
-          <p:nvPr/>
-        </p:nvSpPr>
-        <p:spPr>
-          <a:xfrm>
-            <a:off x="5191049" y="2075688"/>
-            <a:ext cx="182880" cy="182880"/>
-          </a:xfrm>
-          <a:prstGeom prst="rightArrow">
-            <a:avLst/>
-          </a:prstGeom>
-          <a:solidFill>
-            <a:schemeClr val="accent2"/>
-          </a:solidFill>
-          <a:ln w="12700">
-            <a:solidFill>
-              <a:schemeClr val="accent2"/>
-            </a:solidFill>
-            <a:prstDash val="solid"/>
-          </a:ln>
-        </p:spPr>
-      </p:sp>
-      <p:sp>
-        <p:nvSpPr>
-          <p:cNvPr id="11" name="Journey: Sit and talk"/>
-          <p:cNvSpPr txBox="1"/>
-          <p:nvPr/>
-        </p:nvSpPr>
-        <p:spPr>
-          <a:xfrm>
-            <a:off x="5428793" y="1828800"/>
-            <a:ext cx="1334110" cy="685800"/>
-          </a:xfrm>
-          <a:prstGeom prst="roundRect">
-            <a:avLst>
-              <a:gd name="adj" fmla="val 49333"/>
-            </a:avLst>
-          </a:prstGeom>
-          <a:solidFill>
-            <a:schemeClr val="tx1"/>
-          </a:solidFill>
-          <a:ln/>
-        </p:spPr>
-        <p:txBody>
-          <a:bodyPr wrap="square" lIns="0" tIns="0" rIns="0" bIns="0" rtlCol="0" anchor="ctr"/>
-          <a:lstStyle/>
-          <a:p>
-            <a:pPr algn="ctr" indent="0" marL="0">
-              <a:buNone/>
-            </a:pPr>
-            <a:r>
-              <a:rPr lang="en-US" sz="1500" dirty="0">
-                <a:solidFill>
-                  <a:schemeClr val="bg2"/>
-                </a:solidFill>
-                <a:latin typeface="Raleway SemiBold" pitchFamily="34" charset="0"/>
-                <a:ea typeface="Raleway SemiBold" pitchFamily="34" charset="-122"/>
-                <a:cs typeface="Raleway SemiBold" pitchFamily="34" charset="-120"/>
-              </a:rPr>
-              <a:t>Sit and talk</a:t>
-            </a:r>
-            <a:endParaRPr lang="en-US" sz="1500" dirty="0"/>
-          </a:p>
-        </p:txBody>
-      </p:sp>
-      <p:sp>
-        <p:nvSpPr>
-          <p:cNvPr id="12" name="Shape 10"/>
-          <p:cNvSpPr/>
-          <p:nvPr/>
-        </p:nvSpPr>
-        <p:spPr>
-          <a:xfrm>
-            <a:off x="6817766" y="2075688"/>
-            <a:ext cx="182880" cy="182880"/>
-          </a:xfrm>
-          <a:prstGeom prst="rightArrow">
-            <a:avLst/>
-          </a:prstGeom>
-          <a:solidFill>
-            <a:schemeClr val="accent2"/>
-          </a:solidFill>
-          <a:ln w="12700">
-            <a:solidFill>
-              <a:schemeClr val="accent2"/>
-            </a:solidFill>
-            <a:prstDash val="solid"/>
-          </a:ln>
-        </p:spPr>
-      </p:sp>
-      <p:sp>
-        <p:nvSpPr>
-          <p:cNvPr id="13" name="Journey: Save"/>
-          <p:cNvSpPr txBox="1"/>
-          <p:nvPr/>
-        </p:nvSpPr>
-        <p:spPr>
-          <a:xfrm>
-            <a:off x="7055510" y="1828800"/>
-            <a:ext cx="1334110" cy="685800"/>
-          </a:xfrm>
-          <a:prstGeom prst="roundRect">
-            <a:avLst>
-              <a:gd name="adj" fmla="val 49333"/>
-            </a:avLst>
-          </a:prstGeom>
-          <a:solidFill>
-            <a:schemeClr val="tx1"/>
-          </a:solidFill>
-          <a:ln/>
-        </p:spPr>
-        <p:txBody>
-          <a:bodyPr wrap="square" lIns="0" tIns="0" rIns="0" bIns="0" rtlCol="0" anchor="ctr"/>
-          <a:lstStyle/>
-          <a:p>
-            <a:pPr algn="ctr" indent="0" marL="0">
-              <a:buNone/>
-            </a:pPr>
-            <a:r>
-              <a:rPr lang="en-US" sz="1500" dirty="0">
-                <a:solidFill>
-                  <a:schemeClr val="bg2"/>
-                </a:solidFill>
-                <a:latin typeface="Raleway SemiBold" pitchFamily="34" charset="0"/>
-                <a:ea typeface="Raleway SemiBold" pitchFamily="34" charset="-122"/>
-                <a:cs typeface="Raleway SemiBold" pitchFamily="34" charset="-120"/>
-              </a:rPr>
-              <a:t>Save</a:t>
-            </a:r>
-            <a:endParaRPr lang="en-US" sz="1500" dirty="0"/>
-          </a:p>
-        </p:txBody>
-      </p:sp>
-      <p:sp>
-        <p:nvSpPr>
-          <p:cNvPr id="14" name="Shape 12"/>
-          <p:cNvSpPr/>
-          <p:nvPr/>
-        </p:nvSpPr>
-        <p:spPr>
-          <a:xfrm>
-            <a:off x="8444484" y="2075688"/>
-            <a:ext cx="182880" cy="182880"/>
-          </a:xfrm>
-          <a:prstGeom prst="rightArrow">
-            <a:avLst/>
-          </a:prstGeom>
-          <a:solidFill>
-            <a:schemeClr val="accent2"/>
-          </a:solidFill>
-          <a:ln w="12700">
-            <a:solidFill>
-              <a:schemeClr val="accent2"/>
-            </a:solidFill>
-            <a:prstDash val="solid"/>
-          </a:ln>
-        </p:spPr>
-      </p:sp>
-      <p:sp>
-        <p:nvSpPr>
-          <p:cNvPr id="15" name="Journey: Crown"/>
-          <p:cNvSpPr txBox="1"/>
-          <p:nvPr/>
-        </p:nvSpPr>
-        <p:spPr>
-          <a:xfrm>
-            <a:off x="8682228" y="1828800"/>
-            <a:ext cx="1334110" cy="685800"/>
-          </a:xfrm>
-          <a:prstGeom prst="roundRect">
-            <a:avLst>
-              <a:gd name="adj" fmla="val 49333"/>
-            </a:avLst>
-          </a:prstGeom>
-          <a:solidFill>
-            <a:schemeClr val="tx1"/>
-          </a:solidFill>
-          <a:ln/>
-        </p:spPr>
-        <p:txBody>
-          <a:bodyPr wrap="square" lIns="0" tIns="0" rIns="0" bIns="0" rtlCol="0" anchor="ctr"/>
-          <a:lstStyle/>
-          <a:p>
-            <a:pPr algn="ctr" indent="0" marL="0">
-              <a:buNone/>
-            </a:pPr>
-            <a:r>
-              <a:rPr lang="en-US" sz="1500" dirty="0">
-                <a:solidFill>
-                  <a:schemeClr val="bg2"/>
-                </a:solidFill>
-                <a:latin typeface="Raleway SemiBold" pitchFamily="34" charset="0"/>
-                <a:ea typeface="Raleway SemiBold" pitchFamily="34" charset="-122"/>
-                <a:cs typeface="Raleway SemiBold" pitchFamily="34" charset="-120"/>
-              </a:rPr>
-              <a:t>Crown</a:t>
-            </a:r>
-            <a:endParaRPr lang="en-US" sz="1500" dirty="0"/>
-          </a:p>
-        </p:txBody>
-      </p:sp>
-      <p:sp>
-        <p:nvSpPr>
-          <p:cNvPr id="16" name="Shape 14"/>
-          <p:cNvSpPr/>
-          <p:nvPr/>
-        </p:nvSpPr>
-        <p:spPr>
-          <a:xfrm>
-            <a:off x="10071202" y="2075688"/>
-            <a:ext cx="182880" cy="182880"/>
-          </a:xfrm>
-          <a:prstGeom prst="rightArrow">
-            <a:avLst/>
-          </a:prstGeom>
-          <a:solidFill>
-            <a:schemeClr val="accent2"/>
-          </a:solidFill>
-          <a:ln w="12700">
-            <a:solidFill>
-              <a:schemeClr val="accent2"/>
-            </a:solidFill>
-            <a:prstDash val="solid"/>
-          </a:ln>
-        </p:spPr>
-      </p:sp>
-      <p:sp>
-        <p:nvSpPr>
-          <p:cNvPr id="17" name="Journey: Revisit"/>
-          <p:cNvSpPr txBox="1"/>
-          <p:nvPr/>
-        </p:nvSpPr>
-        <p:spPr>
-          <a:xfrm>
-            <a:off x="10308946" y="1828800"/>
-            <a:ext cx="1334110" cy="685800"/>
-          </a:xfrm>
-          <a:prstGeom prst="roundRect">
-            <a:avLst>
-              <a:gd name="adj" fmla="val 49333"/>
-            </a:avLst>
-          </a:prstGeom>
-          <a:solidFill>
-            <a:schemeClr val="tx1"/>
-          </a:solidFill>
-          <a:ln/>
-        </p:spPr>
-        <p:txBody>
-          <a:bodyPr wrap="square" lIns="0" tIns="0" rIns="0" bIns="0" rtlCol="0" anchor="ctr"/>
-          <a:lstStyle/>
-          <a:p>
-            <a:pPr algn="ctr" indent="0" marL="0">
-              <a:buNone/>
-            </a:pPr>
-            <a:r>
-              <a:rPr lang="en-US" sz="1500" dirty="0">
-                <a:solidFill>
-                  <a:schemeClr val="bg2"/>
-                </a:solidFill>
-                <a:latin typeface="Raleway SemiBold" pitchFamily="34" charset="0"/>
-                <a:ea typeface="Raleway SemiBold" pitchFamily="34" charset="-122"/>
-                <a:cs typeface="Raleway SemiBold" pitchFamily="34" charset="-120"/>
-              </a:rPr>
-              <a:t>Revisit</a:t>
-            </a:r>
-            <a:endParaRPr lang="en-US" sz="1500" dirty="0"/>
-          </a:p>
-        </p:txBody>
-      </p:sp>
-      <p:sp>
-        <p:nvSpPr>
-          <p:cNvPr id="18" name="Card: QUICK TO USE"/>
-          <p:cNvSpPr/>
-          <p:nvPr/>
-        </p:nvSpPr>
-        <p:spPr>
-          <a:xfrm>
-            <a:off x="548640" y="2971800"/>
-            <a:ext cx="2567864" cy="1463040"/>
-          </a:xfrm>
-          <a:prstGeom prst="roundRect">
-            <a:avLst>
-              <a:gd name="adj" fmla="val 7500"/>
+              <a:gd name="adj" fmla="val 5106"/>
             </a:avLst>
           </a:prstGeom>
           <a:solidFill>
@@ -8512,14 +8133,14 @@
       </p:sp>
       <p:sp>
         <p:nvSpPr>
-          <p:cNvPr id="19" name="Text 17"/>
+          <p:cNvPr id="6" name="Text 4"/>
           <p:cNvSpPr txBox="1"/>
           <p:nvPr/>
         </p:nvSpPr>
         <p:spPr>
           <a:xfrm>
-            <a:off x="777240" y="3200400"/>
-            <a:ext cx="2110664" cy="1097280"/>
+            <a:off x="777240" y="2011680"/>
+            <a:ext cx="3058058" cy="1783080"/>
           </a:xfrm>
           <a:prstGeom prst="rect">
             <a:avLst/>
@@ -8546,7 +8167,7 @@
                 <a:ea typeface="Raleway SemiBold" pitchFamily="34" charset="-122"/>
                 <a:cs typeface="Raleway SemiBold" pitchFamily="34" charset="-120"/>
               </a:rPr>
-              <a:t>QUICK TO USE</a:t>
+              <a:t>ON VISITORS' PHONES</a:t>
             </a:r>
             <a:endParaRPr lang="en-US" sz="1500" dirty="0"/>
           </a:p>
@@ -8580,7 +8201,7 @@
                   <a:schemeClr val="tx1"/>
                 </a:solidFill>
               </a:rPr>
-              <a:t>Easy to start, easy to join.</a:t>
+              <a:t>A QR code is all it takes. The experience runs alongside the tasting, at each visitor's own pace.</a:t>
             </a:r>
             <a:endParaRPr lang="en-US" sz="1500" dirty="0"/>
           </a:p>
@@ -8588,18 +8209,18 @@
       </p:sp>
       <p:sp>
         <p:nvSpPr>
-          <p:cNvPr id="20" name="Card: OPTIONAL QUESTIONS"/>
+          <p:cNvPr id="7" name="Card: ON YOUR MAIN SCREEN"/>
           <p:cNvSpPr/>
           <p:nvPr/>
         </p:nvSpPr>
         <p:spPr>
           <a:xfrm>
-            <a:off x="3390824" y="2971800"/>
-            <a:ext cx="2567864" cy="1463040"/>
+            <a:off x="4338218" y="1783080"/>
+            <a:ext cx="3515258" cy="2148840"/>
           </a:xfrm>
           <a:prstGeom prst="roundRect">
             <a:avLst>
-              <a:gd name="adj" fmla="val 7500"/>
+              <a:gd name="adj" fmla="val 5106"/>
             </a:avLst>
           </a:prstGeom>
           <a:solidFill>
@@ -8622,14 +8243,14 @@
       </p:sp>
       <p:sp>
         <p:nvSpPr>
-          <p:cNvPr id="21" name="Text 19"/>
+          <p:cNvPr id="8" name="Text 6"/>
           <p:cNvSpPr txBox="1"/>
           <p:nvPr/>
         </p:nvSpPr>
         <p:spPr>
           <a:xfrm>
-            <a:off x="3619424" y="3200400"/>
-            <a:ext cx="2110664" cy="1097280"/>
+            <a:off x="4566818" y="2011680"/>
+            <a:ext cx="3058058" cy="1783080"/>
           </a:xfrm>
           <a:prstGeom prst="rect">
             <a:avLst/>
@@ -8656,7 +8277,7 @@
                 <a:ea typeface="Raleway SemiBold" pitchFamily="34" charset="-122"/>
                 <a:cs typeface="Raleway SemiBold" pitchFamily="34" charset="-120"/>
               </a:rPr>
-              <a:t>OPTIONAL QUESTIONS</a:t>
+              <a:t>ON YOUR MAIN SCREEN</a:t>
             </a:r>
             <a:endParaRPr lang="en-US" sz="1500" dirty="0"/>
           </a:p>
@@ -8690,7 +8311,7 @@
                   <a:schemeClr val="tx1"/>
                 </a:solidFill>
               </a:rPr>
-              <a:t>Visitors answer as much or as little as they like.</a:t>
+              <a:t>Where you have one: live shared questions and results, in scheduled moments.</a:t>
             </a:r>
             <a:endParaRPr lang="en-US" sz="1500" dirty="0"/>
           </a:p>
@@ -8698,18 +8319,18 @@
       </p:sp>
       <p:sp>
         <p:nvSpPr>
-          <p:cNvPr id="22" name="Card: NO COMPULSORY TASTING"/>
+          <p:cNvPr id="9" name="Card: A SMALL ENTRE AMIS CORNER"/>
           <p:cNvSpPr/>
           <p:nvPr/>
         </p:nvSpPr>
         <p:spPr>
           <a:xfrm>
-            <a:off x="6233008" y="2971800"/>
-            <a:ext cx="2567864" cy="1463040"/>
+            <a:off x="8127797" y="1783080"/>
+            <a:ext cx="3515258" cy="2148840"/>
           </a:xfrm>
           <a:prstGeom prst="roundRect">
             <a:avLst>
-              <a:gd name="adj" fmla="val 7500"/>
+              <a:gd name="adj" fmla="val 5106"/>
             </a:avLst>
           </a:prstGeom>
           <a:solidFill>
@@ -8732,14 +8353,14 @@
       </p:sp>
       <p:sp>
         <p:nvSpPr>
-          <p:cNvPr id="23" name="Text 21"/>
+          <p:cNvPr id="10" name="Text 8"/>
           <p:cNvSpPr txBox="1"/>
           <p:nvPr/>
         </p:nvSpPr>
         <p:spPr>
           <a:xfrm>
-            <a:off x="6461608" y="3200400"/>
-            <a:ext cx="2110664" cy="1097280"/>
+            <a:off x="8356397" y="2011680"/>
+            <a:ext cx="3058058" cy="1783080"/>
           </a:xfrm>
           <a:prstGeom prst="rect">
             <a:avLst/>
@@ -8766,7 +8387,7 @@
                 <a:ea typeface="Raleway SemiBold" pitchFamily="34" charset="-122"/>
                 <a:cs typeface="Raleway SemiBold" pitchFamily="34" charset="-120"/>
               </a:rPr>
-              <a:t>NO COMPULSORY TASTING</a:t>
+              <a:t>A SMALL ENTRE AMIS CORNER</a:t>
             </a:r>
             <a:endParaRPr lang="en-US" sz="1500" dirty="0"/>
           </a:p>
@@ -8800,7 +8421,7 @@
                   <a:schemeClr val="tx1"/>
                 </a:solidFill>
               </a:rPr>
-              <a:t>Tasting is always optional.</a:t>
+              <a:t>Comfortable seats and a place to connect and find comfort. Never a sales space.</a:t>
             </a:r>
             <a:endParaRPr lang="en-US" sz="1500" dirty="0"/>
           </a:p>
@@ -8808,48 +8429,14 @@
       </p:sp>
       <p:sp>
         <p:nvSpPr>
-          <p:cNvPr id="24" name="Card: TAILORED TO EACH EVENT"/>
-          <p:cNvSpPr/>
-          <p:nvPr/>
-        </p:nvSpPr>
-        <p:spPr>
-          <a:xfrm>
-            <a:off x="9075191" y="2971800"/>
-            <a:ext cx="2567864" cy="1463040"/>
-          </a:xfrm>
-          <a:prstGeom prst="roundRect">
-            <a:avLst>
-              <a:gd name="adj" fmla="val 7500"/>
-            </a:avLst>
-          </a:prstGeom>
-          <a:solidFill>
-            <a:schemeClr val="bg1"/>
-          </a:solidFill>
-          <a:ln w="12700">
-            <a:solidFill>
-              <a:schemeClr val="bg1"/>
-            </a:solidFill>
-            <a:prstDash val="solid"/>
-          </a:ln>
-          <a:effectLst>
-            <a:outerShdw sx="100000" sy="100000" kx="0" ky="0" algn="bl" rotWithShape="0" blurRad="76200" dist="25400" dir="5400000">
-              <a:srgbClr val="565A32">
-                <a:alpha val="12000"/>
-              </a:srgbClr>
-            </a:outerShdw>
-          </a:effectLst>
-        </p:spPr>
-      </p:sp>
-      <p:sp>
-        <p:nvSpPr>
-          <p:cNvPr id="25" name="Text 23"/>
+          <p:cNvPr id="11" name="Text 9"/>
           <p:cNvSpPr txBox="1"/>
           <p:nvPr/>
         </p:nvSpPr>
         <p:spPr>
           <a:xfrm>
-            <a:off x="9303791" y="3200400"/>
-            <a:ext cx="2110664" cy="1097280"/>
+            <a:off x="548640" y="4160520"/>
+            <a:ext cx="7132320" cy="914400"/>
           </a:xfrm>
           <a:prstGeom prst="rect">
             <a:avLst/>
@@ -8868,7 +8455,7 @@
               <a:buNone/>
             </a:pPr>
             <a:r>
-              <a:rPr lang="en-US" sz="1200" spc="150" kern="0" dirty="0">
+              <a:rPr lang="en-US" sz="1300" spc="150" kern="0" dirty="0">
                 <a:solidFill>
                   <a:schemeClr val="tx1"/>
                 </a:solidFill>
@@ -8876,7 +8463,7 @@
                 <a:ea typeface="Raleway SemiBold" pitchFamily="34" charset="-122"/>
                 <a:cs typeface="Raleway SemiBold" pitchFamily="34" charset="-120"/>
               </a:rPr>
-              <a:t>TAILORED TO EACH EVENT</a:t>
+              <a:t>IT FITS DIFFERENT EVENTS</a:t>
             </a:r>
             <a:endParaRPr lang="en-US" sz="1500" dirty="0"/>
           </a:p>
@@ -8888,48 +8475,31 @@
               <a:buNone/>
             </a:pPr>
             <a:r>
-              <a:rPr lang="en-US" sz="600" dirty="0">
-                <a:solidFill>
-                  <a:schemeClr val="tx1"/>
-                </a:solidFill>
-              </a:rPr>
-              <a:t> </a:t>
+              <a:rPr lang="en-US" sz="1500" dirty="0">
+                <a:solidFill>
+                  <a:schemeClr val="tx1"/>
+                </a:solidFill>
+              </a:rPr>
+              <a:t>Large festivals with a main screen.  Tented tastings with no installed screens.  A smaller seasonal follow-up to reconnect with visitors.</a:t>
             </a:r>
             <a:endParaRPr lang="en-US" sz="1500" dirty="0"/>
           </a:p>
-          <a:p>
-            <a:pPr indent="0" marL="0">
-              <a:spcAft>
-                <a:spcPts val="400"/>
-              </a:spcAft>
-              <a:buNone/>
-            </a:pPr>
-            <a:r>
-              <a:rPr lang="en-US" sz="1500" dirty="0">
-                <a:solidFill>
-                  <a:schemeClr val="tx1"/>
-                </a:solidFill>
-              </a:rPr>
-              <a:t>Adds to the day itself, and helps visitors remember it.</a:t>
-            </a:r>
-            <a:endParaRPr lang="en-US" sz="1500" dirty="0"/>
-          </a:p>
-        </p:txBody>
-      </p:sp>
-      <p:sp>
-        <p:nvSpPr>
-          <p:cNvPr id="26" name="Image placeholder"/>
+        </p:txBody>
+      </p:sp>
+      <p:sp>
+        <p:nvSpPr>
+          <p:cNvPr id="12" name="Image placeholder"/>
           <p:cNvSpPr/>
           <p:nvPr/>
         </p:nvSpPr>
         <p:spPr>
           <a:xfrm>
-            <a:off x="548640" y="4663440"/>
-            <a:ext cx="11094415" cy="1280160"/>
+            <a:off x="7955280" y="4114800"/>
+            <a:ext cx="3687775" cy="1783080"/>
           </a:xfrm>
           <a:prstGeom prst="roundRect">
             <a:avLst>
-              <a:gd name="adj" fmla="val 8571"/>
+              <a:gd name="adj" fmla="val 6154"/>
             </a:avLst>
           </a:prstGeom>
           <a:solidFill>
@@ -8945,14 +8515,14 @@
       </p:sp>
       <p:sp>
         <p:nvSpPr>
-          <p:cNvPr id="27" name="Text 25"/>
+          <p:cNvPr id="13" name="Text 11"/>
           <p:cNvSpPr txBox="1"/>
           <p:nvPr/>
         </p:nvSpPr>
         <p:spPr>
           <a:xfrm>
-            <a:off x="822960" y="4663440"/>
-            <a:ext cx="10545775" cy="1280160"/>
+            <a:off x="8229600" y="4114800"/>
+            <a:ext cx="3139135" cy="1783080"/>
           </a:xfrm>
           <a:prstGeom prst="rect">
             <a:avLst/>
@@ -8979,9 +8549,65 @@
                 <a:ea typeface="Raleway SemiBold" pitchFamily="34" charset="-122"/>
                 <a:cs typeface="Raleway SemiBold" pitchFamily="34" charset="-120"/>
               </a:rPr>
-              <a:t>Journey screens or photos — to add</a:t>
+              <a:t>Photo of the corner or the app in use — to add</a:t>
             </a:r>
             <a:endParaRPr lang="en-US" sz="1400" dirty="0"/>
+          </a:p>
+        </p:txBody>
+      </p:sp>
+      <p:sp>
+        <p:nvSpPr>
+          <p:cNvPr id="14" name="FLAG — delete before sharing"/>
+          <p:cNvSpPr txBox="1"/>
+          <p:nvPr/>
+        </p:nvSpPr>
+        <p:spPr>
+          <a:xfrm>
+            <a:off x="548640" y="5303520"/>
+            <a:ext cx="7132320" cy="594360"/>
+          </a:xfrm>
+          <a:prstGeom prst="rect">
+            <a:avLst/>
+          </a:prstGeom>
+          <a:solidFill>
+            <a:schemeClr val="bg1"/>
+          </a:solidFill>
+          <a:ln w="25400">
+            <a:solidFill>
+              <a:schemeClr val="accent4"/>
+            </a:solidFill>
+          </a:ln>
+        </p:spPr>
+        <p:txBody>
+          <a:bodyPr wrap="square" lIns="38100" tIns="76200" rIns="76200" bIns="38100" rtlCol="0" anchor="ctr"/>
+          <a:lstStyle/>
+          <a:p>
+            <a:pPr indent="0" marL="0">
+              <a:buNone/>
+            </a:pPr>
+            <a:r>
+              <a:rPr lang="en-US" sz="1100" dirty="0">
+                <a:solidFill>
+                  <a:schemeClr val="tx1"/>
+                </a:solidFill>
+                <a:latin typeface="Raleway SemiBold" pitchFamily="34" charset="0"/>
+                <a:ea typeface="Raleway SemiBold" pitchFamily="34" charset="-122"/>
+                <a:cs typeface="Raleway SemiBold" pitchFamily="34" charset="-120"/>
+              </a:rPr>
+              <a:t>TO CONFIRM  </a:t>
+            </a:r>
+            <a:pPr indent="0" marL="0">
+              <a:buNone/>
+            </a:pPr>
+            <a:r>
+              <a:rPr lang="en-US" sz="1100" dirty="0">
+                <a:solidFill>
+                  <a:schemeClr val="tx1"/>
+                </a:solidFill>
+              </a:rPr>
+              <a:t>'A QR code is all it takes' assumes visitors join by QR at every event.</a:t>
+            </a:r>
+            <a:endParaRPr lang="en-US" sz="1100" dirty="0"/>
           </a:p>
         </p:txBody>
       </p:sp>
@@ -9093,7 +8719,7 @@
                 <a:ea typeface="Raleway Light" pitchFamily="34" charset="-122"/>
                 <a:cs typeface="Raleway Light" pitchFamily="34" charset="-120"/>
               </a:rPr>
-              <a:t>The Entre Amis table</a:t>
+              <a:t>Your visitors' day</a:t>
             </a:r>
             <a:endParaRPr lang="en-US" sz="3600" dirty="0"/>
           </a:p>
@@ -9134,7 +8760,7 @@
                 <a:ea typeface="Raleway Light" pitchFamily="34" charset="-122"/>
                 <a:cs typeface="Raleway Light" pitchFamily="34" charset="-120"/>
               </a:rPr>
-              <a:t>An invitation to experience the brand, never a sales stand.</a:t>
+              <a:t>Built around what actually happens at a discovery day.</a:t>
             </a:r>
             <a:endParaRPr lang="en-US" sz="1800" dirty="0"/>
           </a:p>
@@ -9185,46 +8811,91 @@
       </p:sp>
       <p:sp>
         <p:nvSpPr>
-          <p:cNvPr id="5" name="Image placeholder"/>
-          <p:cNvSpPr/>
-          <p:nvPr/>
-        </p:nvSpPr>
-        <p:spPr>
-          <a:xfrm>
-            <a:off x="548640" y="1783080"/>
-            <a:ext cx="4206240" cy="3931920"/>
+          <p:cNvPr id="5" name="Journey: Arrive"/>
+          <p:cNvSpPr txBox="1"/>
+          <p:nvPr/>
+        </p:nvSpPr>
+        <p:spPr>
+          <a:xfrm>
+            <a:off x="548640" y="1828800"/>
+            <a:ext cx="1334110" cy="685800"/>
           </a:xfrm>
           <a:prstGeom prst="roundRect">
             <a:avLst>
-              <a:gd name="adj" fmla="val 2791"/>
+              <a:gd name="adj" fmla="val 49333"/>
             </a:avLst>
           </a:prstGeom>
           <a:solidFill>
-            <a:schemeClr val="accent3"/>
+            <a:schemeClr val="tx1"/>
+          </a:solidFill>
+          <a:ln/>
+        </p:spPr>
+        <p:txBody>
+          <a:bodyPr wrap="square" lIns="0" tIns="0" rIns="0" bIns="0" rtlCol="0" anchor="ctr"/>
+          <a:lstStyle/>
+          <a:p>
+            <a:pPr algn="ctr" indent="0" marL="0">
+              <a:buNone/>
+            </a:pPr>
+            <a:r>
+              <a:rPr lang="en-US" sz="1500" dirty="0">
+                <a:solidFill>
+                  <a:schemeClr val="bg2"/>
+                </a:solidFill>
+                <a:latin typeface="Raleway SemiBold" pitchFamily="34" charset="0"/>
+                <a:ea typeface="Raleway SemiBold" pitchFamily="34" charset="-122"/>
+                <a:cs typeface="Raleway SemiBold" pitchFamily="34" charset="-120"/>
+              </a:rPr>
+              <a:t>Arrive</a:t>
+            </a:r>
+            <a:endParaRPr lang="en-US" sz="1500" dirty="0"/>
+          </a:p>
+        </p:txBody>
+      </p:sp>
+      <p:sp>
+        <p:nvSpPr>
+          <p:cNvPr id="6" name="Shape 4"/>
+          <p:cNvSpPr/>
+          <p:nvPr/>
+        </p:nvSpPr>
+        <p:spPr>
+          <a:xfrm>
+            <a:off x="1937614" y="2075688"/>
+            <a:ext cx="182880" cy="182880"/>
+          </a:xfrm>
+          <a:prstGeom prst="rightArrow">
+            <a:avLst/>
+          </a:prstGeom>
+          <a:solidFill>
+            <a:schemeClr val="accent2"/>
           </a:solidFill>
           <a:ln w="12700">
             <a:solidFill>
-              <a:schemeClr val="tx1"/>
+              <a:schemeClr val="accent2"/>
             </a:solidFill>
-            <a:prstDash val="dash"/>
+            <a:prstDash val="solid"/>
           </a:ln>
         </p:spPr>
       </p:sp>
       <p:sp>
         <p:nvSpPr>
-          <p:cNvPr id="6" name="Text 4"/>
+          <p:cNvPr id="7" name="Journey: Explore"/>
           <p:cNvSpPr txBox="1"/>
           <p:nvPr/>
         </p:nvSpPr>
         <p:spPr>
           <a:xfrm>
-            <a:off x="822960" y="1783080"/>
-            <a:ext cx="3657600" cy="3931920"/>
-          </a:xfrm>
-          <a:prstGeom prst="rect">
-            <a:avLst/>
-          </a:prstGeom>
-          <a:noFill/>
+            <a:off x="2175358" y="1828800"/>
+            <a:ext cx="1334110" cy="685800"/>
+          </a:xfrm>
+          <a:prstGeom prst="roundRect">
+            <a:avLst>
+              <a:gd name="adj" fmla="val 49333"/>
+            </a:avLst>
+          </a:prstGeom>
+          <a:solidFill>
+            <a:schemeClr val="tx1"/>
+          </a:solidFill>
           <a:ln/>
         </p:spPr>
         <p:txBody>
@@ -9232,40 +8903,377 @@
           <a:lstStyle/>
           <a:p>
             <a:pPr algn="ctr" indent="0" marL="0">
-              <a:spcAft>
-                <a:spcPts val="400"/>
-              </a:spcAft>
-              <a:buNone/>
-            </a:pPr>
-            <a:r>
-              <a:rPr lang="en-US" sz="1400" dirty="0">
-                <a:solidFill>
-                  <a:schemeClr val="tx1"/>
+              <a:buNone/>
+            </a:pPr>
+            <a:r>
+              <a:rPr lang="en-US" sz="1500" dirty="0">
+                <a:solidFill>
+                  <a:schemeClr val="bg2"/>
                 </a:solidFill>
                 <a:latin typeface="Raleway SemiBold" pitchFamily="34" charset="0"/>
                 <a:ea typeface="Raleway SemiBold" pitchFamily="34" charset="-122"/>
                 <a:cs typeface="Raleway SemiBold" pitchFamily="34" charset="-120"/>
               </a:rPr>
-              <a:t>Photo of an Entre Amis table — to add</a:t>
-            </a:r>
-            <a:endParaRPr lang="en-US" sz="1400" dirty="0"/>
-          </a:p>
-        </p:txBody>
-      </p:sp>
-      <p:sp>
-        <p:nvSpPr>
-          <p:cNvPr id="7" name="Table: THE SETTING"/>
+              <a:t>Explore</a:t>
+            </a:r>
+            <a:endParaRPr lang="en-US" sz="1500" dirty="0"/>
+          </a:p>
+        </p:txBody>
+      </p:sp>
+      <p:sp>
+        <p:nvSpPr>
+          <p:cNvPr id="8" name="Shape 6"/>
           <p:cNvSpPr/>
           <p:nvPr/>
         </p:nvSpPr>
         <p:spPr>
           <a:xfrm>
-            <a:off x="5029200" y="1783080"/>
-            <a:ext cx="6613855" cy="914400"/>
+            <a:off x="3564331" y="2075688"/>
+            <a:ext cx="182880" cy="182880"/>
+          </a:xfrm>
+          <a:prstGeom prst="rightArrow">
+            <a:avLst/>
+          </a:prstGeom>
+          <a:solidFill>
+            <a:schemeClr val="accent2"/>
+          </a:solidFill>
+          <a:ln w="12700">
+            <a:solidFill>
+              <a:schemeClr val="accent2"/>
+            </a:solidFill>
+            <a:prstDash val="solid"/>
+          </a:ln>
+        </p:spPr>
+      </p:sp>
+      <p:sp>
+        <p:nvSpPr>
+          <p:cNvPr id="9" name="Journey: Taste"/>
+          <p:cNvSpPr txBox="1"/>
+          <p:nvPr/>
+        </p:nvSpPr>
+        <p:spPr>
+          <a:xfrm>
+            <a:off x="3802075" y="1828800"/>
+            <a:ext cx="1334110" cy="685800"/>
           </a:xfrm>
           <a:prstGeom prst="roundRect">
             <a:avLst>
-              <a:gd name="adj" fmla="val 12000"/>
+              <a:gd name="adj" fmla="val 49333"/>
+            </a:avLst>
+          </a:prstGeom>
+          <a:solidFill>
+            <a:schemeClr val="tx1"/>
+          </a:solidFill>
+          <a:ln/>
+        </p:spPr>
+        <p:txBody>
+          <a:bodyPr wrap="square" lIns="0" tIns="0" rIns="0" bIns="0" rtlCol="0" anchor="ctr"/>
+          <a:lstStyle/>
+          <a:p>
+            <a:pPr algn="ctr" indent="0" marL="0">
+              <a:buNone/>
+            </a:pPr>
+            <a:r>
+              <a:rPr lang="en-US" sz="1500" dirty="0">
+                <a:solidFill>
+                  <a:schemeClr val="bg2"/>
+                </a:solidFill>
+                <a:latin typeface="Raleway SemiBold" pitchFamily="34" charset="0"/>
+                <a:ea typeface="Raleway SemiBold" pitchFamily="34" charset="-122"/>
+                <a:cs typeface="Raleway SemiBold" pitchFamily="34" charset="-120"/>
+              </a:rPr>
+              <a:t>Taste</a:t>
+            </a:r>
+            <a:endParaRPr lang="en-US" sz="1500" dirty="0"/>
+          </a:p>
+        </p:txBody>
+      </p:sp>
+      <p:sp>
+        <p:nvSpPr>
+          <p:cNvPr id="10" name="Shape 8"/>
+          <p:cNvSpPr/>
+          <p:nvPr/>
+        </p:nvSpPr>
+        <p:spPr>
+          <a:xfrm>
+            <a:off x="5191049" y="2075688"/>
+            <a:ext cx="182880" cy="182880"/>
+          </a:xfrm>
+          <a:prstGeom prst="rightArrow">
+            <a:avLst/>
+          </a:prstGeom>
+          <a:solidFill>
+            <a:schemeClr val="accent2"/>
+          </a:solidFill>
+          <a:ln w="12700">
+            <a:solidFill>
+              <a:schemeClr val="accent2"/>
+            </a:solidFill>
+            <a:prstDash val="solid"/>
+          </a:ln>
+        </p:spPr>
+      </p:sp>
+      <p:sp>
+        <p:nvSpPr>
+          <p:cNvPr id="11" name="Journey: Sit and talk"/>
+          <p:cNvSpPr txBox="1"/>
+          <p:nvPr/>
+        </p:nvSpPr>
+        <p:spPr>
+          <a:xfrm>
+            <a:off x="5428793" y="1828800"/>
+            <a:ext cx="1334110" cy="685800"/>
+          </a:xfrm>
+          <a:prstGeom prst="roundRect">
+            <a:avLst>
+              <a:gd name="adj" fmla="val 49333"/>
+            </a:avLst>
+          </a:prstGeom>
+          <a:solidFill>
+            <a:schemeClr val="tx1"/>
+          </a:solidFill>
+          <a:ln/>
+        </p:spPr>
+        <p:txBody>
+          <a:bodyPr wrap="square" lIns="0" tIns="0" rIns="0" bIns="0" rtlCol="0" anchor="ctr"/>
+          <a:lstStyle/>
+          <a:p>
+            <a:pPr algn="ctr" indent="0" marL="0">
+              <a:buNone/>
+            </a:pPr>
+            <a:r>
+              <a:rPr lang="en-US" sz="1500" dirty="0">
+                <a:solidFill>
+                  <a:schemeClr val="bg2"/>
+                </a:solidFill>
+                <a:latin typeface="Raleway SemiBold" pitchFamily="34" charset="0"/>
+                <a:ea typeface="Raleway SemiBold" pitchFamily="34" charset="-122"/>
+                <a:cs typeface="Raleway SemiBold" pitchFamily="34" charset="-120"/>
+              </a:rPr>
+              <a:t>Sit and talk</a:t>
+            </a:r>
+            <a:endParaRPr lang="en-US" sz="1500" dirty="0"/>
+          </a:p>
+        </p:txBody>
+      </p:sp>
+      <p:sp>
+        <p:nvSpPr>
+          <p:cNvPr id="12" name="Shape 10"/>
+          <p:cNvSpPr/>
+          <p:nvPr/>
+        </p:nvSpPr>
+        <p:spPr>
+          <a:xfrm>
+            <a:off x="6817766" y="2075688"/>
+            <a:ext cx="182880" cy="182880"/>
+          </a:xfrm>
+          <a:prstGeom prst="rightArrow">
+            <a:avLst/>
+          </a:prstGeom>
+          <a:solidFill>
+            <a:schemeClr val="accent2"/>
+          </a:solidFill>
+          <a:ln w="12700">
+            <a:solidFill>
+              <a:schemeClr val="accent2"/>
+            </a:solidFill>
+            <a:prstDash val="solid"/>
+          </a:ln>
+        </p:spPr>
+      </p:sp>
+      <p:sp>
+        <p:nvSpPr>
+          <p:cNvPr id="13" name="Journey: Save"/>
+          <p:cNvSpPr txBox="1"/>
+          <p:nvPr/>
+        </p:nvSpPr>
+        <p:spPr>
+          <a:xfrm>
+            <a:off x="7055510" y="1828800"/>
+            <a:ext cx="1334110" cy="685800"/>
+          </a:xfrm>
+          <a:prstGeom prst="roundRect">
+            <a:avLst>
+              <a:gd name="adj" fmla="val 49333"/>
+            </a:avLst>
+          </a:prstGeom>
+          <a:solidFill>
+            <a:schemeClr val="tx1"/>
+          </a:solidFill>
+          <a:ln/>
+        </p:spPr>
+        <p:txBody>
+          <a:bodyPr wrap="square" lIns="0" tIns="0" rIns="0" bIns="0" rtlCol="0" anchor="ctr"/>
+          <a:lstStyle/>
+          <a:p>
+            <a:pPr algn="ctr" indent="0" marL="0">
+              <a:buNone/>
+            </a:pPr>
+            <a:r>
+              <a:rPr lang="en-US" sz="1500" dirty="0">
+                <a:solidFill>
+                  <a:schemeClr val="bg2"/>
+                </a:solidFill>
+                <a:latin typeface="Raleway SemiBold" pitchFamily="34" charset="0"/>
+                <a:ea typeface="Raleway SemiBold" pitchFamily="34" charset="-122"/>
+                <a:cs typeface="Raleway SemiBold" pitchFamily="34" charset="-120"/>
+              </a:rPr>
+              <a:t>Save</a:t>
+            </a:r>
+            <a:endParaRPr lang="en-US" sz="1500" dirty="0"/>
+          </a:p>
+        </p:txBody>
+      </p:sp>
+      <p:sp>
+        <p:nvSpPr>
+          <p:cNvPr id="14" name="Shape 12"/>
+          <p:cNvSpPr/>
+          <p:nvPr/>
+        </p:nvSpPr>
+        <p:spPr>
+          <a:xfrm>
+            <a:off x="8444484" y="2075688"/>
+            <a:ext cx="182880" cy="182880"/>
+          </a:xfrm>
+          <a:prstGeom prst="rightArrow">
+            <a:avLst/>
+          </a:prstGeom>
+          <a:solidFill>
+            <a:schemeClr val="accent2"/>
+          </a:solidFill>
+          <a:ln w="12700">
+            <a:solidFill>
+              <a:schemeClr val="accent2"/>
+            </a:solidFill>
+            <a:prstDash val="solid"/>
+          </a:ln>
+        </p:spPr>
+      </p:sp>
+      <p:sp>
+        <p:nvSpPr>
+          <p:cNvPr id="15" name="Journey: Crown"/>
+          <p:cNvSpPr txBox="1"/>
+          <p:nvPr/>
+        </p:nvSpPr>
+        <p:spPr>
+          <a:xfrm>
+            <a:off x="8682228" y="1828800"/>
+            <a:ext cx="1334110" cy="685800"/>
+          </a:xfrm>
+          <a:prstGeom prst="roundRect">
+            <a:avLst>
+              <a:gd name="adj" fmla="val 49333"/>
+            </a:avLst>
+          </a:prstGeom>
+          <a:solidFill>
+            <a:schemeClr val="tx1"/>
+          </a:solidFill>
+          <a:ln/>
+        </p:spPr>
+        <p:txBody>
+          <a:bodyPr wrap="square" lIns="0" tIns="0" rIns="0" bIns="0" rtlCol="0" anchor="ctr"/>
+          <a:lstStyle/>
+          <a:p>
+            <a:pPr algn="ctr" indent="0" marL="0">
+              <a:buNone/>
+            </a:pPr>
+            <a:r>
+              <a:rPr lang="en-US" sz="1500" dirty="0">
+                <a:solidFill>
+                  <a:schemeClr val="bg2"/>
+                </a:solidFill>
+                <a:latin typeface="Raleway SemiBold" pitchFamily="34" charset="0"/>
+                <a:ea typeface="Raleway SemiBold" pitchFamily="34" charset="-122"/>
+                <a:cs typeface="Raleway SemiBold" pitchFamily="34" charset="-120"/>
+              </a:rPr>
+              <a:t>Crown</a:t>
+            </a:r>
+            <a:endParaRPr lang="en-US" sz="1500" dirty="0"/>
+          </a:p>
+        </p:txBody>
+      </p:sp>
+      <p:sp>
+        <p:nvSpPr>
+          <p:cNvPr id="16" name="Shape 14"/>
+          <p:cNvSpPr/>
+          <p:nvPr/>
+        </p:nvSpPr>
+        <p:spPr>
+          <a:xfrm>
+            <a:off x="10071202" y="2075688"/>
+            <a:ext cx="182880" cy="182880"/>
+          </a:xfrm>
+          <a:prstGeom prst="rightArrow">
+            <a:avLst/>
+          </a:prstGeom>
+          <a:solidFill>
+            <a:schemeClr val="accent2"/>
+          </a:solidFill>
+          <a:ln w="12700">
+            <a:solidFill>
+              <a:schemeClr val="accent2"/>
+            </a:solidFill>
+            <a:prstDash val="solid"/>
+          </a:ln>
+        </p:spPr>
+      </p:sp>
+      <p:sp>
+        <p:nvSpPr>
+          <p:cNvPr id="17" name="Journey: Revisit"/>
+          <p:cNvSpPr txBox="1"/>
+          <p:nvPr/>
+        </p:nvSpPr>
+        <p:spPr>
+          <a:xfrm>
+            <a:off x="10308946" y="1828800"/>
+            <a:ext cx="1334110" cy="685800"/>
+          </a:xfrm>
+          <a:prstGeom prst="roundRect">
+            <a:avLst>
+              <a:gd name="adj" fmla="val 49333"/>
+            </a:avLst>
+          </a:prstGeom>
+          <a:solidFill>
+            <a:schemeClr val="tx1"/>
+          </a:solidFill>
+          <a:ln/>
+        </p:spPr>
+        <p:txBody>
+          <a:bodyPr wrap="square" lIns="0" tIns="0" rIns="0" bIns="0" rtlCol="0" anchor="ctr"/>
+          <a:lstStyle/>
+          <a:p>
+            <a:pPr algn="ctr" indent="0" marL="0">
+              <a:buNone/>
+            </a:pPr>
+            <a:r>
+              <a:rPr lang="en-US" sz="1500" dirty="0">
+                <a:solidFill>
+                  <a:schemeClr val="bg2"/>
+                </a:solidFill>
+                <a:latin typeface="Raleway SemiBold" pitchFamily="34" charset="0"/>
+                <a:ea typeface="Raleway SemiBold" pitchFamily="34" charset="-122"/>
+                <a:cs typeface="Raleway SemiBold" pitchFamily="34" charset="-120"/>
+              </a:rPr>
+              <a:t>Revisit</a:t>
+            </a:r>
+            <a:endParaRPr lang="en-US" sz="1500" dirty="0"/>
+          </a:p>
+        </p:txBody>
+      </p:sp>
+      <p:sp>
+        <p:nvSpPr>
+          <p:cNvPr id="18" name="Card: QUICK TO USE"/>
+          <p:cNvSpPr/>
+          <p:nvPr/>
+        </p:nvSpPr>
+        <p:spPr>
+          <a:xfrm>
+            <a:off x="548640" y="2971800"/>
+            <a:ext cx="2567864" cy="1463040"/>
+          </a:xfrm>
+          <a:prstGeom prst="roundRect">
+            <a:avLst>
+              <a:gd name="adj" fmla="val 7500"/>
             </a:avLst>
           </a:prstGeom>
           <a:solidFill>
@@ -9288,14 +9296,14 @@
       </p:sp>
       <p:sp>
         <p:nvSpPr>
-          <p:cNvPr id="8" name="Text 6"/>
+          <p:cNvPr id="19" name="Text 17"/>
           <p:cNvSpPr txBox="1"/>
           <p:nvPr/>
         </p:nvSpPr>
         <p:spPr>
           <a:xfrm>
-            <a:off x="5303520" y="1783080"/>
-            <a:ext cx="1920240" cy="914400"/>
+            <a:off x="777240" y="3200400"/>
+            <a:ext cx="2110664" cy="1097280"/>
           </a:xfrm>
           <a:prstGeom prst="rect">
             <a:avLst/>
@@ -9304,7 +9312,7 @@
           <a:ln/>
         </p:spPr>
         <p:txBody>
-          <a:bodyPr wrap="square" lIns="0" tIns="0" rIns="0" bIns="0" rtlCol="0" anchor="ctr"/>
+          <a:bodyPr wrap="square" lIns="0" tIns="0" rIns="0" bIns="0" rtlCol="0" anchor="t"/>
           <a:lstStyle/>
           <a:p>
             <a:pPr indent="0" marL="0">
@@ -9314,7 +9322,7 @@
               <a:buNone/>
             </a:pPr>
             <a:r>
-              <a:rPr lang="en-US" sz="1300" spc="150" kern="0" dirty="0">
+              <a:rPr lang="en-US" sz="1200" spc="150" kern="0" dirty="0">
                 <a:solidFill>
                   <a:schemeClr val="tx1"/>
                 </a:solidFill>
@@ -9322,32 +9330,10 @@
                 <a:ea typeface="Raleway SemiBold" pitchFamily="34" charset="-122"/>
                 <a:cs typeface="Raleway SemiBold" pitchFamily="34" charset="-120"/>
               </a:rPr>
-              <a:t>THE SETTING</a:t>
-            </a:r>
-            <a:endParaRPr lang="en-US" sz="1300" dirty="0"/>
-          </a:p>
-        </p:txBody>
-      </p:sp>
-      <p:sp>
-        <p:nvSpPr>
-          <p:cNvPr id="9" name="Text 7"/>
-          <p:cNvSpPr txBox="1"/>
-          <p:nvPr/>
-        </p:nvSpPr>
-        <p:spPr>
-          <a:xfrm>
-            <a:off x="7315200" y="1783080"/>
-            <a:ext cx="4053535" cy="914400"/>
-          </a:xfrm>
-          <a:prstGeom prst="rect">
-            <a:avLst/>
-          </a:prstGeom>
-          <a:noFill/>
-          <a:ln/>
-        </p:spPr>
-        <p:txBody>
-          <a:bodyPr wrap="square" lIns="0" tIns="0" rIns="0" bIns="0" rtlCol="0" anchor="ctr"/>
-          <a:lstStyle/>
+              <a:t>QUICK TO USE</a:t>
+            </a:r>
+            <a:endParaRPr lang="en-US" sz="1500" dirty="0"/>
+          </a:p>
           <a:p>
             <a:pPr indent="0" marL="0">
               <a:spcAft>
@@ -9356,31 +9342,48 @@
               <a:buNone/>
             </a:pPr>
             <a:r>
-              <a:rPr lang="en-US" sz="1400" dirty="0">
-                <a:solidFill>
-                  <a:schemeClr val="tx1"/>
-                </a:solidFill>
-              </a:rPr>
-              <a:t>A beautifully dressed dining table, comfortable chairs and tactile details, with the game and crown naturally in place.</a:t>
-            </a:r>
-            <a:endParaRPr lang="en-US" sz="1400" dirty="0"/>
-          </a:p>
-        </p:txBody>
-      </p:sp>
-      <p:sp>
-        <p:nvSpPr>
-          <p:cNvPr id="10" name="Table: THE EXPERIENCE"/>
+              <a:rPr lang="en-US" sz="600" dirty="0">
+                <a:solidFill>
+                  <a:schemeClr val="tx1"/>
+                </a:solidFill>
+              </a:rPr>
+              <a:t> </a:t>
+            </a:r>
+            <a:endParaRPr lang="en-US" sz="1500" dirty="0"/>
+          </a:p>
+          <a:p>
+            <a:pPr indent="0" marL="0">
+              <a:spcAft>
+                <a:spcPts val="400"/>
+              </a:spcAft>
+              <a:buNone/>
+            </a:pPr>
+            <a:r>
+              <a:rPr lang="en-US" sz="1500" dirty="0">
+                <a:solidFill>
+                  <a:schemeClr val="tx1"/>
+                </a:solidFill>
+              </a:rPr>
+              <a:t>Easy to start, easy to join.</a:t>
+            </a:r>
+            <a:endParaRPr lang="en-US" sz="1500" dirty="0"/>
+          </a:p>
+        </p:txBody>
+      </p:sp>
+      <p:sp>
+        <p:nvSpPr>
+          <p:cNvPr id="20" name="Card: OPTIONAL QUESTIONS"/>
           <p:cNvSpPr/>
           <p:nvPr/>
         </p:nvSpPr>
         <p:spPr>
           <a:xfrm>
-            <a:off x="5029200" y="2834640"/>
-            <a:ext cx="6613855" cy="914400"/>
+            <a:off x="3390824" y="2971800"/>
+            <a:ext cx="2567864" cy="1463040"/>
           </a:xfrm>
           <a:prstGeom prst="roundRect">
             <a:avLst>
-              <a:gd name="adj" fmla="val 12000"/>
+              <a:gd name="adj" fmla="val 7500"/>
             </a:avLst>
           </a:prstGeom>
           <a:solidFill>
@@ -9403,14 +9406,14 @@
       </p:sp>
       <p:sp>
         <p:nvSpPr>
-          <p:cNvPr id="11" name="Text 9"/>
+          <p:cNvPr id="21" name="Text 19"/>
           <p:cNvSpPr txBox="1"/>
           <p:nvPr/>
         </p:nvSpPr>
         <p:spPr>
           <a:xfrm>
-            <a:off x="5303520" y="2834640"/>
-            <a:ext cx="1920240" cy="914400"/>
+            <a:off x="3619424" y="3200400"/>
+            <a:ext cx="2110664" cy="1097280"/>
           </a:xfrm>
           <a:prstGeom prst="rect">
             <a:avLst/>
@@ -9419,7 +9422,7 @@
           <a:ln/>
         </p:spPr>
         <p:txBody>
-          <a:bodyPr wrap="square" lIns="0" tIns="0" rIns="0" bIns="0" rtlCol="0" anchor="ctr"/>
+          <a:bodyPr wrap="square" lIns="0" tIns="0" rIns="0" bIns="0" rtlCol="0" anchor="t"/>
           <a:lstStyle/>
           <a:p>
             <a:pPr indent="0" marL="0">
@@ -9429,7 +9432,7 @@
               <a:buNone/>
             </a:pPr>
             <a:r>
-              <a:rPr lang="en-US" sz="1300" spc="150" kern="0" dirty="0">
+              <a:rPr lang="en-US" sz="1200" spc="150" kern="0" dirty="0">
                 <a:solidFill>
                   <a:schemeClr val="tx1"/>
                 </a:solidFill>
@@ -9437,32 +9440,10 @@
                 <a:ea typeface="Raleway SemiBold" pitchFamily="34" charset="-122"/>
                 <a:cs typeface="Raleway SemiBold" pitchFamily="34" charset="-120"/>
               </a:rPr>
-              <a:t>THE EXPERIENCE</a:t>
-            </a:r>
-            <a:endParaRPr lang="en-US" sz="1300" dirty="0"/>
-          </a:p>
-        </p:txBody>
-      </p:sp>
-      <p:sp>
-        <p:nvSpPr>
-          <p:cNvPr id="12" name="Text 10"/>
-          <p:cNvSpPr txBox="1"/>
-          <p:nvPr/>
-        </p:nvSpPr>
-        <p:spPr>
-          <a:xfrm>
-            <a:off x="7315200" y="2834640"/>
-            <a:ext cx="4053535" cy="914400"/>
-          </a:xfrm>
-          <a:prstGeom prst="rect">
-            <a:avLst/>
-          </a:prstGeom>
-          <a:noFill/>
-          <a:ln/>
-        </p:spPr>
-        <p:txBody>
-          <a:bodyPr wrap="square" lIns="0" tIns="0" rIns="0" bIns="0" rtlCol="0" anchor="ctr"/>
-          <a:lstStyle/>
+              <a:t>OPTIONAL QUESTIONS</a:t>
+            </a:r>
+            <a:endParaRPr lang="en-US" sz="1500" dirty="0"/>
+          </a:p>
           <a:p>
             <a:pPr indent="0" marL="0">
               <a:spcAft>
@@ -9471,31 +9452,48 @@
               <a:buNone/>
             </a:pPr>
             <a:r>
-              <a:rPr lang="en-US" sz="1400" dirty="0">
-                <a:solidFill>
-                  <a:schemeClr val="tx1"/>
-                </a:solidFill>
-              </a:rPr>
-              <a:t>Short hosted conversations, tasting prompts and playful challenges. Demonstrations, never a hard sell.</a:t>
-            </a:r>
-            <a:endParaRPr lang="en-US" sz="1400" dirty="0"/>
-          </a:p>
-        </p:txBody>
-      </p:sp>
-      <p:sp>
-        <p:nvSpPr>
-          <p:cNvPr id="13" name="Table: THE CONNECTION"/>
+              <a:rPr lang="en-US" sz="600" dirty="0">
+                <a:solidFill>
+                  <a:schemeClr val="tx1"/>
+                </a:solidFill>
+              </a:rPr>
+              <a:t> </a:t>
+            </a:r>
+            <a:endParaRPr lang="en-US" sz="1500" dirty="0"/>
+          </a:p>
+          <a:p>
+            <a:pPr indent="0" marL="0">
+              <a:spcAft>
+                <a:spcPts val="400"/>
+              </a:spcAft>
+              <a:buNone/>
+            </a:pPr>
+            <a:r>
+              <a:rPr lang="en-US" sz="1500" dirty="0">
+                <a:solidFill>
+                  <a:schemeClr val="tx1"/>
+                </a:solidFill>
+              </a:rPr>
+              <a:t>Visitors answer as much or as little as they like.</a:t>
+            </a:r>
+            <a:endParaRPr lang="en-US" sz="1500" dirty="0"/>
+          </a:p>
+        </p:txBody>
+      </p:sp>
+      <p:sp>
+        <p:nvSpPr>
+          <p:cNvPr id="22" name="Card: NO COMPULSORY TASTING"/>
           <p:cNvSpPr/>
           <p:nvPr/>
         </p:nvSpPr>
         <p:spPr>
           <a:xfrm>
-            <a:off x="5029200" y="3886200"/>
-            <a:ext cx="6613855" cy="914400"/>
+            <a:off x="6233008" y="2971800"/>
+            <a:ext cx="2567864" cy="1463040"/>
           </a:xfrm>
           <a:prstGeom prst="roundRect">
             <a:avLst>
-              <a:gd name="adj" fmla="val 12000"/>
+              <a:gd name="adj" fmla="val 7500"/>
             </a:avLst>
           </a:prstGeom>
           <a:solidFill>
@@ -9518,14 +9516,14 @@
       </p:sp>
       <p:sp>
         <p:nvSpPr>
-          <p:cNvPr id="14" name="Text 12"/>
+          <p:cNvPr id="23" name="Text 21"/>
           <p:cNvSpPr txBox="1"/>
           <p:nvPr/>
         </p:nvSpPr>
         <p:spPr>
           <a:xfrm>
-            <a:off x="5303520" y="3886200"/>
-            <a:ext cx="1920240" cy="914400"/>
+            <a:off x="6461608" y="3200400"/>
+            <a:ext cx="2110664" cy="1097280"/>
           </a:xfrm>
           <a:prstGeom prst="rect">
             <a:avLst/>
@@ -9534,7 +9532,7 @@
           <a:ln/>
         </p:spPr>
         <p:txBody>
-          <a:bodyPr wrap="square" lIns="0" tIns="0" rIns="0" bIns="0" rtlCol="0" anchor="ctr"/>
+          <a:bodyPr wrap="square" lIns="0" tIns="0" rIns="0" bIns="0" rtlCol="0" anchor="t"/>
           <a:lstStyle/>
           <a:p>
             <a:pPr indent="0" marL="0">
@@ -9544,7 +9542,7 @@
               <a:buNone/>
             </a:pPr>
             <a:r>
-              <a:rPr lang="en-US" sz="1300" spc="150" kern="0" dirty="0">
+              <a:rPr lang="en-US" sz="1200" spc="150" kern="0" dirty="0">
                 <a:solidFill>
                   <a:schemeClr val="tx1"/>
                 </a:solidFill>
@@ -9552,32 +9550,10 @@
                 <a:ea typeface="Raleway SemiBold" pitchFamily="34" charset="-122"/>
                 <a:cs typeface="Raleway SemiBold" pitchFamily="34" charset="-120"/>
               </a:rPr>
-              <a:t>THE CONNECTION</a:t>
-            </a:r>
-            <a:endParaRPr lang="en-US" sz="1300" dirty="0"/>
-          </a:p>
-        </p:txBody>
-      </p:sp>
-      <p:sp>
-        <p:nvSpPr>
-          <p:cNvPr id="15" name="Text 13"/>
-          <p:cNvSpPr txBox="1"/>
-          <p:nvPr/>
-        </p:nvSpPr>
-        <p:spPr>
-          <a:xfrm>
-            <a:off x="7315200" y="3886200"/>
-            <a:ext cx="4053535" cy="914400"/>
-          </a:xfrm>
-          <a:prstGeom prst="rect">
-            <a:avLst/>
-          </a:prstGeom>
-          <a:noFill/>
-          <a:ln/>
-        </p:spPr>
-        <p:txBody>
-          <a:bodyPr wrap="square" lIns="0" tIns="0" rIns="0" bIns="0" rtlCol="0" anchor="ctr"/>
-          <a:lstStyle/>
+              <a:t>NO COMPULSORY TASTING</a:t>
+            </a:r>
+            <a:endParaRPr lang="en-US" sz="1500" dirty="0"/>
+          </a:p>
           <a:p>
             <a:pPr indent="0" marL="0">
               <a:spcAft>
@@ -9586,49 +9562,97 @@
               <a:buNone/>
             </a:pPr>
             <a:r>
-              <a:rPr lang="en-US" sz="1400" dirty="0">
-                <a:solidFill>
-                  <a:schemeClr val="tx1"/>
-                </a:solidFill>
-              </a:rPr>
-              <a:t>Optional event-screen moments and content. Being there in person supports the visitor experience on the phone.</a:t>
-            </a:r>
-            <a:endParaRPr lang="en-US" sz="1400" dirty="0"/>
-          </a:p>
-        </p:txBody>
-      </p:sp>
-      <p:sp>
-        <p:nvSpPr>
-          <p:cNvPr id="16" name="FLAG — delete before sharing"/>
-          <p:cNvSpPr txBox="1"/>
-          <p:nvPr/>
-        </p:nvSpPr>
-        <p:spPr>
-          <a:xfrm>
-            <a:off x="5029200" y="4983480"/>
-            <a:ext cx="6613855" cy="731520"/>
-          </a:xfrm>
-          <a:prstGeom prst="rect">
-            <a:avLst/>
+              <a:rPr lang="en-US" sz="600" dirty="0">
+                <a:solidFill>
+                  <a:schemeClr val="tx1"/>
+                </a:solidFill>
+              </a:rPr>
+              <a:t> </a:t>
+            </a:r>
+            <a:endParaRPr lang="en-US" sz="1500" dirty="0"/>
+          </a:p>
+          <a:p>
+            <a:pPr indent="0" marL="0">
+              <a:spcAft>
+                <a:spcPts val="400"/>
+              </a:spcAft>
+              <a:buNone/>
+            </a:pPr>
+            <a:r>
+              <a:rPr lang="en-US" sz="1500" dirty="0">
+                <a:solidFill>
+                  <a:schemeClr val="tx1"/>
+                </a:solidFill>
+              </a:rPr>
+              <a:t>Tasting is always optional.</a:t>
+            </a:r>
+            <a:endParaRPr lang="en-US" sz="1500" dirty="0"/>
+          </a:p>
+        </p:txBody>
+      </p:sp>
+      <p:sp>
+        <p:nvSpPr>
+          <p:cNvPr id="24" name="Card: SET UP FOR YOUR EVENT"/>
+          <p:cNvSpPr/>
+          <p:nvPr/>
+        </p:nvSpPr>
+        <p:spPr>
+          <a:xfrm>
+            <a:off x="9075191" y="2971800"/>
+            <a:ext cx="2567864" cy="1463040"/>
+          </a:xfrm>
+          <a:prstGeom prst="roundRect">
+            <a:avLst>
+              <a:gd name="adj" fmla="val 7500"/>
+            </a:avLst>
           </a:prstGeom>
           <a:solidFill>
             <a:schemeClr val="bg1"/>
           </a:solidFill>
-          <a:ln w="25400">
+          <a:ln w="12700">
             <a:solidFill>
-              <a:schemeClr val="accent4"/>
+              <a:schemeClr val="bg1"/>
             </a:solidFill>
+            <a:prstDash val="solid"/>
           </a:ln>
-        </p:spPr>
-        <p:txBody>
-          <a:bodyPr wrap="square" lIns="38100" tIns="76200" rIns="76200" bIns="38100" rtlCol="0" anchor="ctr"/>
-          <a:lstStyle/>
-          <a:p>
-            <a:pPr indent="0" marL="0">
-              <a:buNone/>
-            </a:pPr>
-            <a:r>
-              <a:rPr lang="en-US" sz="1000" dirty="0">
+          <a:effectLst>
+            <a:outerShdw sx="100000" sy="100000" kx="0" ky="0" algn="bl" rotWithShape="0" blurRad="76200" dist="25400" dir="5400000">
+              <a:srgbClr val="565A32">
+                <a:alpha val="12000"/>
+              </a:srgbClr>
+            </a:outerShdw>
+          </a:effectLst>
+        </p:spPr>
+      </p:sp>
+      <p:sp>
+        <p:nvSpPr>
+          <p:cNvPr id="25" name="Text 23"/>
+          <p:cNvSpPr txBox="1"/>
+          <p:nvPr/>
+        </p:nvSpPr>
+        <p:spPr>
+          <a:xfrm>
+            <a:off x="9303791" y="3200400"/>
+            <a:ext cx="2110664" cy="1097280"/>
+          </a:xfrm>
+          <a:prstGeom prst="rect">
+            <a:avLst/>
+          </a:prstGeom>
+          <a:noFill/>
+          <a:ln/>
+        </p:spPr>
+        <p:txBody>
+          <a:bodyPr wrap="square" lIns="0" tIns="0" rIns="0" bIns="0" rtlCol="0" anchor="t"/>
+          <a:lstStyle/>
+          <a:p>
+            <a:pPr indent="0" marL="0">
+              <a:spcAft>
+                <a:spcPts val="400"/>
+              </a:spcAft>
+              <a:buNone/>
+            </a:pPr>
+            <a:r>
+              <a:rPr lang="en-US" sz="1200" spc="150" kern="0" dirty="0">
                 <a:solidFill>
                   <a:schemeClr val="tx1"/>
                 </a:solidFill>
@@ -9636,20 +9660,112 @@
                 <a:ea typeface="Raleway SemiBold" pitchFamily="34" charset="-122"/>
                 <a:cs typeface="Raleway SemiBold" pitchFamily="34" charset="-120"/>
               </a:rPr>
-              <a:t>TO DECIDE  </a:t>
-            </a:r>
-            <a:pPr indent="0" marL="0">
-              <a:buNone/>
-            </a:pPr>
-            <a:r>
-              <a:rPr lang="en-US" sz="1000" dirty="0">
-                <a:solidFill>
-                  <a:schemeClr val="tx1"/>
-                </a:solidFill>
-              </a:rPr>
-              <a:t>'Staffing, furniture, transport, setup and operational support must be covered by the agreed event fee.' Suggest this goes in the proposal, not the pack.</a:t>
-            </a:r>
-            <a:endParaRPr lang="en-US" sz="1000" dirty="0"/>
+              <a:t>SET UP FOR YOUR EVENT</a:t>
+            </a:r>
+            <a:endParaRPr lang="en-US" sz="1500" dirty="0"/>
+          </a:p>
+          <a:p>
+            <a:pPr indent="0" marL="0">
+              <a:spcAft>
+                <a:spcPts val="400"/>
+              </a:spcAft>
+              <a:buNone/>
+            </a:pPr>
+            <a:r>
+              <a:rPr lang="en-US" sz="600" dirty="0">
+                <a:solidFill>
+                  <a:schemeClr val="tx1"/>
+                </a:solidFill>
+              </a:rPr>
+              <a:t> </a:t>
+            </a:r>
+            <a:endParaRPr lang="en-US" sz="1500" dirty="0"/>
+          </a:p>
+          <a:p>
+            <a:pPr indent="0" marL="0">
+              <a:spcAft>
+                <a:spcPts val="400"/>
+              </a:spcAft>
+              <a:buNone/>
+            </a:pPr>
+            <a:r>
+              <a:rPr lang="en-US" sz="1500" dirty="0">
+                <a:solidFill>
+                  <a:schemeClr val="tx1"/>
+                </a:solidFill>
+              </a:rPr>
+              <a:t>Tailored to how your day runs.</a:t>
+            </a:r>
+            <a:endParaRPr lang="en-US" sz="1500" dirty="0"/>
+          </a:p>
+        </p:txBody>
+      </p:sp>
+      <p:sp>
+        <p:nvSpPr>
+          <p:cNvPr id="26" name="Image placeholder"/>
+          <p:cNvSpPr/>
+          <p:nvPr/>
+        </p:nvSpPr>
+        <p:spPr>
+          <a:xfrm>
+            <a:off x="548640" y="4663440"/>
+            <a:ext cx="11094415" cy="1280160"/>
+          </a:xfrm>
+          <a:prstGeom prst="roundRect">
+            <a:avLst>
+              <a:gd name="adj" fmla="val 8571"/>
+            </a:avLst>
+          </a:prstGeom>
+          <a:solidFill>
+            <a:schemeClr val="accent3"/>
+          </a:solidFill>
+          <a:ln w="12700">
+            <a:solidFill>
+              <a:schemeClr val="tx1"/>
+            </a:solidFill>
+            <a:prstDash val="dash"/>
+          </a:ln>
+        </p:spPr>
+      </p:sp>
+      <p:sp>
+        <p:nvSpPr>
+          <p:cNvPr id="27" name="Text 25"/>
+          <p:cNvSpPr txBox="1"/>
+          <p:nvPr/>
+        </p:nvSpPr>
+        <p:spPr>
+          <a:xfrm>
+            <a:off x="822960" y="4663440"/>
+            <a:ext cx="10545775" cy="1280160"/>
+          </a:xfrm>
+          <a:prstGeom prst="rect">
+            <a:avLst/>
+          </a:prstGeom>
+          <a:noFill/>
+          <a:ln/>
+        </p:spPr>
+        <p:txBody>
+          <a:bodyPr wrap="square" lIns="0" tIns="0" rIns="0" bIns="0" rtlCol="0" anchor="ctr"/>
+          <a:lstStyle/>
+          <a:p>
+            <a:pPr algn="ctr" indent="0" marL="0">
+              <a:spcAft>
+                <a:spcPts val="400"/>
+              </a:spcAft>
+              <a:buNone/>
+            </a:pPr>
+            <a:r>
+              <a:rPr lang="en-US" sz="1400" dirty="0">
+                <a:solidFill>
+                  <a:schemeClr val="tx1"/>
+                </a:solidFill>
+                <a:latin typeface="Raleway SemiBold" pitchFamily="34" charset="0"/>
+                <a:ea typeface="Raleway SemiBold" pitchFamily="34" charset="-122"/>
+                <a:cs typeface="Raleway SemiBold" pitchFamily="34" charset="-120"/>
+              </a:rPr>
+              <a:t>Visitor screens — to add</a:t>
+            </a:r>
+            <a:endParaRPr lang="en-US" sz="1400" dirty="0"/>
           </a:p>
         </p:txBody>
       </p:sp>
@@ -9761,7 +9877,7 @@
                 <a:ea typeface="Raleway Light" pitchFamily="34" charset="-122"/>
                 <a:cs typeface="Raleway Light" pitchFamily="34" charset="-120"/>
               </a:rPr>
-              <a:t>The organiser's opportunity</a:t>
+              <a:t>The insight you receive</a:t>
             </a:r>
             <a:endParaRPr lang="en-US" sz="3600" dirty="0"/>
           </a:p>
@@ -9802,7 +9918,7 @@
                 <a:ea typeface="Raleway Light" pitchFamily="34" charset="-122"/>
                 <a:cs typeface="Raleway Light" pitchFamily="34" charset="-120"/>
               </a:rPr>
-              <a:t>Experiences, relationships and understanding.</a:t>
+              <a:t>Three layers, all built on consent.</a:t>
             </a:r>
             <a:endParaRPr lang="en-US" sz="1800" dirty="0"/>
           </a:p>
@@ -9853,18 +9969,18 @@
       </p:sp>
       <p:sp>
         <p:nvSpPr>
-          <p:cNvPr id="5" name="Card: RICHER EXPERIENCES"/>
+          <p:cNvPr id="5" name="Layer: Your event"/>
           <p:cNvSpPr/>
           <p:nvPr/>
         </p:nvSpPr>
         <p:spPr>
           <a:xfrm>
             <a:off x="548640" y="1783080"/>
-            <a:ext cx="3515258" cy="2331720"/>
+            <a:ext cx="11094415" cy="960120"/>
           </a:xfrm>
           <a:prstGeom prst="roundRect">
             <a:avLst>
-              <a:gd name="adj" fmla="val 4706"/>
+              <a:gd name="adj" fmla="val 11429"/>
             </a:avLst>
           </a:prstGeom>
           <a:solidFill>
@@ -9893,38 +10009,59 @@
         </p:nvSpPr>
         <p:spPr>
           <a:xfrm>
-            <a:off x="777240" y="2011680"/>
-            <a:ext cx="3058058" cy="1965960"/>
-          </a:xfrm>
-          <a:prstGeom prst="rect">
-            <a:avLst/>
-          </a:prstGeom>
-          <a:noFill/>
+            <a:off x="822960" y="1965960"/>
+            <a:ext cx="594360" cy="594360"/>
+          </a:xfrm>
+          <a:prstGeom prst="ellipse">
+            <a:avLst/>
+          </a:prstGeom>
+          <a:solidFill>
+            <a:schemeClr val="tx1"/>
+          </a:solidFill>
           <a:ln/>
         </p:spPr>
         <p:txBody>
-          <a:bodyPr wrap="square" lIns="0" tIns="0" rIns="0" bIns="0" rtlCol="0" anchor="t"/>
-          <a:lstStyle/>
-          <a:p>
-            <a:pPr indent="0" marL="0">
-              <a:spcAft>
-                <a:spcPts val="400"/>
-              </a:spcAft>
-              <a:buNone/>
-            </a:pPr>
-            <a:r>
-              <a:rPr lang="en-US" sz="1200" spc="150" kern="0" dirty="0">
-                <a:solidFill>
-                  <a:schemeClr val="tx1"/>
+          <a:bodyPr wrap="square" lIns="0" tIns="0" rIns="0" bIns="0" rtlCol="0" anchor="ctr"/>
+          <a:lstStyle/>
+          <a:p>
+            <a:pPr algn="ctr" indent="0" marL="0">
+              <a:buNone/>
+            </a:pPr>
+            <a:r>
+              <a:rPr lang="en-US" sz="1600" dirty="0">
+                <a:solidFill>
+                  <a:schemeClr val="bg2"/>
                 </a:solidFill>
                 <a:latin typeface="Raleway SemiBold" pitchFamily="34" charset="0"/>
                 <a:ea typeface="Raleway SemiBold" pitchFamily="34" charset="-122"/>
                 <a:cs typeface="Raleway SemiBold" pitchFamily="34" charset="-120"/>
               </a:rPr>
-              <a:t>RICHER EXPERIENCES</a:t>
-            </a:r>
-            <a:endParaRPr lang="en-US" sz="1500" dirty="0"/>
-          </a:p>
+              <a:t>1</a:t>
+            </a:r>
+            <a:endParaRPr lang="en-US" sz="1600" dirty="0"/>
+          </a:p>
+        </p:txBody>
+      </p:sp>
+      <p:sp>
+        <p:nvSpPr>
+          <p:cNvPr id="7" name="Text 5"/>
+          <p:cNvSpPr txBox="1"/>
+          <p:nvPr/>
+        </p:nvSpPr>
+        <p:spPr>
+          <a:xfrm>
+            <a:off x="1691640" y="1783080"/>
+            <a:ext cx="2651760" cy="960120"/>
+          </a:xfrm>
+          <a:prstGeom prst="rect">
+            <a:avLst/>
+          </a:prstGeom>
+          <a:noFill/>
+          <a:ln/>
+        </p:spPr>
+        <p:txBody>
+          <a:bodyPr wrap="square" lIns="0" tIns="0" rIns="0" bIns="0" rtlCol="0" anchor="ctr"/>
+          <a:lstStyle/>
           <a:p>
             <a:pPr indent="0" marL="0">
               <a:spcAft>
@@ -9933,15 +10070,40 @@
               <a:buNone/>
             </a:pPr>
             <a:r>
-              <a:rPr lang="en-US" sz="600" dirty="0">
-                <a:solidFill>
-                  <a:schemeClr val="tx1"/>
-                </a:solidFill>
-              </a:rPr>
-              <a:t> </a:t>
-            </a:r>
-            <a:endParaRPr lang="en-US" sz="1500" dirty="0"/>
-          </a:p>
+              <a:rPr lang="en-US" sz="1600" dirty="0">
+                <a:solidFill>
+                  <a:schemeClr val="tx1"/>
+                </a:solidFill>
+                <a:latin typeface="Raleway SemiBold" pitchFamily="34" charset="0"/>
+                <a:ea typeface="Raleway SemiBold" pitchFamily="34" charset="-122"/>
+                <a:cs typeface="Raleway SemiBold" pitchFamily="34" charset="-120"/>
+              </a:rPr>
+              <a:t>Your event</a:t>
+            </a:r>
+            <a:endParaRPr lang="en-US" sz="1600" dirty="0"/>
+          </a:p>
+        </p:txBody>
+      </p:sp>
+      <p:sp>
+        <p:nvSpPr>
+          <p:cNvPr id="8" name="Text 6"/>
+          <p:cNvSpPr txBox="1"/>
+          <p:nvPr/>
+        </p:nvSpPr>
+        <p:spPr>
+          <a:xfrm>
+            <a:off x="4389120" y="1783080"/>
+            <a:ext cx="6979615" cy="960120"/>
+          </a:xfrm>
+          <a:prstGeom prst="rect">
+            <a:avLst/>
+          </a:prstGeom>
+          <a:noFill/>
+          <a:ln/>
+        </p:spPr>
+        <p:txBody>
+          <a:bodyPr wrap="square" lIns="0" tIns="0" rIns="0" bIns="0" rtlCol="0" anchor="ctr"/>
+          <a:lstStyle/>
           <a:p>
             <a:pPr indent="0" marL="0">
               <a:spcAft>
@@ -9950,31 +10112,31 @@
               <a:buNone/>
             </a:pPr>
             <a:r>
-              <a:rPr lang="en-US" sz="1500" dirty="0">
-                <a:solidFill>
-                  <a:schemeClr val="tx1"/>
-                </a:solidFill>
-              </a:rPr>
-              <a:t>Visitors take part, learn and remember. Producer videos and stories gain a useful home.</a:t>
-            </a:r>
-            <a:endParaRPr lang="en-US" sz="1500" dirty="0"/>
-          </a:p>
-        </p:txBody>
-      </p:sp>
-      <p:sp>
-        <p:nvSpPr>
-          <p:cNvPr id="7" name="Card: CLOSER RELATIONSHIPS"/>
+              <a:rPr lang="en-US" sz="1600" dirty="0">
+                <a:solidFill>
+                  <a:schemeClr val="tx1"/>
+                </a:solidFill>
+              </a:rPr>
+              <a:t>Combined discoveries, favourites, crown patterns, poll and tasting responses, and how visitors used your content.</a:t>
+            </a:r>
+            <a:endParaRPr lang="en-US" sz="1600" dirty="0"/>
+          </a:p>
+        </p:txBody>
+      </p:sp>
+      <p:sp>
+        <p:nvSpPr>
+          <p:cNvPr id="9" name="Layer: Your new contacts"/>
           <p:cNvSpPr/>
           <p:nvPr/>
         </p:nvSpPr>
         <p:spPr>
           <a:xfrm>
-            <a:off x="4338218" y="1783080"/>
-            <a:ext cx="3515258" cy="2331720"/>
+            <a:off x="548640" y="2880360"/>
+            <a:ext cx="11094415" cy="960120"/>
           </a:xfrm>
           <a:prstGeom prst="roundRect">
             <a:avLst>
-              <a:gd name="adj" fmla="val 4706"/>
+              <a:gd name="adj" fmla="val 11429"/>
             </a:avLst>
           </a:prstGeom>
           <a:solidFill>
@@ -9997,44 +10159,65 @@
       </p:sp>
       <p:sp>
         <p:nvSpPr>
-          <p:cNvPr id="8" name="Text 6"/>
+          <p:cNvPr id="10" name="Text 8"/>
           <p:cNvSpPr txBox="1"/>
           <p:nvPr/>
         </p:nvSpPr>
         <p:spPr>
           <a:xfrm>
-            <a:off x="4566818" y="2011680"/>
-            <a:ext cx="3058058" cy="1965960"/>
-          </a:xfrm>
-          <a:prstGeom prst="rect">
-            <a:avLst/>
-          </a:prstGeom>
-          <a:noFill/>
+            <a:off x="822960" y="3063240"/>
+            <a:ext cx="594360" cy="594360"/>
+          </a:xfrm>
+          <a:prstGeom prst="ellipse">
+            <a:avLst/>
+          </a:prstGeom>
+          <a:solidFill>
+            <a:schemeClr val="tx1"/>
+          </a:solidFill>
           <a:ln/>
         </p:spPr>
         <p:txBody>
-          <a:bodyPr wrap="square" lIns="0" tIns="0" rIns="0" bIns="0" rtlCol="0" anchor="t"/>
-          <a:lstStyle/>
-          <a:p>
-            <a:pPr indent="0" marL="0">
-              <a:spcAft>
-                <a:spcPts val="400"/>
-              </a:spcAft>
-              <a:buNone/>
-            </a:pPr>
-            <a:r>
-              <a:rPr lang="en-US" sz="1200" spc="150" kern="0" dirty="0">
-                <a:solidFill>
-                  <a:schemeClr val="tx1"/>
+          <a:bodyPr wrap="square" lIns="0" tIns="0" rIns="0" bIns="0" rtlCol="0" anchor="ctr"/>
+          <a:lstStyle/>
+          <a:p>
+            <a:pPr algn="ctr" indent="0" marL="0">
+              <a:buNone/>
+            </a:pPr>
+            <a:r>
+              <a:rPr lang="en-US" sz="1600" dirty="0">
+                <a:solidFill>
+                  <a:schemeClr val="bg2"/>
                 </a:solidFill>
                 <a:latin typeface="Raleway SemiBold" pitchFamily="34" charset="0"/>
                 <a:ea typeface="Raleway SemiBold" pitchFamily="34" charset="-122"/>
                 <a:cs typeface="Raleway SemiBold" pitchFamily="34" charset="-120"/>
               </a:rPr>
-              <a:t>CLOSER RELATIONSHIPS</a:t>
-            </a:r>
-            <a:endParaRPr lang="en-US" sz="1500" dirty="0"/>
-          </a:p>
+              <a:t>2</a:t>
+            </a:r>
+            <a:endParaRPr lang="en-US" sz="1600" dirty="0"/>
+          </a:p>
+        </p:txBody>
+      </p:sp>
+      <p:sp>
+        <p:nvSpPr>
+          <p:cNvPr id="11" name="Text 9"/>
+          <p:cNvSpPr txBox="1"/>
+          <p:nvPr/>
+        </p:nvSpPr>
+        <p:spPr>
+          <a:xfrm>
+            <a:off x="1691640" y="2880360"/>
+            <a:ext cx="2651760" cy="960120"/>
+          </a:xfrm>
+          <a:prstGeom prst="rect">
+            <a:avLst/>
+          </a:prstGeom>
+          <a:noFill/>
+          <a:ln/>
+        </p:spPr>
+        <p:txBody>
+          <a:bodyPr wrap="square" lIns="0" tIns="0" rIns="0" bIns="0" rtlCol="0" anchor="ctr"/>
+          <a:lstStyle/>
           <a:p>
             <a:pPr indent="0" marL="0">
               <a:spcAft>
@@ -10043,15 +10226,40 @@
               <a:buNone/>
             </a:pPr>
             <a:r>
-              <a:rPr lang="en-US" sz="600" dirty="0">
-                <a:solidFill>
-                  <a:schemeClr val="tx1"/>
-                </a:solidFill>
-              </a:rPr>
-              <a:t> </a:t>
-            </a:r>
-            <a:endParaRPr lang="en-US" sz="1500" dirty="0"/>
-          </a:p>
+              <a:rPr lang="en-US" sz="1600" dirty="0">
+                <a:solidFill>
+                  <a:schemeClr val="tx1"/>
+                </a:solidFill>
+                <a:latin typeface="Raleway SemiBold" pitchFamily="34" charset="0"/>
+                <a:ea typeface="Raleway SemiBold" pitchFamily="34" charset="-122"/>
+                <a:cs typeface="Raleway SemiBold" pitchFamily="34" charset="-120"/>
+              </a:rPr>
+              <a:t>Your new contacts</a:t>
+            </a:r>
+            <a:endParaRPr lang="en-US" sz="1600" dirty="0"/>
+          </a:p>
+        </p:txBody>
+      </p:sp>
+      <p:sp>
+        <p:nvSpPr>
+          <p:cNvPr id="12" name="Text 10"/>
+          <p:cNvSpPr txBox="1"/>
+          <p:nvPr/>
+        </p:nvSpPr>
+        <p:spPr>
+          <a:xfrm>
+            <a:off x="4389120" y="2880360"/>
+            <a:ext cx="6979615" cy="960120"/>
+          </a:xfrm>
+          <a:prstGeom prst="rect">
+            <a:avLst/>
+          </a:prstGeom>
+          <a:noFill/>
+          <a:ln/>
+        </p:spPr>
+        <p:txBody>
+          <a:bodyPr wrap="square" lIns="0" tIns="0" rIns="0" bIns="0" rtlCol="0" anchor="ctr"/>
+          <a:lstStyle/>
           <a:p>
             <a:pPr indent="0" marL="0">
               <a:spcAft>
@@ -10060,31 +10268,31 @@
               <a:buNone/>
             </a:pPr>
             <a:r>
-              <a:rPr lang="en-US" sz="1500" dirty="0">
-                <a:solidFill>
-                  <a:schemeClr val="tx1"/>
-                </a:solidFill>
-              </a:rPr>
-              <a:t>One person may buy eight tickets. Taking part individually can help you reach the other attendees, only with their clear permission.</a:t>
-            </a:r>
-            <a:endParaRPr lang="en-US" sz="1500" dirty="0"/>
-          </a:p>
-        </p:txBody>
-      </p:sp>
-      <p:sp>
-        <p:nvSpPr>
-          <p:cNvPr id="9" name="Card: WHAT VISITORS THINK"/>
+              <a:rPr lang="en-US" sz="1600" dirty="0">
+                <a:solidFill>
+                  <a:schemeClr val="tx1"/>
+                </a:solidFill>
+              </a:rPr>
+              <a:t>Individual visitors who choose to hear from you, and only them.</a:t>
+            </a:r>
+            <a:endParaRPr lang="en-US" sz="1600" dirty="0"/>
+          </a:p>
+        </p:txBody>
+      </p:sp>
+      <p:sp>
+        <p:nvSpPr>
+          <p:cNvPr id="13" name="Layer: Wider trends"/>
           <p:cNvSpPr/>
           <p:nvPr/>
         </p:nvSpPr>
         <p:spPr>
           <a:xfrm>
-            <a:off x="8127797" y="1783080"/>
-            <a:ext cx="3515258" cy="2331720"/>
+            <a:off x="548640" y="3977640"/>
+            <a:ext cx="11094415" cy="960120"/>
           </a:xfrm>
           <a:prstGeom prst="roundRect">
             <a:avLst>
-              <a:gd name="adj" fmla="val 4706"/>
+              <a:gd name="adj" fmla="val 11429"/>
             </a:avLst>
           </a:prstGeom>
           <a:solidFill>
@@ -10107,44 +10315,65 @@
       </p:sp>
       <p:sp>
         <p:nvSpPr>
-          <p:cNvPr id="10" name="Text 8"/>
+          <p:cNvPr id="14" name="Text 12"/>
           <p:cNvSpPr txBox="1"/>
           <p:nvPr/>
         </p:nvSpPr>
         <p:spPr>
           <a:xfrm>
-            <a:off x="8356397" y="2011680"/>
-            <a:ext cx="3058058" cy="1965960"/>
-          </a:xfrm>
-          <a:prstGeom prst="rect">
-            <a:avLst/>
-          </a:prstGeom>
-          <a:noFill/>
+            <a:off x="822960" y="4160520"/>
+            <a:ext cx="594360" cy="594360"/>
+          </a:xfrm>
+          <a:prstGeom prst="ellipse">
+            <a:avLst/>
+          </a:prstGeom>
+          <a:solidFill>
+            <a:schemeClr val="tx1"/>
+          </a:solidFill>
           <a:ln/>
         </p:spPr>
         <p:txBody>
-          <a:bodyPr wrap="square" lIns="0" tIns="0" rIns="0" bIns="0" rtlCol="0" anchor="t"/>
-          <a:lstStyle/>
-          <a:p>
-            <a:pPr indent="0" marL="0">
-              <a:spcAft>
-                <a:spcPts val="400"/>
-              </a:spcAft>
-              <a:buNone/>
-            </a:pPr>
-            <a:r>
-              <a:rPr lang="en-US" sz="1200" spc="150" kern="0" dirty="0">
-                <a:solidFill>
-                  <a:schemeClr val="tx1"/>
+          <a:bodyPr wrap="square" lIns="0" tIns="0" rIns="0" bIns="0" rtlCol="0" anchor="ctr"/>
+          <a:lstStyle/>
+          <a:p>
+            <a:pPr algn="ctr" indent="0" marL="0">
+              <a:buNone/>
+            </a:pPr>
+            <a:r>
+              <a:rPr lang="en-US" sz="1600" dirty="0">
+                <a:solidFill>
+                  <a:schemeClr val="bg2"/>
                 </a:solidFill>
                 <a:latin typeface="Raleway SemiBold" pitchFamily="34" charset="0"/>
                 <a:ea typeface="Raleway SemiBold" pitchFamily="34" charset="-122"/>
                 <a:cs typeface="Raleway SemiBold" pitchFamily="34" charset="-120"/>
               </a:rPr>
-              <a:t>WHAT VISITORS THINK</a:t>
-            </a:r>
-            <a:endParaRPr lang="en-US" sz="1500" dirty="0"/>
-          </a:p>
+              <a:t>3</a:t>
+            </a:r>
+            <a:endParaRPr lang="en-US" sz="1600" dirty="0"/>
+          </a:p>
+        </p:txBody>
+      </p:sp>
+      <p:sp>
+        <p:nvSpPr>
+          <p:cNvPr id="15" name="Text 13"/>
+          <p:cNvSpPr txBox="1"/>
+          <p:nvPr/>
+        </p:nvSpPr>
+        <p:spPr>
+          <a:xfrm>
+            <a:off x="1691640" y="3977640"/>
+            <a:ext cx="2651760" cy="960120"/>
+          </a:xfrm>
+          <a:prstGeom prst="rect">
+            <a:avLst/>
+          </a:prstGeom>
+          <a:noFill/>
+          <a:ln/>
+        </p:spPr>
+        <p:txBody>
+          <a:bodyPr wrap="square" lIns="0" tIns="0" rIns="0" bIns="0" rtlCol="0" anchor="ctr"/>
+          <a:lstStyle/>
           <a:p>
             <a:pPr indent="0" marL="0">
               <a:spcAft>
@@ -10153,15 +10382,40 @@
               <a:buNone/>
             </a:pPr>
             <a:r>
-              <a:rPr lang="en-US" sz="600" dirty="0">
-                <a:solidFill>
-                  <a:schemeClr val="tx1"/>
-                </a:solidFill>
-              </a:rPr>
-              <a:t> </a:t>
-            </a:r>
-            <a:endParaRPr lang="en-US" sz="1500" dirty="0"/>
-          </a:p>
+              <a:rPr lang="en-US" sz="1600" dirty="0">
+                <a:solidFill>
+                  <a:schemeClr val="tx1"/>
+                </a:solidFill>
+                <a:latin typeface="Raleway SemiBold" pitchFamily="34" charset="0"/>
+                <a:ea typeface="Raleway SemiBold" pitchFamily="34" charset="-122"/>
+                <a:cs typeface="Raleway SemiBold" pitchFamily="34" charset="-120"/>
+              </a:rPr>
+              <a:t>Wider trends</a:t>
+            </a:r>
+            <a:endParaRPr lang="en-US" sz="1600" dirty="0"/>
+          </a:p>
+        </p:txBody>
+      </p:sp>
+      <p:sp>
+        <p:nvSpPr>
+          <p:cNvPr id="16" name="Text 14"/>
+          <p:cNvSpPr txBox="1"/>
+          <p:nvPr/>
+        </p:nvSpPr>
+        <p:spPr>
+          <a:xfrm>
+            <a:off x="4389120" y="3977640"/>
+            <a:ext cx="6979615" cy="960120"/>
+          </a:xfrm>
+          <a:prstGeom prst="rect">
+            <a:avLst/>
+          </a:prstGeom>
+          <a:noFill/>
+          <a:ln/>
+        </p:spPr>
+        <p:txBody>
+          <a:bodyPr wrap="square" lIns="0" tIns="0" rIns="0" bIns="0" rtlCol="0" anchor="ctr"/>
+          <a:lstStyle/>
           <a:p>
             <a:pPr indent="0" marL="0">
               <a:spcAft>
@@ -10170,27 +10424,27 @@
               <a:buNone/>
             </a:pPr>
             <a:r>
-              <a:rPr lang="en-US" sz="1500" dirty="0">
-                <a:solidFill>
-                  <a:schemeClr val="tx1"/>
-                </a:solidFill>
-              </a:rPr>
-              <a:t>Engagement, saved wines, crowned wines, tasting responses, content use and post-event activity.</a:t>
-            </a:r>
-            <a:endParaRPr lang="en-US" sz="1500" dirty="0"/>
-          </a:p>
-        </p:txBody>
-      </p:sp>
-      <p:sp>
-        <p:nvSpPr>
-          <p:cNvPr id="11" name="FLAG — delete before sharing"/>
+              <a:rPr lang="en-US" sz="1600" dirty="0">
+                <a:solidFill>
+                  <a:schemeClr val="tx1"/>
+                </a:solidFill>
+              </a:rPr>
+              <a:t>Carefully anonymised Entre Amis trends across events, where numbers and permissions allow.</a:t>
+            </a:r>
+            <a:endParaRPr lang="en-US" sz="1600" dirty="0"/>
+          </a:p>
+        </p:txBody>
+      </p:sp>
+      <p:sp>
+        <p:nvSpPr>
+          <p:cNvPr id="17" name="FLAG — delete before sharing"/>
           <p:cNvSpPr txBox="1"/>
           <p:nvPr/>
         </p:nvSpPr>
         <p:spPr>
           <a:xfrm>
-            <a:off x="548640" y="4389120"/>
-            <a:ext cx="3520440" cy="914400"/>
+            <a:off x="548640" y="5166360"/>
+            <a:ext cx="5410048" cy="731520"/>
           </a:xfrm>
           <a:prstGeom prst="rect">
             <a:avLst/>
@@ -10220,7 +10474,7 @@
                 <a:ea typeface="Raleway SemiBold" pitchFamily="34" charset="-122"/>
                 <a:cs typeface="Raleway SemiBold" pitchFamily="34" charset="-120"/>
               </a:rPr>
-              <a:t>CLAIM  </a:t>
+              <a:t>TO CONFIRM  </a:t>
             </a:r>
             <a:pPr indent="0" marL="0">
               <a:buNone/>
@@ -10231,7 +10485,7 @@
                   <a:schemeClr val="tx1"/>
                 </a:solidFill>
               </a:rPr>
-              <a:t>needs founder approval: 'richer experiences' (was 'enhanced experiences').</a:t>
+              <a:t>Layer 2 depends on the proposed contact rule and legal review.</a:t>
             </a:r>
             <a:endParaRPr lang="en-US" sz="1100" dirty="0"/>
           </a:p>
@@ -10239,70 +10493,14 @@
       </p:sp>
       <p:sp>
         <p:nvSpPr>
-          <p:cNvPr id="12" name="FLAG — delete before sharing"/>
+          <p:cNvPr id="18" name="FLAG — delete before sharing"/>
           <p:cNvSpPr txBox="1"/>
           <p:nvPr/>
         </p:nvSpPr>
         <p:spPr>
           <a:xfrm>
-            <a:off x="4343400" y="4389120"/>
-            <a:ext cx="3520440" cy="914400"/>
-          </a:xfrm>
-          <a:prstGeom prst="rect">
-            <a:avLst/>
-          </a:prstGeom>
-          <a:solidFill>
-            <a:schemeClr val="bg1"/>
-          </a:solidFill>
-          <a:ln w="25400">
-            <a:solidFill>
-              <a:schemeClr val="accent4"/>
-            </a:solidFill>
-          </a:ln>
-        </p:spPr>
-        <p:txBody>
-          <a:bodyPr wrap="square" lIns="38100" tIns="76200" rIns="76200" bIns="38100" rtlCol="0" anchor="ctr"/>
-          <a:lstStyle/>
-          <a:p>
-            <a:pPr indent="0" marL="0">
-              <a:buNone/>
-            </a:pPr>
-            <a:r>
-              <a:rPr lang="en-US" sz="1100" dirty="0">
-                <a:solidFill>
-                  <a:schemeClr val="tx1"/>
-                </a:solidFill>
-                <a:latin typeface="Raleway SemiBold" pitchFamily="34" charset="0"/>
-                <a:ea typeface="Raleway SemiBold" pitchFamily="34" charset="-122"/>
-                <a:cs typeface="Raleway SemiBold" pitchFamily="34" charset="-120"/>
-              </a:rPr>
-              <a:t>TO CONFIRM  </a:t>
-            </a:r>
-            <a:pPr indent="0" marL="0">
-              <a:buNone/>
-            </a:pPr>
-            <a:r>
-              <a:rPr lang="en-US" sz="1100" dirty="0">
-                <a:solidFill>
-                  <a:schemeClr val="tx1"/>
-                </a:solidFill>
-              </a:rPr>
-              <a:t>Sharing contacts with permission is proposed and needs legal review (UK GDPR).</a:t>
-            </a:r>
-            <a:endParaRPr lang="en-US" sz="1100" dirty="0"/>
-          </a:p>
-        </p:txBody>
-      </p:sp>
-      <p:sp>
-        <p:nvSpPr>
-          <p:cNvPr id="13" name="FLAG — delete before sharing"/>
-          <p:cNvSpPr txBox="1"/>
-          <p:nvPr/>
-        </p:nvSpPr>
-        <p:spPr>
-          <a:xfrm>
-            <a:off x="8138160" y="4389120"/>
-            <a:ext cx="3504895" cy="914400"/>
+            <a:off x="6233008" y="5166360"/>
+            <a:ext cx="5410048" cy="731520"/>
           </a:xfrm>
           <a:prstGeom prst="rect">
             <a:avLst/>
@@ -10457,7 +10655,7 @@
                 <a:ea typeface="Raleway Light" pitchFamily="34" charset="-122"/>
                 <a:cs typeface="Raleway Light" pitchFamily="34" charset="-120"/>
               </a:rPr>
-              <a:t>Three layers of understanding</a:t>
+              <a:t>Honest insight starts with trust</a:t>
             </a:r>
             <a:endParaRPr lang="en-US" sz="3600" dirty="0"/>
           </a:p>
@@ -10498,7 +10696,7 @@
                 <a:ea typeface="Raleway Light" pitchFamily="34" charset="-122"/>
                 <a:cs typeface="Raleway Light" pitchFamily="34" charset="-120"/>
               </a:rPr>
-              <a:t>More understanding for organisers, without turning vineyards into public competitors.</a:t>
+              <a:t>People only say what they really think when it's safe to.</a:t>
             </a:r>
             <a:endParaRPr lang="en-US" sz="1800" dirty="0"/>
           </a:p>
@@ -10549,18 +10747,18 @@
       </p:sp>
       <p:sp>
         <p:nvSpPr>
-          <p:cNvPr id="5" name="Layer: Your event"/>
+          <p:cNvPr id="5" name="Promise: Consent first"/>
           <p:cNvSpPr/>
           <p:nvPr/>
         </p:nvSpPr>
         <p:spPr>
           <a:xfrm>
             <a:off x="548640" y="1783080"/>
-            <a:ext cx="6949440" cy="896112"/>
+            <a:ext cx="7680960" cy="603504"/>
           </a:xfrm>
           <a:prstGeom prst="roundRect">
             <a:avLst>
-              <a:gd name="adj" fmla="val 12245"/>
+              <a:gd name="adj" fmla="val 18182"/>
             </a:avLst>
           </a:prstGeom>
           <a:solidFill>
@@ -10589,60 +10787,36 @@
         </p:nvSpPr>
         <p:spPr>
           <a:xfrm>
-            <a:off x="777240" y="1938528"/>
-            <a:ext cx="585216" cy="585216"/>
-          </a:xfrm>
-          <a:prstGeom prst="ellipse">
-            <a:avLst/>
-          </a:prstGeom>
-          <a:solidFill>
-            <a:schemeClr val="tx1"/>
-          </a:solidFill>
+            <a:off x="822960" y="1783080"/>
+            <a:ext cx="7223760" cy="603504"/>
+          </a:xfrm>
+          <a:prstGeom prst="rect">
+            <a:avLst/>
+          </a:prstGeom>
+          <a:noFill/>
           <a:ln/>
         </p:spPr>
         <p:txBody>
           <a:bodyPr wrap="square" lIns="0" tIns="0" rIns="0" bIns="0" rtlCol="0" anchor="ctr"/>
           <a:lstStyle/>
           <a:p>
-            <a:pPr algn="ctr" indent="0" marL="0">
-              <a:buNone/>
-            </a:pPr>
-            <a:r>
-              <a:rPr lang="en-US" sz="1600" dirty="0">
-                <a:solidFill>
-                  <a:schemeClr val="bg2"/>
+            <a:pPr indent="0" marL="0">
+              <a:spcAft>
+                <a:spcPts val="400"/>
+              </a:spcAft>
+              <a:buNone/>
+            </a:pPr>
+            <a:r>
+              <a:rPr lang="en-US" sz="1400" dirty="0">
+                <a:solidFill>
+                  <a:schemeClr val="tx1"/>
                 </a:solidFill>
                 <a:latin typeface="Raleway SemiBold" pitchFamily="34" charset="0"/>
                 <a:ea typeface="Raleway SemiBold" pitchFamily="34" charset="-122"/>
                 <a:cs typeface="Raleway SemiBold" pitchFamily="34" charset="-120"/>
               </a:rPr>
-              <a:t>1</a:t>
-            </a:r>
-            <a:endParaRPr lang="en-US" sz="1600" dirty="0"/>
-          </a:p>
-        </p:txBody>
-      </p:sp>
-      <p:sp>
-        <p:nvSpPr>
-          <p:cNvPr id="7" name="Text 5"/>
-          <p:cNvSpPr txBox="1"/>
-          <p:nvPr/>
-        </p:nvSpPr>
-        <p:spPr>
-          <a:xfrm>
-            <a:off x="1554480" y="1783080"/>
-            <a:ext cx="5760720" cy="896112"/>
-          </a:xfrm>
-          <a:prstGeom prst="rect">
-            <a:avLst/>
-          </a:prstGeom>
-          <a:noFill/>
-          <a:ln/>
-        </p:spPr>
-        <p:txBody>
-          <a:bodyPr wrap="square" lIns="0" tIns="0" rIns="0" bIns="0" rtlCol="0" anchor="ctr"/>
-          <a:lstStyle/>
-          <a:p>
+              <a:t>Consent first  </a:t>
+            </a:r>
             <a:pPr indent="0" marL="0">
               <a:spcAft>
                 <a:spcPts val="400"/>
@@ -10654,25 +10828,8 @@
                 <a:solidFill>
                   <a:schemeClr val="tx1"/>
                 </a:solidFill>
-                <a:latin typeface="Raleway SemiBold" pitchFamily="34" charset="0"/>
-                <a:ea typeface="Raleway SemiBold" pitchFamily="34" charset="-122"/>
-                <a:cs typeface="Raleway SemiBold" pitchFamily="34" charset="-120"/>
-              </a:rPr>
-              <a:t>Your event  </a:t>
-            </a:r>
-            <a:pPr indent="0" marL="0">
-              <a:spcAft>
-                <a:spcPts val="400"/>
-              </a:spcAft>
-              <a:buNone/>
-            </a:pPr>
-            <a:r>
-              <a:rPr lang="en-US" sz="1400" dirty="0">
-                <a:solidFill>
-                  <a:schemeClr val="tx1"/>
-                </a:solidFill>
-              </a:rPr>
-              <a:t>Combined discoveries, favourites, crown patterns, polls, quiz responses and content engagement.</a:t>
+              </a:rPr>
+              <a:t>Nothing is collected for your insight without clear, informed consent.</a:t>
             </a:r>
             <a:endParaRPr lang="en-US" sz="1400" dirty="0"/>
           </a:p>
@@ -10680,18 +10837,18 @@
       </p:sp>
       <p:sp>
         <p:nvSpPr>
-          <p:cNvPr id="8" name="Layer: Visitor contacts"/>
+          <p:cNvPr id="7" name="Promise: Anonymised"/>
           <p:cNvSpPr/>
           <p:nvPr/>
         </p:nvSpPr>
         <p:spPr>
           <a:xfrm>
-            <a:off x="548640" y="2807208"/>
-            <a:ext cx="6949440" cy="896112"/>
+            <a:off x="548640" y="2496312"/>
+            <a:ext cx="7680960" cy="603504"/>
           </a:xfrm>
           <a:prstGeom prst="roundRect">
             <a:avLst>
-              <a:gd name="adj" fmla="val 12245"/>
+              <a:gd name="adj" fmla="val 18182"/>
             </a:avLst>
           </a:prstGeom>
           <a:solidFill>
@@ -10714,66 +10871,42 @@
       </p:sp>
       <p:sp>
         <p:nvSpPr>
-          <p:cNvPr id="9" name="Text 7"/>
+          <p:cNvPr id="8" name="Text 6"/>
           <p:cNvSpPr txBox="1"/>
           <p:nvPr/>
         </p:nvSpPr>
         <p:spPr>
           <a:xfrm>
-            <a:off x="777240" y="2962656"/>
-            <a:ext cx="585216" cy="585216"/>
-          </a:xfrm>
-          <a:prstGeom prst="ellipse">
-            <a:avLst/>
-          </a:prstGeom>
-          <a:solidFill>
-            <a:schemeClr val="tx1"/>
-          </a:solidFill>
+            <a:off x="822960" y="2496312"/>
+            <a:ext cx="7223760" cy="603504"/>
+          </a:xfrm>
+          <a:prstGeom prst="rect">
+            <a:avLst/>
+          </a:prstGeom>
+          <a:noFill/>
           <a:ln/>
         </p:spPr>
         <p:txBody>
           <a:bodyPr wrap="square" lIns="0" tIns="0" rIns="0" bIns="0" rtlCol="0" anchor="ctr"/>
           <a:lstStyle/>
           <a:p>
-            <a:pPr algn="ctr" indent="0" marL="0">
-              <a:buNone/>
-            </a:pPr>
-            <a:r>
-              <a:rPr lang="en-US" sz="1600" dirty="0">
-                <a:solidFill>
-                  <a:schemeClr val="bg2"/>
+            <a:pPr indent="0" marL="0">
+              <a:spcAft>
+                <a:spcPts val="400"/>
+              </a:spcAft>
+              <a:buNone/>
+            </a:pPr>
+            <a:r>
+              <a:rPr lang="en-US" sz="1400" dirty="0">
+                <a:solidFill>
+                  <a:schemeClr val="tx1"/>
                 </a:solidFill>
                 <a:latin typeface="Raleway SemiBold" pitchFamily="34" charset="0"/>
                 <a:ea typeface="Raleway SemiBold" pitchFamily="34" charset="-122"/>
                 <a:cs typeface="Raleway SemiBold" pitchFamily="34" charset="-120"/>
               </a:rPr>
-              <a:t>2</a:t>
-            </a:r>
-            <a:endParaRPr lang="en-US" sz="1600" dirty="0"/>
-          </a:p>
-        </p:txBody>
-      </p:sp>
-      <p:sp>
-        <p:nvSpPr>
-          <p:cNvPr id="10" name="Text 8"/>
-          <p:cNvSpPr txBox="1"/>
-          <p:nvPr/>
-        </p:nvSpPr>
-        <p:spPr>
-          <a:xfrm>
-            <a:off x="1554480" y="2807208"/>
-            <a:ext cx="5760720" cy="896112"/>
-          </a:xfrm>
-          <a:prstGeom prst="rect">
-            <a:avLst/>
-          </a:prstGeom>
-          <a:noFill/>
-          <a:ln/>
-        </p:spPr>
-        <p:txBody>
-          <a:bodyPr wrap="square" lIns="0" tIns="0" rIns="0" bIns="0" rtlCol="0" anchor="ctr"/>
-          <a:lstStyle/>
-          <a:p>
+              <a:t>Anonymised  </a:t>
+            </a:r>
             <a:pPr indent="0" marL="0">
               <a:spcAft>
                 <a:spcPts val="400"/>
@@ -10785,25 +10918,8 @@
                 <a:solidFill>
                   <a:schemeClr val="tx1"/>
                 </a:solidFill>
-                <a:latin typeface="Raleway SemiBold" pitchFamily="34" charset="0"/>
-                <a:ea typeface="Raleway SemiBold" pitchFamily="34" charset="-122"/>
-                <a:cs typeface="Raleway SemiBold" pitchFamily="34" charset="-120"/>
-              </a:rPr>
-              <a:t>Visitor contacts  </a:t>
-            </a:r>
-            <a:pPr indent="0" marL="0">
-              <a:spcAft>
-                <a:spcPts val="400"/>
-              </a:spcAft>
-              <a:buNone/>
-            </a:pPr>
-            <a:r>
-              <a:rPr lang="en-US" sz="1400" dirty="0">
-                <a:solidFill>
-                  <a:schemeClr val="tx1"/>
-                </a:solidFill>
-              </a:rPr>
-              <a:t>New relationships with individual attendees who expressly opt in to hearing from you.</a:t>
+              </a:rPr>
+              <a:t>Opinions and tasting responses are combined and anonymised, never linked to a name.</a:t>
             </a:r>
             <a:endParaRPr lang="en-US" sz="1400" dirty="0"/>
           </a:p>
@@ -10811,18 +10927,18 @@
       </p:sp>
       <p:sp>
         <p:nvSpPr>
-          <p:cNvPr id="11" name="Layer: Wider trends"/>
+          <p:cNvPr id="9" name="Promise: Never sold"/>
           <p:cNvSpPr/>
           <p:nvPr/>
         </p:nvSpPr>
         <p:spPr>
           <a:xfrm>
-            <a:off x="548640" y="3831336"/>
-            <a:ext cx="6949440" cy="896112"/>
+            <a:off x="548640" y="3209544"/>
+            <a:ext cx="7680960" cy="603504"/>
           </a:xfrm>
           <a:prstGeom prst="roundRect">
             <a:avLst>
-              <a:gd name="adj" fmla="val 12245"/>
+              <a:gd name="adj" fmla="val 18182"/>
             </a:avLst>
           </a:prstGeom>
           <a:solidFill>
@@ -10845,55 +10961,104 @@
       </p:sp>
       <p:sp>
         <p:nvSpPr>
-          <p:cNvPr id="12" name="Text 10"/>
+          <p:cNvPr id="10" name="Text 8"/>
           <p:cNvSpPr txBox="1"/>
           <p:nvPr/>
         </p:nvSpPr>
         <p:spPr>
           <a:xfrm>
-            <a:off x="777240" y="3986784"/>
-            <a:ext cx="585216" cy="585216"/>
-          </a:xfrm>
-          <a:prstGeom prst="ellipse">
-            <a:avLst/>
-          </a:prstGeom>
-          <a:solidFill>
-            <a:schemeClr val="tx1"/>
-          </a:solidFill>
+            <a:off x="822960" y="3209544"/>
+            <a:ext cx="7223760" cy="603504"/>
+          </a:xfrm>
+          <a:prstGeom prst="rect">
+            <a:avLst/>
+          </a:prstGeom>
+          <a:noFill/>
           <a:ln/>
         </p:spPr>
         <p:txBody>
           <a:bodyPr wrap="square" lIns="0" tIns="0" rIns="0" bIns="0" rtlCol="0" anchor="ctr"/>
           <a:lstStyle/>
           <a:p>
-            <a:pPr algn="ctr" indent="0" marL="0">
-              <a:buNone/>
-            </a:pPr>
-            <a:r>
-              <a:rPr lang="en-US" sz="1600" dirty="0">
-                <a:solidFill>
-                  <a:schemeClr val="bg2"/>
+            <a:pPr indent="0" marL="0">
+              <a:spcAft>
+                <a:spcPts val="400"/>
+              </a:spcAft>
+              <a:buNone/>
+            </a:pPr>
+            <a:r>
+              <a:rPr lang="en-US" sz="1400" dirty="0">
+                <a:solidFill>
+                  <a:schemeClr val="tx1"/>
                 </a:solidFill>
                 <a:latin typeface="Raleway SemiBold" pitchFamily="34" charset="0"/>
                 <a:ea typeface="Raleway SemiBold" pitchFamily="34" charset="-122"/>
                 <a:cs typeface="Raleway SemiBold" pitchFamily="34" charset="-120"/>
               </a:rPr>
-              <a:t>3</a:t>
-            </a:r>
-            <a:endParaRPr lang="en-US" sz="1600" dirty="0"/>
-          </a:p>
-        </p:txBody>
-      </p:sp>
-      <p:sp>
-        <p:nvSpPr>
-          <p:cNvPr id="13" name="Text 11"/>
+              <a:t>Never sold  </a:t>
+            </a:r>
+            <a:pPr indent="0" marL="0">
+              <a:spcAft>
+                <a:spcPts val="400"/>
+              </a:spcAft>
+              <a:buNone/>
+            </a:pPr>
+            <a:r>
+              <a:rPr lang="en-US" sz="1400" dirty="0">
+                <a:solidFill>
+                  <a:schemeClr val="tx1"/>
+                </a:solidFill>
+              </a:rPr>
+              <a:t>What someone says is never sold or passed on as individual data.</a:t>
+            </a:r>
+            <a:endParaRPr lang="en-US" sz="1400" dirty="0"/>
+          </a:p>
+        </p:txBody>
+      </p:sp>
+      <p:sp>
+        <p:nvSpPr>
+          <p:cNvPr id="11" name="Promise: Personal crowns stay personal"/>
+          <p:cNvSpPr/>
+          <p:nvPr/>
+        </p:nvSpPr>
+        <p:spPr>
+          <a:xfrm>
+            <a:off x="548640" y="3922776"/>
+            <a:ext cx="7680960" cy="603504"/>
+          </a:xfrm>
+          <a:prstGeom prst="roundRect">
+            <a:avLst>
+              <a:gd name="adj" fmla="val 18182"/>
+            </a:avLst>
+          </a:prstGeom>
+          <a:solidFill>
+            <a:schemeClr val="bg1"/>
+          </a:solidFill>
+          <a:ln w="12700">
+            <a:solidFill>
+              <a:schemeClr val="bg1"/>
+            </a:solidFill>
+            <a:prstDash val="solid"/>
+          </a:ln>
+          <a:effectLst>
+            <a:outerShdw sx="100000" sy="100000" kx="0" ky="0" algn="bl" rotWithShape="0" blurRad="76200" dist="25400" dir="5400000">
+              <a:srgbClr val="565A32">
+                <a:alpha val="12000"/>
+              </a:srgbClr>
+            </a:outerShdw>
+          </a:effectLst>
+        </p:spPr>
+      </p:sp>
+      <p:sp>
+        <p:nvSpPr>
+          <p:cNvPr id="12" name="Text 10"/>
           <p:cNvSpPr txBox="1"/>
           <p:nvPr/>
         </p:nvSpPr>
         <p:spPr>
           <a:xfrm>
-            <a:off x="1554480" y="3831336"/>
-            <a:ext cx="5760720" cy="896112"/>
+            <a:off x="822960" y="3922776"/>
+            <a:ext cx="7223760" cy="603504"/>
           </a:xfrm>
           <a:prstGeom prst="rect">
             <a:avLst/>
@@ -10920,7 +11085,7 @@
                 <a:ea typeface="Raleway SemiBold" pitchFamily="34" charset="-122"/>
                 <a:cs typeface="Raleway SemiBold" pitchFamily="34" charset="-120"/>
               </a:rPr>
-              <a:t>Wider trends  </a:t>
+              <a:t>Personal crowns stay personal  </a:t>
             </a:r>
             <a:pPr indent="0" marL="0">
               <a:spcAft>
@@ -10934,7 +11099,7 @@
                   <a:schemeClr val="tx1"/>
                 </a:solidFill>
               </a:rPr>
-              <a:t>Carefully anonymised, combined Entre Amis trends, where sample size and permissions support them.</a:t>
+              <a:t>No public ranking of vineyards by default.</a:t>
             </a:r>
             <a:endParaRPr lang="en-US" sz="1400" dirty="0"/>
           </a:p>
@@ -10942,18 +11107,108 @@
       </p:sp>
       <p:sp>
         <p:nvSpPr>
-          <p:cNvPr id="14" name="Our promises"/>
+          <p:cNvPr id="13" name="Promise: No re-identification"/>
           <p:cNvSpPr/>
           <p:nvPr/>
         </p:nvSpPr>
         <p:spPr>
           <a:xfrm>
-            <a:off x="7772400" y="1783080"/>
-            <a:ext cx="3870655" cy="2944368"/>
+            <a:off x="548640" y="4636008"/>
+            <a:ext cx="7680960" cy="603504"/>
           </a:xfrm>
           <a:prstGeom prst="roundRect">
             <a:avLst>
-              <a:gd name="adj" fmla="val 3727"/>
+              <a:gd name="adj" fmla="val 18182"/>
+            </a:avLst>
+          </a:prstGeom>
+          <a:solidFill>
+            <a:schemeClr val="bg1"/>
+          </a:solidFill>
+          <a:ln w="12700">
+            <a:solidFill>
+              <a:schemeClr val="bg1"/>
+            </a:solidFill>
+            <a:prstDash val="solid"/>
+          </a:ln>
+          <a:effectLst>
+            <a:outerShdw sx="100000" sy="100000" kx="0" ky="0" algn="bl" rotWithShape="0" blurRad="76200" dist="25400" dir="5400000">
+              <a:srgbClr val="565A32">
+                <a:alpha val="12000"/>
+              </a:srgbClr>
+            </a:outerShdw>
+          </a:effectLst>
+        </p:spPr>
+      </p:sp>
+      <p:sp>
+        <p:nvSpPr>
+          <p:cNvPr id="14" name="Text 12"/>
+          <p:cNvSpPr txBox="1"/>
+          <p:nvPr/>
+        </p:nvSpPr>
+        <p:spPr>
+          <a:xfrm>
+            <a:off x="822960" y="4636008"/>
+            <a:ext cx="7223760" cy="603504"/>
+          </a:xfrm>
+          <a:prstGeom prst="rect">
+            <a:avLst/>
+          </a:prstGeom>
+          <a:noFill/>
+          <a:ln/>
+        </p:spPr>
+        <p:txBody>
+          <a:bodyPr wrap="square" lIns="0" tIns="0" rIns="0" bIns="0" rtlCol="0" anchor="ctr"/>
+          <a:lstStyle/>
+          <a:p>
+            <a:pPr indent="0" marL="0">
+              <a:spcAft>
+                <a:spcPts val="400"/>
+              </a:spcAft>
+              <a:buNone/>
+            </a:pPr>
+            <a:r>
+              <a:rPr lang="en-US" sz="1400" dirty="0">
+                <a:solidFill>
+                  <a:schemeClr val="tx1"/>
+                </a:solidFill>
+                <a:latin typeface="Raleway SemiBold" pitchFamily="34" charset="0"/>
+                <a:ea typeface="Raleway SemiBold" pitchFamily="34" charset="-122"/>
+                <a:cs typeface="Raleway SemiBold" pitchFamily="34" charset="-120"/>
+              </a:rPr>
+              <a:t>No re-identification  </a:t>
+            </a:r>
+            <a:pPr indent="0" marL="0">
+              <a:spcAft>
+                <a:spcPts val="400"/>
+              </a:spcAft>
+              <a:buNone/>
+            </a:pPr>
+            <a:r>
+              <a:rPr lang="en-US" sz="1400" dirty="0">
+                <a:solidFill>
+                  <a:schemeClr val="tx1"/>
+                </a:solidFill>
+              </a:rPr>
+              <a:t>No automatic data sharing across platforms.</a:t>
+            </a:r>
+            <a:endParaRPr lang="en-US" sz="1400" dirty="0"/>
+          </a:p>
+        </p:txBody>
+      </p:sp>
+      <p:sp>
+        <p:nvSpPr>
+          <p:cNvPr id="15" name="Why it matters"/>
+          <p:cNvSpPr/>
+          <p:nvPr/>
+        </p:nvSpPr>
+        <p:spPr>
+          <a:xfrm>
+            <a:off x="8503920" y="1783080"/>
+            <a:ext cx="3139135" cy="3456432"/>
+          </a:xfrm>
+          <a:prstGeom prst="roundRect">
+            <a:avLst>
+              <a:gd name="adj" fmla="val 3495"/>
             </a:avLst>
           </a:prstGeom>
           <a:solidFill>
@@ -10969,14 +11224,14 @@
       </p:sp>
       <p:sp>
         <p:nvSpPr>
-          <p:cNvPr id="15" name="Text 13"/>
+          <p:cNvPr id="16" name="Text 14"/>
           <p:cNvSpPr txBox="1"/>
           <p:nvPr/>
         </p:nvSpPr>
         <p:spPr>
           <a:xfrm>
-            <a:off x="8046720" y="2011680"/>
-            <a:ext cx="3322015" cy="2560320"/>
+            <a:off x="8778240" y="2011680"/>
+            <a:ext cx="2590495" cy="3017520"/>
           </a:xfrm>
           <a:prstGeom prst="rect">
             <a:avLst/>
@@ -11003,9 +11258,9 @@
                 <a:ea typeface="Raleway SemiBold" pitchFamily="34" charset="-122"/>
                 <a:cs typeface="Raleway SemiBold" pitchFamily="34" charset="-120"/>
               </a:rPr>
-              <a:t>OUR PROMISES</a:t>
-            </a:r>
-            <a:endParaRPr lang="en-US" sz="1500" dirty="0"/>
+              <a:t>WHY IT MATTERS</a:t>
+            </a:r>
+            <a:endParaRPr lang="en-US" sz="1700" dirty="0"/>
           </a:p>
           <a:p>
             <a:pPr indent="0" marL="0">
@@ -11015,99 +11270,44 @@
               <a:buNone/>
             </a:pPr>
             <a:r>
-              <a:rPr lang="en-US" sz="600" dirty="0">
+              <a:rPr lang="en-US" sz="800" dirty="0">
                 <a:solidFill>
                   <a:schemeClr val="bg2"/>
                 </a:solidFill>
               </a:rPr>
               <a:t> </a:t>
             </a:r>
-            <a:endParaRPr lang="en-US" sz="1500" dirty="0"/>
-          </a:p>
-          <a:p>
-            <a:pPr marL="203200" indent="-203200">
-              <a:spcAft>
-                <a:spcPts val="800"/>
-              </a:spcAft>
-              <a:buSzPct val="100000"/>
-              <a:buChar char="•"/>
-            </a:pPr>
-            <a:r>
-              <a:rPr lang="en-US" sz="1500" dirty="0">
+            <a:endParaRPr lang="en-US" sz="1700" dirty="0"/>
+          </a:p>
+          <a:p>
+            <a:pPr indent="0" marL="0">
+              <a:spcAft>
+                <a:spcPts val="400"/>
+              </a:spcAft>
+              <a:buNone/>
+            </a:pPr>
+            <a:r>
+              <a:rPr lang="en-US" sz="1700" dirty="0">
                 <a:solidFill>
                   <a:schemeClr val="bg2"/>
                 </a:solidFill>
               </a:rPr>
-              <a:t>Personal crowns stay personal.</a:t>
-            </a:r>
-            <a:endParaRPr lang="en-US" sz="1500" dirty="0"/>
-          </a:p>
-          <a:p>
-            <a:pPr marL="203200" indent="-203200">
-              <a:spcAft>
-                <a:spcPts val="800"/>
-              </a:spcAft>
-              <a:buSzPct val="100000"/>
-              <a:buChar char="•"/>
-            </a:pPr>
-            <a:r>
-              <a:rPr lang="en-US" sz="1500" dirty="0">
-                <a:solidFill>
-                  <a:schemeClr val="bg2"/>
-                </a:solidFill>
-              </a:rPr>
-              <a:t>No public ranking by default.</a:t>
-            </a:r>
-            <a:endParaRPr lang="en-US" sz="1500" dirty="0"/>
-          </a:p>
-          <a:p>
-            <a:pPr marL="203200" indent="-203200">
-              <a:spcAft>
-                <a:spcPts val="800"/>
-              </a:spcAft>
-              <a:buSzPct val="100000"/>
-              <a:buChar char="•"/>
-            </a:pPr>
-            <a:r>
-              <a:rPr lang="en-US" sz="1500" dirty="0">
-                <a:solidFill>
-                  <a:schemeClr val="bg2"/>
-                </a:solidFill>
-              </a:rPr>
-              <a:t>No risk of identifying anyone.</a:t>
-            </a:r>
-            <a:endParaRPr lang="en-US" sz="1500" dirty="0"/>
-          </a:p>
-          <a:p>
-            <a:pPr marL="203200" indent="-203200">
-              <a:spcAft>
-                <a:spcPts val="800"/>
-              </a:spcAft>
-              <a:buSzPct val="100000"/>
-              <a:buChar char="•"/>
-            </a:pPr>
-            <a:r>
-              <a:rPr lang="en-US" sz="1500" dirty="0">
-                <a:solidFill>
-                  <a:schemeClr val="bg2"/>
-                </a:solidFill>
-              </a:rPr>
-              <a:t>No automatic data sharing across platforms.</a:t>
-            </a:r>
-            <a:endParaRPr lang="en-US" sz="1500" dirty="0"/>
-          </a:p>
-        </p:txBody>
-      </p:sp>
-      <p:sp>
-        <p:nvSpPr>
-          <p:cNvPr id="16" name="FLAG — delete before sharing"/>
+              <a:t>Say what you really think. It only works if people are safe to. That trust is what makes the insight worth having.</a:t>
+            </a:r>
+            <a:endParaRPr lang="en-US" sz="1700" dirty="0"/>
+          </a:p>
+        </p:txBody>
+      </p:sp>
+      <p:sp>
+        <p:nvSpPr>
+          <p:cNvPr id="17" name="FLAG — delete before sharing"/>
           <p:cNvSpPr txBox="1"/>
           <p:nvPr/>
         </p:nvSpPr>
         <p:spPr>
           <a:xfrm>
-            <a:off x="548640" y="4983480"/>
-            <a:ext cx="6949440" cy="731520"/>
+            <a:off x="548640" y="5440680"/>
+            <a:ext cx="11094415" cy="502920"/>
           </a:xfrm>
           <a:prstGeom prst="rect">
             <a:avLst/>
@@ -11137,7 +11337,7 @@
                 <a:ea typeface="Raleway SemiBold" pitchFamily="34" charset="-122"/>
                 <a:cs typeface="Raleway SemiBold" pitchFamily="34" charset="-120"/>
               </a:rPr>
-              <a:t>TO CONFIRM  </a:t>
+              <a:t>TO DECIDE  </a:t>
             </a:r>
             <a:pPr indent="0" marL="0">
               <a:buNone/>
@@ -11148,63 +11348,7 @@
                   <a:schemeClr val="tx1"/>
                 </a:solidFill>
               </a:rPr>
-              <a:t>Layer 2 depends on the proposed contact rule and legal review. Layer names now match their descriptions (they were swapped).</a:t>
-            </a:r>
-            <a:endParaRPr lang="en-US" sz="1100" dirty="0"/>
-          </a:p>
-        </p:txBody>
-      </p:sp>
-      <p:sp>
-        <p:nvSpPr>
-          <p:cNvPr id="17" name="FLAG — delete before sharing"/>
-          <p:cNvSpPr txBox="1"/>
-          <p:nvPr/>
-        </p:nvSpPr>
-        <p:spPr>
-          <a:xfrm>
-            <a:off x="7772400" y="4983480"/>
-            <a:ext cx="3870655" cy="731520"/>
-          </a:xfrm>
-          <a:prstGeom prst="rect">
-            <a:avLst/>
-          </a:prstGeom>
-          <a:solidFill>
-            <a:schemeClr val="bg1"/>
-          </a:solidFill>
-          <a:ln w="25400">
-            <a:solidFill>
-              <a:schemeClr val="accent4"/>
-            </a:solidFill>
-          </a:ln>
-        </p:spPr>
-        <p:txBody>
-          <a:bodyPr wrap="square" lIns="38100" tIns="76200" rIns="76200" bIns="38100" rtlCol="0" anchor="ctr"/>
-          <a:lstStyle/>
-          <a:p>
-            <a:pPr indent="0" marL="0">
-              <a:buNone/>
-            </a:pPr>
-            <a:r>
-              <a:rPr lang="en-US" sz="1100" dirty="0">
-                <a:solidFill>
-                  <a:schemeClr val="tx1"/>
-                </a:solidFill>
-                <a:latin typeface="Raleway SemiBold" pitchFamily="34" charset="0"/>
-                <a:ea typeface="Raleway SemiBold" pitchFamily="34" charset="-122"/>
-                <a:cs typeface="Raleway SemiBold" pitchFamily="34" charset="-120"/>
-              </a:rPr>
-              <a:t>TO DECIDE  </a:t>
-            </a:r>
-            <a:pPr indent="0" marL="0">
-              <a:buNone/>
-            </a:pPr>
-            <a:r>
-              <a:rPr lang="en-US" sz="1100" dirty="0">
-                <a:solidFill>
-                  <a:schemeClr val="tx1"/>
-                </a:solidFill>
-              </a:rPr>
-              <a:t>'by default' and 'automatic' suggest exceptions. Keep, or make absolute?</a:t>
+              <a:t>'By default' and 'automatic' suggest exceptions. Keep, or make absolute?</a:t>
             </a:r>
             <a:endParaRPr lang="en-US" sz="1100" dirty="0"/>
           </a:p>
@@ -11512,7 +11656,7 @@
                   <a:schemeClr val="tx1"/>
                 </a:solidFill>
               </a:rPr>
-              <a:t>Visitor experience, producer content, saved discoveries, polls and quizzes, consent journeys and reporting.</a:t>
+              <a:t>The visitor experience, your producers' content, saved discoveries, polls, consent journeys and reporting.</a:t>
             </a:r>
             <a:endParaRPr lang="en-US" sz="1500" dirty="0"/>
           </a:p>
@@ -11520,7 +11664,7 @@
       </p:sp>
       <p:sp>
         <p:nvSpPr>
-          <p:cNvPr id="7" name="Card: PHYSICAL"/>
+          <p:cNvPr id="7" name="Card: AT THE EVENT"/>
           <p:cNvSpPr/>
           <p:nvPr/>
         </p:nvSpPr>
@@ -11588,7 +11732,7 @@
                 <a:ea typeface="Raleway SemiBold" pitchFamily="34" charset="-122"/>
                 <a:cs typeface="Raleway SemiBold" pitchFamily="34" charset="-120"/>
               </a:rPr>
-              <a:t>PHYSICAL</a:t>
+              <a:t>AT THE EVENT</a:t>
             </a:r>
             <a:endParaRPr lang="en-US" sz="1500" dirty="0"/>
           </a:p>
@@ -11622,7 +11766,7 @@
                   <a:schemeClr val="tx1"/>
                 </a:solidFill>
               </a:rPr>
-              <a:t>A hosted Entre Amis table and scheduled screen moments at the main event, fully costed.</a:t>
+              <a:t>A small Entre Amis corner and scheduled moments on your main screen, fully costed.</a:t>
             </a:r>
             <a:endParaRPr lang="en-US" sz="1500" dirty="0"/>
           </a:p>
@@ -11630,7 +11774,7 @@
       </p:sp>
       <p:sp>
         <p:nvSpPr>
-          <p:cNvPr id="9" name="Card: ONGOING"/>
+          <p:cNvPr id="9" name="Card: AFTER THE EVENT"/>
           <p:cNvSpPr/>
           <p:nvPr/>
         </p:nvSpPr>
@@ -11698,7 +11842,7 @@
                 <a:ea typeface="Raleway SemiBold" pitchFamily="34" charset="-122"/>
                 <a:cs typeface="Raleway SemiBold" pitchFamily="34" charset="-120"/>
               </a:rPr>
-              <a:t>ONGOING</a:t>
+              <a:t>AFTER THE EVENT</a:t>
             </a:r>
             <a:endParaRPr lang="en-US" sz="1500" dirty="0"/>
           </a:p>
@@ -11732,7 +11876,7 @@
                   <a:schemeClr val="tx1"/>
                 </a:solidFill>
               </a:rPr>
-              <a:t>Post-event visitor experience, combined reporting, a partner review and a potential Christmas activation.</a:t>
+              <a:t>The post-event visitor experience, combined insight reports, a partner review and a potential Christmas activation.</a:t>
             </a:r>
             <a:endParaRPr lang="en-US" sz="1500" dirty="0"/>
           </a:p>

--- a/decks/Entre Amis - Event Mode pack - DRAFT.pptx
+++ b/decks/Entre Amis - Event Mode pack - DRAFT.pptx
@@ -121,13 +121,13 @@
   <p:extLst>
     <p:ext uri="{521415D9-36F7-43E2-AB2F-B90AF26B5E84}">
       <p14:sectionLst xmlns:p14="http://schemas.microsoft.com/office/powerpoint/2010/main">
-        <p14:section name="Introduction" id="{46cc0697-0e51-d675-a9d0-1e4d9deca65f}">
+        <p14:section name="Introduction" id="{dabf1cf6-656a-b387-1a93-0d3193cf2db7}">
           <p14:sldIdLst>
             <p14:sldId id="256"/>
             <p14:sldId id="257"/>
           </p14:sldIdLst>
         </p14:section>
-        <p14:section name="Event Mode" id="{ca67fd7e-22e2-a15c-872d-56c97c85cf14}">
+        <p14:section name="Event Mode" id="{51542ecd-75dd-8ec8-5d6c-2481aa2ccff2}">
           <p14:sldIdLst>
             <p14:sldId id="258"/>
             <p14:sldId id="259"/>
@@ -137,21 +137,21 @@
             <p14:sldId id="263"/>
           </p14:sldIdLst>
         </p14:section>
-        <p14:section name="Working together" id="{0af013f5-d6bc-e853-3f9a-ed154621ee08}">
+        <p14:section name="Working together" id="{b7689625-2554-4810-41e5-6f360888f873}">
           <p14:sldIdLst>
             <p14:sldId id="264"/>
             <p14:sldId id="265"/>
             <p14:sldId id="266"/>
           </p14:sldIdLst>
         </p14:section>
-        <p14:section name="About us" id="{ec7c7bf8-d1ff-97de-e2f1-7e5d43783ca3}">
+        <p14:section name="About us" id="{1af4a4a9-01ab-4c34-2fb6-af3ace785686}">
           <p14:sldIdLst>
             <p14:sldId id="267"/>
             <p14:sldId id="268"/>
             <p14:sldId id="269"/>
           </p14:sldIdLst>
         </p14:section>
-        <p14:section name="Working notes — delete before sharing" id="{5fe85ec4-f169-ec1a-8239-fff1bb542b94}">
+        <p14:section name="Working notes — delete before sharing" id="{8ddf4c9a-b89d-9cac-ab3d-ab3c26de784e}">
           <p14:sldIdLst>
             <p14:sldId id="270"/>
           </p14:sldIdLst>
@@ -1176,7 +1176,7 @@
           <a:p>
             <a:r>
               <a:rPr lang="en-US" dirty="0"/>
-              <a:t>Made explicit that this is the brand, before the pack turns to Event Mode. Every line uses confirmed content apart from the third card's 'an honest view of what people think', drawn from the Partner Mode data rule ('helps partners understand what people genuinely think').</a:t>
+              <a:t>Makes it explicit that this is the brand. The closing line is the partner line (founder, 12 October): for Partner Mode and Event Mode materials only, not a consumer line.</a:t>
             </a:r>
             <a:endParaRPr lang="en-US" dirty="0"/>
           </a:p>
@@ -1704,7 +1704,7 @@
           <a:p>
             <a:r>
               <a:rPr lang="en-US" dirty="0"/>
-              <a:t>New slide built from the confirmed Partner Mode data rules ('That trust is the brand — Say what you really think only works if people are safe to do so') and the promises from 'Three layers of insight'. It answers the organiser's likely first question about data.</a:t>
+              <a:t>Built from the confirmed Partner Mode data rules ('That trust is the brand — Say what you really think only works if people are safe to do so') and the promises from the October deck's 'Three layers of insight'.</a:t>
             </a:r>
             <a:endParaRPr lang="en-US" dirty="0"/>
           </a:p>
@@ -2603,7 +2603,7 @@
                   <a:schemeClr val="tx1"/>
                 </a:solidFill>
               </a:rPr>
-              <a:t>What your visitors really think, and what it tells you.</a:t>
+              <a:t>Conversation creates connection. Connection creates insight.</a:t>
             </a:r>
             <a:endParaRPr lang="en-US" sz="1600" dirty="0"/>
           </a:p>
@@ -2659,7 +2659,7 @@
                   <a:schemeClr val="tx1"/>
                 </a:solidFill>
               </a:rPr>
-              <a:t>Event Mode is proposed in the Brand Brain. Its stage, and how it differs from Partner Mode, are still to decide. The italic line is new descriptive copy: keep or change.</a:t>
+              <a:t>Event Mode is proposed in the Brand Brain. Its stage, and how it differs from Partner Mode, are still to decide. The partner line is proposed too.</a:t>
             </a:r>
             <a:endParaRPr lang="en-US" sz="1100" dirty="0"/>
           </a:p>
@@ -5658,25 +5658,7 @@
                   <a:schemeClr val="tx1"/>
                 </a:solidFill>
               </a:rPr>
-              <a:t>Cover line (slide 1)</a:t>
-            </a:r>
-            <a:endParaRPr lang="en-US" sz="1400" dirty="0"/>
-          </a:p>
-          <a:p>
-            <a:pPr marL="203200" indent="-203200">
-              <a:spcAft>
-                <a:spcPts val="600"/>
-              </a:spcAft>
-              <a:buSzPct val="100000"/>
-              <a:buChar char="•"/>
-            </a:pPr>
-            <a:r>
-              <a:rPr lang="en-US" sz="1400" dirty="0">
-                <a:solidFill>
-                  <a:schemeClr val="tx1"/>
-                </a:solidFill>
-              </a:rPr>
-              <a:t>Conversations as a source of learning and connection (slide 2)</a:t>
+              <a:t>Partner line (slides 1, 2)</a:t>
             </a:r>
             <a:endParaRPr lang="en-US" sz="1400" dirty="0"/>
           </a:p>
@@ -6137,11 +6119,11 @@
         <p:spPr>
           <a:xfrm>
             <a:off x="548640" y="1783080"/>
-            <a:ext cx="11094415" cy="1097280"/>
+            <a:ext cx="11094415" cy="960120"/>
           </a:xfrm>
           <a:prstGeom prst="roundRect">
             <a:avLst>
-              <a:gd name="adj" fmla="val 10000"/>
+              <a:gd name="adj" fmla="val 11429"/>
             </a:avLst>
           </a:prstGeom>
           <a:solidFill>
@@ -6164,7 +6146,7 @@
         <p:spPr>
           <a:xfrm>
             <a:off x="1005840" y="1783080"/>
-            <a:ext cx="10180015" cy="1097280"/>
+            <a:ext cx="10180015" cy="960120"/>
           </a:xfrm>
           <a:prstGeom prst="rect">
             <a:avLst/>
@@ -6202,12 +6184,12 @@
         </p:nvSpPr>
         <p:spPr>
           <a:xfrm>
-            <a:off x="548640" y="3108960"/>
-            <a:ext cx="3515258" cy="1874520"/>
+            <a:off x="548640" y="2926080"/>
+            <a:ext cx="3515258" cy="1691640"/>
           </a:xfrm>
           <a:prstGeom prst="roundRect">
             <a:avLst>
-              <a:gd name="adj" fmla="val 5854"/>
+              <a:gd name="adj" fmla="val 6486"/>
             </a:avLst>
           </a:prstGeom>
           <a:solidFill>
@@ -6236,8 +6218,8 @@
         </p:nvSpPr>
         <p:spPr>
           <a:xfrm>
-            <a:off x="777240" y="3337560"/>
-            <a:ext cx="3058058" cy="1508760"/>
+            <a:off x="777240" y="3154680"/>
+            <a:ext cx="3058058" cy="1325880"/>
           </a:xfrm>
           <a:prstGeom prst="rect">
             <a:avLst/>
@@ -6312,12 +6294,12 @@
         </p:nvSpPr>
         <p:spPr>
           <a:xfrm>
-            <a:off x="4338218" y="3108960"/>
-            <a:ext cx="3515258" cy="1874520"/>
+            <a:off x="4338218" y="2926080"/>
+            <a:ext cx="3515258" cy="1691640"/>
           </a:xfrm>
           <a:prstGeom prst="roundRect">
             <a:avLst>
-              <a:gd name="adj" fmla="val 5854"/>
+              <a:gd name="adj" fmla="val 6486"/>
             </a:avLst>
           </a:prstGeom>
           <a:solidFill>
@@ -6346,8 +6328,8 @@
         </p:nvSpPr>
         <p:spPr>
           <a:xfrm>
-            <a:off x="4566818" y="3337560"/>
-            <a:ext cx="3058058" cy="1508760"/>
+            <a:off x="4566818" y="3154680"/>
+            <a:ext cx="3058058" cy="1325880"/>
           </a:xfrm>
           <a:prstGeom prst="rect">
             <a:avLst/>
@@ -6422,12 +6404,12 @@
         </p:nvSpPr>
         <p:spPr>
           <a:xfrm>
-            <a:off x="8127797" y="3108960"/>
-            <a:ext cx="3515258" cy="1874520"/>
+            <a:off x="8127797" y="2926080"/>
+            <a:ext cx="3515258" cy="1691640"/>
           </a:xfrm>
           <a:prstGeom prst="roundRect">
             <a:avLst>
-              <a:gd name="adj" fmla="val 5854"/>
+              <a:gd name="adj" fmla="val 6486"/>
             </a:avLst>
           </a:prstGeom>
           <a:solidFill>
@@ -6456,8 +6438,8 @@
         </p:nvSpPr>
         <p:spPr>
           <a:xfrm>
-            <a:off x="8356397" y="3337560"/>
-            <a:ext cx="3058058" cy="1508760"/>
+            <a:off x="8356397" y="3154680"/>
+            <a:ext cx="3058058" cy="1325880"/>
           </a:xfrm>
           <a:prstGeom prst="rect">
             <a:avLst/>
@@ -6518,7 +6500,7 @@
                   <a:schemeClr val="tx1"/>
                 </a:solidFill>
               </a:rPr>
-              <a:t>What we add isn't content. It's connection, and an honest view of what people think.</a:t>
+              <a:t>What we add isn't content. It's connection.</a:t>
             </a:r>
             <a:endParaRPr lang="en-US" sz="1500" dirty="0"/>
           </a:p>
@@ -6526,14 +6508,53 @@
       </p:sp>
       <p:sp>
         <p:nvSpPr>
-          <p:cNvPr id="12" name="FLAG — delete before sharing"/>
+          <p:cNvPr id="12" name="Text 10"/>
           <p:cNvSpPr txBox="1"/>
           <p:nvPr/>
         </p:nvSpPr>
         <p:spPr>
           <a:xfrm>
-            <a:off x="548640" y="5212080"/>
-            <a:ext cx="11094415" cy="731520"/>
+            <a:off x="548640" y="4800600"/>
+            <a:ext cx="11094415" cy="548640"/>
+          </a:xfrm>
+          <a:prstGeom prst="rect">
+            <a:avLst/>
+          </a:prstGeom>
+          <a:noFill/>
+          <a:ln/>
+        </p:spPr>
+        <p:txBody>
+          <a:bodyPr wrap="square" lIns="0" tIns="0" rIns="0" bIns="0" rtlCol="0" anchor="t"/>
+          <a:lstStyle/>
+          <a:p>
+            <a:pPr algn="ctr" indent="0" marL="0">
+              <a:spcAft>
+                <a:spcPts val="400"/>
+              </a:spcAft>
+              <a:buNone/>
+            </a:pPr>
+            <a:r>
+              <a:rPr lang="en-US" sz="2600" dirty="0">
+                <a:solidFill>
+                  <a:schemeClr val="tx1"/>
+                </a:solidFill>
+              </a:rPr>
+              <a:t>Conversation creates connection. Connection creates insight.</a:t>
+            </a:r>
+            <a:endParaRPr lang="en-US" sz="2600" dirty="0"/>
+          </a:p>
+        </p:txBody>
+      </p:sp>
+      <p:sp>
+        <p:nvSpPr>
+          <p:cNvPr id="13" name="FLAG — delete before sharing"/>
+          <p:cNvSpPr txBox="1"/>
+          <p:nvPr/>
+        </p:nvSpPr>
+        <p:spPr>
+          <a:xfrm>
+            <a:off x="3169768" y="5486400"/>
+            <a:ext cx="5852160" cy="457200"/>
           </a:xfrm>
           <a:prstGeom prst="rect">
             <a:avLst/>
@@ -6563,7 +6584,7 @@
                 <a:ea typeface="Raleway SemiBold" pitchFamily="34" charset="-122"/>
                 <a:cs typeface="Raleway SemiBold" pitchFamily="34" charset="-120"/>
               </a:rPr>
-              <a:t>TO DISCUSS  </a:t>
+              <a:t>TO CONFIRM  </a:t>
             </a:r>
             <a:pPr indent="0" marL="0">
               <a:buNone/>
@@ -6574,7 +6595,7 @@
                   <a:schemeClr val="tx1"/>
                 </a:solidFill>
               </a:rPr>
-              <a:t>Your new thought: conversations are a source of rich learning and connection. It could be the bridge from the brand to insight on this slide. Not used yet; let's work out the wording together.</a:t>
+              <a:t>Partner line, proposed in the Brand Brain.</a:t>
             </a:r>
             <a:endParaRPr lang="en-US" sz="1100" dirty="0"/>
           </a:p>
@@ -10919,7 +10940,7 @@
                   <a:schemeClr val="tx1"/>
                 </a:solidFill>
               </a:rPr>
-              <a:t>Opinions and tasting responses are combined and anonymised, never linked to a name.</a:t>
+              <a:t>Opinions and responses are combined and anonymised, never linked to a name.</a:t>
             </a:r>
             <a:endParaRPr lang="en-US" sz="1400" dirty="0"/>
           </a:p>
@@ -11099,7 +11120,7 @@
                   <a:schemeClr val="tx1"/>
                 </a:solidFill>
               </a:rPr>
-              <a:t>No public ranking of vineyards by default.</a:t>
+              <a:t>No public ranking of producers by default.</a:t>
             </a:r>
             <a:endParaRPr lang="en-US" sz="1400" dirty="0"/>
           </a:p>

--- a/decks/Entre Amis - Event Mode pack - DRAFT.pptx
+++ b/decks/Entre Amis - Event Mode pack - DRAFT.pptx
@@ -121,13 +121,13 @@
   <p:extLst>
     <p:ext uri="{521415D9-36F7-43E2-AB2F-B90AF26B5E84}">
       <p14:sectionLst xmlns:p14="http://schemas.microsoft.com/office/powerpoint/2010/main">
-        <p14:section name="Introduction" id="{dabf1cf6-656a-b387-1a93-0d3193cf2db7}">
+        <p14:section name="Introduction" id="{f8e8cf07-88b3-28a9-13c6-d4e70628f171}">
           <p14:sldIdLst>
             <p14:sldId id="256"/>
             <p14:sldId id="257"/>
           </p14:sldIdLst>
         </p14:section>
-        <p14:section name="Event Mode" id="{51542ecd-75dd-8ec8-5d6c-2481aa2ccff2}">
+        <p14:section name="Event Mode" id="{cb304ab3-7aaf-c928-8548-b125a49f58a1}">
           <p14:sldIdLst>
             <p14:sldId id="258"/>
             <p14:sldId id="259"/>
@@ -137,21 +137,21 @@
             <p14:sldId id="263"/>
           </p14:sldIdLst>
         </p14:section>
-        <p14:section name="Working together" id="{b7689625-2554-4810-41e5-6f360888f873}">
+        <p14:section name="Working together" id="{ad2a4529-9956-854f-0964-52ce9d6ef961}">
           <p14:sldIdLst>
             <p14:sldId id="264"/>
             <p14:sldId id="265"/>
             <p14:sldId id="266"/>
           </p14:sldIdLst>
         </p14:section>
-        <p14:section name="About us" id="{1af4a4a9-01ab-4c34-2fb6-af3ace785686}">
+        <p14:section name="About us" id="{419a1eb6-f295-1d93-6cfb-660d7f31e403}">
           <p14:sldIdLst>
             <p14:sldId id="267"/>
             <p14:sldId id="268"/>
             <p14:sldId id="269"/>
           </p14:sldIdLst>
         </p14:section>
-        <p14:section name="Working notes — delete before sharing" id="{8ddf4c9a-b89d-9cac-ab3d-ab3c26de784e}">
+        <p14:section name="Working notes — delete before sharing" id="{c7d549da-7f70-829f-9dfa-fd408d98808d}">
           <p14:sldIdLst>
             <p14:sldId id="270"/>
           </p14:sldIdLst>
@@ -7626,7 +7626,7 @@
                   <a:schemeClr val="tx1"/>
                 </a:solidFill>
               </a:rPr>
-              <a:t>A personal record to revisit after the event.</a:t>
+              <a:t>A personal record in My wines, to revisit after the event.</a:t>
             </a:r>
             <a:endParaRPr lang="en-US" sz="1600" dirty="0"/>
           </a:p>

--- a/decks/Entre Amis - Event Mode pack - DRAFT.pptx
+++ b/decks/Entre Amis - Event Mode pack - DRAFT.pptx
@@ -121,13 +121,13 @@
   <p:extLst>
     <p:ext uri="{521415D9-36F7-43E2-AB2F-B90AF26B5E84}">
       <p14:sectionLst xmlns:p14="http://schemas.microsoft.com/office/powerpoint/2010/main">
-        <p14:section name="Introduction" id="{f8e8cf07-88b3-28a9-13c6-d4e70628f171}">
+        <p14:section name="Introduction" id="{c0ca1213-b9c0-e1e9-e25b-47b962abdabe}">
           <p14:sldIdLst>
             <p14:sldId id="256"/>
             <p14:sldId id="257"/>
           </p14:sldIdLst>
         </p14:section>
-        <p14:section name="Event Mode" id="{cb304ab3-7aaf-c928-8548-b125a49f58a1}">
+        <p14:section name="Event Mode" id="{b0363421-1762-394f-0876-ff6fe013c7c3}">
           <p14:sldIdLst>
             <p14:sldId id="258"/>
             <p14:sldId id="259"/>
@@ -137,21 +137,21 @@
             <p14:sldId id="263"/>
           </p14:sldIdLst>
         </p14:section>
-        <p14:section name="Working together" id="{ad2a4529-9956-854f-0964-52ce9d6ef961}">
+        <p14:section name="Working together" id="{cfe0f26d-bed1-731e-6689-28fefae79757}">
           <p14:sldIdLst>
             <p14:sldId id="264"/>
             <p14:sldId id="265"/>
             <p14:sldId id="266"/>
           </p14:sldIdLst>
         </p14:section>
-        <p14:section name="About us" id="{419a1eb6-f295-1d93-6cfb-660d7f31e403}">
+        <p14:section name="About us" id="{582e0b74-5563-cec0-ce7c-f6ee4173aba4}">
           <p14:sldIdLst>
             <p14:sldId id="267"/>
             <p14:sldId id="268"/>
             <p14:sldId id="269"/>
           </p14:sldIdLst>
         </p14:section>
-        <p14:section name="Working notes — delete before sharing" id="{c7d549da-7f70-829f-9dfa-fd408d98808d}">
+        <p14:section name="Working notes — delete before sharing" id="{8e1a17c0-b602-e647-8841-dc993688b06c}">
           <p14:sldIdLst>
             <p14:sldId id="270"/>
           </p14:sldIdLst>
@@ -2648,7 +2648,7 @@
                 <a:ea typeface="Raleway SemiBold" pitchFamily="34" charset="-122"/>
                 <a:cs typeface="Raleway SemiBold" pitchFamily="34" charset="-120"/>
               </a:rPr>
-              <a:t>TO CONFIRM  </a:t>
+              <a:t>TO DECIDE  </a:t>
             </a:r>
             <a:pPr indent="0" marL="0">
               <a:buNone/>
@@ -2659,7 +2659,7 @@
                   <a:schemeClr val="tx1"/>
                 </a:solidFill>
               </a:rPr>
-              <a:t>Event Mode is proposed in the Brand Brain. Its stage, and how it differs from Partner Mode, are still to decide. The partner line is proposed too.</a:t>
+              <a:t>Event Mode's stage, and its detailed differences from Partner Mode.</a:t>
             </a:r>
             <a:endParaRPr lang="en-US" sz="1100" dirty="0"/>
           </a:p>
@@ -5640,25 +5640,7 @@
                   <a:schemeClr val="tx1"/>
                 </a:solidFill>
               </a:rPr>
-              <a:t>Event Mode: confirm, set its stage and how it differs from Partner Mode</a:t>
-            </a:r>
-            <a:endParaRPr lang="en-US" sz="1400" dirty="0"/>
-          </a:p>
-          <a:p>
-            <a:pPr marL="203200" indent="-203200">
-              <a:spcAft>
-                <a:spcPts val="600"/>
-              </a:spcAft>
-              <a:buSzPct val="100000"/>
-              <a:buChar char="•"/>
-            </a:pPr>
-            <a:r>
-              <a:rPr lang="en-US" sz="1400" dirty="0">
-                <a:solidFill>
-                  <a:schemeClr val="tx1"/>
-                </a:solidFill>
-              </a:rPr>
-              <a:t>Partner line (slides 1, 2)</a:t>
+              <a:t>Event Mode: its stage and how it differs from Partner Mode</a:t>
             </a:r>
             <a:endParaRPr lang="en-US" sz="1400" dirty="0"/>
           </a:p>
@@ -6542,62 +6524,6 @@
               <a:t>Conversation creates connection. Connection creates insight.</a:t>
             </a:r>
             <a:endParaRPr lang="en-US" sz="2600" dirty="0"/>
-          </a:p>
-        </p:txBody>
-      </p:sp>
-      <p:sp>
-        <p:nvSpPr>
-          <p:cNvPr id="13" name="FLAG — delete before sharing"/>
-          <p:cNvSpPr txBox="1"/>
-          <p:nvPr/>
-        </p:nvSpPr>
-        <p:spPr>
-          <a:xfrm>
-            <a:off x="3169768" y="5486400"/>
-            <a:ext cx="5852160" cy="457200"/>
-          </a:xfrm>
-          <a:prstGeom prst="rect">
-            <a:avLst/>
-          </a:prstGeom>
-          <a:solidFill>
-            <a:schemeClr val="bg1"/>
-          </a:solidFill>
-          <a:ln w="25400">
-            <a:solidFill>
-              <a:schemeClr val="accent4"/>
-            </a:solidFill>
-          </a:ln>
-        </p:spPr>
-        <p:txBody>
-          <a:bodyPr wrap="square" lIns="38100" tIns="76200" rIns="76200" bIns="38100" rtlCol="0" anchor="ctr"/>
-          <a:lstStyle/>
-          <a:p>
-            <a:pPr indent="0" marL="0">
-              <a:buNone/>
-            </a:pPr>
-            <a:r>
-              <a:rPr lang="en-US" sz="1100" dirty="0">
-                <a:solidFill>
-                  <a:schemeClr val="tx1"/>
-                </a:solidFill>
-                <a:latin typeface="Raleway SemiBold" pitchFamily="34" charset="0"/>
-                <a:ea typeface="Raleway SemiBold" pitchFamily="34" charset="-122"/>
-                <a:cs typeface="Raleway SemiBold" pitchFamily="34" charset="-120"/>
-              </a:rPr>
-              <a:t>TO CONFIRM  </a:t>
-            </a:r>
-            <a:pPr indent="0" marL="0">
-              <a:buNone/>
-            </a:pPr>
-            <a:r>
-              <a:rPr lang="en-US" sz="1100" dirty="0">
-                <a:solidFill>
-                  <a:schemeClr val="tx1"/>
-                </a:solidFill>
-              </a:rPr>
-              <a:t>Partner line, proposed in the Brand Brain.</a:t>
-            </a:r>
-            <a:endParaRPr lang="en-US" sz="1100" dirty="0"/>
           </a:p>
         </p:txBody>
       </p:sp>

--- a/decks/Entre Amis - Event Mode pack - DRAFT.pptx
+++ b/decks/Entre Amis - Event Mode pack - DRAFT.pptx
@@ -20,9 +20,10 @@
     <p:sldId id="268" r:id="rId14"/>
     <p:sldId id="269" r:id="rId15"/>
     <p:sldId id="270" r:id="rId16"/>
+    <p:sldId id="271" r:id="rId17"/>
   </p:sldIdLst>
   <p:notesMasterIdLst>
-    <p:notesMasterId r:id="rId17"/>
+    <p:notesMasterId r:id="rId18"/>
   </p:notesMasterIdLst>
   <p:sldSz cx="12192000" cy="6858000"/>
   <p:notesSz cx="6858000" cy="12192000"/>
@@ -121,13 +122,13 @@
   <p:extLst>
     <p:ext uri="{521415D9-36F7-43E2-AB2F-B90AF26B5E84}">
       <p14:sectionLst xmlns:p14="http://schemas.microsoft.com/office/powerpoint/2010/main">
-        <p14:section name="Introduction" id="{c0ca1213-b9c0-e1e9-e25b-47b962abdabe}">
+        <p14:section name="Introduction" id="{231fa06a-da83-813b-1cc3-4700338607b8}">
           <p14:sldIdLst>
             <p14:sldId id="256"/>
             <p14:sldId id="257"/>
           </p14:sldIdLst>
         </p14:section>
-        <p14:section name="Event Mode" id="{b0363421-1762-394f-0876-ff6fe013c7c3}">
+        <p14:section name="Event Mode" id="{3fd6c50b-7362-1760-63cd-bb1354b68a6a}">
           <p14:sldIdLst>
             <p14:sldId id="258"/>
             <p14:sldId id="259"/>
@@ -135,25 +136,26 @@
             <p14:sldId id="261"/>
             <p14:sldId id="262"/>
             <p14:sldId id="263"/>
+            <p14:sldId id="264"/>
           </p14:sldIdLst>
         </p14:section>
-        <p14:section name="Working together" id="{cfe0f26d-bed1-731e-6689-28fefae79757}">
+        <p14:section name="Working together" id="{fd52be1b-a8ac-77b1-d5e5-1d0e6a20daf2}">
           <p14:sldIdLst>
-            <p14:sldId id="264"/>
             <p14:sldId id="265"/>
             <p14:sldId id="266"/>
+            <p14:sldId id="267"/>
           </p14:sldIdLst>
         </p14:section>
-        <p14:section name="About us" id="{582e0b74-5563-cec0-ce7c-f6ee4173aba4}">
+        <p14:section name="About us" id="{8a5df74b-f990-643c-8a1c-1e2cbe147219}">
           <p14:sldIdLst>
-            <p14:sldId id="267"/>
             <p14:sldId id="268"/>
             <p14:sldId id="269"/>
+            <p14:sldId id="270"/>
           </p14:sldIdLst>
         </p14:section>
-        <p14:section name="Working notes — delete before sharing" id="{8e1a17c0-b602-e647-8841-dc993688b06c}">
+        <p14:section name="Working notes — delete before sharing" id="{19b45441-f726-735b-ac80-03e11f0fd809}">
           <p14:sldIdLst>
-            <p14:sldId id="270"/>
+            <p14:sldId id="271"/>
           </p14:sldIdLst>
         </p14:section>
       </p14:sectionLst>
@@ -648,7 +650,7 @@
           <a:p>
             <a:r>
               <a:rPr lang="en-US" dirty="0"/>
-              <a:t>Heading typo fixed: 'foundering' (sinking) is now 'founding'. 'Insight' restored, as it's allowed in partner materials (proposed).</a:t>
+              <a:t>'Hosted Entre Amis Table' is now 'a small Entre Amis corner', in line with how Entre Amis shows up at events.</a:t>
             </a:r>
             <a:endParaRPr lang="en-US" dirty="0"/>
           </a:p>
@@ -736,7 +738,7 @@
           <a:p>
             <a:r>
               <a:rPr lang="en-US" dirty="0"/>
-              <a:t>From 'Before we build event partner mode'. The 'Ecosystem story' card was a note about the deck itself, so it's left out.</a:t>
+              <a:t>Heading typo fixed: 'foundering' (sinking) is now 'founding'. 'Insight' restored, as it's allowed in partner materials (proposed).</a:t>
             </a:r>
             <a:endParaRPr lang="en-US" dirty="0"/>
           </a:p>
@@ -824,7 +826,7 @@
           <a:p>
             <a:r>
               <a:rPr lang="en-US" dirty="0"/>
-              <a:t>New slide, built from confirmed responsible-drinking and Partner Mode data rules. 'No pressure to taste' comes from the visitor journey slide in the October deck.</a:t>
+              <a:t>From 'Before we build event partner mode'. The 'Ecosystem story' card was a note about the deck itself, so it's left out.</a:t>
             </a:r>
             <a:endParaRPr lang="en-US" dirty="0"/>
           </a:p>
@@ -912,7 +914,7 @@
           <a:p>
             <a:r>
               <a:rPr lang="en-US" dirty="0"/>
-              <a:t>Brand voice about Caroline, not written as her. A first-person line would work well here, but it must be Caroline's own words.</a:t>
+              <a:t>New slide, built from confirmed responsible-drinking and Partner Mode data rules. 'No pressure to taste' comes from the visitor journey slide in the October deck.</a:t>
             </a:r>
             <a:endParaRPr lang="en-US" dirty="0"/>
           </a:p>
@@ -1000,7 +1002,7 @@
           <a:p>
             <a:r>
               <a:rPr lang="en-US" dirty="0"/>
-              <a:t/>
+              <a:t>Brand voice about Caroline, not written as her. A first-person line would work well here, but it must be Caroline's own words.</a:t>
             </a:r>
             <a:endParaRPr lang="en-US" dirty="0"/>
           </a:p>
@@ -1088,7 +1090,7 @@
           <a:p>
             <a:r>
               <a:rPr lang="en-US" dirty="0"/>
-              <a:t>Then run the pre-publish check in brand-brain/03-guardrails.md.</a:t>
+              <a:t/>
             </a:r>
             <a:endParaRPr lang="en-US" dirty="0"/>
           </a:p>
@@ -1112,6 +1114,94 @@
             <a:fld id="{F7021451-1387-4CA6-816F-3879F97B5CBC}" type="slidenum">
               <a:rPr lang="en-US"/>
               <a:t>15</a:t>
+            </a:fld>
+            <a:endParaRPr lang="en-US"/>
+          </a:p>
+        </p:txBody>
+      </p:sp>
+    </p:spTree>
+    <p:extLst>
+      <p:ext uri="{BB962C8B-B14F-4D97-AF65-F5344CB8AC3E}">
+        <p14:creationId xmlns:p14="http://schemas.microsoft.com/office/powerpoint/2010/main" val="1024086991"/>
+      </p:ext>
+    </p:extLst>
+  </p:cSld>
+  <p:clrMapOvr>
+    <a:masterClrMapping/>
+  </p:clrMapOvr>
+</p:notes>
+</file>
+
+<file path=ppt/notesSlides/notesSlide16.xml><?xml version="1.0" encoding="utf-8"?>
+<p:notes xmlns:a="http://schemas.openxmlformats.org/drawingml/2006/main" xmlns:r="http://schemas.openxmlformats.org/officeDocument/2006/relationships" xmlns:p="http://schemas.openxmlformats.org/presentationml/2006/main">
+  <p:cSld>
+    <p:spTree>
+      <p:nvGrpSpPr>
+        <p:cNvPr id="1" name=""/>
+        <p:cNvGrpSpPr/>
+        <p:nvPr/>
+      </p:nvGrpSpPr>
+      <p:grpSpPr>
+        <a:xfrm>
+          <a:off x="0" y="0"/>
+          <a:ext cx="0" cy="0"/>
+          <a:chOff x="0" y="0"/>
+          <a:chExt cx="0" cy="0"/>
+        </a:xfrm>
+      </p:grpSpPr>
+      <p:sp>
+        <p:nvSpPr>
+          <p:cNvPr id="2" name="Slide Image Placeholder 1"/>
+          <p:cNvSpPr>
+            <a:spLocks noGrp="1" noRot="1" noChangeAspect="1"/>
+          </p:cNvSpPr>
+          <p:nvPr>
+            <p:ph type="sldImg"/>
+          </p:nvPr>
+        </p:nvSpPr>
+        <p:spPr/>
+      </p:sp>
+      <p:sp>
+        <p:nvSpPr>
+          <p:cNvPr id="3" name="Notes Placeholder 2"/>
+          <p:cNvSpPr>
+            <a:spLocks noGrp="1"/>
+          </p:cNvSpPr>
+          <p:nvPr>
+            <p:ph type="body" idx="1"/>
+          </p:nvPr>
+        </p:nvSpPr>
+        <p:spPr/>
+        <p:txBody>
+          <a:bodyPr/>
+          <a:lstStyle/>
+          <a:p>
+            <a:r>
+              <a:rPr lang="en-US" dirty="0"/>
+              <a:t>Then run the pre-publish check in brand-brain/03-guardrails.md.</a:t>
+            </a:r>
+            <a:endParaRPr lang="en-US" dirty="0"/>
+          </a:p>
+        </p:txBody>
+      </p:sp>
+      <p:sp>
+        <p:nvSpPr>
+          <p:cNvPr id="4" name="Slide Number Placeholder 3"/>
+          <p:cNvSpPr>
+            <a:spLocks noGrp="1"/>
+          </p:cNvSpPr>
+          <p:nvPr>
+            <p:ph type="sldNum" sz="quarter" idx="10"/>
+          </p:nvPr>
+        </p:nvSpPr>
+        <p:spPr/>
+        <p:txBody>
+          <a:bodyPr/>
+          <a:lstStyle/>
+          <a:p>
+            <a:fld id="{F7021451-1387-4CA6-816F-3879F97B5CBC}" type="slidenum">
+              <a:rPr lang="en-US"/>
+              <a:t>16</a:t>
             </a:fld>
             <a:endParaRPr lang="en-US"/>
           </a:p>
@@ -1704,7 +1794,7 @@
           <a:p>
             <a:r>
               <a:rPr lang="en-US" dirty="0"/>
-              <a:t>Built from the confirmed Partner Mode data rules ('That trust is the brand — Say what you really think only works if people are safe to do so') and the promises from the October deck's 'Three layers of insight'.</a:t>
+              <a:t>New slide, 16 October: the benefits for wine businesses, from the app as built to 15 October 2026 (Event Mode prototype: visitor and organiser screens, stand QR cards, one question per wine, crowning and prize draw). Producer totals are recorded but the screen that shows them is not built yet. Contacts follow the proposed Brand Brain rule: one tick box per producer, never pre-ticked, no opinions attached. Event Mode's stage is still to confirm, so this slide is draft-only.</a:t>
             </a:r>
             <a:endParaRPr lang="en-US" dirty="0"/>
           </a:p>
@@ -1792,7 +1882,7 @@
           <a:p>
             <a:r>
               <a:rPr lang="en-US" dirty="0"/>
-              <a:t>'Hosted Entre Amis Table' is now 'a small Entre Amis corner', in line with how Entre Amis shows up at events.</a:t>
+              <a:t>Built from the confirmed Partner Mode data rules ('That trust is the brand — Say what you really think only works if people are safe to do so') and the promises from the October deck's 'Three layers of insight'.</a:t>
             </a:r>
             <a:endParaRPr lang="en-US" dirty="0"/>
           </a:p>
@@ -2781,7 +2871,7 @@
                 <a:ea typeface="Raleway Light" pitchFamily="34" charset="-122"/>
                 <a:cs typeface="Raleway Light" pitchFamily="34" charset="-120"/>
               </a:rPr>
-              <a:t>A founding partnership, not exclusivity</a:t>
+              <a:t>What a partnership might include</a:t>
             </a:r>
             <a:endParaRPr lang="en-US" sz="3600" dirty="0"/>
           </a:p>
@@ -2822,7 +2912,7 @@
                 <a:ea typeface="Raleway Light" pitchFamily="34" charset="-122"/>
                 <a:cs typeface="Raleway Light" pitchFamily="34" charset="-120"/>
               </a:rPr>
-              <a:t>Help shape the future of the Entre Amis event experience.</a:t>
+              <a:t>A possible year-round relationship across your events.</a:t>
             </a:r>
             <a:endParaRPr lang="en-US" sz="1800" dirty="0"/>
           </a:p>
@@ -2873,18 +2963,18 @@
       </p:sp>
       <p:sp>
         <p:nvSpPr>
-          <p:cNvPr id="5" name="Founding: FOUNDING EXPERIENCE PARTNER"/>
+          <p:cNvPr id="5" name="Card: DIGITAL"/>
           <p:cNvSpPr/>
           <p:nvPr/>
         </p:nvSpPr>
         <p:spPr>
           <a:xfrm>
             <a:off x="548640" y="1783080"/>
-            <a:ext cx="11094415" cy="896112"/>
+            <a:ext cx="3515258" cy="2194560"/>
           </a:xfrm>
           <a:prstGeom prst="roundRect">
             <a:avLst>
-              <a:gd name="adj" fmla="val 12245"/>
+              <a:gd name="adj" fmla="val 5000"/>
             </a:avLst>
           </a:prstGeom>
           <a:solidFill>
@@ -2913,8 +3003,8 @@
         </p:nvSpPr>
         <p:spPr>
           <a:xfrm>
-            <a:off x="822960" y="1783080"/>
-            <a:ext cx="3291840" cy="896112"/>
+            <a:off x="777240" y="2011680"/>
+            <a:ext cx="3058058" cy="1828800"/>
           </a:xfrm>
           <a:prstGeom prst="rect">
             <a:avLst/>
@@ -2923,7 +3013,7 @@
           <a:ln/>
         </p:spPr>
         <p:txBody>
-          <a:bodyPr wrap="square" lIns="0" tIns="0" rIns="0" bIns="0" rtlCol="0" anchor="ctr"/>
+          <a:bodyPr wrap="square" lIns="0" tIns="0" rIns="0" bIns="0" rtlCol="0" anchor="t"/>
           <a:lstStyle/>
           <a:p>
             <a:pPr indent="0" marL="0">
@@ -2933,7 +3023,7 @@
               <a:buNone/>
             </a:pPr>
             <a:r>
-              <a:rPr lang="en-US" sz="1300" spc="150" kern="0" dirty="0">
+              <a:rPr lang="en-US" sz="1200" spc="150" kern="0" dirty="0">
                 <a:solidFill>
                   <a:schemeClr val="tx1"/>
                 </a:solidFill>
@@ -2941,32 +3031,10 @@
                 <a:ea typeface="Raleway SemiBold" pitchFamily="34" charset="-122"/>
                 <a:cs typeface="Raleway SemiBold" pitchFamily="34" charset="-120"/>
               </a:rPr>
-              <a:t>FOUNDING EXPERIENCE PARTNER</a:t>
-            </a:r>
-            <a:endParaRPr lang="en-US" sz="1300" dirty="0"/>
-          </a:p>
-        </p:txBody>
-      </p:sp>
-      <p:sp>
-        <p:nvSpPr>
-          <p:cNvPr id="7" name="Text 5"/>
-          <p:cNvSpPr txBox="1"/>
-          <p:nvPr/>
-        </p:nvSpPr>
-        <p:spPr>
-          <a:xfrm>
-            <a:off x="4297680" y="1783080"/>
-            <a:ext cx="7071055" cy="896112"/>
-          </a:xfrm>
-          <a:prstGeom prst="rect">
-            <a:avLst/>
-          </a:prstGeom>
-          <a:noFill/>
-          <a:ln/>
-        </p:spPr>
-        <p:txBody>
-          <a:bodyPr wrap="square" lIns="0" tIns="0" rIns="0" bIns="0" rtlCol="0" anchor="ctr"/>
-          <a:lstStyle/>
+              <a:t>DIGITAL</a:t>
+            </a:r>
+            <a:endParaRPr lang="en-US" sz="1500" dirty="0"/>
+          </a:p>
           <a:p>
             <a:pPr indent="0" marL="0">
               <a:spcAft>
@@ -2975,12 +3043,29 @@
               <a:buNone/>
             </a:pPr>
             <a:r>
+              <a:rPr lang="en-US" sz="600" dirty="0">
+                <a:solidFill>
+                  <a:schemeClr val="tx1"/>
+                </a:solidFill>
+              </a:rPr>
+              <a:t> </a:t>
+            </a:r>
+            <a:endParaRPr lang="en-US" sz="1500" dirty="0"/>
+          </a:p>
+          <a:p>
+            <a:pPr indent="0" marL="0">
+              <a:spcAft>
+                <a:spcPts val="400"/>
+              </a:spcAft>
+              <a:buNone/>
+            </a:pPr>
+            <a:r>
               <a:rPr lang="en-US" sz="1500" dirty="0">
                 <a:solidFill>
                   <a:schemeClr val="tx1"/>
                 </a:solidFill>
               </a:rPr>
-              <a:t>Co-design input, launch recognition, a set-up tailored to your event and a shared post-event learning review.</a:t>
+              <a:t>The visitor experience, your producers' content, saved discoveries, polls, consent journeys and reporting.</a:t>
             </a:r>
             <a:endParaRPr lang="en-US" sz="1500" dirty="0"/>
           </a:p>
@@ -2988,18 +3073,18 @@
       </p:sp>
       <p:sp>
         <p:nvSpPr>
-          <p:cNvPr id="8" name="Founding: TWO-YEAR INSIGHT BENEFIT"/>
+          <p:cNvPr id="7" name="Card: AT THE EVENT"/>
           <p:cNvSpPr/>
           <p:nvPr/>
         </p:nvSpPr>
         <p:spPr>
           <a:xfrm>
-            <a:off x="548640" y="2807208"/>
-            <a:ext cx="11094415" cy="896112"/>
+            <a:off x="4338218" y="1783080"/>
+            <a:ext cx="3515258" cy="2194560"/>
           </a:xfrm>
           <a:prstGeom prst="roundRect">
             <a:avLst>
-              <a:gd name="adj" fmla="val 12245"/>
+              <a:gd name="adj" fmla="val 5000"/>
             </a:avLst>
           </a:prstGeom>
           <a:solidFill>
@@ -3022,14 +3107,14 @@
       </p:sp>
       <p:sp>
         <p:nvSpPr>
-          <p:cNvPr id="9" name="Text 7"/>
+          <p:cNvPr id="8" name="Text 6"/>
           <p:cNvSpPr txBox="1"/>
           <p:nvPr/>
         </p:nvSpPr>
         <p:spPr>
           <a:xfrm>
-            <a:off x="822960" y="2807208"/>
-            <a:ext cx="3291840" cy="896112"/>
+            <a:off x="4566818" y="2011680"/>
+            <a:ext cx="3058058" cy="1828800"/>
           </a:xfrm>
           <a:prstGeom prst="rect">
             <a:avLst/>
@@ -3038,7 +3123,7 @@
           <a:ln/>
         </p:spPr>
         <p:txBody>
-          <a:bodyPr wrap="square" lIns="0" tIns="0" rIns="0" bIns="0" rtlCol="0" anchor="ctr"/>
+          <a:bodyPr wrap="square" lIns="0" tIns="0" rIns="0" bIns="0" rtlCol="0" anchor="t"/>
           <a:lstStyle/>
           <a:p>
             <a:pPr indent="0" marL="0">
@@ -3048,7 +3133,7 @@
               <a:buNone/>
             </a:pPr>
             <a:r>
-              <a:rPr lang="en-US" sz="1300" spc="150" kern="0" dirty="0">
+              <a:rPr lang="en-US" sz="1200" spc="150" kern="0" dirty="0">
                 <a:solidFill>
                   <a:schemeClr val="tx1"/>
                 </a:solidFill>
@@ -3056,32 +3141,10 @@
                 <a:ea typeface="Raleway SemiBold" pitchFamily="34" charset="-122"/>
                 <a:cs typeface="Raleway SemiBold" pitchFamily="34" charset="-120"/>
               </a:rPr>
-              <a:t>TWO-YEAR INSIGHT BENEFIT</a:t>
-            </a:r>
-            <a:endParaRPr lang="en-US" sz="1300" dirty="0"/>
-          </a:p>
-        </p:txBody>
-      </p:sp>
-      <p:sp>
-        <p:nvSpPr>
-          <p:cNvPr id="10" name="Text 8"/>
-          <p:cNvSpPr txBox="1"/>
-          <p:nvPr/>
-        </p:nvSpPr>
-        <p:spPr>
-          <a:xfrm>
-            <a:off x="4297680" y="2807208"/>
-            <a:ext cx="7071055" cy="896112"/>
-          </a:xfrm>
-          <a:prstGeom prst="rect">
-            <a:avLst/>
-          </a:prstGeom>
-          <a:noFill/>
-          <a:ln/>
-        </p:spPr>
-        <p:txBody>
-          <a:bodyPr wrap="square" lIns="0" tIns="0" rIns="0" bIns="0" rtlCol="0" anchor="ctr"/>
-          <a:lstStyle/>
+              <a:t>AT THE EVENT</a:t>
+            </a:r>
+            <a:endParaRPr lang="en-US" sz="1500" dirty="0"/>
+          </a:p>
           <a:p>
             <a:pPr indent="0" marL="0">
               <a:spcAft>
@@ -3090,12 +3153,29 @@
               <a:buNone/>
             </a:pPr>
             <a:r>
+              <a:rPr lang="en-US" sz="600" dirty="0">
+                <a:solidFill>
+                  <a:schemeClr val="tx1"/>
+                </a:solidFill>
+              </a:rPr>
+              <a:t> </a:t>
+            </a:r>
+            <a:endParaRPr lang="en-US" sz="1500" dirty="0"/>
+          </a:p>
+          <a:p>
+            <a:pPr indent="0" marL="0">
+              <a:spcAft>
+                <a:spcPts val="400"/>
+              </a:spcAft>
+              <a:buNone/>
+            </a:pPr>
+            <a:r>
               <a:rPr lang="en-US" sz="1500" dirty="0">
                 <a:solidFill>
                   <a:schemeClr val="tx1"/>
                 </a:solidFill>
               </a:rPr>
-              <a:t>Enhanced reporting and strategic insight conversations, within agreed deliverables and data-quality thresholds.</a:t>
+              <a:t>A small Entre Amis corner and scheduled moments on your main screen, fully costed.</a:t>
             </a:r>
             <a:endParaRPr lang="en-US" sz="1500" dirty="0"/>
           </a:p>
@@ -3103,18 +3183,18 @@
       </p:sp>
       <p:sp>
         <p:nvSpPr>
-          <p:cNvPr id="11" name="Founding: PREFERENTIAL RATES"/>
+          <p:cNvPr id="9" name="Card: AFTER THE EVENT"/>
           <p:cNvSpPr/>
           <p:nvPr/>
         </p:nvSpPr>
         <p:spPr>
           <a:xfrm>
-            <a:off x="548640" y="3831336"/>
-            <a:ext cx="11094415" cy="896112"/>
+            <a:off x="8127797" y="1783080"/>
+            <a:ext cx="3515258" cy="2194560"/>
           </a:xfrm>
           <a:prstGeom prst="roundRect">
             <a:avLst>
-              <a:gd name="adj" fmla="val 12245"/>
+              <a:gd name="adj" fmla="val 5000"/>
             </a:avLst>
           </a:prstGeom>
           <a:solidFill>
@@ -3137,14 +3217,14 @@
       </p:sp>
       <p:sp>
         <p:nvSpPr>
-          <p:cNvPr id="12" name="Text 10"/>
+          <p:cNvPr id="10" name="Text 8"/>
           <p:cNvSpPr txBox="1"/>
           <p:nvPr/>
         </p:nvSpPr>
         <p:spPr>
           <a:xfrm>
-            <a:off x="822960" y="3831336"/>
-            <a:ext cx="3291840" cy="896112"/>
+            <a:off x="8356397" y="2011680"/>
+            <a:ext cx="3058058" cy="1828800"/>
           </a:xfrm>
           <a:prstGeom prst="rect">
             <a:avLst/>
@@ -3153,7 +3233,7 @@
           <a:ln/>
         </p:spPr>
         <p:txBody>
-          <a:bodyPr wrap="square" lIns="0" tIns="0" rIns="0" bIns="0" rtlCol="0" anchor="ctr"/>
+          <a:bodyPr wrap="square" lIns="0" tIns="0" rIns="0" bIns="0" rtlCol="0" anchor="t"/>
           <a:lstStyle/>
           <a:p>
             <a:pPr indent="0" marL="0">
@@ -3163,7 +3243,7 @@
               <a:buNone/>
             </a:pPr>
             <a:r>
-              <a:rPr lang="en-US" sz="1300" spc="150" kern="0" dirty="0">
+              <a:rPr lang="en-US" sz="1200" spc="150" kern="0" dirty="0">
                 <a:solidFill>
                   <a:schemeClr val="tx1"/>
                 </a:solidFill>
@@ -3171,61 +3251,56 @@
                 <a:ea typeface="Raleway SemiBold" pitchFamily="34" charset="-122"/>
                 <a:cs typeface="Raleway SemiBold" pitchFamily="34" charset="-120"/>
               </a:rPr>
-              <a:t>PREFERENTIAL RATES</a:t>
-            </a:r>
-            <a:endParaRPr lang="en-US" sz="1300" dirty="0"/>
-          </a:p>
-        </p:txBody>
-      </p:sp>
-      <p:sp>
-        <p:nvSpPr>
-          <p:cNvPr id="13" name="Text 11"/>
+              <a:t>AFTER THE EVENT</a:t>
+            </a:r>
+            <a:endParaRPr lang="en-US" sz="1500" dirty="0"/>
+          </a:p>
+          <a:p>
+            <a:pPr indent="0" marL="0">
+              <a:spcAft>
+                <a:spcPts val="400"/>
+              </a:spcAft>
+              <a:buNone/>
+            </a:pPr>
+            <a:r>
+              <a:rPr lang="en-US" sz="600" dirty="0">
+                <a:solidFill>
+                  <a:schemeClr val="tx1"/>
+                </a:solidFill>
+              </a:rPr>
+              <a:t> </a:t>
+            </a:r>
+            <a:endParaRPr lang="en-US" sz="1500" dirty="0"/>
+          </a:p>
+          <a:p>
+            <a:pPr indent="0" marL="0">
+              <a:spcAft>
+                <a:spcPts val="400"/>
+              </a:spcAft>
+              <a:buNone/>
+            </a:pPr>
+            <a:r>
+              <a:rPr lang="en-US" sz="1500" dirty="0">
+                <a:solidFill>
+                  <a:schemeClr val="tx1"/>
+                </a:solidFill>
+              </a:rPr>
+              <a:t>The post-event visitor experience, combined insight reports, a partner review and a potential Christmas activation.</a:t>
+            </a:r>
+            <a:endParaRPr lang="en-US" sz="1500" dirty="0"/>
+          </a:p>
+        </p:txBody>
+      </p:sp>
+      <p:sp>
+        <p:nvSpPr>
+          <p:cNvPr id="11" name="FLAG — delete before sharing"/>
           <p:cNvSpPr txBox="1"/>
           <p:nvPr/>
         </p:nvSpPr>
         <p:spPr>
           <a:xfrm>
-            <a:off x="4297680" y="3831336"/>
-            <a:ext cx="7071055" cy="896112"/>
-          </a:xfrm>
-          <a:prstGeom prst="rect">
-            <a:avLst/>
-          </a:prstGeom>
-          <a:noFill/>
-          <a:ln/>
-        </p:spPr>
-        <p:txBody>
-          <a:bodyPr wrap="square" lIns="0" tIns="0" rIns="0" bIns="0" rtlCol="0" anchor="ctr"/>
-          <a:lstStyle/>
-          <a:p>
-            <a:pPr indent="0" marL="0">
-              <a:spcAft>
-                <a:spcPts val="400"/>
-              </a:spcAft>
-              <a:buNone/>
-            </a:pPr>
-            <a:r>
-              <a:rPr lang="en-US" sz="1500" dirty="0">
-                <a:solidFill>
-                  <a:schemeClr val="tx1"/>
-                </a:solidFill>
-              </a:rPr>
-              <a:t>A preferential rate for comparable future events. Annual adjustments and wider scope agreed separately. No exclusivity.</a:t>
-            </a:r>
-            <a:endParaRPr lang="en-US" sz="1500" dirty="0"/>
-          </a:p>
-        </p:txBody>
-      </p:sp>
-      <p:sp>
-        <p:nvSpPr>
-          <p:cNvPr id="14" name="FLAG — delete before sharing"/>
-          <p:cNvSpPr txBox="1"/>
-          <p:nvPr/>
-        </p:nvSpPr>
-        <p:spPr>
-          <a:xfrm>
-            <a:off x="548640" y="4983480"/>
-            <a:ext cx="5410048" cy="731520"/>
+            <a:off x="548640" y="4251960"/>
+            <a:ext cx="11094415" cy="640080"/>
           </a:xfrm>
           <a:prstGeom prst="rect">
             <a:avLst/>
@@ -3266,63 +3341,7 @@
                   <a:schemeClr val="tx1"/>
                 </a:solidFill>
               </a:rPr>
-              <a:t>Preferential rates imply pricing. Keep here, or move to the proposal?</a:t>
-            </a:r>
-            <a:endParaRPr lang="en-US" sz="1100" dirty="0"/>
-          </a:p>
-        </p:txBody>
-      </p:sp>
-      <p:sp>
-        <p:nvSpPr>
-          <p:cNvPr id="15" name="FLAG — delete before sharing"/>
-          <p:cNvSpPr txBox="1"/>
-          <p:nvPr/>
-        </p:nvSpPr>
-        <p:spPr>
-          <a:xfrm>
-            <a:off x="6233008" y="4983480"/>
-            <a:ext cx="5410048" cy="731520"/>
-          </a:xfrm>
-          <a:prstGeom prst="rect">
-            <a:avLst/>
-          </a:prstGeom>
-          <a:solidFill>
-            <a:schemeClr val="bg1"/>
-          </a:solidFill>
-          <a:ln w="25400">
-            <a:solidFill>
-              <a:schemeClr val="accent4"/>
-            </a:solidFill>
-          </a:ln>
-        </p:spPr>
-        <p:txBody>
-          <a:bodyPr wrap="square" lIns="38100" tIns="76200" rIns="76200" bIns="38100" rtlCol="0" anchor="ctr"/>
-          <a:lstStyle/>
-          <a:p>
-            <a:pPr indent="0" marL="0">
-              <a:buNone/>
-            </a:pPr>
-            <a:r>
-              <a:rPr lang="en-US" sz="1100" dirty="0">
-                <a:solidFill>
-                  <a:schemeClr val="tx1"/>
-                </a:solidFill>
-                <a:latin typeface="Raleway SemiBold" pitchFamily="34" charset="0"/>
-                <a:ea typeface="Raleway SemiBold" pitchFamily="34" charset="-122"/>
-                <a:cs typeface="Raleway SemiBold" pitchFamily="34" charset="-120"/>
-              </a:rPr>
-              <a:t>TO DECIDE  </a:t>
-            </a:r>
-            <a:pPr indent="0" marL="0">
-              <a:buNone/>
-            </a:pPr>
-            <a:r>
-              <a:rPr lang="en-US" sz="1100" dirty="0">
-                <a:solidFill>
-                  <a:schemeClr val="tx1"/>
-                </a:solidFill>
-              </a:rPr>
-              <a:t>'Launch recognition': confirm what is launching, and when.</a:t>
+              <a:t>The indicative price line is removed: nothing may be priced until confirmed. Pricing belongs in each organiser's proposal.</a:t>
             </a:r>
             <a:endParaRPr lang="en-US" sz="1100" dirty="0"/>
           </a:p>
@@ -3436,7 +3455,7 @@
                 <a:ea typeface="Raleway Light" pitchFamily="34" charset="-122"/>
                 <a:cs typeface="Raleway Light" pitchFamily="34" charset="-120"/>
               </a:rPr>
-              <a:t>How we'll show it working</a:t>
+              <a:t>A founding partnership, not exclusivity</a:t>
             </a:r>
             <a:endParaRPr lang="en-US" sz="3600" dirty="0"/>
           </a:p>
@@ -3477,7 +3496,7 @@
                 <a:ea typeface="Raleway Light" pitchFamily="34" charset="-122"/>
                 <a:cs typeface="Raleway Light" pitchFamily="34" charset="-120"/>
               </a:rPr>
-              <a:t>The experience and evidence first.</a:t>
+              <a:t>Help shape the future of the Entre Amis event experience.</a:t>
             </a:r>
             <a:endParaRPr lang="en-US" sz="1800" dirty="0"/>
           </a:p>
@@ -3528,18 +3547,18 @@
       </p:sp>
       <p:sp>
         <p:nvSpPr>
-          <p:cNvPr id="5" name="Card: CLICKABLE PROTOTYPE"/>
+          <p:cNvPr id="5" name="Founding: FOUNDING EXPERIENCE PARTNER"/>
           <p:cNvSpPr/>
           <p:nvPr/>
         </p:nvSpPr>
         <p:spPr>
           <a:xfrm>
             <a:off x="548640" y="1783080"/>
-            <a:ext cx="3515258" cy="2377440"/>
+            <a:ext cx="11094415" cy="896112"/>
           </a:xfrm>
           <a:prstGeom prst="roundRect">
             <a:avLst>
-              <a:gd name="adj" fmla="val 4615"/>
+              <a:gd name="adj" fmla="val 12245"/>
             </a:avLst>
           </a:prstGeom>
           <a:solidFill>
@@ -3568,8 +3587,8 @@
         </p:nvSpPr>
         <p:spPr>
           <a:xfrm>
-            <a:off x="777240" y="2011680"/>
-            <a:ext cx="3058058" cy="2011680"/>
+            <a:off x="822960" y="1783080"/>
+            <a:ext cx="3291840" cy="896112"/>
           </a:xfrm>
           <a:prstGeom prst="rect">
             <a:avLst/>
@@ -3578,7 +3597,7 @@
           <a:ln/>
         </p:spPr>
         <p:txBody>
-          <a:bodyPr wrap="square" lIns="0" tIns="0" rIns="0" bIns="0" rtlCol="0" anchor="t"/>
+          <a:bodyPr wrap="square" lIns="0" tIns="0" rIns="0" bIns="0" rtlCol="0" anchor="ctr"/>
           <a:lstStyle/>
           <a:p>
             <a:pPr indent="0" marL="0">
@@ -3588,7 +3607,7 @@
               <a:buNone/>
             </a:pPr>
             <a:r>
-              <a:rPr lang="en-US" sz="1200" spc="150" kern="0" dirty="0">
+              <a:rPr lang="en-US" sz="1300" spc="150" kern="0" dirty="0">
                 <a:solidFill>
                   <a:schemeClr val="tx1"/>
                 </a:solidFill>
@@ -3596,60 +3615,65 @@
                 <a:ea typeface="Raleway SemiBold" pitchFamily="34" charset="-122"/>
                 <a:cs typeface="Raleway SemiBold" pitchFamily="34" charset="-120"/>
               </a:rPr>
-              <a:t>CLICKABLE PROTOTYPE</a:t>
+              <a:t>FOUNDING EXPERIENCE PARTNER</a:t>
+            </a:r>
+            <a:endParaRPr lang="en-US" sz="1300" dirty="0"/>
+          </a:p>
+        </p:txBody>
+      </p:sp>
+      <p:sp>
+        <p:nvSpPr>
+          <p:cNvPr id="7" name="Text 5"/>
+          <p:cNvSpPr txBox="1"/>
+          <p:nvPr/>
+        </p:nvSpPr>
+        <p:spPr>
+          <a:xfrm>
+            <a:off x="4297680" y="1783080"/>
+            <a:ext cx="7071055" cy="896112"/>
+          </a:xfrm>
+          <a:prstGeom prst="rect">
+            <a:avLst/>
+          </a:prstGeom>
+          <a:noFill/>
+          <a:ln/>
+        </p:spPr>
+        <p:txBody>
+          <a:bodyPr wrap="square" lIns="0" tIns="0" rIns="0" bIns="0" rtlCol="0" anchor="ctr"/>
+          <a:lstStyle/>
+          <a:p>
+            <a:pPr indent="0" marL="0">
+              <a:spcAft>
+                <a:spcPts val="400"/>
+              </a:spcAft>
+              <a:buNone/>
+            </a:pPr>
+            <a:r>
+              <a:rPr lang="en-US" sz="1500" dirty="0">
+                <a:solidFill>
+                  <a:schemeClr val="tx1"/>
+                </a:solidFill>
+              </a:rPr>
+              <a:t>Co-design input, launch recognition, a set-up tailored to your event and a shared post-event learning review.</a:t>
             </a:r>
             <a:endParaRPr lang="en-US" sz="1500" dirty="0"/>
           </a:p>
-          <a:p>
-            <a:pPr indent="0" marL="0">
-              <a:spcAft>
-                <a:spcPts val="400"/>
-              </a:spcAft>
-              <a:buNone/>
-            </a:pPr>
-            <a:r>
-              <a:rPr lang="en-US" sz="600" dirty="0">
-                <a:solidFill>
-                  <a:schemeClr val="tx1"/>
-                </a:solidFill>
-              </a:rPr>
-              <a:t> </a:t>
-            </a:r>
-            <a:endParaRPr lang="en-US" sz="1500" dirty="0"/>
-          </a:p>
-          <a:p>
-            <a:pPr indent="0" marL="0">
-              <a:spcAft>
-                <a:spcPts val="400"/>
-              </a:spcAft>
-              <a:buNone/>
-            </a:pPr>
-            <a:r>
-              <a:rPr lang="en-US" sz="1500" dirty="0">
-                <a:solidFill>
-                  <a:schemeClr val="tx1"/>
-                </a:solidFill>
-              </a:rPr>
-              <a:t>Your visitors' screens: discover, Meet the Maker, tasting prompts, save, crown, join in, memories and consent.</a:t>
-            </a:r>
-            <a:endParaRPr lang="en-US" sz="1500" dirty="0"/>
-          </a:p>
-        </p:txBody>
-      </p:sp>
-      <p:sp>
-        <p:nvSpPr>
-          <p:cNvPr id="7" name="Card: EXAMPLE INSIGHT REPORT"/>
+        </p:txBody>
+      </p:sp>
+      <p:sp>
+        <p:nvSpPr>
+          <p:cNvPr id="8" name="Founding: TWO-YEAR INSIGHT BENEFIT"/>
           <p:cNvSpPr/>
           <p:nvPr/>
         </p:nvSpPr>
         <p:spPr>
           <a:xfrm>
-            <a:off x="4338218" y="1783080"/>
-            <a:ext cx="3515258" cy="2377440"/>
+            <a:off x="548640" y="2807208"/>
+            <a:ext cx="11094415" cy="896112"/>
           </a:xfrm>
           <a:prstGeom prst="roundRect">
             <a:avLst>
-              <a:gd name="adj" fmla="val 4615"/>
+              <a:gd name="adj" fmla="val 12245"/>
             </a:avLst>
           </a:prstGeom>
           <a:solidFill>
@@ -3672,14 +3696,14 @@
       </p:sp>
       <p:sp>
         <p:nvSpPr>
-          <p:cNvPr id="8" name="Text 6"/>
+          <p:cNvPr id="9" name="Text 7"/>
           <p:cNvSpPr txBox="1"/>
           <p:nvPr/>
         </p:nvSpPr>
         <p:spPr>
           <a:xfrm>
-            <a:off x="4566818" y="2011680"/>
-            <a:ext cx="3058058" cy="2011680"/>
+            <a:off x="822960" y="2807208"/>
+            <a:ext cx="3291840" cy="896112"/>
           </a:xfrm>
           <a:prstGeom prst="rect">
             <a:avLst/>
@@ -3688,7 +3712,7 @@
           <a:ln/>
         </p:spPr>
         <p:txBody>
-          <a:bodyPr wrap="square" lIns="0" tIns="0" rIns="0" bIns="0" rtlCol="0" anchor="t"/>
+          <a:bodyPr wrap="square" lIns="0" tIns="0" rIns="0" bIns="0" rtlCol="0" anchor="ctr"/>
           <a:lstStyle/>
           <a:p>
             <a:pPr indent="0" marL="0">
@@ -3698,7 +3722,7 @@
               <a:buNone/>
             </a:pPr>
             <a:r>
-              <a:rPr lang="en-US" sz="1200" spc="150" kern="0" dirty="0">
+              <a:rPr lang="en-US" sz="1300" spc="150" kern="0" dirty="0">
                 <a:solidFill>
                   <a:schemeClr val="tx1"/>
                 </a:solidFill>
@@ -3706,60 +3730,65 @@
                 <a:ea typeface="Raleway SemiBold" pitchFamily="34" charset="-122"/>
                 <a:cs typeface="Raleway SemiBold" pitchFamily="34" charset="-120"/>
               </a:rPr>
-              <a:t>EXAMPLE INSIGHT REPORT</a:t>
+              <a:t>TWO-YEAR INSIGHT BENEFIT</a:t>
+            </a:r>
+            <a:endParaRPr lang="en-US" sz="1300" dirty="0"/>
+          </a:p>
+        </p:txBody>
+      </p:sp>
+      <p:sp>
+        <p:nvSpPr>
+          <p:cNvPr id="10" name="Text 8"/>
+          <p:cNvSpPr txBox="1"/>
+          <p:nvPr/>
+        </p:nvSpPr>
+        <p:spPr>
+          <a:xfrm>
+            <a:off x="4297680" y="2807208"/>
+            <a:ext cx="7071055" cy="896112"/>
+          </a:xfrm>
+          <a:prstGeom prst="rect">
+            <a:avLst/>
+          </a:prstGeom>
+          <a:noFill/>
+          <a:ln/>
+        </p:spPr>
+        <p:txBody>
+          <a:bodyPr wrap="square" lIns="0" tIns="0" rIns="0" bIns="0" rtlCol="0" anchor="ctr"/>
+          <a:lstStyle/>
+          <a:p>
+            <a:pPr indent="0" marL="0">
+              <a:spcAft>
+                <a:spcPts val="400"/>
+              </a:spcAft>
+              <a:buNone/>
+            </a:pPr>
+            <a:r>
+              <a:rPr lang="en-US" sz="1500" dirty="0">
+                <a:solidFill>
+                  <a:schemeClr val="tx1"/>
+                </a:solidFill>
+              </a:rPr>
+              <a:t>Enhanced reporting and strategic insight conversations, within agreed deliverables and data-quality thresholds.</a:t>
             </a:r>
             <a:endParaRPr lang="en-US" sz="1500" dirty="0"/>
           </a:p>
-          <a:p>
-            <a:pPr indent="0" marL="0">
-              <a:spcAft>
-                <a:spcPts val="400"/>
-              </a:spcAft>
-              <a:buNone/>
-            </a:pPr>
-            <a:r>
-              <a:rPr lang="en-US" sz="600" dirty="0">
-                <a:solidFill>
-                  <a:schemeClr val="tx1"/>
-                </a:solidFill>
-              </a:rPr>
-              <a:t> </a:t>
-            </a:r>
-            <a:endParaRPr lang="en-US" sz="1500" dirty="0"/>
-          </a:p>
-          <a:p>
-            <a:pPr indent="0" marL="0">
-              <a:spcAft>
-                <a:spcPts val="400"/>
-              </a:spcAft>
-              <a:buNone/>
-            </a:pPr>
-            <a:r>
-              <a:rPr lang="en-US" sz="1500" dirty="0">
-                <a:solidFill>
-                  <a:schemeClr val="tx1"/>
-                </a:solidFill>
-              </a:rPr>
-              <a:t>An illustrative dashboard and post-event report. Every number tied to a real interaction.</a:t>
-            </a:r>
-            <a:endParaRPr lang="en-US" sz="1500" dirty="0"/>
-          </a:p>
-        </p:txBody>
-      </p:sp>
-      <p:sp>
-        <p:nvSpPr>
-          <p:cNvPr id="9" name="Card: FIRST EVENT PILOT"/>
+        </p:txBody>
+      </p:sp>
+      <p:sp>
+        <p:nvSpPr>
+          <p:cNvPr id="11" name="Founding: PREFERENTIAL RATES"/>
           <p:cNvSpPr/>
           <p:nvPr/>
         </p:nvSpPr>
         <p:spPr>
           <a:xfrm>
-            <a:off x="8127797" y="1783080"/>
-            <a:ext cx="3515258" cy="2377440"/>
+            <a:off x="548640" y="3831336"/>
+            <a:ext cx="11094415" cy="896112"/>
           </a:xfrm>
           <a:prstGeom prst="roundRect">
             <a:avLst>
-              <a:gd name="adj" fmla="val 4615"/>
+              <a:gd name="adj" fmla="val 12245"/>
             </a:avLst>
           </a:prstGeom>
           <a:solidFill>
@@ -3782,14 +3811,14 @@
       </p:sp>
       <p:sp>
         <p:nvSpPr>
-          <p:cNvPr id="10" name="Text 8"/>
+          <p:cNvPr id="12" name="Text 10"/>
           <p:cNvSpPr txBox="1"/>
           <p:nvPr/>
         </p:nvSpPr>
         <p:spPr>
           <a:xfrm>
-            <a:off x="8356397" y="2011680"/>
-            <a:ext cx="3058058" cy="2011680"/>
+            <a:off x="822960" y="3831336"/>
+            <a:ext cx="3291840" cy="896112"/>
           </a:xfrm>
           <a:prstGeom prst="rect">
             <a:avLst/>
@@ -3798,7 +3827,7 @@
           <a:ln/>
         </p:spPr>
         <p:txBody>
-          <a:bodyPr wrap="square" lIns="0" tIns="0" rIns="0" bIns="0" rtlCol="0" anchor="t"/>
+          <a:bodyPr wrap="square" lIns="0" tIns="0" rIns="0" bIns="0" rtlCol="0" anchor="ctr"/>
           <a:lstStyle/>
           <a:p>
             <a:pPr indent="0" marL="0">
@@ -3808,7 +3837,7 @@
               <a:buNone/>
             </a:pPr>
             <a:r>
-              <a:rPr lang="en-US" sz="1200" spc="150" kern="0" dirty="0">
+              <a:rPr lang="en-US" sz="1300" spc="150" kern="0" dirty="0">
                 <a:solidFill>
                   <a:schemeClr val="tx1"/>
                 </a:solidFill>
@@ -3816,56 +3845,61 @@
                 <a:ea typeface="Raleway SemiBold" pitchFamily="34" charset="-122"/>
                 <a:cs typeface="Raleway SemiBold" pitchFamily="34" charset="-120"/>
               </a:rPr>
-              <a:t>FIRST EVENT PILOT</a:t>
+              <a:t>PREFERENTIAL RATES</a:t>
+            </a:r>
+            <a:endParaRPr lang="en-US" sz="1300" dirty="0"/>
+          </a:p>
+        </p:txBody>
+      </p:sp>
+      <p:sp>
+        <p:nvSpPr>
+          <p:cNvPr id="13" name="Text 11"/>
+          <p:cNvSpPr txBox="1"/>
+          <p:nvPr/>
+        </p:nvSpPr>
+        <p:spPr>
+          <a:xfrm>
+            <a:off x="4297680" y="3831336"/>
+            <a:ext cx="7071055" cy="896112"/>
+          </a:xfrm>
+          <a:prstGeom prst="rect">
+            <a:avLst/>
+          </a:prstGeom>
+          <a:noFill/>
+          <a:ln/>
+        </p:spPr>
+        <p:txBody>
+          <a:bodyPr wrap="square" lIns="0" tIns="0" rIns="0" bIns="0" rtlCol="0" anchor="ctr"/>
+          <a:lstStyle/>
+          <a:p>
+            <a:pPr indent="0" marL="0">
+              <a:spcAft>
+                <a:spcPts val="400"/>
+              </a:spcAft>
+              <a:buNone/>
+            </a:pPr>
+            <a:r>
+              <a:rPr lang="en-US" sz="1500" dirty="0">
+                <a:solidFill>
+                  <a:schemeClr val="tx1"/>
+                </a:solidFill>
+              </a:rPr>
+              <a:t>A preferential rate for comparable future events. Annual adjustments and wider scope agreed separately. No exclusivity.</a:t>
             </a:r>
             <a:endParaRPr lang="en-US" sz="1500" dirty="0"/>
           </a:p>
-          <a:p>
-            <a:pPr indent="0" marL="0">
-              <a:spcAft>
-                <a:spcPts val="400"/>
-              </a:spcAft>
-              <a:buNone/>
-            </a:pPr>
-            <a:r>
-              <a:rPr lang="en-US" sz="600" dirty="0">
-                <a:solidFill>
-                  <a:schemeClr val="tx1"/>
-                </a:solidFill>
-              </a:rPr>
-              <a:t> </a:t>
-            </a:r>
-            <a:endParaRPr lang="en-US" sz="1500" dirty="0"/>
-          </a:p>
-          <a:p>
-            <a:pPr indent="0" marL="0">
-              <a:spcAft>
-                <a:spcPts val="400"/>
-              </a:spcAft>
-              <a:buNone/>
-            </a:pPr>
-            <a:r>
-              <a:rPr lang="en-US" sz="1500" dirty="0">
-                <a:solidFill>
-                  <a:schemeClr val="tx1"/>
-                </a:solidFill>
-              </a:rPr>
-              <a:t>Defined scope, costs, responsibilities, no exclusivity, and measures of success for your first event.</a:t>
-            </a:r>
-            <a:endParaRPr lang="en-US" sz="1500" dirty="0"/>
-          </a:p>
-        </p:txBody>
-      </p:sp>
-      <p:sp>
-        <p:nvSpPr>
-          <p:cNvPr id="11" name="FLAG — delete before sharing"/>
+        </p:txBody>
+      </p:sp>
+      <p:sp>
+        <p:nvSpPr>
+          <p:cNvPr id="14" name="FLAG — delete before sharing"/>
           <p:cNvSpPr txBox="1"/>
           <p:nvPr/>
         </p:nvSpPr>
         <p:spPr>
           <a:xfrm>
-            <a:off x="548640" y="4434840"/>
-            <a:ext cx="11094415" cy="640080"/>
+            <a:off x="548640" y="4983480"/>
+            <a:ext cx="5410048" cy="731520"/>
           </a:xfrm>
           <a:prstGeom prst="rect">
             <a:avLst/>
@@ -3895,7 +3929,7 @@
                 <a:ea typeface="Raleway SemiBold" pitchFamily="34" charset="-122"/>
                 <a:cs typeface="Raleway SemiBold" pitchFamily="34" charset="-120"/>
               </a:rPr>
-              <a:t>TO ADD  </a:t>
+              <a:t>TO DECIDE  </a:t>
             </a:r>
             <a:pPr indent="0" marL="0">
               <a:buNone/>
@@ -3906,7 +3940,63 @@
                   <a:schemeClr val="tx1"/>
                 </a:solidFill>
               </a:rPr>
-              <a:t>Where each of these is today (e.g. built, in progress, planned).</a:t>
+              <a:t>Preferential rates imply pricing. Keep here, or move to the proposal?</a:t>
+            </a:r>
+            <a:endParaRPr lang="en-US" sz="1100" dirty="0"/>
+          </a:p>
+        </p:txBody>
+      </p:sp>
+      <p:sp>
+        <p:nvSpPr>
+          <p:cNvPr id="15" name="FLAG — delete before sharing"/>
+          <p:cNvSpPr txBox="1"/>
+          <p:nvPr/>
+        </p:nvSpPr>
+        <p:spPr>
+          <a:xfrm>
+            <a:off x="6233008" y="4983480"/>
+            <a:ext cx="5410048" cy="731520"/>
+          </a:xfrm>
+          <a:prstGeom prst="rect">
+            <a:avLst/>
+          </a:prstGeom>
+          <a:solidFill>
+            <a:schemeClr val="bg1"/>
+          </a:solidFill>
+          <a:ln w="25400">
+            <a:solidFill>
+              <a:schemeClr val="accent4"/>
+            </a:solidFill>
+          </a:ln>
+        </p:spPr>
+        <p:txBody>
+          <a:bodyPr wrap="square" lIns="38100" tIns="76200" rIns="76200" bIns="38100" rtlCol="0" anchor="ctr"/>
+          <a:lstStyle/>
+          <a:p>
+            <a:pPr indent="0" marL="0">
+              <a:buNone/>
+            </a:pPr>
+            <a:r>
+              <a:rPr lang="en-US" sz="1100" dirty="0">
+                <a:solidFill>
+                  <a:schemeClr val="tx1"/>
+                </a:solidFill>
+                <a:latin typeface="Raleway SemiBold" pitchFamily="34" charset="0"/>
+                <a:ea typeface="Raleway SemiBold" pitchFamily="34" charset="-122"/>
+                <a:cs typeface="Raleway SemiBold" pitchFamily="34" charset="-120"/>
+              </a:rPr>
+              <a:t>TO DECIDE  </a:t>
+            </a:r>
+            <a:pPr indent="0" marL="0">
+              <a:buNone/>
+            </a:pPr>
+            <a:r>
+              <a:rPr lang="en-US" sz="1100" dirty="0">
+                <a:solidFill>
+                  <a:schemeClr val="tx1"/>
+                </a:solidFill>
+              </a:rPr>
+              <a:t>'Launch recognition': confirm what is launching, and when.</a:t>
             </a:r>
             <a:endParaRPr lang="en-US" sz="1100" dirty="0"/>
           </a:p>
@@ -4020,7 +4110,7 @@
                 <a:ea typeface="Raleway Light" pitchFamily="34" charset="-122"/>
                 <a:cs typeface="Raleway Light" pitchFamily="34" charset="-120"/>
               </a:rPr>
-              <a:t>Responsible by design</a:t>
+              <a:t>How we'll show it working</a:t>
             </a:r>
             <a:endParaRPr lang="en-US" sz="3600" dirty="0"/>
           </a:p>
@@ -4028,18 +4118,102 @@
       </p:sp>
       <p:sp>
         <p:nvSpPr>
-          <p:cNvPr id="3" name="Responsible: 18+ only."/>
+          <p:cNvPr id="3" name="Text 1"/>
           <p:cNvSpPr/>
-          <p:nvPr/>
-        </p:nvSpPr>
-        <p:spPr>
-          <a:xfrm>
-            <a:off x="548640" y="1417320"/>
-            <a:ext cx="11094415" cy="731520"/>
+          <p:nvPr>
+            <p:ph idx="103" type="body" hasCustomPrompt="1"/>
+          </p:nvPr>
+        </p:nvSpPr>
+        <p:spPr>
+          <a:xfrm>
+            <a:off x="548640" y="1115568"/>
+            <a:ext cx="11094415" cy="411480"/>
+          </a:xfrm>
+          <a:prstGeom prst="rect">
+            <a:avLst/>
+          </a:prstGeom>
+          <a:noFill/>
+          <a:ln/>
+        </p:spPr>
+        <p:txBody>
+          <a:bodyPr wrap="square" lIns="0" tIns="0" rIns="0" bIns="0" rtlCol="0" anchor="t"/>
+          <a:lstStyle/>
+          <a:p>
+            <a:pPr algn="l" indent="0" marL="0">
+              <a:buNone/>
+            </a:pPr>
+            <a:r>
+              <a:rPr lang="en-US" sz="1800" dirty="0">
+                <a:solidFill>
+                  <a:schemeClr val="tx1"/>
+                </a:solidFill>
+                <a:latin typeface="Raleway Light" pitchFamily="34" charset="0"/>
+                <a:ea typeface="Raleway Light" pitchFamily="34" charset="-122"/>
+                <a:cs typeface="Raleway Light" pitchFamily="34" charset="-120"/>
+              </a:rPr>
+              <a:t>The experience and evidence first.</a:t>
+            </a:r>
+            <a:endParaRPr lang="en-US" sz="1800" dirty="0"/>
+          </a:p>
+        </p:txBody>
+      </p:sp>
+      <p:sp>
+        <p:nvSpPr>
+          <p:cNvPr id="4" name="Expression marker: EVENT MODE"/>
+          <p:cNvSpPr txBox="1"/>
+          <p:nvPr/>
+        </p:nvSpPr>
+        <p:spPr>
+          <a:xfrm>
+            <a:off x="9265615" y="457200"/>
+            <a:ext cx="2377440" cy="384048"/>
           </a:xfrm>
           <a:prstGeom prst="roundRect">
             <a:avLst>
-              <a:gd name="adj" fmla="val 15000"/>
+              <a:gd name="adj" fmla="val 50000"/>
+            </a:avLst>
+          </a:prstGeom>
+          <a:solidFill>
+            <a:schemeClr val="accent4"/>
+          </a:solidFill>
+          <a:ln/>
+        </p:spPr>
+        <p:txBody>
+          <a:bodyPr wrap="square" lIns="0" tIns="0" rIns="0" bIns="0" rtlCol="0" anchor="ctr"/>
+          <a:lstStyle/>
+          <a:p>
+            <a:pPr algn="ctr" indent="0" marL="0">
+              <a:buNone/>
+            </a:pPr>
+            <a:r>
+              <a:rPr lang="en-US" sz="1400" spc="150" kern="0" dirty="0">
+                <a:solidFill>
+                  <a:schemeClr val="tx1"/>
+                </a:solidFill>
+                <a:latin typeface="Raleway SemiBold" pitchFamily="34" charset="0"/>
+                <a:ea typeface="Raleway SemiBold" pitchFamily="34" charset="-122"/>
+                <a:cs typeface="Raleway SemiBold" pitchFamily="34" charset="-120"/>
+              </a:rPr>
+              <a:t>EVENT MODE</a:t>
+            </a:r>
+            <a:endParaRPr lang="en-US" sz="1400" dirty="0"/>
+          </a:p>
+        </p:txBody>
+      </p:sp>
+      <p:sp>
+        <p:nvSpPr>
+          <p:cNvPr id="5" name="Card: CLICKABLE PROTOTYPE"/>
+          <p:cNvSpPr/>
+          <p:nvPr/>
+        </p:nvSpPr>
+        <p:spPr>
+          <a:xfrm>
+            <a:off x="548640" y="1783080"/>
+            <a:ext cx="3515258" cy="2377440"/>
+          </a:xfrm>
+          <a:prstGeom prst="roundRect">
+            <a:avLst>
+              <a:gd name="adj" fmla="val 4615"/>
             </a:avLst>
           </a:prstGeom>
           <a:solidFill>
@@ -4062,67 +4236,44 @@
       </p:sp>
       <p:sp>
         <p:nvSpPr>
-          <p:cNvPr id="4" name="Text 2"/>
+          <p:cNvPr id="6" name="Text 4"/>
           <p:cNvSpPr txBox="1"/>
           <p:nvPr/>
         </p:nvSpPr>
         <p:spPr>
           <a:xfrm>
-            <a:off x="777240" y="1527048"/>
-            <a:ext cx="1371600" cy="512064"/>
-          </a:xfrm>
-          <a:prstGeom prst="roundRect">
-            <a:avLst>
-              <a:gd name="adj" fmla="val 50000"/>
-            </a:avLst>
-          </a:prstGeom>
-          <a:solidFill>
-            <a:schemeClr val="tx1"/>
-          </a:solidFill>
+            <a:off x="777240" y="2011680"/>
+            <a:ext cx="3058058" cy="2011680"/>
+          </a:xfrm>
+          <a:prstGeom prst="rect">
+            <a:avLst/>
+          </a:prstGeom>
+          <a:noFill/>
           <a:ln/>
         </p:spPr>
         <p:txBody>
-          <a:bodyPr wrap="square" lIns="0" tIns="0" rIns="0" bIns="0" rtlCol="0" anchor="ctr"/>
-          <a:lstStyle/>
-          <a:p>
-            <a:pPr algn="ctr" indent="0" marL="0">
-              <a:buNone/>
-            </a:pPr>
-            <a:r>
-              <a:rPr lang="en-US" sz="1400" dirty="0">
-                <a:solidFill>
-                  <a:schemeClr val="bg2"/>
+          <a:bodyPr wrap="square" lIns="0" tIns="0" rIns="0" bIns="0" rtlCol="0" anchor="t"/>
+          <a:lstStyle/>
+          <a:p>
+            <a:pPr indent="0" marL="0">
+              <a:spcAft>
+                <a:spcPts val="400"/>
+              </a:spcAft>
+              <a:buNone/>
+            </a:pPr>
+            <a:r>
+              <a:rPr lang="en-US" sz="1200" spc="150" kern="0" dirty="0">
+                <a:solidFill>
+                  <a:schemeClr val="tx1"/>
                 </a:solidFill>
                 <a:latin typeface="Raleway SemiBold" pitchFamily="34" charset="0"/>
                 <a:ea typeface="Raleway SemiBold" pitchFamily="34" charset="-122"/>
                 <a:cs typeface="Raleway SemiBold" pitchFamily="34" charset="-120"/>
               </a:rPr>
-              <a:t>18+</a:t>
-            </a:r>
-            <a:endParaRPr lang="en-US" sz="1400" dirty="0"/>
-          </a:p>
-        </p:txBody>
-      </p:sp>
-      <p:sp>
-        <p:nvSpPr>
-          <p:cNvPr id="5" name="Text 3"/>
-          <p:cNvSpPr txBox="1"/>
-          <p:nvPr/>
-        </p:nvSpPr>
-        <p:spPr>
-          <a:xfrm>
-            <a:off x="2423160" y="1417320"/>
-            <a:ext cx="8991295" cy="731520"/>
-          </a:xfrm>
-          <a:prstGeom prst="rect">
-            <a:avLst/>
-          </a:prstGeom>
-          <a:noFill/>
-          <a:ln/>
-        </p:spPr>
-        <p:txBody>
-          <a:bodyPr wrap="square" lIns="0" tIns="0" rIns="0" bIns="0" rtlCol="0" anchor="ctr"/>
-          <a:lstStyle/>
+              <a:t>CLICKABLE PROTOTYPE</a:t>
+            </a:r>
+            <a:endParaRPr lang="en-US" sz="1500" dirty="0"/>
+          </a:p>
           <a:p>
             <a:pPr indent="0" marL="0">
               <a:spcAft>
@@ -4131,16 +4282,16 @@
               <a:buNone/>
             </a:pPr>
             <a:r>
-              <a:rPr lang="en-US" sz="1600" dirty="0">
-                <a:solidFill>
-                  <a:schemeClr val="tx1"/>
-                </a:solidFill>
-                <a:latin typeface="Raleway SemiBold" pitchFamily="34" charset="0"/>
-                <a:ea typeface="Raleway SemiBold" pitchFamily="34" charset="-122"/>
-                <a:cs typeface="Raleway SemiBold" pitchFamily="34" charset="-120"/>
-              </a:rPr>
-              <a:t>18+ only.  </a:t>
-            </a:r>
+              <a:rPr lang="en-US" sz="600" dirty="0">
+                <a:solidFill>
+                  <a:schemeClr val="tx1"/>
+                </a:solidFill>
+              </a:rPr>
+              <a:t> </a:t>
+            </a:r>
+            <a:endParaRPr lang="en-US" sz="1500" dirty="0"/>
+          </a:p>
+          <a:p>
             <a:pPr indent="0" marL="0">
               <a:spcAft>
                 <a:spcPts val="400"/>
@@ -4148,31 +4299,31 @@
               <a:buNone/>
             </a:pPr>
             <a:r>
-              <a:rPr lang="en-US" sz="1600" dirty="0">
-                <a:solidFill>
-                  <a:schemeClr val="tx1"/>
-                </a:solidFill>
-              </a:rPr>
-              <a:t>The game is clearly marked 18+, and the app has an age gate.</a:t>
-            </a:r>
-            <a:endParaRPr lang="en-US" sz="1600" dirty="0"/>
-          </a:p>
-        </p:txBody>
-      </p:sp>
-      <p:sp>
-        <p:nvSpPr>
-          <p:cNvPr id="6" name="Responsible: Never a drinking game."/>
+              <a:rPr lang="en-US" sz="1500" dirty="0">
+                <a:solidFill>
+                  <a:schemeClr val="tx1"/>
+                </a:solidFill>
+              </a:rPr>
+              <a:t>Your visitors' screens: discover, Meet the Maker, tasting prompts, save, crown, join in, memories and consent.</a:t>
+            </a:r>
+            <a:endParaRPr lang="en-US" sz="1500" dirty="0"/>
+          </a:p>
+        </p:txBody>
+      </p:sp>
+      <p:sp>
+        <p:nvSpPr>
+          <p:cNvPr id="7" name="Card: EXAMPLE INSIGHT REPORT"/>
           <p:cNvSpPr/>
           <p:nvPr/>
         </p:nvSpPr>
         <p:spPr>
           <a:xfrm>
-            <a:off x="548640" y="2313432"/>
-            <a:ext cx="11094415" cy="731520"/>
+            <a:off x="4338218" y="1783080"/>
+            <a:ext cx="3515258" cy="2377440"/>
           </a:xfrm>
           <a:prstGeom prst="roundRect">
             <a:avLst>
-              <a:gd name="adj" fmla="val 15000"/>
+              <a:gd name="adj" fmla="val 4615"/>
             </a:avLst>
           </a:prstGeom>
           <a:solidFill>
@@ -4195,67 +4346,44 @@
       </p:sp>
       <p:sp>
         <p:nvSpPr>
-          <p:cNvPr id="7" name="Text 5"/>
+          <p:cNvPr id="8" name="Text 6"/>
           <p:cNvSpPr txBox="1"/>
           <p:nvPr/>
         </p:nvSpPr>
         <p:spPr>
           <a:xfrm>
-            <a:off x="777240" y="2423160"/>
-            <a:ext cx="1371600" cy="512064"/>
-          </a:xfrm>
-          <a:prstGeom prst="roundRect">
-            <a:avLst>
-              <a:gd name="adj" fmla="val 50000"/>
-            </a:avLst>
-          </a:prstGeom>
-          <a:solidFill>
-            <a:schemeClr val="tx1"/>
-          </a:solidFill>
+            <a:off x="4566818" y="2011680"/>
+            <a:ext cx="3058058" cy="2011680"/>
+          </a:xfrm>
+          <a:prstGeom prst="rect">
+            <a:avLst/>
+          </a:prstGeom>
+          <a:noFill/>
           <a:ln/>
         </p:spPr>
         <p:txBody>
-          <a:bodyPr wrap="square" lIns="0" tIns="0" rIns="0" bIns="0" rtlCol="0" anchor="ctr"/>
-          <a:lstStyle/>
-          <a:p>
-            <a:pPr algn="ctr" indent="0" marL="0">
-              <a:buNone/>
-            </a:pPr>
-            <a:r>
-              <a:rPr lang="en-US" sz="1400" dirty="0">
-                <a:solidFill>
-                  <a:schemeClr val="bg2"/>
+          <a:bodyPr wrap="square" lIns="0" tIns="0" rIns="0" bIns="0" rtlCol="0" anchor="t"/>
+          <a:lstStyle/>
+          <a:p>
+            <a:pPr indent="0" marL="0">
+              <a:spcAft>
+                <a:spcPts val="400"/>
+              </a:spcAft>
+              <a:buNone/>
+            </a:pPr>
+            <a:r>
+              <a:rPr lang="en-US" sz="1200" spc="150" kern="0" dirty="0">
+                <a:solidFill>
+                  <a:schemeClr val="tx1"/>
                 </a:solidFill>
                 <a:latin typeface="Raleway SemiBold" pitchFamily="34" charset="0"/>
                 <a:ea typeface="Raleway SemiBold" pitchFamily="34" charset="-122"/>
                 <a:cs typeface="Raleway SemiBold" pitchFamily="34" charset="-120"/>
               </a:rPr>
-              <a:t>Corks</a:t>
-            </a:r>
-            <a:endParaRPr lang="en-US" sz="1400" dirty="0"/>
-          </a:p>
-        </p:txBody>
-      </p:sp>
-      <p:sp>
-        <p:nvSpPr>
-          <p:cNvPr id="8" name="Text 6"/>
-          <p:cNvSpPr txBox="1"/>
-          <p:nvPr/>
-        </p:nvSpPr>
-        <p:spPr>
-          <a:xfrm>
-            <a:off x="2423160" y="2313432"/>
-            <a:ext cx="8991295" cy="731520"/>
-          </a:xfrm>
-          <a:prstGeom prst="rect">
-            <a:avLst/>
-          </a:prstGeom>
-          <a:noFill/>
-          <a:ln/>
-        </p:spPr>
-        <p:txBody>
-          <a:bodyPr wrap="square" lIns="0" tIns="0" rIns="0" bIns="0" rtlCol="0" anchor="ctr"/>
-          <a:lstStyle/>
+              <a:t>EXAMPLE INSIGHT REPORT</a:t>
+            </a:r>
+            <a:endParaRPr lang="en-US" sz="1500" dirty="0"/>
+          </a:p>
           <a:p>
             <a:pPr indent="0" marL="0">
               <a:spcAft>
@@ -4264,16 +4392,16 @@
               <a:buNone/>
             </a:pPr>
             <a:r>
-              <a:rPr lang="en-US" sz="1600" dirty="0">
-                <a:solidFill>
-                  <a:schemeClr val="tx1"/>
-                </a:solidFill>
-                <a:latin typeface="Raleway SemiBold" pitchFamily="34" charset="0"/>
-                <a:ea typeface="Raleway SemiBold" pitchFamily="34" charset="-122"/>
-                <a:cs typeface="Raleway SemiBold" pitchFamily="34" charset="-120"/>
-              </a:rPr>
-              <a:t>Never a drinking game.  </a:t>
-            </a:r>
+              <a:rPr lang="en-US" sz="600" dirty="0">
+                <a:solidFill>
+                  <a:schemeClr val="tx1"/>
+                </a:solidFill>
+              </a:rPr>
+              <a:t> </a:t>
+            </a:r>
+            <a:endParaRPr lang="en-US" sz="1500" dirty="0"/>
+          </a:p>
+          <a:p>
             <a:pPr indent="0" marL="0">
               <a:spcAft>
                 <a:spcPts val="400"/>
@@ -4281,31 +4409,31 @@
               <a:buNone/>
             </a:pPr>
             <a:r>
-              <a:rPr lang="en-US" sz="1600" dirty="0">
-                <a:solidFill>
-                  <a:schemeClr val="tx1"/>
-                </a:solidFill>
-              </a:rPr>
-              <a:t>Corks are won for conversation and play, never for how much anyone drinks.</a:t>
-            </a:r>
-            <a:endParaRPr lang="en-US" sz="1600" dirty="0"/>
-          </a:p>
-        </p:txBody>
-      </p:sp>
-      <p:sp>
-        <p:nvSpPr>
-          <p:cNvPr id="9" name="Responsible: A single glass is enough."/>
+              <a:rPr lang="en-US" sz="1500" dirty="0">
+                <a:solidFill>
+                  <a:schemeClr val="tx1"/>
+                </a:solidFill>
+              </a:rPr>
+              <a:t>An illustrative dashboard and post-event report. Every number tied to a real interaction.</a:t>
+            </a:r>
+            <a:endParaRPr lang="en-US" sz="1500" dirty="0"/>
+          </a:p>
+        </p:txBody>
+      </p:sp>
+      <p:sp>
+        <p:nvSpPr>
+          <p:cNvPr id="9" name="Card: FIRST EVENT PILOT"/>
           <p:cNvSpPr/>
           <p:nvPr/>
         </p:nvSpPr>
         <p:spPr>
           <a:xfrm>
-            <a:off x="548640" y="3209544"/>
-            <a:ext cx="11094415" cy="731520"/>
+            <a:off x="8127797" y="1783080"/>
+            <a:ext cx="3515258" cy="2377440"/>
           </a:xfrm>
           <a:prstGeom prst="roundRect">
             <a:avLst>
-              <a:gd name="adj" fmla="val 15000"/>
+              <a:gd name="adj" fmla="val 4615"/>
             </a:avLst>
           </a:prstGeom>
           <a:solidFill>
@@ -4334,70 +4462,106 @@
         </p:nvSpPr>
         <p:spPr>
           <a:xfrm>
-            <a:off x="777240" y="3319272"/>
-            <a:ext cx="1371600" cy="512064"/>
-          </a:xfrm>
-          <a:prstGeom prst="roundRect">
-            <a:avLst>
-              <a:gd name="adj" fmla="val 50000"/>
-            </a:avLst>
-          </a:prstGeom>
-          <a:solidFill>
-            <a:schemeClr val="tx1"/>
-          </a:solidFill>
+            <a:off x="8356397" y="2011680"/>
+            <a:ext cx="3058058" cy="2011680"/>
+          </a:xfrm>
+          <a:prstGeom prst="rect">
+            <a:avLst/>
+          </a:prstGeom>
+          <a:noFill/>
           <a:ln/>
         </p:spPr>
         <p:txBody>
-          <a:bodyPr wrap="square" lIns="0" tIns="0" rIns="0" bIns="0" rtlCol="0" anchor="ctr"/>
-          <a:lstStyle/>
-          <a:p>
-            <a:pPr algn="ctr" indent="0" marL="0">
-              <a:buNone/>
-            </a:pPr>
-            <a:r>
-              <a:rPr lang="en-US" sz="1400" dirty="0">
-                <a:solidFill>
-                  <a:schemeClr val="bg2"/>
+          <a:bodyPr wrap="square" lIns="0" tIns="0" rIns="0" bIns="0" rtlCol="0" anchor="t"/>
+          <a:lstStyle/>
+          <a:p>
+            <a:pPr indent="0" marL="0">
+              <a:spcAft>
+                <a:spcPts val="400"/>
+              </a:spcAft>
+              <a:buNone/>
+            </a:pPr>
+            <a:r>
+              <a:rPr lang="en-US" sz="1200" spc="150" kern="0" dirty="0">
+                <a:solidFill>
+                  <a:schemeClr val="tx1"/>
                 </a:solidFill>
                 <a:latin typeface="Raleway SemiBold" pitchFamily="34" charset="0"/>
                 <a:ea typeface="Raleway SemiBold" pitchFamily="34" charset="-122"/>
                 <a:cs typeface="Raleway SemiBold" pitchFamily="34" charset="-120"/>
               </a:rPr>
-              <a:t>1 glass</a:t>
-            </a:r>
-            <a:endParaRPr lang="en-US" sz="1400" dirty="0"/>
-          </a:p>
-        </p:txBody>
-      </p:sp>
-      <p:sp>
-        <p:nvSpPr>
-          <p:cNvPr id="11" name="Text 9"/>
+              <a:t>FIRST EVENT PILOT</a:t>
+            </a:r>
+            <a:endParaRPr lang="en-US" sz="1500" dirty="0"/>
+          </a:p>
+          <a:p>
+            <a:pPr indent="0" marL="0">
+              <a:spcAft>
+                <a:spcPts val="400"/>
+              </a:spcAft>
+              <a:buNone/>
+            </a:pPr>
+            <a:r>
+              <a:rPr lang="en-US" sz="600" dirty="0">
+                <a:solidFill>
+                  <a:schemeClr val="tx1"/>
+                </a:solidFill>
+              </a:rPr>
+              <a:t> </a:t>
+            </a:r>
+            <a:endParaRPr lang="en-US" sz="1500" dirty="0"/>
+          </a:p>
+          <a:p>
+            <a:pPr indent="0" marL="0">
+              <a:spcAft>
+                <a:spcPts val="400"/>
+              </a:spcAft>
+              <a:buNone/>
+            </a:pPr>
+            <a:r>
+              <a:rPr lang="en-US" sz="1500" dirty="0">
+                <a:solidFill>
+                  <a:schemeClr val="tx1"/>
+                </a:solidFill>
+              </a:rPr>
+              <a:t>Defined scope, costs, responsibilities, no exclusivity, and measures of success for your first event.</a:t>
+            </a:r>
+            <a:endParaRPr lang="en-US" sz="1500" dirty="0"/>
+          </a:p>
+        </p:txBody>
+      </p:sp>
+      <p:sp>
+        <p:nvSpPr>
+          <p:cNvPr id="11" name="FLAG — delete before sharing"/>
           <p:cNvSpPr txBox="1"/>
           <p:nvPr/>
         </p:nvSpPr>
         <p:spPr>
           <a:xfrm>
-            <a:off x="2423160" y="3209544"/>
-            <a:ext cx="8991295" cy="731520"/>
-          </a:xfrm>
-          <a:prstGeom prst="rect">
-            <a:avLst/>
-          </a:prstGeom>
-          <a:noFill/>
-          <a:ln/>
-        </p:spPr>
-        <p:txBody>
-          <a:bodyPr wrap="square" lIns="0" tIns="0" rIns="0" bIns="0" rtlCol="0" anchor="ctr"/>
-          <a:lstStyle/>
-          <a:p>
-            <a:pPr indent="0" marL="0">
-              <a:spcAft>
-                <a:spcPts val="400"/>
-              </a:spcAft>
-              <a:buNone/>
-            </a:pPr>
-            <a:r>
-              <a:rPr lang="en-US" sz="1600" dirty="0">
+            <a:off x="548640" y="4434840"/>
+            <a:ext cx="11094415" cy="777240"/>
+          </a:xfrm>
+          <a:prstGeom prst="rect">
+            <a:avLst/>
+          </a:prstGeom>
+          <a:solidFill>
+            <a:schemeClr val="bg1"/>
+          </a:solidFill>
+          <a:ln w="25400">
+            <a:solidFill>
+              <a:schemeClr val="accent4"/>
+            </a:solidFill>
+          </a:ln>
+        </p:spPr>
+        <p:txBody>
+          <a:bodyPr wrap="square" lIns="38100" tIns="76200" rIns="76200" bIns="38100" rtlCol="0" anchor="ctr"/>
+          <a:lstStyle/>
+          <a:p>
+            <a:pPr indent="0" marL="0">
+              <a:buNone/>
+            </a:pPr>
+            <a:r>
+              <a:rPr lang="en-US" sz="1100" dirty="0">
                 <a:solidFill>
                   <a:schemeClr val="tx1"/>
                 </a:solidFill>
@@ -4405,319 +4569,20 @@
                 <a:ea typeface="Raleway SemiBold" pitchFamily="34" charset="-122"/>
                 <a:cs typeface="Raleway SemiBold" pitchFamily="34" charset="-120"/>
               </a:rPr>
-              <a:t>A single glass is enough.  </a:t>
-            </a:r>
-            <a:pPr indent="0" marL="0">
-              <a:spcAft>
-                <a:spcPts val="400"/>
-              </a:spcAft>
-              <a:buNone/>
-            </a:pPr>
-            <a:r>
-              <a:rPr lang="en-US" sz="1600" dirty="0">
-                <a:solidFill>
-                  <a:schemeClr val="tx1"/>
-                </a:solidFill>
-              </a:rPr>
-              <a:t>Any wine works.</a:t>
-            </a:r>
-            <a:endParaRPr lang="en-US" sz="1600" dirty="0"/>
-          </a:p>
-        </p:txBody>
-      </p:sp>
-      <p:sp>
-        <p:nvSpPr>
-          <p:cNvPr id="12" name="Responsible: No pressure to taste."/>
-          <p:cNvSpPr/>
-          <p:nvPr/>
-        </p:nvSpPr>
-        <p:spPr>
-          <a:xfrm>
-            <a:off x="548640" y="4105656"/>
-            <a:ext cx="11094415" cy="731520"/>
-          </a:xfrm>
-          <a:prstGeom prst="roundRect">
-            <a:avLst>
-              <a:gd name="adj" fmla="val 15000"/>
-            </a:avLst>
-          </a:prstGeom>
-          <a:solidFill>
-            <a:schemeClr val="bg1"/>
-          </a:solidFill>
-          <a:ln w="12700">
-            <a:solidFill>
-              <a:schemeClr val="bg1"/>
-            </a:solidFill>
-            <a:prstDash val="solid"/>
-          </a:ln>
-          <a:effectLst>
-            <a:outerShdw sx="100000" sy="100000" kx="0" ky="0" algn="bl" rotWithShape="0" blurRad="76200" dist="25400" dir="5400000">
-              <a:srgbClr val="565A32">
-                <a:alpha val="12000"/>
-              </a:srgbClr>
-            </a:outerShdw>
-          </a:effectLst>
-        </p:spPr>
-      </p:sp>
-      <p:sp>
-        <p:nvSpPr>
-          <p:cNvPr id="13" name="Text 11"/>
-          <p:cNvSpPr txBox="1"/>
-          <p:nvPr/>
-        </p:nvSpPr>
-        <p:spPr>
-          <a:xfrm>
-            <a:off x="777240" y="4215384"/>
-            <a:ext cx="1371600" cy="512064"/>
-          </a:xfrm>
-          <a:prstGeom prst="roundRect">
-            <a:avLst>
-              <a:gd name="adj" fmla="val 50000"/>
-            </a:avLst>
-          </a:prstGeom>
-          <a:solidFill>
-            <a:schemeClr val="tx1"/>
-          </a:solidFill>
-          <a:ln/>
-        </p:spPr>
-        <p:txBody>
-          <a:bodyPr wrap="square" lIns="0" tIns="0" rIns="0" bIns="0" rtlCol="0" anchor="ctr"/>
-          <a:lstStyle/>
-          <a:p>
-            <a:pPr algn="ctr" indent="0" marL="0">
-              <a:buNone/>
-            </a:pPr>
-            <a:r>
-              <a:rPr lang="en-US" sz="1400" dirty="0">
-                <a:solidFill>
-                  <a:schemeClr val="bg2"/>
-                </a:solidFill>
-                <a:latin typeface="Raleway SemiBold" pitchFamily="34" charset="0"/>
-                <a:ea typeface="Raleway SemiBold" pitchFamily="34" charset="-122"/>
-                <a:cs typeface="Raleway SemiBold" pitchFamily="34" charset="-120"/>
-              </a:rPr>
-              <a:t>Optional</a:t>
-            </a:r>
-            <a:endParaRPr lang="en-US" sz="1400" dirty="0"/>
-          </a:p>
-        </p:txBody>
-      </p:sp>
-      <p:sp>
-        <p:nvSpPr>
-          <p:cNvPr id="14" name="Text 12"/>
-          <p:cNvSpPr txBox="1"/>
-          <p:nvPr/>
-        </p:nvSpPr>
-        <p:spPr>
-          <a:xfrm>
-            <a:off x="2423160" y="4105656"/>
-            <a:ext cx="8991295" cy="731520"/>
-          </a:xfrm>
-          <a:prstGeom prst="rect">
-            <a:avLst/>
-          </a:prstGeom>
-          <a:noFill/>
-          <a:ln/>
-        </p:spPr>
-        <p:txBody>
-          <a:bodyPr wrap="square" lIns="0" tIns="0" rIns="0" bIns="0" rtlCol="0" anchor="ctr"/>
-          <a:lstStyle/>
-          <a:p>
-            <a:pPr indent="0" marL="0">
-              <a:spcAft>
-                <a:spcPts val="400"/>
-              </a:spcAft>
-              <a:buNone/>
-            </a:pPr>
-            <a:r>
-              <a:rPr lang="en-US" sz="1600" dirty="0">
-                <a:solidFill>
-                  <a:schemeClr val="tx1"/>
-                </a:solidFill>
-                <a:latin typeface="Raleway SemiBold" pitchFamily="34" charset="0"/>
-                <a:ea typeface="Raleway SemiBold" pitchFamily="34" charset="-122"/>
-                <a:cs typeface="Raleway SemiBold" pitchFamily="34" charset="-120"/>
-              </a:rPr>
-              <a:t>No pressure to taste.  </a:t>
-            </a:r>
-            <a:pPr indent="0" marL="0">
-              <a:spcAft>
-                <a:spcPts val="400"/>
-              </a:spcAft>
-              <a:buNone/>
-            </a:pPr>
-            <a:r>
-              <a:rPr lang="en-US" sz="1600" dirty="0">
-                <a:solidFill>
-                  <a:schemeClr val="tx1"/>
-                </a:solidFill>
-              </a:rPr>
-              <a:t>At events, tasting is always optional.</a:t>
-            </a:r>
-            <a:endParaRPr lang="en-US" sz="1600" dirty="0"/>
-          </a:p>
-        </p:txBody>
-      </p:sp>
-      <p:sp>
-        <p:nvSpPr>
-          <p:cNvPr id="15" name="Responsible: Safe to say what you think."/>
-          <p:cNvSpPr/>
-          <p:nvPr/>
-        </p:nvSpPr>
-        <p:spPr>
-          <a:xfrm>
-            <a:off x="548640" y="5001768"/>
-            <a:ext cx="11094415" cy="731520"/>
-          </a:xfrm>
-          <a:prstGeom prst="roundRect">
-            <a:avLst>
-              <a:gd name="adj" fmla="val 15000"/>
-            </a:avLst>
-          </a:prstGeom>
-          <a:solidFill>
-            <a:schemeClr val="bg1"/>
-          </a:solidFill>
-          <a:ln w="12700">
-            <a:solidFill>
-              <a:schemeClr val="bg1"/>
-            </a:solidFill>
-            <a:prstDash val="solid"/>
-          </a:ln>
-          <a:effectLst>
-            <a:outerShdw sx="100000" sy="100000" kx="0" ky="0" algn="bl" rotWithShape="0" blurRad="76200" dist="25400" dir="5400000">
-              <a:srgbClr val="565A32">
-                <a:alpha val="12000"/>
-              </a:srgbClr>
-            </a:outerShdw>
-          </a:effectLst>
-        </p:spPr>
-      </p:sp>
-      <p:sp>
-        <p:nvSpPr>
-          <p:cNvPr id="16" name="Text 14"/>
-          <p:cNvSpPr txBox="1"/>
-          <p:nvPr/>
-        </p:nvSpPr>
-        <p:spPr>
-          <a:xfrm>
-            <a:off x="777240" y="5111496"/>
-            <a:ext cx="1371600" cy="512064"/>
-          </a:xfrm>
-          <a:prstGeom prst="roundRect">
-            <a:avLst>
-              <a:gd name="adj" fmla="val 50000"/>
-            </a:avLst>
-          </a:prstGeom>
-          <a:solidFill>
-            <a:schemeClr val="tx1"/>
-          </a:solidFill>
-          <a:ln/>
-        </p:spPr>
-        <p:txBody>
-          <a:bodyPr wrap="square" lIns="0" tIns="0" rIns="0" bIns="0" rtlCol="0" anchor="ctr"/>
-          <a:lstStyle/>
-          <a:p>
-            <a:pPr algn="ctr" indent="0" marL="0">
-              <a:buNone/>
-            </a:pPr>
-            <a:r>
-              <a:rPr lang="en-US" sz="1400" dirty="0">
-                <a:solidFill>
-                  <a:schemeClr val="bg2"/>
-                </a:solidFill>
-                <a:latin typeface="Raleway SemiBold" pitchFamily="34" charset="0"/>
-                <a:ea typeface="Raleway SemiBold" pitchFamily="34" charset="-122"/>
-                <a:cs typeface="Raleway SemiBold" pitchFamily="34" charset="-120"/>
-              </a:rPr>
-              <a:t>Consent</a:t>
-            </a:r>
-            <a:endParaRPr lang="en-US" sz="1400" dirty="0"/>
-          </a:p>
-        </p:txBody>
-      </p:sp>
-      <p:sp>
-        <p:nvSpPr>
-          <p:cNvPr id="17" name="Text 15"/>
-          <p:cNvSpPr txBox="1"/>
-          <p:nvPr/>
-        </p:nvSpPr>
-        <p:spPr>
-          <a:xfrm>
-            <a:off x="2423160" y="5001768"/>
-            <a:ext cx="8991295" cy="731520"/>
-          </a:xfrm>
-          <a:prstGeom prst="rect">
-            <a:avLst/>
-          </a:prstGeom>
-          <a:noFill/>
-          <a:ln/>
-        </p:spPr>
-        <p:txBody>
-          <a:bodyPr wrap="square" lIns="0" tIns="0" rIns="0" bIns="0" rtlCol="0" anchor="ctr"/>
-          <a:lstStyle/>
-          <a:p>
-            <a:pPr indent="0" marL="0">
-              <a:spcAft>
-                <a:spcPts val="400"/>
-              </a:spcAft>
-              <a:buNone/>
-            </a:pPr>
-            <a:r>
-              <a:rPr lang="en-US" sz="1600" dirty="0">
-                <a:solidFill>
-                  <a:schemeClr val="tx1"/>
-                </a:solidFill>
-                <a:latin typeface="Raleway SemiBold" pitchFamily="34" charset="0"/>
-                <a:ea typeface="Raleway SemiBold" pitchFamily="34" charset="-122"/>
-                <a:cs typeface="Raleway SemiBold" pitchFamily="34" charset="-120"/>
-              </a:rPr>
-              <a:t>Safe to say what you think.  </a:t>
-            </a:r>
-            <a:pPr indent="0" marL="0">
-              <a:spcAft>
-                <a:spcPts val="400"/>
-              </a:spcAft>
-              <a:buNone/>
-            </a:pPr>
-            <a:r>
-              <a:rPr lang="en-US" sz="1600" dirty="0">
-                <a:solidFill>
-                  <a:schemeClr val="tx1"/>
-                </a:solidFill>
-              </a:rPr>
-              <a:t>What people say is anonymised, needs their consent, and is never sold.</a:t>
-            </a:r>
-            <a:endParaRPr lang="en-US" sz="1600" dirty="0"/>
-          </a:p>
-        </p:txBody>
-      </p:sp>
-      <p:sp>
-        <p:nvSpPr>
-          <p:cNvPr id="19" name="Text 1"/>
-          <p:cNvSpPr/>
-          <p:nvPr>
-            <p:ph idx="103" type="body" hasCustomPrompt="1"/>
-          </p:nvPr>
-        </p:nvSpPr>
-        <p:spPr>
-          <a:xfrm>
-            <a:off x="548640" y="1115568"/>
-            <a:ext cx="11094415" cy="411480"/>
-          </a:xfrm>
-          <a:prstGeom prst="rect">
-            <a:avLst/>
-          </a:prstGeom>
-          <a:noFill/>
-          <a:ln/>
-        </p:spPr>
-        <p:txBody>
-          <a:bodyPr wrap="square" lIns="0" tIns="0" rIns="0" bIns="0" rtlCol="0" anchor="t"/>
-          <a:lstStyle/>
-          <a:p>
-            <a:pPr algn="l" indent="0" marL="0">
-              <a:buNone/>
-            </a:pPr>
-            <a:endParaRPr lang="en-US" sz="1800" dirty="0"/>
+              <a:t>TO CONFIRM  </a:t>
+            </a:r>
+            <a:pPr indent="0" marL="0">
+              <a:buNone/>
+            </a:pPr>
+            <a:r>
+              <a:rPr lang="en-US" sz="1100" dirty="0">
+                <a:solidFill>
+                  <a:schemeClr val="tx1"/>
+                </a:solidFill>
+              </a:rPr>
+              <a:t>Where each is today (15 October): prototype built and working, with visitor and organiser screens and stand QR cards. Example report: totals recorded, report screen in progress. First pilot: planned. Event Mode's stage still to confirm.</a:t>
+            </a:r>
+            <a:endParaRPr lang="en-US" sz="1100" dirty="0"/>
           </a:p>
         </p:txBody>
       </p:sp>
@@ -4829,7 +4694,7 @@
                 <a:ea typeface="Raleway Light" pitchFamily="34" charset="-122"/>
                 <a:cs typeface="Raleway Light" pitchFamily="34" charset="-120"/>
               </a:rPr>
-              <a:t>Who's behind Entre Amis</a:t>
+              <a:t>Responsible by design</a:t>
             </a:r>
             <a:endParaRPr lang="en-US" sz="3600" dirty="0"/>
           </a:p>
@@ -4837,146 +4702,18 @@
       </p:sp>
       <p:sp>
         <p:nvSpPr>
-          <p:cNvPr id="3" name="Image placeholder"/>
+          <p:cNvPr id="3" name="Responsible: 18+ only."/>
           <p:cNvSpPr/>
           <p:nvPr/>
         </p:nvSpPr>
         <p:spPr>
           <a:xfrm>
-            <a:off x="548640" y="1463040"/>
-            <a:ext cx="3474720" cy="4206240"/>
+            <a:off x="548640" y="1417320"/>
+            <a:ext cx="11094415" cy="731520"/>
           </a:xfrm>
           <a:prstGeom prst="roundRect">
             <a:avLst>
-              <a:gd name="adj" fmla="val 3158"/>
-            </a:avLst>
-          </a:prstGeom>
-          <a:solidFill>
-            <a:schemeClr val="accent3"/>
-          </a:solidFill>
-          <a:ln w="12700">
-            <a:solidFill>
-              <a:schemeClr val="tx1"/>
-            </a:solidFill>
-            <a:prstDash val="dash"/>
-          </a:ln>
-        </p:spPr>
-      </p:sp>
-      <p:sp>
-        <p:nvSpPr>
-          <p:cNvPr id="4" name="Text 2"/>
-          <p:cNvSpPr txBox="1"/>
-          <p:nvPr/>
-        </p:nvSpPr>
-        <p:spPr>
-          <a:xfrm>
-            <a:off x="822960" y="1463040"/>
-            <a:ext cx="2926080" cy="4206240"/>
-          </a:xfrm>
-          <a:prstGeom prst="rect">
-            <a:avLst/>
-          </a:prstGeom>
-          <a:noFill/>
-          <a:ln/>
-        </p:spPr>
-        <p:txBody>
-          <a:bodyPr wrap="square" lIns="0" tIns="0" rIns="0" bIns="0" rtlCol="0" anchor="ctr"/>
-          <a:lstStyle/>
-          <a:p>
-            <a:pPr algn="ctr" indent="0" marL="0">
-              <a:spcAft>
-                <a:spcPts val="400"/>
-              </a:spcAft>
-              <a:buNone/>
-            </a:pPr>
-            <a:r>
-              <a:rPr lang="en-US" sz="1400" dirty="0">
-                <a:solidFill>
-                  <a:schemeClr val="tx1"/>
-                </a:solidFill>
-                <a:latin typeface="Raleway SemiBold" pitchFamily="34" charset="0"/>
-                <a:ea typeface="Raleway SemiBold" pitchFamily="34" charset="-122"/>
-                <a:cs typeface="Raleway SemiBold" pitchFamily="34" charset="-120"/>
-              </a:rPr>
-              <a:t>Photo of Caroline — to add</a:t>
-            </a:r>
-            <a:endParaRPr lang="en-US" sz="1400" dirty="0"/>
-          </a:p>
-        </p:txBody>
-      </p:sp>
-      <p:sp>
-        <p:nvSpPr>
-          <p:cNvPr id="5" name="Text 3"/>
-          <p:cNvSpPr txBox="1"/>
-          <p:nvPr/>
-        </p:nvSpPr>
-        <p:spPr>
-          <a:xfrm>
-            <a:off x="4480560" y="1463040"/>
-            <a:ext cx="7162495" cy="914400"/>
-          </a:xfrm>
-          <a:prstGeom prst="rect">
-            <a:avLst/>
-          </a:prstGeom>
-          <a:noFill/>
-          <a:ln/>
-        </p:spPr>
-        <p:txBody>
-          <a:bodyPr wrap="square" lIns="0" tIns="0" rIns="0" bIns="0" rtlCol="0" anchor="t"/>
-          <a:lstStyle/>
-          <a:p>
-            <a:pPr indent="0" marL="0">
-              <a:spcAft>
-                <a:spcPts val="400"/>
-              </a:spcAft>
-              <a:buNone/>
-            </a:pPr>
-            <a:r>
-              <a:rPr lang="en-US" sz="3200" dirty="0">
-                <a:solidFill>
-                  <a:schemeClr val="tx1"/>
-                </a:solidFill>
-              </a:rPr>
-              <a:t>Caroline [surname]</a:t>
-            </a:r>
-            <a:endParaRPr lang="en-US" sz="1400" dirty="0"/>
-          </a:p>
-          <a:p>
-            <a:pPr indent="0" marL="0">
-              <a:spcAft>
-                <a:spcPts val="400"/>
-              </a:spcAft>
-              <a:buNone/>
-            </a:pPr>
-            <a:r>
-              <a:rPr lang="en-US" sz="1400" spc="150" kern="0" dirty="0">
-                <a:solidFill>
-                  <a:schemeClr val="tx1"/>
-                </a:solidFill>
-                <a:latin typeface="Raleway SemiBold" pitchFamily="34" charset="0"/>
-                <a:ea typeface="Raleway SemiBold" pitchFamily="34" charset="-122"/>
-                <a:cs typeface="Raleway SemiBold" pitchFamily="34" charset="-120"/>
-              </a:rPr>
-              <a:t>Founder</a:t>
-            </a:r>
-            <a:endParaRPr lang="en-US" sz="1400" dirty="0"/>
-          </a:p>
-        </p:txBody>
-      </p:sp>
-      <p:sp>
-        <p:nvSpPr>
-          <p:cNvPr id="6" name="Credentials"/>
-          <p:cNvSpPr/>
-          <p:nvPr/>
-        </p:nvSpPr>
-        <p:spPr>
-          <a:xfrm>
-            <a:off x="4480560" y="2560320"/>
-            <a:ext cx="7162495" cy="1371600"/>
-          </a:xfrm>
-          <a:prstGeom prst="roundRect">
-            <a:avLst>
-              <a:gd name="adj" fmla="val 8000"/>
+              <a:gd name="adj" fmla="val 15000"/>
             </a:avLst>
           </a:prstGeom>
           <a:solidFill>
@@ -4999,14 +4736,57 @@
       </p:sp>
       <p:sp>
         <p:nvSpPr>
-          <p:cNvPr id="7" name="Text 5"/>
+          <p:cNvPr id="4" name="Text 2"/>
           <p:cNvSpPr txBox="1"/>
           <p:nvPr/>
         </p:nvSpPr>
         <p:spPr>
           <a:xfrm>
-            <a:off x="4800600" y="2743200"/>
-            <a:ext cx="6522415" cy="1097280"/>
+            <a:off x="777240" y="1527048"/>
+            <a:ext cx="1371600" cy="512064"/>
+          </a:xfrm>
+          <a:prstGeom prst="roundRect">
+            <a:avLst>
+              <a:gd name="adj" fmla="val 50000"/>
+            </a:avLst>
+          </a:prstGeom>
+          <a:solidFill>
+            <a:schemeClr val="tx1"/>
+          </a:solidFill>
+          <a:ln/>
+        </p:spPr>
+        <p:txBody>
+          <a:bodyPr wrap="square" lIns="0" tIns="0" rIns="0" bIns="0" rtlCol="0" anchor="ctr"/>
+          <a:lstStyle/>
+          <a:p>
+            <a:pPr algn="ctr" indent="0" marL="0">
+              <a:buNone/>
+            </a:pPr>
+            <a:r>
+              <a:rPr lang="en-US" sz="1400" dirty="0">
+                <a:solidFill>
+                  <a:schemeClr val="bg2"/>
+                </a:solidFill>
+                <a:latin typeface="Raleway SemiBold" pitchFamily="34" charset="0"/>
+                <a:ea typeface="Raleway SemiBold" pitchFamily="34" charset="-122"/>
+                <a:cs typeface="Raleway SemiBold" pitchFamily="34" charset="-120"/>
+              </a:rPr>
+              <a:t>18+</a:t>
+            </a:r>
+            <a:endParaRPr lang="en-US" sz="1400" dirty="0"/>
+          </a:p>
+        </p:txBody>
+      </p:sp>
+      <p:sp>
+        <p:nvSpPr>
+          <p:cNvPr id="5" name="Text 3"/>
+          <p:cNvSpPr txBox="1"/>
+          <p:nvPr/>
+        </p:nvSpPr>
+        <p:spPr>
+          <a:xfrm>
+            <a:off x="2423160" y="1417320"/>
+            <a:ext cx="8991295" cy="731520"/>
           </a:xfrm>
           <a:prstGeom prst="rect">
             <a:avLst/>
@@ -5015,200 +4795,579 @@
           <a:ln/>
         </p:spPr>
         <p:txBody>
-          <a:bodyPr wrap="square" lIns="0" tIns="0" rIns="0" bIns="0" rtlCol="0" anchor="t"/>
-          <a:lstStyle/>
-          <a:p>
-            <a:pPr marL="203200" indent="-203200">
-              <a:spcAft>
-                <a:spcPts val="1000"/>
-              </a:spcAft>
-              <a:buSzPct val="100000"/>
-              <a:buChar char="•"/>
+          <a:bodyPr wrap="square" lIns="0" tIns="0" rIns="0" bIns="0" rtlCol="0" anchor="ctr"/>
+          <a:lstStyle/>
+          <a:p>
+            <a:pPr indent="0" marL="0">
+              <a:spcAft>
+                <a:spcPts val="400"/>
+              </a:spcAft>
+              <a:buNone/>
             </a:pPr>
             <a:r>
               <a:rPr lang="en-US" sz="1600" dirty="0">
                 <a:solidFill>
                   <a:schemeClr val="tx1"/>
                 </a:solidFill>
-              </a:rPr>
-              <a:t>A marketing and commercial leader with over 30 years across UK and international brands.</a:t>
+                <a:latin typeface="Raleway SemiBold" pitchFamily="34" charset="0"/>
+                <a:ea typeface="Raleway SemiBold" pitchFamily="34" charset="-122"/>
+                <a:cs typeface="Raleway SemiBold" pitchFamily="34" charset="-120"/>
+              </a:rPr>
+              <a:t>18+ only.  </a:t>
+            </a:r>
+            <a:pPr indent="0" marL="0">
+              <a:spcAft>
+                <a:spcPts val="400"/>
+              </a:spcAft>
+              <a:buNone/>
+            </a:pPr>
+            <a:r>
+              <a:rPr lang="en-US" sz="1600" dirty="0">
+                <a:solidFill>
+                  <a:schemeClr val="tx1"/>
+                </a:solidFill>
+              </a:rPr>
+              <a:t>The game is clearly marked 18+, and the app has an age gate.</a:t>
             </a:r>
             <a:endParaRPr lang="en-US" sz="1600" dirty="0"/>
           </a:p>
-          <a:p>
-            <a:pPr marL="203200" indent="-203200">
-              <a:spcAft>
-                <a:spcPts val="400"/>
-              </a:spcAft>
-              <a:buSzPct val="100000"/>
-              <a:buChar char="•"/>
-            </a:pPr>
-            <a:r>
-              <a:rPr lang="en-US" sz="1600" dirty="0">
-                <a:solidFill>
-                  <a:schemeClr val="tx1"/>
-                </a:solidFill>
-              </a:rPr>
-              <a:t>WSET Level 3 in Wines, with Distinction.</a:t>
-            </a:r>
-            <a:endParaRPr lang="en-US" sz="1600" dirty="0"/>
-          </a:p>
-        </p:txBody>
-      </p:sp>
-      <p:sp>
-        <p:nvSpPr>
-          <p:cNvPr id="8" name="Text 6"/>
-          <p:cNvSpPr txBox="1"/>
-          <p:nvPr/>
-        </p:nvSpPr>
-        <p:spPr>
-          <a:xfrm>
-            <a:off x="4480560" y="4114800"/>
-            <a:ext cx="7162495" cy="640080"/>
-          </a:xfrm>
-          <a:prstGeom prst="rect">
-            <a:avLst/>
-          </a:prstGeom>
-          <a:noFill/>
-          <a:ln/>
-        </p:spPr>
-        <p:txBody>
-          <a:bodyPr wrap="square" lIns="0" tIns="0" rIns="0" bIns="0" rtlCol="0" anchor="t"/>
-          <a:lstStyle/>
-          <a:p>
-            <a:pPr indent="0" marL="0">
-              <a:spcAft>
-                <a:spcPts val="400"/>
-              </a:spcAft>
-              <a:buNone/>
-            </a:pPr>
-            <a:r>
-              <a:rPr lang="en-US" sz="1800" i="1" dirty="0">
-                <a:solidFill>
-                  <a:schemeClr val="tx1"/>
-                </a:solidFill>
-              </a:rPr>
-              <a:t>Entre Amis brings together Caroline's marketing experience and her focus on customers.</a:t>
-            </a:r>
-            <a:endParaRPr lang="en-US" sz="1800" dirty="0"/>
-          </a:p>
-        </p:txBody>
-      </p:sp>
-      <p:sp>
-        <p:nvSpPr>
-          <p:cNvPr id="9" name="FLAG — delete before sharing"/>
-          <p:cNvSpPr txBox="1"/>
-          <p:nvPr/>
-        </p:nvSpPr>
-        <p:spPr>
-          <a:xfrm>
-            <a:off x="4480560" y="4937760"/>
-            <a:ext cx="3444088" cy="731520"/>
-          </a:xfrm>
-          <a:prstGeom prst="rect">
-            <a:avLst/>
+        </p:txBody>
+      </p:sp>
+      <p:sp>
+        <p:nvSpPr>
+          <p:cNvPr id="6" name="Responsible: Never a drinking game."/>
+          <p:cNvSpPr/>
+          <p:nvPr/>
+        </p:nvSpPr>
+        <p:spPr>
+          <a:xfrm>
+            <a:off x="548640" y="2313432"/>
+            <a:ext cx="11094415" cy="731520"/>
+          </a:xfrm>
+          <a:prstGeom prst="roundRect">
+            <a:avLst>
+              <a:gd name="adj" fmla="val 15000"/>
+            </a:avLst>
           </a:prstGeom>
           <a:solidFill>
             <a:schemeClr val="bg1"/>
           </a:solidFill>
-          <a:ln w="25400">
+          <a:ln w="12700">
             <a:solidFill>
-              <a:schemeClr val="accent4"/>
+              <a:schemeClr val="bg1"/>
             </a:solidFill>
+            <a:prstDash val="solid"/>
           </a:ln>
-        </p:spPr>
-        <p:txBody>
-          <a:bodyPr wrap="square" lIns="38100" tIns="76200" rIns="76200" bIns="38100" rtlCol="0" anchor="ctr"/>
-          <a:lstStyle/>
-          <a:p>
-            <a:pPr indent="0" marL="0">
-              <a:buNone/>
-            </a:pPr>
-            <a:r>
-              <a:rPr lang="en-US" sz="1100" dirty="0">
-                <a:solidFill>
-                  <a:schemeClr val="tx1"/>
+          <a:effectLst>
+            <a:outerShdw sx="100000" sy="100000" kx="0" ky="0" algn="bl" rotWithShape="0" blurRad="76200" dist="25400" dir="5400000">
+              <a:srgbClr val="565A32">
+                <a:alpha val="12000"/>
+              </a:srgbClr>
+            </a:outerShdw>
+          </a:effectLst>
+        </p:spPr>
+      </p:sp>
+      <p:sp>
+        <p:nvSpPr>
+          <p:cNvPr id="7" name="Text 5"/>
+          <p:cNvSpPr txBox="1"/>
+          <p:nvPr/>
+        </p:nvSpPr>
+        <p:spPr>
+          <a:xfrm>
+            <a:off x="777240" y="2423160"/>
+            <a:ext cx="1371600" cy="512064"/>
+          </a:xfrm>
+          <a:prstGeom prst="roundRect">
+            <a:avLst>
+              <a:gd name="adj" fmla="val 50000"/>
+            </a:avLst>
+          </a:prstGeom>
+          <a:solidFill>
+            <a:schemeClr val="tx1"/>
+          </a:solidFill>
+          <a:ln/>
+        </p:spPr>
+        <p:txBody>
+          <a:bodyPr wrap="square" lIns="0" tIns="0" rIns="0" bIns="0" rtlCol="0" anchor="ctr"/>
+          <a:lstStyle/>
+          <a:p>
+            <a:pPr algn="ctr" indent="0" marL="0">
+              <a:buNone/>
+            </a:pPr>
+            <a:r>
+              <a:rPr lang="en-US" sz="1400" dirty="0">
+                <a:solidFill>
+                  <a:schemeClr val="bg2"/>
                 </a:solidFill>
                 <a:latin typeface="Raleway SemiBold" pitchFamily="34" charset="0"/>
                 <a:ea typeface="Raleway SemiBold" pitchFamily="34" charset="-122"/>
                 <a:cs typeface="Raleway SemiBold" pitchFamily="34" charset="-120"/>
               </a:rPr>
-              <a:t>TO ADD  </a:t>
-            </a:r>
-            <a:pPr indent="0" marL="0">
-              <a:buNone/>
-            </a:pPr>
-            <a:r>
-              <a:rPr lang="en-US" sz="1100" dirty="0">
-                <a:solidFill>
-                  <a:schemeClr val="tx1"/>
-                </a:solidFill>
-              </a:rPr>
-              <a:t>Your surname and a photo.</a:t>
-            </a:r>
-            <a:endParaRPr lang="en-US" sz="1100" dirty="0"/>
-          </a:p>
-        </p:txBody>
-      </p:sp>
-      <p:sp>
-        <p:nvSpPr>
-          <p:cNvPr id="10" name="FLAG — delete before sharing"/>
+              <a:t>Corks</a:t>
+            </a:r>
+            <a:endParaRPr lang="en-US" sz="1400" dirty="0"/>
+          </a:p>
+        </p:txBody>
+      </p:sp>
+      <p:sp>
+        <p:nvSpPr>
+          <p:cNvPr id="8" name="Text 6"/>
           <p:cNvSpPr txBox="1"/>
           <p:nvPr/>
         </p:nvSpPr>
         <p:spPr>
           <a:xfrm>
-            <a:off x="8198968" y="4937760"/>
-            <a:ext cx="3444088" cy="731520"/>
-          </a:xfrm>
-          <a:prstGeom prst="rect">
-            <a:avLst/>
+            <a:off x="2423160" y="2313432"/>
+            <a:ext cx="8991295" cy="731520"/>
+          </a:xfrm>
+          <a:prstGeom prst="rect">
+            <a:avLst/>
+          </a:prstGeom>
+          <a:noFill/>
+          <a:ln/>
+        </p:spPr>
+        <p:txBody>
+          <a:bodyPr wrap="square" lIns="0" tIns="0" rIns="0" bIns="0" rtlCol="0" anchor="ctr"/>
+          <a:lstStyle/>
+          <a:p>
+            <a:pPr indent="0" marL="0">
+              <a:spcAft>
+                <a:spcPts val="400"/>
+              </a:spcAft>
+              <a:buNone/>
+            </a:pPr>
+            <a:r>
+              <a:rPr lang="en-US" sz="1600" dirty="0">
+                <a:solidFill>
+                  <a:schemeClr val="tx1"/>
+                </a:solidFill>
+                <a:latin typeface="Raleway SemiBold" pitchFamily="34" charset="0"/>
+                <a:ea typeface="Raleway SemiBold" pitchFamily="34" charset="-122"/>
+                <a:cs typeface="Raleway SemiBold" pitchFamily="34" charset="-120"/>
+              </a:rPr>
+              <a:t>Never a drinking game.  </a:t>
+            </a:r>
+            <a:pPr indent="0" marL="0">
+              <a:spcAft>
+                <a:spcPts val="400"/>
+              </a:spcAft>
+              <a:buNone/>
+            </a:pPr>
+            <a:r>
+              <a:rPr lang="en-US" sz="1600" dirty="0">
+                <a:solidFill>
+                  <a:schemeClr val="tx1"/>
+                </a:solidFill>
+              </a:rPr>
+              <a:t>Corks are won for conversation and play, never for how much anyone drinks.</a:t>
+            </a:r>
+            <a:endParaRPr lang="en-US" sz="1600" dirty="0"/>
+          </a:p>
+        </p:txBody>
+      </p:sp>
+      <p:sp>
+        <p:nvSpPr>
+          <p:cNvPr id="9" name="Responsible: A single glass is enough."/>
+          <p:cNvSpPr/>
+          <p:nvPr/>
+        </p:nvSpPr>
+        <p:spPr>
+          <a:xfrm>
+            <a:off x="548640" y="3209544"/>
+            <a:ext cx="11094415" cy="731520"/>
+          </a:xfrm>
+          <a:prstGeom prst="roundRect">
+            <a:avLst>
+              <a:gd name="adj" fmla="val 15000"/>
+            </a:avLst>
           </a:prstGeom>
           <a:solidFill>
             <a:schemeClr val="bg1"/>
           </a:solidFill>
-          <a:ln w="25400">
+          <a:ln w="12700">
             <a:solidFill>
-              <a:schemeClr val="accent4"/>
+              <a:schemeClr val="bg1"/>
             </a:solidFill>
+            <a:prstDash val="solid"/>
           </a:ln>
-        </p:spPr>
-        <p:txBody>
-          <a:bodyPr wrap="square" lIns="38100" tIns="76200" rIns="76200" bIns="38100" rtlCol="0" anchor="ctr"/>
-          <a:lstStyle/>
-          <a:p>
-            <a:pPr indent="0" marL="0">
-              <a:buNone/>
-            </a:pPr>
-            <a:r>
-              <a:rPr lang="en-US" sz="1100" dirty="0">
-                <a:solidFill>
-                  <a:schemeClr val="tx1"/>
+          <a:effectLst>
+            <a:outerShdw sx="100000" sy="100000" kx="0" ky="0" algn="bl" rotWithShape="0" blurRad="76200" dist="25400" dir="5400000">
+              <a:srgbClr val="565A32">
+                <a:alpha val="12000"/>
+              </a:srgbClr>
+            </a:outerShdw>
+          </a:effectLst>
+        </p:spPr>
+      </p:sp>
+      <p:sp>
+        <p:nvSpPr>
+          <p:cNvPr id="10" name="Text 8"/>
+          <p:cNvSpPr txBox="1"/>
+          <p:nvPr/>
+        </p:nvSpPr>
+        <p:spPr>
+          <a:xfrm>
+            <a:off x="777240" y="3319272"/>
+            <a:ext cx="1371600" cy="512064"/>
+          </a:xfrm>
+          <a:prstGeom prst="roundRect">
+            <a:avLst>
+              <a:gd name="adj" fmla="val 50000"/>
+            </a:avLst>
+          </a:prstGeom>
+          <a:solidFill>
+            <a:schemeClr val="tx1"/>
+          </a:solidFill>
+          <a:ln/>
+        </p:spPr>
+        <p:txBody>
+          <a:bodyPr wrap="square" lIns="0" tIns="0" rIns="0" bIns="0" rtlCol="0" anchor="ctr"/>
+          <a:lstStyle/>
+          <a:p>
+            <a:pPr algn="ctr" indent="0" marL="0">
+              <a:buNone/>
+            </a:pPr>
+            <a:r>
+              <a:rPr lang="en-US" sz="1400" dirty="0">
+                <a:solidFill>
+                  <a:schemeClr val="bg2"/>
                 </a:solidFill>
                 <a:latin typeface="Raleway SemiBold" pitchFamily="34" charset="0"/>
                 <a:ea typeface="Raleway SemiBold" pitchFamily="34" charset="-122"/>
                 <a:cs typeface="Raleway SemiBold" pitchFamily="34" charset="-120"/>
               </a:rPr>
-              <a:t>TO ADD  </a:t>
-            </a:r>
-            <a:pPr indent="0" marL="0">
-              <a:buNone/>
-            </a:pPr>
-            <a:r>
-              <a:rPr lang="en-US" sz="1100" dirty="0">
-                <a:solidFill>
-                  <a:schemeClr val="tx1"/>
-                </a:solidFill>
-              </a:rPr>
-              <a:t>Optional: a short line in your own words.</a:t>
-            </a:r>
-            <a:endParaRPr lang="en-US" sz="1100" dirty="0"/>
-          </a:p>
-        </p:txBody>
-      </p:sp>
-      <p:sp>
-        <p:nvSpPr>
-          <p:cNvPr id="12" name="Text 1"/>
+              <a:t>1 glass</a:t>
+            </a:r>
+            <a:endParaRPr lang="en-US" sz="1400" dirty="0"/>
+          </a:p>
+        </p:txBody>
+      </p:sp>
+      <p:sp>
+        <p:nvSpPr>
+          <p:cNvPr id="11" name="Text 9"/>
+          <p:cNvSpPr txBox="1"/>
+          <p:nvPr/>
+        </p:nvSpPr>
+        <p:spPr>
+          <a:xfrm>
+            <a:off x="2423160" y="3209544"/>
+            <a:ext cx="8991295" cy="731520"/>
+          </a:xfrm>
+          <a:prstGeom prst="rect">
+            <a:avLst/>
+          </a:prstGeom>
+          <a:noFill/>
+          <a:ln/>
+        </p:spPr>
+        <p:txBody>
+          <a:bodyPr wrap="square" lIns="0" tIns="0" rIns="0" bIns="0" rtlCol="0" anchor="ctr"/>
+          <a:lstStyle/>
+          <a:p>
+            <a:pPr indent="0" marL="0">
+              <a:spcAft>
+                <a:spcPts val="400"/>
+              </a:spcAft>
+              <a:buNone/>
+            </a:pPr>
+            <a:r>
+              <a:rPr lang="en-US" sz="1600" dirty="0">
+                <a:solidFill>
+                  <a:schemeClr val="tx1"/>
+                </a:solidFill>
+                <a:latin typeface="Raleway SemiBold" pitchFamily="34" charset="0"/>
+                <a:ea typeface="Raleway SemiBold" pitchFamily="34" charset="-122"/>
+                <a:cs typeface="Raleway SemiBold" pitchFamily="34" charset="-120"/>
+              </a:rPr>
+              <a:t>A single glass is enough.  </a:t>
+            </a:r>
+            <a:pPr indent="0" marL="0">
+              <a:spcAft>
+                <a:spcPts val="400"/>
+              </a:spcAft>
+              <a:buNone/>
+            </a:pPr>
+            <a:r>
+              <a:rPr lang="en-US" sz="1600" dirty="0">
+                <a:solidFill>
+                  <a:schemeClr val="tx1"/>
+                </a:solidFill>
+              </a:rPr>
+              <a:t>Any wine works.</a:t>
+            </a:r>
+            <a:endParaRPr lang="en-US" sz="1600" dirty="0"/>
+          </a:p>
+        </p:txBody>
+      </p:sp>
+      <p:sp>
+        <p:nvSpPr>
+          <p:cNvPr id="12" name="Responsible: No pressure to taste."/>
+          <p:cNvSpPr/>
+          <p:nvPr/>
+        </p:nvSpPr>
+        <p:spPr>
+          <a:xfrm>
+            <a:off x="548640" y="4105656"/>
+            <a:ext cx="11094415" cy="731520"/>
+          </a:xfrm>
+          <a:prstGeom prst="roundRect">
+            <a:avLst>
+              <a:gd name="adj" fmla="val 15000"/>
+            </a:avLst>
+          </a:prstGeom>
+          <a:solidFill>
+            <a:schemeClr val="bg1"/>
+          </a:solidFill>
+          <a:ln w="12700">
+            <a:solidFill>
+              <a:schemeClr val="bg1"/>
+            </a:solidFill>
+            <a:prstDash val="solid"/>
+          </a:ln>
+          <a:effectLst>
+            <a:outerShdw sx="100000" sy="100000" kx="0" ky="0" algn="bl" rotWithShape="0" blurRad="76200" dist="25400" dir="5400000">
+              <a:srgbClr val="565A32">
+                <a:alpha val="12000"/>
+              </a:srgbClr>
+            </a:outerShdw>
+          </a:effectLst>
+        </p:spPr>
+      </p:sp>
+      <p:sp>
+        <p:nvSpPr>
+          <p:cNvPr id="13" name="Text 11"/>
+          <p:cNvSpPr txBox="1"/>
+          <p:nvPr/>
+        </p:nvSpPr>
+        <p:spPr>
+          <a:xfrm>
+            <a:off x="777240" y="4215384"/>
+            <a:ext cx="1371600" cy="512064"/>
+          </a:xfrm>
+          <a:prstGeom prst="roundRect">
+            <a:avLst>
+              <a:gd name="adj" fmla="val 50000"/>
+            </a:avLst>
+          </a:prstGeom>
+          <a:solidFill>
+            <a:schemeClr val="tx1"/>
+          </a:solidFill>
+          <a:ln/>
+        </p:spPr>
+        <p:txBody>
+          <a:bodyPr wrap="square" lIns="0" tIns="0" rIns="0" bIns="0" rtlCol="0" anchor="ctr"/>
+          <a:lstStyle/>
+          <a:p>
+            <a:pPr algn="ctr" indent="0" marL="0">
+              <a:buNone/>
+            </a:pPr>
+            <a:r>
+              <a:rPr lang="en-US" sz="1400" dirty="0">
+                <a:solidFill>
+                  <a:schemeClr val="bg2"/>
+                </a:solidFill>
+                <a:latin typeface="Raleway SemiBold" pitchFamily="34" charset="0"/>
+                <a:ea typeface="Raleway SemiBold" pitchFamily="34" charset="-122"/>
+                <a:cs typeface="Raleway SemiBold" pitchFamily="34" charset="-120"/>
+              </a:rPr>
+              <a:t>Optional</a:t>
+            </a:r>
+            <a:endParaRPr lang="en-US" sz="1400" dirty="0"/>
+          </a:p>
+        </p:txBody>
+      </p:sp>
+      <p:sp>
+        <p:nvSpPr>
+          <p:cNvPr id="14" name="Text 12"/>
+          <p:cNvSpPr txBox="1"/>
+          <p:nvPr/>
+        </p:nvSpPr>
+        <p:spPr>
+          <a:xfrm>
+            <a:off x="2423160" y="4105656"/>
+            <a:ext cx="8991295" cy="731520"/>
+          </a:xfrm>
+          <a:prstGeom prst="rect">
+            <a:avLst/>
+          </a:prstGeom>
+          <a:noFill/>
+          <a:ln/>
+        </p:spPr>
+        <p:txBody>
+          <a:bodyPr wrap="square" lIns="0" tIns="0" rIns="0" bIns="0" rtlCol="0" anchor="ctr"/>
+          <a:lstStyle/>
+          <a:p>
+            <a:pPr indent="0" marL="0">
+              <a:spcAft>
+                <a:spcPts val="400"/>
+              </a:spcAft>
+              <a:buNone/>
+            </a:pPr>
+            <a:r>
+              <a:rPr lang="en-US" sz="1600" dirty="0">
+                <a:solidFill>
+                  <a:schemeClr val="tx1"/>
+                </a:solidFill>
+                <a:latin typeface="Raleway SemiBold" pitchFamily="34" charset="0"/>
+                <a:ea typeface="Raleway SemiBold" pitchFamily="34" charset="-122"/>
+                <a:cs typeface="Raleway SemiBold" pitchFamily="34" charset="-120"/>
+              </a:rPr>
+              <a:t>No pressure to taste.  </a:t>
+            </a:r>
+            <a:pPr indent="0" marL="0">
+              <a:spcAft>
+                <a:spcPts val="400"/>
+              </a:spcAft>
+              <a:buNone/>
+            </a:pPr>
+            <a:r>
+              <a:rPr lang="en-US" sz="1600" dirty="0">
+                <a:solidFill>
+                  <a:schemeClr val="tx1"/>
+                </a:solidFill>
+              </a:rPr>
+              <a:t>At events, tasting is always optional.</a:t>
+            </a:r>
+            <a:endParaRPr lang="en-US" sz="1600" dirty="0"/>
+          </a:p>
+        </p:txBody>
+      </p:sp>
+      <p:sp>
+        <p:nvSpPr>
+          <p:cNvPr id="15" name="Responsible: Safe to say what you think."/>
+          <p:cNvSpPr/>
+          <p:nvPr/>
+        </p:nvSpPr>
+        <p:spPr>
+          <a:xfrm>
+            <a:off x="548640" y="5001768"/>
+            <a:ext cx="11094415" cy="731520"/>
+          </a:xfrm>
+          <a:prstGeom prst="roundRect">
+            <a:avLst>
+              <a:gd name="adj" fmla="val 15000"/>
+            </a:avLst>
+          </a:prstGeom>
+          <a:solidFill>
+            <a:schemeClr val="bg1"/>
+          </a:solidFill>
+          <a:ln w="12700">
+            <a:solidFill>
+              <a:schemeClr val="bg1"/>
+            </a:solidFill>
+            <a:prstDash val="solid"/>
+          </a:ln>
+          <a:effectLst>
+            <a:outerShdw sx="100000" sy="100000" kx="0" ky="0" algn="bl" rotWithShape="0" blurRad="76200" dist="25400" dir="5400000">
+              <a:srgbClr val="565A32">
+                <a:alpha val="12000"/>
+              </a:srgbClr>
+            </a:outerShdw>
+          </a:effectLst>
+        </p:spPr>
+      </p:sp>
+      <p:sp>
+        <p:nvSpPr>
+          <p:cNvPr id="16" name="Text 14"/>
+          <p:cNvSpPr txBox="1"/>
+          <p:nvPr/>
+        </p:nvSpPr>
+        <p:spPr>
+          <a:xfrm>
+            <a:off x="777240" y="5111496"/>
+            <a:ext cx="1371600" cy="512064"/>
+          </a:xfrm>
+          <a:prstGeom prst="roundRect">
+            <a:avLst>
+              <a:gd name="adj" fmla="val 50000"/>
+            </a:avLst>
+          </a:prstGeom>
+          <a:solidFill>
+            <a:schemeClr val="tx1"/>
+          </a:solidFill>
+          <a:ln/>
+        </p:spPr>
+        <p:txBody>
+          <a:bodyPr wrap="square" lIns="0" tIns="0" rIns="0" bIns="0" rtlCol="0" anchor="ctr"/>
+          <a:lstStyle/>
+          <a:p>
+            <a:pPr algn="ctr" indent="0" marL="0">
+              <a:buNone/>
+            </a:pPr>
+            <a:r>
+              <a:rPr lang="en-US" sz="1400" dirty="0">
+                <a:solidFill>
+                  <a:schemeClr val="bg2"/>
+                </a:solidFill>
+                <a:latin typeface="Raleway SemiBold" pitchFamily="34" charset="0"/>
+                <a:ea typeface="Raleway SemiBold" pitchFamily="34" charset="-122"/>
+                <a:cs typeface="Raleway SemiBold" pitchFamily="34" charset="-120"/>
+              </a:rPr>
+              <a:t>Consent</a:t>
+            </a:r>
+            <a:endParaRPr lang="en-US" sz="1400" dirty="0"/>
+          </a:p>
+        </p:txBody>
+      </p:sp>
+      <p:sp>
+        <p:nvSpPr>
+          <p:cNvPr id="17" name="Text 15"/>
+          <p:cNvSpPr txBox="1"/>
+          <p:nvPr/>
+        </p:nvSpPr>
+        <p:spPr>
+          <a:xfrm>
+            <a:off x="2423160" y="5001768"/>
+            <a:ext cx="8991295" cy="731520"/>
+          </a:xfrm>
+          <a:prstGeom prst="rect">
+            <a:avLst/>
+          </a:prstGeom>
+          <a:noFill/>
+          <a:ln/>
+        </p:spPr>
+        <p:txBody>
+          <a:bodyPr wrap="square" lIns="0" tIns="0" rIns="0" bIns="0" rtlCol="0" anchor="ctr"/>
+          <a:lstStyle/>
+          <a:p>
+            <a:pPr indent="0" marL="0">
+              <a:spcAft>
+                <a:spcPts val="400"/>
+              </a:spcAft>
+              <a:buNone/>
+            </a:pPr>
+            <a:r>
+              <a:rPr lang="en-US" sz="1600" dirty="0">
+                <a:solidFill>
+                  <a:schemeClr val="tx1"/>
+                </a:solidFill>
+                <a:latin typeface="Raleway SemiBold" pitchFamily="34" charset="0"/>
+                <a:ea typeface="Raleway SemiBold" pitchFamily="34" charset="-122"/>
+                <a:cs typeface="Raleway SemiBold" pitchFamily="34" charset="-120"/>
+              </a:rPr>
+              <a:t>Safe to say what you think.  </a:t>
+            </a:r>
+            <a:pPr indent="0" marL="0">
+              <a:spcAft>
+                <a:spcPts val="400"/>
+              </a:spcAft>
+              <a:buNone/>
+            </a:pPr>
+            <a:r>
+              <a:rPr lang="en-US" sz="1600" dirty="0">
+                <a:solidFill>
+                  <a:schemeClr val="tx1"/>
+                </a:solidFill>
+              </a:rPr>
+              <a:t>What people say is anonymised, needs their consent, and is never sold.</a:t>
+            </a:r>
+            <a:endParaRPr lang="en-US" sz="1600" dirty="0"/>
+          </a:p>
+        </p:txBody>
+      </p:sp>
+      <p:sp>
+        <p:nvSpPr>
+          <p:cNvPr id="19" name="Text 1"/>
           <p:cNvSpPr/>
           <p:nvPr>
             <p:ph idx="103" type="body" hasCustomPrompt="1"/>
@@ -5309,40 +5468,18 @@
           <a:chExt cx="0" cy="0"/>
         </a:xfrm>
       </p:grpSpPr>
-      <p:pic>
-        <p:nvPicPr>
-          <p:cNvPr id="2" name="Image 0" descr="Entre Amis logo">    </p:cNvPr>
-          <p:cNvPicPr>
-            <a:picLocks noChangeAspect="1"/>
-          </p:cNvPicPr>
-          <p:nvPr/>
-        </p:nvPicPr>
-        <p:blipFill>
-          <a:blip r:embed="rId1"/>
-          <a:stretch>
-            <a:fillRect/>
-          </a:stretch>
-        </p:blipFill>
-        <p:spPr>
-          <a:xfrm>
-            <a:off x="4541368" y="1828800"/>
-            <a:ext cx="3108960" cy="1564707"/>
-          </a:xfrm>
-          <a:prstGeom prst="rect">
-            <a:avLst/>
-          </a:prstGeom>
-        </p:spPr>
-      </p:pic>
-      <p:sp>
-        <p:nvSpPr>
-          <p:cNvPr id="3" name="Text 0"/>
-          <p:cNvSpPr txBox="1"/>
-          <p:nvPr/>
-        </p:nvSpPr>
-        <p:spPr>
-          <a:xfrm>
-            <a:off x="548640" y="3657600"/>
-            <a:ext cx="11094415" cy="457200"/>
+      <p:sp>
+        <p:nvSpPr>
+          <p:cNvPr id="2" name="Text 1"/>
+          <p:cNvSpPr/>
+          <p:nvPr>
+            <p:ph idx="102" type="title" hasCustomPrompt="1"/>
+          </p:nvPr>
+        </p:nvSpPr>
+        <p:spPr>
+          <a:xfrm>
+            <a:off x="548640" y="411480"/>
+            <a:ext cx="8138160" cy="685800"/>
           </a:xfrm>
           <a:prstGeom prst="rect">
             <a:avLst/>
@@ -5354,6 +5491,72 @@
           <a:bodyPr wrap="square" lIns="0" tIns="0" rIns="0" bIns="0" rtlCol="0" anchor="t"/>
           <a:lstStyle/>
           <a:p>
+            <a:pPr algn="l" indent="0" marL="0">
+              <a:buNone/>
+            </a:pPr>
+            <a:r>
+              <a:rPr lang="en-US" sz="3600" dirty="0">
+                <a:solidFill>
+                  <a:schemeClr val="tx1"/>
+                </a:solidFill>
+                <a:latin typeface="Raleway Light" pitchFamily="34" charset="0"/>
+                <a:ea typeface="Raleway Light" pitchFamily="34" charset="-122"/>
+                <a:cs typeface="Raleway Light" pitchFamily="34" charset="-120"/>
+              </a:rPr>
+              <a:t>Who's behind Entre Amis</a:t>
+            </a:r>
+            <a:endParaRPr lang="en-US" sz="3600" dirty="0"/>
+          </a:p>
+        </p:txBody>
+      </p:sp>
+      <p:sp>
+        <p:nvSpPr>
+          <p:cNvPr id="3" name="Image placeholder"/>
+          <p:cNvSpPr/>
+          <p:nvPr/>
+        </p:nvSpPr>
+        <p:spPr>
+          <a:xfrm>
+            <a:off x="548640" y="1463040"/>
+            <a:ext cx="3474720" cy="4206240"/>
+          </a:xfrm>
+          <a:prstGeom prst="roundRect">
+            <a:avLst>
+              <a:gd name="adj" fmla="val 3158"/>
+            </a:avLst>
+          </a:prstGeom>
+          <a:solidFill>
+            <a:schemeClr val="accent3"/>
+          </a:solidFill>
+          <a:ln w="12700">
+            <a:solidFill>
+              <a:schemeClr val="tx1"/>
+            </a:solidFill>
+            <a:prstDash val="dash"/>
+          </a:ln>
+        </p:spPr>
+      </p:sp>
+      <p:sp>
+        <p:nvSpPr>
+          <p:cNvPr id="4" name="Text 2"/>
+          <p:cNvSpPr txBox="1"/>
+          <p:nvPr/>
+        </p:nvSpPr>
+        <p:spPr>
+          <a:xfrm>
+            <a:off x="822960" y="1463040"/>
+            <a:ext cx="2926080" cy="4206240"/>
+          </a:xfrm>
+          <a:prstGeom prst="rect">
+            <a:avLst/>
+          </a:prstGeom>
+          <a:noFill/>
+          <a:ln/>
+        </p:spPr>
+        <p:txBody>
+          <a:bodyPr wrap="square" lIns="0" tIns="0" rIns="0" bIns="0" rtlCol="0" anchor="ctr"/>
+          <a:lstStyle/>
+          <a:p>
             <a:pPr algn="ctr" indent="0" marL="0">
               <a:spcAft>
                 <a:spcPts val="400"/>
@@ -5361,27 +5564,220 @@
               <a:buNone/>
             </a:pPr>
             <a:r>
-              <a:rPr lang="en-US" sz="2000" dirty="0">
-                <a:solidFill>
-                  <a:schemeClr val="tx1"/>
-                </a:solidFill>
-              </a:rPr>
-              <a:t>Say what you really think.</a:t>
-            </a:r>
-            <a:endParaRPr lang="en-US" sz="2000" dirty="0"/>
-          </a:p>
-        </p:txBody>
-      </p:sp>
-      <p:sp>
-        <p:nvSpPr>
-          <p:cNvPr id="4" name="FLAG — delete before sharing"/>
+              <a:rPr lang="en-US" sz="1400" dirty="0">
+                <a:solidFill>
+                  <a:schemeClr val="tx1"/>
+                </a:solidFill>
+                <a:latin typeface="Raleway SemiBold" pitchFamily="34" charset="0"/>
+                <a:ea typeface="Raleway SemiBold" pitchFamily="34" charset="-122"/>
+                <a:cs typeface="Raleway SemiBold" pitchFamily="34" charset="-120"/>
+              </a:rPr>
+              <a:t>Photo of Caroline — to add</a:t>
+            </a:r>
+            <a:endParaRPr lang="en-US" sz="1400" dirty="0"/>
+          </a:p>
+        </p:txBody>
+      </p:sp>
+      <p:sp>
+        <p:nvSpPr>
+          <p:cNvPr id="5" name="Text 3"/>
           <p:cNvSpPr txBox="1"/>
           <p:nvPr/>
         </p:nvSpPr>
         <p:spPr>
           <a:xfrm>
-            <a:off x="3809848" y="4480560"/>
-            <a:ext cx="4572000" cy="548640"/>
+            <a:off x="4480560" y="1463040"/>
+            <a:ext cx="7162495" cy="914400"/>
+          </a:xfrm>
+          <a:prstGeom prst="rect">
+            <a:avLst/>
+          </a:prstGeom>
+          <a:noFill/>
+          <a:ln/>
+        </p:spPr>
+        <p:txBody>
+          <a:bodyPr wrap="square" lIns="0" tIns="0" rIns="0" bIns="0" rtlCol="0" anchor="t"/>
+          <a:lstStyle/>
+          <a:p>
+            <a:pPr indent="0" marL="0">
+              <a:spcAft>
+                <a:spcPts val="400"/>
+              </a:spcAft>
+              <a:buNone/>
+            </a:pPr>
+            <a:r>
+              <a:rPr lang="en-US" sz="3200" dirty="0">
+                <a:solidFill>
+                  <a:schemeClr val="tx1"/>
+                </a:solidFill>
+              </a:rPr>
+              <a:t>Caroline [surname]</a:t>
+            </a:r>
+            <a:endParaRPr lang="en-US" sz="1400" dirty="0"/>
+          </a:p>
+          <a:p>
+            <a:pPr indent="0" marL="0">
+              <a:spcAft>
+                <a:spcPts val="400"/>
+              </a:spcAft>
+              <a:buNone/>
+            </a:pPr>
+            <a:r>
+              <a:rPr lang="en-US" sz="1400" spc="150" kern="0" dirty="0">
+                <a:solidFill>
+                  <a:schemeClr val="tx1"/>
+                </a:solidFill>
+                <a:latin typeface="Raleway SemiBold" pitchFamily="34" charset="0"/>
+                <a:ea typeface="Raleway SemiBold" pitchFamily="34" charset="-122"/>
+                <a:cs typeface="Raleway SemiBold" pitchFamily="34" charset="-120"/>
+              </a:rPr>
+              <a:t>Founder</a:t>
+            </a:r>
+            <a:endParaRPr lang="en-US" sz="1400" dirty="0"/>
+          </a:p>
+        </p:txBody>
+      </p:sp>
+      <p:sp>
+        <p:nvSpPr>
+          <p:cNvPr id="6" name="Credentials"/>
+          <p:cNvSpPr/>
+          <p:nvPr/>
+        </p:nvSpPr>
+        <p:spPr>
+          <a:xfrm>
+            <a:off x="4480560" y="2560320"/>
+            <a:ext cx="7162495" cy="1371600"/>
+          </a:xfrm>
+          <a:prstGeom prst="roundRect">
+            <a:avLst>
+              <a:gd name="adj" fmla="val 8000"/>
+            </a:avLst>
+          </a:prstGeom>
+          <a:solidFill>
+            <a:schemeClr val="bg1"/>
+          </a:solidFill>
+          <a:ln w="12700">
+            <a:solidFill>
+              <a:schemeClr val="bg1"/>
+            </a:solidFill>
+            <a:prstDash val="solid"/>
+          </a:ln>
+          <a:effectLst>
+            <a:outerShdw sx="100000" sy="100000" kx="0" ky="0" algn="bl" rotWithShape="0" blurRad="76200" dist="25400" dir="5400000">
+              <a:srgbClr val="565A32">
+                <a:alpha val="12000"/>
+              </a:srgbClr>
+            </a:outerShdw>
+          </a:effectLst>
+        </p:spPr>
+      </p:sp>
+      <p:sp>
+        <p:nvSpPr>
+          <p:cNvPr id="7" name="Text 5"/>
+          <p:cNvSpPr txBox="1"/>
+          <p:nvPr/>
+        </p:nvSpPr>
+        <p:spPr>
+          <a:xfrm>
+            <a:off x="4800600" y="2743200"/>
+            <a:ext cx="6522415" cy="1097280"/>
+          </a:xfrm>
+          <a:prstGeom prst="rect">
+            <a:avLst/>
+          </a:prstGeom>
+          <a:noFill/>
+          <a:ln/>
+        </p:spPr>
+        <p:txBody>
+          <a:bodyPr wrap="square" lIns="0" tIns="0" rIns="0" bIns="0" rtlCol="0" anchor="t"/>
+          <a:lstStyle/>
+          <a:p>
+            <a:pPr marL="203200" indent="-203200">
+              <a:spcAft>
+                <a:spcPts val="1000"/>
+              </a:spcAft>
+              <a:buSzPct val="100000"/>
+              <a:buChar char="•"/>
+            </a:pPr>
+            <a:r>
+              <a:rPr lang="en-US" sz="1600" dirty="0">
+                <a:solidFill>
+                  <a:schemeClr val="tx1"/>
+                </a:solidFill>
+              </a:rPr>
+              <a:t>A marketing and commercial leader with over 30 years across UK and international brands.</a:t>
+            </a:r>
+            <a:endParaRPr lang="en-US" sz="1600" dirty="0"/>
+          </a:p>
+          <a:p>
+            <a:pPr marL="203200" indent="-203200">
+              <a:spcAft>
+                <a:spcPts val="400"/>
+              </a:spcAft>
+              <a:buSzPct val="100000"/>
+              <a:buChar char="•"/>
+            </a:pPr>
+            <a:r>
+              <a:rPr lang="en-US" sz="1600" dirty="0">
+                <a:solidFill>
+                  <a:schemeClr val="tx1"/>
+                </a:solidFill>
+              </a:rPr>
+              <a:t>WSET Level 3 in Wines, with Distinction.</a:t>
+            </a:r>
+            <a:endParaRPr lang="en-US" sz="1600" dirty="0"/>
+          </a:p>
+        </p:txBody>
+      </p:sp>
+      <p:sp>
+        <p:nvSpPr>
+          <p:cNvPr id="8" name="Text 6"/>
+          <p:cNvSpPr txBox="1"/>
+          <p:nvPr/>
+        </p:nvSpPr>
+        <p:spPr>
+          <a:xfrm>
+            <a:off x="4480560" y="4114800"/>
+            <a:ext cx="7162495" cy="640080"/>
+          </a:xfrm>
+          <a:prstGeom prst="rect">
+            <a:avLst/>
+          </a:prstGeom>
+          <a:noFill/>
+          <a:ln/>
+        </p:spPr>
+        <p:txBody>
+          <a:bodyPr wrap="square" lIns="0" tIns="0" rIns="0" bIns="0" rtlCol="0" anchor="t"/>
+          <a:lstStyle/>
+          <a:p>
+            <a:pPr indent="0" marL="0">
+              <a:spcAft>
+                <a:spcPts val="400"/>
+              </a:spcAft>
+              <a:buNone/>
+            </a:pPr>
+            <a:r>
+              <a:rPr lang="en-US" sz="1800" i="1" dirty="0">
+                <a:solidFill>
+                  <a:schemeClr val="tx1"/>
+                </a:solidFill>
+              </a:rPr>
+              <a:t>Entre Amis brings together Caroline's marketing experience and her focus on customers.</a:t>
+            </a:r>
+            <a:endParaRPr lang="en-US" sz="1800" dirty="0"/>
+          </a:p>
+        </p:txBody>
+      </p:sp>
+      <p:sp>
+        <p:nvSpPr>
+          <p:cNvPr id="9" name="FLAG — delete before sharing"/>
+          <p:cNvSpPr txBox="1"/>
+          <p:nvPr/>
+        </p:nvSpPr>
+        <p:spPr>
+          <a:xfrm>
+            <a:off x="4480560" y="4937760"/>
+            <a:ext cx="3444088" cy="731520"/>
           </a:xfrm>
           <a:prstGeom prst="rect">
             <a:avLst/>
@@ -5403,7 +5799,7 @@
               <a:buNone/>
             </a:pPr>
             <a:r>
-              <a:rPr lang="en-US" sz="1200" dirty="0">
+              <a:rPr lang="en-US" sz="1100" dirty="0">
                 <a:solidFill>
                   <a:schemeClr val="tx1"/>
                 </a:solidFill>
@@ -5417,14 +5813,148 @@
               <a:buNone/>
             </a:pPr>
             <a:r>
-              <a:rPr lang="en-US" sz="1200" dirty="0">
-                <a:solidFill>
-                  <a:schemeClr val="tx1"/>
-                </a:solidFill>
-              </a:rPr>
-              <a:t>Contact details.</a:t>
-            </a:r>
-            <a:endParaRPr lang="en-US" sz="1200" dirty="0"/>
+              <a:rPr lang="en-US" sz="1100" dirty="0">
+                <a:solidFill>
+                  <a:schemeClr val="tx1"/>
+                </a:solidFill>
+              </a:rPr>
+              <a:t>Your surname and a photo.</a:t>
+            </a:r>
+            <a:endParaRPr lang="en-US" sz="1100" dirty="0"/>
+          </a:p>
+        </p:txBody>
+      </p:sp>
+      <p:sp>
+        <p:nvSpPr>
+          <p:cNvPr id="10" name="FLAG — delete before sharing"/>
+          <p:cNvSpPr txBox="1"/>
+          <p:nvPr/>
+        </p:nvSpPr>
+        <p:spPr>
+          <a:xfrm>
+            <a:off x="8198968" y="4937760"/>
+            <a:ext cx="3444088" cy="731520"/>
+          </a:xfrm>
+          <a:prstGeom prst="rect">
+            <a:avLst/>
+          </a:prstGeom>
+          <a:solidFill>
+            <a:schemeClr val="bg1"/>
+          </a:solidFill>
+          <a:ln w="25400">
+            <a:solidFill>
+              <a:schemeClr val="accent4"/>
+            </a:solidFill>
+          </a:ln>
+        </p:spPr>
+        <p:txBody>
+          <a:bodyPr wrap="square" lIns="38100" tIns="76200" rIns="76200" bIns="38100" rtlCol="0" anchor="ctr"/>
+          <a:lstStyle/>
+          <a:p>
+            <a:pPr indent="0" marL="0">
+              <a:buNone/>
+            </a:pPr>
+            <a:r>
+              <a:rPr lang="en-US" sz="1100" dirty="0">
+                <a:solidFill>
+                  <a:schemeClr val="tx1"/>
+                </a:solidFill>
+                <a:latin typeface="Raleway SemiBold" pitchFamily="34" charset="0"/>
+                <a:ea typeface="Raleway SemiBold" pitchFamily="34" charset="-122"/>
+                <a:cs typeface="Raleway SemiBold" pitchFamily="34" charset="-120"/>
+              </a:rPr>
+              <a:t>TO ADD  </a:t>
+            </a:r>
+            <a:pPr indent="0" marL="0">
+              <a:buNone/>
+            </a:pPr>
+            <a:r>
+              <a:rPr lang="en-US" sz="1100" dirty="0">
+                <a:solidFill>
+                  <a:schemeClr val="tx1"/>
+                </a:solidFill>
+              </a:rPr>
+              <a:t>Optional: a short line in your own words.</a:t>
+            </a:r>
+            <a:endParaRPr lang="en-US" sz="1100" dirty="0"/>
+          </a:p>
+        </p:txBody>
+      </p:sp>
+      <p:sp>
+        <p:nvSpPr>
+          <p:cNvPr id="12" name="Text 1"/>
+          <p:cNvSpPr/>
+          <p:nvPr>
+            <p:ph idx="103" type="body" hasCustomPrompt="1"/>
+          </p:nvPr>
+        </p:nvSpPr>
+        <p:spPr>
+          <a:xfrm>
+            <a:off x="548640" y="1115568"/>
+            <a:ext cx="11094415" cy="411480"/>
+          </a:xfrm>
+          <a:prstGeom prst="rect">
+            <a:avLst/>
+          </a:prstGeom>
+          <a:noFill/>
+          <a:ln/>
+        </p:spPr>
+        <p:txBody>
+          <a:bodyPr wrap="square" lIns="0" tIns="0" rIns="0" bIns="0" rtlCol="0" anchor="t"/>
+          <a:lstStyle/>
+          <a:p>
+            <a:pPr algn="l" indent="0" marL="0">
+              <a:buNone/>
+            </a:pPr>
+            <a:endParaRPr lang="en-US" sz="1800" dirty="0"/>
+          </a:p>
+        </p:txBody>
+      </p:sp>
+      <p:sp>
+        <p:nvSpPr>
+          <p:cNvPr id="25" name="Slide Number Placeholder 0"/>
+          <p:cNvSpPr>
+            <a:spLocks noGrp="1"/>
+          </p:cNvSpPr>
+          <p:nvPr>
+            <p:ph type="sldNum" sz="quarter" idx="4294967295"/>
+          </p:nvPr>
+        </p:nvSpPr>
+        <p:spPr>
+          <a:xfrm>
+            <a:off x="10180015" y="6355080"/>
+            <a:ext cx="365760" cy="274320"/>
+          </a:xfrm>
+          <a:prstGeom prst="rect">
+            <a:avLst/>
+          </a:prstGeom>
+          <a:extLst>
+            <a:ext uri="{C572A759-6A51-4108-AA02-DFA0A04FC94B}">
+              <ma14:wrappingTextBoxFlag xmlns:ma14="http://schemas.microsoft.com/office/mac/drawingml/2011/main" val="0"/>
+            </a:ext>
+          </a:extLst>
+        </p:spPr>
+        <p:txBody>
+          <a:bodyPr/>
+          <a:lstStyle>
+            <a:lvl1pPr>
+              <a:defRPr sz="1000">
+                <a:solidFill>
+                  <a:schemeClr val="tx1"/>
+                </a:solidFill>
+                <a:latin typeface="Raleway Light"/>
+                <a:ea typeface="Raleway Light"/>
+                <a:cs typeface="Raleway Light"/>
+              </a:defRPr>
+            </a:lvl1pPr>
+          </a:lstStyle>
+          <a:p>
+            <a:pPr algn="l"/>
+            <a:fld id="{F7021451-1387-4CA6-816F-3879F97B5CBC}" type="slidenum">
+              <a:rPr b="0" lang="en-US"/>
+              <a:t>14</a:t>
+            </a:fld>
+            <a:endParaRPr lang="en-US"/>
           </a:p>
         </p:txBody>
       </p:sp>
@@ -5453,6 +5983,150 @@
           <a:chExt cx="0" cy="0"/>
         </a:xfrm>
       </p:grpSpPr>
+      <p:pic>
+        <p:nvPicPr>
+          <p:cNvPr id="2" name="Image 0" descr="Entre Amis logo">    </p:cNvPr>
+          <p:cNvPicPr>
+            <a:picLocks noChangeAspect="1"/>
+          </p:cNvPicPr>
+          <p:nvPr/>
+        </p:nvPicPr>
+        <p:blipFill>
+          <a:blip r:embed="rId1"/>
+          <a:stretch>
+            <a:fillRect/>
+          </a:stretch>
+        </p:blipFill>
+        <p:spPr>
+          <a:xfrm>
+            <a:off x="4541368" y="1828800"/>
+            <a:ext cx="3108960" cy="1564707"/>
+          </a:xfrm>
+          <a:prstGeom prst="rect">
+            <a:avLst/>
+          </a:prstGeom>
+        </p:spPr>
+      </p:pic>
+      <p:sp>
+        <p:nvSpPr>
+          <p:cNvPr id="3" name="Text 0"/>
+          <p:cNvSpPr txBox="1"/>
+          <p:nvPr/>
+        </p:nvSpPr>
+        <p:spPr>
+          <a:xfrm>
+            <a:off x="548640" y="3657600"/>
+            <a:ext cx="11094415" cy="457200"/>
+          </a:xfrm>
+          <a:prstGeom prst="rect">
+            <a:avLst/>
+          </a:prstGeom>
+          <a:noFill/>
+          <a:ln/>
+        </p:spPr>
+        <p:txBody>
+          <a:bodyPr wrap="square" lIns="0" tIns="0" rIns="0" bIns="0" rtlCol="0" anchor="t"/>
+          <a:lstStyle/>
+          <a:p>
+            <a:pPr algn="ctr" indent="0" marL="0">
+              <a:spcAft>
+                <a:spcPts val="400"/>
+              </a:spcAft>
+              <a:buNone/>
+            </a:pPr>
+            <a:r>
+              <a:rPr lang="en-US" sz="2000" dirty="0">
+                <a:solidFill>
+                  <a:schemeClr val="tx1"/>
+                </a:solidFill>
+              </a:rPr>
+              <a:t>Say what you really think.</a:t>
+            </a:r>
+            <a:endParaRPr lang="en-US" sz="2000" dirty="0"/>
+          </a:p>
+        </p:txBody>
+      </p:sp>
+      <p:sp>
+        <p:nvSpPr>
+          <p:cNvPr id="4" name="FLAG — delete before sharing"/>
+          <p:cNvSpPr txBox="1"/>
+          <p:nvPr/>
+        </p:nvSpPr>
+        <p:spPr>
+          <a:xfrm>
+            <a:off x="3809848" y="4480560"/>
+            <a:ext cx="4572000" cy="548640"/>
+          </a:xfrm>
+          <a:prstGeom prst="rect">
+            <a:avLst/>
+          </a:prstGeom>
+          <a:solidFill>
+            <a:schemeClr val="bg1"/>
+          </a:solidFill>
+          <a:ln w="25400">
+            <a:solidFill>
+              <a:schemeClr val="accent4"/>
+            </a:solidFill>
+          </a:ln>
+        </p:spPr>
+        <p:txBody>
+          <a:bodyPr wrap="square" lIns="38100" tIns="76200" rIns="76200" bIns="38100" rtlCol="0" anchor="ctr"/>
+          <a:lstStyle/>
+          <a:p>
+            <a:pPr indent="0" marL="0">
+              <a:buNone/>
+            </a:pPr>
+            <a:r>
+              <a:rPr lang="en-US" sz="1200" dirty="0">
+                <a:solidFill>
+                  <a:schemeClr val="tx1"/>
+                </a:solidFill>
+                <a:latin typeface="Raleway SemiBold" pitchFamily="34" charset="0"/>
+                <a:ea typeface="Raleway SemiBold" pitchFamily="34" charset="-122"/>
+                <a:cs typeface="Raleway SemiBold" pitchFamily="34" charset="-120"/>
+              </a:rPr>
+              <a:t>TO ADD  </a:t>
+            </a:r>
+            <a:pPr indent="0" marL="0">
+              <a:buNone/>
+            </a:pPr>
+            <a:r>
+              <a:rPr lang="en-US" sz="1200" dirty="0">
+                <a:solidFill>
+                  <a:schemeClr val="tx1"/>
+                </a:solidFill>
+              </a:rPr>
+              <a:t>Contact details.</a:t>
+            </a:r>
+            <a:endParaRPr lang="en-US" sz="1200" dirty="0"/>
+          </a:p>
+        </p:txBody>
+      </p:sp>
+    </p:spTree>
+  </p:cSld>
+  <p:clrMapOvr>
+    <a:masterClrMapping/>
+  </p:clrMapOvr>
+</p:sld>
+</file>
+
+<file path=ppt/slides/slide16.xml><?xml version="1.0" encoding="utf-8"?>
+<p:sld xmlns:a="http://schemas.openxmlformats.org/drawingml/2006/main" xmlns:r="http://schemas.openxmlformats.org/officeDocument/2006/relationships" xmlns:p="http://schemas.openxmlformats.org/presentationml/2006/main">
+  <p:cSld name="Slide 16">
+    <p:spTree>
+      <p:nvGrpSpPr>
+        <p:cNvPr id="1" name=""/>
+        <p:cNvGrpSpPr/>
+        <p:nvPr/>
+      </p:nvGrpSpPr>
+      <p:grpSpPr>
+        <a:xfrm>
+          <a:off x="0" y="0"/>
+          <a:ext cx="0" cy="0"/>
+          <a:chOff x="0" y="0"/>
+          <a:chExt cx="0" cy="0"/>
+        </a:xfrm>
+      </p:grpSpPr>
       <p:sp>
         <p:nvSpPr>
           <p:cNvPr id="2" name="Text 1"/>
@@ -5658,7 +6332,7 @@
                   <a:schemeClr val="tx1"/>
                 </a:solidFill>
               </a:rPr>
-              <a:t>Quizzes and prizes (slide 4)</a:t>
+              <a:t>Quizzes and prizes, prize draw legal check (slides 4, 8)</a:t>
             </a:r>
             <a:endParaRPr lang="en-US" sz="1400" dirty="0"/>
           </a:p>
@@ -5694,7 +6368,7 @@
                   <a:schemeClr val="tx1"/>
                 </a:solidFill>
               </a:rPr>
-              <a:t>Contacts rule, legal review; reporting crowns (slides 4, 7)</a:t>
+              <a:t>Contacts rule, legal review; reporting crowns (slides 4, 7, 8)</a:t>
             </a:r>
             <a:endParaRPr lang="en-US" sz="1400" dirty="0"/>
           </a:p>
@@ -5712,7 +6386,7 @@
                   <a:schemeClr val="tx1"/>
                 </a:solidFill>
               </a:rPr>
-              <a:t>'By default' and 'automatic' (slide 8)</a:t>
+              <a:t>'By default' and 'automatic' (slide 9)</a:t>
             </a:r>
             <a:endParaRPr lang="en-US" sz="1400" dirty="0"/>
           </a:p>
@@ -5730,7 +6404,25 @@
                   <a:schemeClr val="tx1"/>
                 </a:solidFill>
               </a:rPr>
-              <a:t>Pricing, preferential rates, launch recognition (slides 9, 10)</a:t>
+              <a:t>Pricing, preferential rates, launch recognition (slides 10, 11)</a:t>
+            </a:r>
+            <a:endParaRPr lang="en-US" sz="1400" dirty="0"/>
+          </a:p>
+          <a:p>
+            <a:pPr marL="203200" indent="-203200">
+              <a:spcAft>
+                <a:spcPts val="600"/>
+              </a:spcAft>
+              <a:buSzPct val="100000"/>
+              <a:buChar char="•"/>
+            </a:pPr>
+            <a:r>
+              <a:rPr lang="en-US" sz="1400" dirty="0">
+                <a:solidFill>
+                  <a:schemeClr val="tx1"/>
+                </a:solidFill>
+              </a:rPr>
+              <a:t>Stage of each proof step (slide 12)</a:t>
             </a:r>
             <a:endParaRPr lang="en-US" sz="1400" dirty="0"/>
           </a:p>
@@ -5895,7 +6587,7 @@
                   <a:schemeClr val="tx1"/>
                 </a:solidFill>
               </a:rPr>
-              <a:t>Stage of each proof step (slide 11)</a:t>
+              <a:t>Producer report screen (slide 8)</a:t>
             </a:r>
             <a:endParaRPr lang="en-US" sz="1400" dirty="0"/>
           </a:p>
@@ -5913,7 +6605,7 @@
                   <a:schemeClr val="tx1"/>
                 </a:solidFill>
               </a:rPr>
-              <a:t>Your surname and photo (slide 13)</a:t>
+              <a:t>Your surname and photo (slide 14)</a:t>
             </a:r>
             <a:endParaRPr lang="en-US" sz="1400" dirty="0"/>
           </a:p>
@@ -5979,7 +6671,7 @@
             <a:pPr algn="l"/>
             <a:fld id="{F7021451-1387-4CA6-816F-3879F97B5CBC}" type="slidenum">
               <a:rPr b="0" lang="en-US"/>
-              <a:t>15</a:t>
+              <a:t>16</a:t>
             </a:fld>
             <a:endParaRPr lang="en-US"/>
           </a:p>
@@ -7784,7 +8476,7 @@
                   <a:schemeClr val="tx1"/>
                 </a:solidFill>
               </a:rPr>
-              <a:t>Quizzes and prizes (in the October deck): keep, and how?</a:t>
+              <a:t>Quizzes and prizes: now in the prototype (slide 8). Keep, and how?</a:t>
             </a:r>
             <a:endParaRPr lang="en-US" sz="1100" dirty="0"/>
           </a:p>
@@ -10602,7 +11294,7 @@
                 <a:ea typeface="Raleway Light" pitchFamily="34" charset="-122"/>
                 <a:cs typeface="Raleway Light" pitchFamily="34" charset="-120"/>
               </a:rPr>
-              <a:t>Honest insight starts with trust</a:t>
+              <a:t>What your producers get</a:t>
             </a:r>
             <a:endParaRPr lang="en-US" sz="3600" dirty="0"/>
           </a:p>
@@ -10643,7 +11335,7 @@
                 <a:ea typeface="Raleway Light" pitchFamily="34" charset="-122"/>
                 <a:cs typeface="Raleway Light" pitchFamily="34" charset="-120"/>
               </a:rPr>
-              <a:t>People only say what they really think when it's safe to.</a:t>
+              <a:t>Reasons for the producers and venues at your event to take part.</a:t>
             </a:r>
             <a:endParaRPr lang="en-US" sz="1800" dirty="0"/>
           </a:p>
@@ -10694,18 +11386,18 @@
       </p:sp>
       <p:sp>
         <p:nvSpPr>
-          <p:cNvPr id="5" name="Promise: Consent first"/>
+          <p:cNvPr id="5" name="Card: WHAT THE ROOM THOUGHT"/>
           <p:cNvSpPr/>
           <p:nvPr/>
         </p:nvSpPr>
         <p:spPr>
           <a:xfrm>
-            <a:off x="548640" y="1783080"/>
-            <a:ext cx="7680960" cy="603504"/>
+            <a:off x="548640" y="1691640"/>
+            <a:ext cx="3515258" cy="1737360"/>
           </a:xfrm>
           <a:prstGeom prst="roundRect">
             <a:avLst>
-              <a:gd name="adj" fmla="val 18182"/>
+              <a:gd name="adj" fmla="val 6316"/>
             </a:avLst>
           </a:prstGeom>
           <a:solidFill>
@@ -10734,8 +11426,8 @@
         </p:nvSpPr>
         <p:spPr>
           <a:xfrm>
-            <a:off x="822960" y="1783080"/>
-            <a:ext cx="7223760" cy="603504"/>
+            <a:off x="777240" y="1920240"/>
+            <a:ext cx="3058058" cy="1371600"/>
           </a:xfrm>
           <a:prstGeom prst="rect">
             <a:avLst/>
@@ -10744,7 +11436,7 @@
           <a:ln/>
         </p:spPr>
         <p:txBody>
-          <a:bodyPr wrap="square" lIns="0" tIns="0" rIns="0" bIns="0" rtlCol="0" anchor="ctr"/>
+          <a:bodyPr wrap="square" lIns="0" tIns="0" rIns="0" bIns="0" rtlCol="0" anchor="t"/>
           <a:lstStyle/>
           <a:p>
             <a:pPr indent="0" marL="0">
@@ -10754,7 +11446,7 @@
               <a:buNone/>
             </a:pPr>
             <a:r>
-              <a:rPr lang="en-US" sz="1400" dirty="0">
+              <a:rPr lang="en-US" sz="1200" spc="150" kern="0" dirty="0">
                 <a:solidFill>
                   <a:schemeClr val="tx1"/>
                 </a:solidFill>
@@ -10762,8 +11454,11 @@
                 <a:ea typeface="Raleway SemiBold" pitchFamily="34" charset="-122"/>
                 <a:cs typeface="Raleway SemiBold" pitchFamily="34" charset="-120"/>
               </a:rPr>
-              <a:t>Consent first  </a:t>
-            </a:r>
+              <a:t>WHAT THE ROOM THOUGHT</a:t>
+            </a:r>
+            <a:endParaRPr lang="en-US" sz="1400" dirty="0"/>
+          </a:p>
+          <a:p>
             <a:pPr indent="0" marL="0">
               <a:spcAft>
                 <a:spcPts val="400"/>
@@ -10771,12 +11466,29 @@
               <a:buNone/>
             </a:pPr>
             <a:r>
+              <a:rPr lang="en-US" sz="600" dirty="0">
+                <a:solidFill>
+                  <a:schemeClr val="tx1"/>
+                </a:solidFill>
+              </a:rPr>
+              <a:t> </a:t>
+            </a:r>
+            <a:endParaRPr lang="en-US" sz="1400" dirty="0"/>
+          </a:p>
+          <a:p>
+            <a:pPr indent="0" marL="0">
+              <a:spcAft>
+                <a:spcPts val="400"/>
+              </a:spcAft>
+              <a:buNone/>
+            </a:pPr>
+            <a:r>
               <a:rPr lang="en-US" sz="1400" dirty="0">
                 <a:solidFill>
                   <a:schemeClr val="tx1"/>
                 </a:solidFill>
               </a:rPr>
-              <a:t>Nothing is collected for your insight without clear, informed consent.</a:t>
+              <a:t>Which of their wines visitors loved, saved and crowned. Only shown once five or more took part, and never with a name.</a:t>
             </a:r>
             <a:endParaRPr lang="en-US" sz="1400" dirty="0"/>
           </a:p>
@@ -10784,18 +11496,18 @@
       </p:sp>
       <p:sp>
         <p:nvSpPr>
-          <p:cNvPr id="7" name="Promise: Anonymised"/>
+          <p:cNvPr id="7" name="Card: CONTACTS WHO SAID YES"/>
           <p:cNvSpPr/>
           <p:nvPr/>
         </p:nvSpPr>
         <p:spPr>
           <a:xfrm>
-            <a:off x="548640" y="2496312"/>
-            <a:ext cx="7680960" cy="603504"/>
+            <a:off x="4338218" y="1691640"/>
+            <a:ext cx="3515258" cy="1737360"/>
           </a:xfrm>
           <a:prstGeom prst="roundRect">
             <a:avLst>
-              <a:gd name="adj" fmla="val 18182"/>
+              <a:gd name="adj" fmla="val 6316"/>
             </a:avLst>
           </a:prstGeom>
           <a:solidFill>
@@ -10824,8 +11536,8 @@
         </p:nvSpPr>
         <p:spPr>
           <a:xfrm>
-            <a:off x="822960" y="2496312"/>
-            <a:ext cx="7223760" cy="603504"/>
+            <a:off x="4566818" y="1920240"/>
+            <a:ext cx="3058058" cy="1371600"/>
           </a:xfrm>
           <a:prstGeom prst="rect">
             <a:avLst/>
@@ -10834,7 +11546,7 @@
           <a:ln/>
         </p:spPr>
         <p:txBody>
-          <a:bodyPr wrap="square" lIns="0" tIns="0" rIns="0" bIns="0" rtlCol="0" anchor="ctr"/>
+          <a:bodyPr wrap="square" lIns="0" tIns="0" rIns="0" bIns="0" rtlCol="0" anchor="t"/>
           <a:lstStyle/>
           <a:p>
             <a:pPr indent="0" marL="0">
@@ -10844,7 +11556,7 @@
               <a:buNone/>
             </a:pPr>
             <a:r>
-              <a:rPr lang="en-US" sz="1400" dirty="0">
+              <a:rPr lang="en-US" sz="1200" spc="150" kern="0" dirty="0">
                 <a:solidFill>
                   <a:schemeClr val="tx1"/>
                 </a:solidFill>
@@ -10852,8 +11564,11 @@
                 <a:ea typeface="Raleway SemiBold" pitchFamily="34" charset="-122"/>
                 <a:cs typeface="Raleway SemiBold" pitchFamily="34" charset="-120"/>
               </a:rPr>
-              <a:t>Anonymised  </a:t>
-            </a:r>
+              <a:t>CONTACTS WHO SAID YES</a:t>
+            </a:r>
+            <a:endParaRPr lang="en-US" sz="1400" dirty="0"/>
+          </a:p>
+          <a:p>
             <a:pPr indent="0" marL="0">
               <a:spcAft>
                 <a:spcPts val="400"/>
@@ -10861,12 +11576,29 @@
               <a:buNone/>
             </a:pPr>
             <a:r>
+              <a:rPr lang="en-US" sz="600" dirty="0">
+                <a:solidFill>
+                  <a:schemeClr val="tx1"/>
+                </a:solidFill>
+              </a:rPr>
+              <a:t> </a:t>
+            </a:r>
+            <a:endParaRPr lang="en-US" sz="1400" dirty="0"/>
+          </a:p>
+          <a:p>
+            <a:pPr indent="0" marL="0">
+              <a:spcAft>
+                <a:spcPts val="400"/>
+              </a:spcAft>
+              <a:buNone/>
+            </a:pPr>
+            <a:r>
               <a:rPr lang="en-US" sz="1400" dirty="0">
                 <a:solidFill>
                   <a:schemeClr val="tx1"/>
                 </a:solidFill>
               </a:rPr>
-              <a:t>Opinions and responses are combined and anonymised, never linked to a name.</a:t>
+              <a:t>Visitors who choose to hear from a producer, by name. Nothing is ever pre-ticked.</a:t>
             </a:r>
             <a:endParaRPr lang="en-US" sz="1400" dirty="0"/>
           </a:p>
@@ -10874,18 +11606,18 @@
       </p:sp>
       <p:sp>
         <p:nvSpPr>
-          <p:cNvPr id="9" name="Promise: Never sold"/>
+          <p:cNvPr id="9" name="Card: THEIR STORY GOES HOME"/>
           <p:cNvSpPr/>
           <p:nvPr/>
         </p:nvSpPr>
         <p:spPr>
           <a:xfrm>
-            <a:off x="548640" y="3209544"/>
-            <a:ext cx="7680960" cy="603504"/>
+            <a:off x="8127797" y="1691640"/>
+            <a:ext cx="3515258" cy="1737360"/>
           </a:xfrm>
           <a:prstGeom prst="roundRect">
             <a:avLst>
-              <a:gd name="adj" fmla="val 18182"/>
+              <a:gd name="adj" fmla="val 6316"/>
             </a:avLst>
           </a:prstGeom>
           <a:solidFill>
@@ -10914,8 +11646,8 @@
         </p:nvSpPr>
         <p:spPr>
           <a:xfrm>
-            <a:off x="822960" y="3209544"/>
-            <a:ext cx="7223760" cy="603504"/>
+            <a:off x="8356397" y="1920240"/>
+            <a:ext cx="3058058" cy="1371600"/>
           </a:xfrm>
           <a:prstGeom prst="rect">
             <a:avLst/>
@@ -10924,7 +11656,7 @@
           <a:ln/>
         </p:spPr>
         <p:txBody>
-          <a:bodyPr wrap="square" lIns="0" tIns="0" rIns="0" bIns="0" rtlCol="0" anchor="ctr"/>
+          <a:bodyPr wrap="square" lIns="0" tIns="0" rIns="0" bIns="0" rtlCol="0" anchor="t"/>
           <a:lstStyle/>
           <a:p>
             <a:pPr indent="0" marL="0">
@@ -10934,7 +11666,7 @@
               <a:buNone/>
             </a:pPr>
             <a:r>
-              <a:rPr lang="en-US" sz="1400" dirty="0">
+              <a:rPr lang="en-US" sz="1200" spc="150" kern="0" dirty="0">
                 <a:solidFill>
                   <a:schemeClr val="tx1"/>
                 </a:solidFill>
@@ -10942,8 +11674,11 @@
                 <a:ea typeface="Raleway SemiBold" pitchFamily="34" charset="-122"/>
                 <a:cs typeface="Raleway SemiBold" pitchFamily="34" charset="-120"/>
               </a:rPr>
-              <a:t>Never sold  </a:t>
-            </a:r>
+              <a:t>THEIR STORY GOES HOME</a:t>
+            </a:r>
+            <a:endParaRPr lang="en-US" sz="1400" dirty="0"/>
+          </a:p>
+          <a:p>
             <a:pPr indent="0" marL="0">
               <a:spcAft>
                 <a:spcPts val="400"/>
@@ -10951,12 +11686,29 @@
               <a:buNone/>
             </a:pPr>
             <a:r>
+              <a:rPr lang="en-US" sz="600" dirty="0">
+                <a:solidFill>
+                  <a:schemeClr val="tx1"/>
+                </a:solidFill>
+              </a:rPr>
+              <a:t> </a:t>
+            </a:r>
+            <a:endParaRPr lang="en-US" sz="1400" dirty="0"/>
+          </a:p>
+          <a:p>
+            <a:pPr indent="0" marL="0">
+              <a:spcAft>
+                <a:spcPts val="400"/>
+              </a:spcAft>
+              <a:buNone/>
+            </a:pPr>
+            <a:r>
               <a:rPr lang="en-US" sz="1400" dirty="0">
                 <a:solidFill>
                   <a:schemeClr val="tx1"/>
                 </a:solidFill>
               </a:rPr>
-              <a:t>What someone says is never sold or passed on as individual data.</a:t>
+              <a:t>Their wines, their story and each visitor's own notes stay in that visitor's My wines after the day.</a:t>
             </a:r>
             <a:endParaRPr lang="en-US" sz="1400" dirty="0"/>
           </a:p>
@@ -10964,18 +11716,18 @@
       </p:sp>
       <p:sp>
         <p:nvSpPr>
-          <p:cNvPr id="11" name="Promise: Personal crowns stay personal"/>
+          <p:cNvPr id="11" name="Card: A QUESTION ABOUT THEIR WINE"/>
           <p:cNvSpPr/>
           <p:nvPr/>
         </p:nvSpPr>
         <p:spPr>
           <a:xfrm>
-            <a:off x="548640" y="3922776"/>
-            <a:ext cx="7680960" cy="603504"/>
+            <a:off x="548640" y="3657600"/>
+            <a:ext cx="3515258" cy="1737360"/>
           </a:xfrm>
           <a:prstGeom prst="roundRect">
             <a:avLst>
-              <a:gd name="adj" fmla="val 18182"/>
+              <a:gd name="adj" fmla="val 6316"/>
             </a:avLst>
           </a:prstGeom>
           <a:solidFill>
@@ -11004,8 +11756,8 @@
         </p:nvSpPr>
         <p:spPr>
           <a:xfrm>
-            <a:off x="822960" y="3922776"/>
-            <a:ext cx="7223760" cy="603504"/>
+            <a:off x="777240" y="3886200"/>
+            <a:ext cx="3058058" cy="1371600"/>
           </a:xfrm>
           <a:prstGeom prst="rect">
             <a:avLst/>
@@ -11014,7 +11766,7 @@
           <a:ln/>
         </p:spPr>
         <p:txBody>
-          <a:bodyPr wrap="square" lIns="0" tIns="0" rIns="0" bIns="0" rtlCol="0" anchor="ctr"/>
+          <a:bodyPr wrap="square" lIns="0" tIns="0" rIns="0" bIns="0" rtlCol="0" anchor="t"/>
           <a:lstStyle/>
           <a:p>
             <a:pPr indent="0" marL="0">
@@ -11024,7 +11776,7 @@
               <a:buNone/>
             </a:pPr>
             <a:r>
-              <a:rPr lang="en-US" sz="1400" dirty="0">
+              <a:rPr lang="en-US" sz="1200" spc="150" kern="0" dirty="0">
                 <a:solidFill>
                   <a:schemeClr val="tx1"/>
                 </a:solidFill>
@@ -11032,8 +11784,11 @@
                 <a:ea typeface="Raleway SemiBold" pitchFamily="34" charset="-122"/>
                 <a:cs typeface="Raleway SemiBold" pitchFamily="34" charset="-120"/>
               </a:rPr>
-              <a:t>Personal crowns stay personal  </a:t>
-            </a:r>
+              <a:t>A QUESTION ABOUT THEIR WINE</a:t>
+            </a:r>
+            <a:endParaRPr lang="en-US" sz="1400" dirty="0"/>
+          </a:p>
+          <a:p>
             <a:pPr indent="0" marL="0">
               <a:spcAft>
                 <a:spcPts val="400"/>
@@ -11041,12 +11796,29 @@
               <a:buNone/>
             </a:pPr>
             <a:r>
+              <a:rPr lang="en-US" sz="600" dirty="0">
+                <a:solidFill>
+                  <a:schemeClr val="tx1"/>
+                </a:solidFill>
+              </a:rPr>
+              <a:t> </a:t>
+            </a:r>
+            <a:endParaRPr lang="en-US" sz="1400" dirty="0"/>
+          </a:p>
+          <a:p>
+            <a:pPr indent="0" marL="0">
+              <a:spcAft>
+                <a:spcPts val="400"/>
+              </a:spcAft>
+              <a:buNone/>
+            </a:pPr>
+            <a:r>
               <a:rPr lang="en-US" sz="1400" dirty="0">
                 <a:solidFill>
                   <a:schemeClr val="tx1"/>
                 </a:solidFill>
               </a:rPr>
-              <a:t>No public ranking of producers by default.</a:t>
+              <a:t>One question per wine. Visitors see how the room answered, then a fact the producer chose. No scores.</a:t>
             </a:r>
             <a:endParaRPr lang="en-US" sz="1400" dirty="0"/>
           </a:p>
@@ -11054,18 +11826,18 @@
       </p:sp>
       <p:sp>
         <p:nvSpPr>
-          <p:cNvPr id="13" name="Promise: No re-identification"/>
+          <p:cNvPr id="13" name="Card: FOUND AT THEIR STAND"/>
           <p:cNvSpPr/>
           <p:nvPr/>
         </p:nvSpPr>
         <p:spPr>
           <a:xfrm>
-            <a:off x="548640" y="4636008"/>
-            <a:ext cx="7680960" cy="603504"/>
+            <a:off x="4338218" y="3657600"/>
+            <a:ext cx="3515258" cy="1737360"/>
           </a:xfrm>
           <a:prstGeom prst="roundRect">
             <a:avLst>
-              <a:gd name="adj" fmla="val 18182"/>
+              <a:gd name="adj" fmla="val 6316"/>
             </a:avLst>
           </a:prstGeom>
           <a:solidFill>
@@ -11094,8 +11866,8 @@
         </p:nvSpPr>
         <p:spPr>
           <a:xfrm>
-            <a:off x="822960" y="4636008"/>
-            <a:ext cx="7223760" cy="603504"/>
+            <a:off x="4566818" y="3886200"/>
+            <a:ext cx="3058058" cy="1371600"/>
           </a:xfrm>
           <a:prstGeom prst="rect">
             <a:avLst/>
@@ -11104,7 +11876,7 @@
           <a:ln/>
         </p:spPr>
         <p:txBody>
-          <a:bodyPr wrap="square" lIns="0" tIns="0" rIns="0" bIns="0" rtlCol="0" anchor="ctr"/>
+          <a:bodyPr wrap="square" lIns="0" tIns="0" rIns="0" bIns="0" rtlCol="0" anchor="t"/>
           <a:lstStyle/>
           <a:p>
             <a:pPr indent="0" marL="0">
@@ -11114,7 +11886,7 @@
               <a:buNone/>
             </a:pPr>
             <a:r>
-              <a:rPr lang="en-US" sz="1400" dirty="0">
+              <a:rPr lang="en-US" sz="1200" spc="150" kern="0" dirty="0">
                 <a:solidFill>
                   <a:schemeClr val="tx1"/>
                 </a:solidFill>
@@ -11122,8 +11894,11 @@
                 <a:ea typeface="Raleway SemiBold" pitchFamily="34" charset="-122"/>
                 <a:cs typeface="Raleway SemiBold" pitchFamily="34" charset="-120"/>
               </a:rPr>
-              <a:t>No re-identification  </a:t>
-            </a:r>
+              <a:t>FOUND AT THEIR STAND</a:t>
+            </a:r>
+            <a:endParaRPr lang="en-US" sz="1400" dirty="0"/>
+          </a:p>
+          <a:p>
             <a:pPr indent="0" marL="0">
               <a:spcAft>
                 <a:spcPts val="400"/>
@@ -11131,12 +11906,29 @@
               <a:buNone/>
             </a:pPr>
             <a:r>
+              <a:rPr lang="en-US" sz="600" dirty="0">
+                <a:solidFill>
+                  <a:schemeClr val="tx1"/>
+                </a:solidFill>
+              </a:rPr>
+              <a:t> </a:t>
+            </a:r>
+            <a:endParaRPr lang="en-US" sz="1400" dirty="0"/>
+          </a:p>
+          <a:p>
+            <a:pPr indent="0" marL="0">
+              <a:spcAft>
+                <a:spcPts val="400"/>
+              </a:spcAft>
+              <a:buNone/>
+            </a:pPr>
+            <a:r>
               <a:rPr lang="en-US" sz="1400" dirty="0">
                 <a:solidFill>
                   <a:schemeClr val="tx1"/>
                 </a:solidFill>
               </a:rPr>
-              <a:t>No automatic data sharing across platforms.</a:t>
+              <a:t>A printed card with a QR code on each stand opens that producer's page.</a:t>
             </a:r>
             <a:endParaRPr lang="en-US" sz="1400" dirty="0"/>
           </a:p>
@@ -11144,29 +11936,36 @@
       </p:sp>
       <p:sp>
         <p:nvSpPr>
-          <p:cNvPr id="15" name="Why it matters"/>
+          <p:cNvPr id="15" name="Card: A REASON TO CROWN"/>
           <p:cNvSpPr/>
           <p:nvPr/>
         </p:nvSpPr>
         <p:spPr>
           <a:xfrm>
-            <a:off x="8503920" y="1783080"/>
-            <a:ext cx="3139135" cy="3456432"/>
+            <a:off x="8127797" y="3657600"/>
+            <a:ext cx="3515258" cy="1737360"/>
           </a:xfrm>
           <a:prstGeom prst="roundRect">
             <a:avLst>
-              <a:gd name="adj" fmla="val 3495"/>
+              <a:gd name="adj" fmla="val 6316"/>
             </a:avLst>
           </a:prstGeom>
           <a:solidFill>
-            <a:schemeClr val="tx1"/>
+            <a:schemeClr val="bg1"/>
           </a:solidFill>
           <a:ln w="12700">
             <a:solidFill>
-              <a:schemeClr val="tx1"/>
+              <a:schemeClr val="bg1"/>
             </a:solidFill>
             <a:prstDash val="solid"/>
           </a:ln>
+          <a:effectLst>
+            <a:outerShdw sx="100000" sy="100000" kx="0" ky="0" algn="bl" rotWithShape="0" blurRad="76200" dist="25400" dir="5400000">
+              <a:srgbClr val="565A32">
+                <a:alpha val="12000"/>
+              </a:srgbClr>
+            </a:outerShdw>
+          </a:effectLst>
         </p:spPr>
       </p:sp>
       <p:sp>
@@ -11177,8 +11976,8 @@
         </p:nvSpPr>
         <p:spPr>
           <a:xfrm>
-            <a:off x="8778240" y="2011680"/>
-            <a:ext cx="2590495" cy="3017520"/>
+            <a:off x="8356397" y="3886200"/>
+            <a:ext cx="3058058" cy="1371600"/>
           </a:xfrm>
           <a:prstGeom prst="rect">
             <a:avLst/>
@@ -11197,17 +11996,17 @@
               <a:buNone/>
             </a:pPr>
             <a:r>
-              <a:rPr lang="en-US" sz="1300" spc="150" kern="0" dirty="0">
-                <a:solidFill>
-                  <a:schemeClr val="bg2"/>
+              <a:rPr lang="en-US" sz="1200" spc="150" kern="0" dirty="0">
+                <a:solidFill>
+                  <a:schemeClr val="tx1"/>
                 </a:solidFill>
                 <a:latin typeface="Raleway SemiBold" pitchFamily="34" charset="0"/>
                 <a:ea typeface="Raleway SemiBold" pitchFamily="34" charset="-122"/>
                 <a:cs typeface="Raleway SemiBold" pitchFamily="34" charset="-120"/>
               </a:rPr>
-              <a:t>WHY IT MATTERS</a:t>
-            </a:r>
-            <a:endParaRPr lang="en-US" sz="1700" dirty="0"/>
+              <a:t>A REASON TO CROWN</a:t>
+            </a:r>
+            <a:endParaRPr lang="en-US" sz="1400" dirty="0"/>
           </a:p>
           <a:p>
             <a:pPr indent="0" marL="0">
@@ -11217,14 +12016,14 @@
               <a:buNone/>
             </a:pPr>
             <a:r>
-              <a:rPr lang="en-US" sz="800" dirty="0">
-                <a:solidFill>
-                  <a:schemeClr val="bg2"/>
+              <a:rPr lang="en-US" sz="600" dirty="0">
+                <a:solidFill>
+                  <a:schemeClr val="tx1"/>
                 </a:solidFill>
               </a:rPr>
               <a:t> </a:t>
             </a:r>
-            <a:endParaRPr lang="en-US" sz="1700" dirty="0"/>
+            <a:endParaRPr lang="en-US" sz="1400" dirty="0"/>
           </a:p>
           <a:p>
             <a:pPr indent="0" marL="0">
@@ -11234,14 +12033,14 @@
               <a:buNone/>
             </a:pPr>
             <a:r>
-              <a:rPr lang="en-US" sz="1700" dirty="0">
-                <a:solidFill>
-                  <a:schemeClr val="bg2"/>
-                </a:solidFill>
-              </a:rPr>
-              <a:t>Say what you really think. It only works if people are safe to. That trust is what makes the insight worth having.</a:t>
-            </a:r>
-            <a:endParaRPr lang="en-US" sz="1700" dirty="0"/>
+              <a:rPr lang="en-US" sz="1400" dirty="0">
+                <a:solidFill>
+                  <a:schemeClr val="tx1"/>
+                </a:solidFill>
+              </a:rPr>
+              <a:t>Visitors crown their own Wine of the Day. Everyone who crowns can be entered into a prize draw.</a:t>
+            </a:r>
+            <a:endParaRPr lang="en-US" sz="1400" dirty="0"/>
           </a:p>
         </p:txBody>
       </p:sp>
@@ -11253,8 +12052,8 @@
         </p:nvSpPr>
         <p:spPr>
           <a:xfrm>
-            <a:off x="548640" y="5440680"/>
-            <a:ext cx="11094415" cy="502920"/>
+            <a:off x="548640" y="5596128"/>
+            <a:ext cx="3515258" cy="548640"/>
           </a:xfrm>
           <a:prstGeom prst="rect">
             <a:avLst/>
@@ -11276,7 +12075,7 @@
               <a:buNone/>
             </a:pPr>
             <a:r>
-              <a:rPr lang="en-US" sz="1100" dirty="0">
+              <a:rPr lang="en-US" sz="1000" dirty="0">
                 <a:solidFill>
                   <a:schemeClr val="tx1"/>
                 </a:solidFill>
@@ -11284,20 +12083,132 @@
                 <a:ea typeface="Raleway SemiBold" pitchFamily="34" charset="-122"/>
                 <a:cs typeface="Raleway SemiBold" pitchFamily="34" charset="-120"/>
               </a:rPr>
+              <a:t>TO CONFIRM  </a:t>
+            </a:r>
+            <a:pPr indent="0" marL="0">
+              <a:buNone/>
+            </a:pPr>
+            <a:r>
+              <a:rPr lang="en-US" sz="1000" dirty="0">
+                <a:solidFill>
+                  <a:schemeClr val="tx1"/>
+                </a:solidFill>
+              </a:rPr>
+              <a:t>Contacts: proposed rule, needs legal review.</a:t>
+            </a:r>
+            <a:endParaRPr lang="en-US" sz="1000" dirty="0"/>
+          </a:p>
+        </p:txBody>
+      </p:sp>
+      <p:sp>
+        <p:nvSpPr>
+          <p:cNvPr id="18" name="FLAG — delete before sharing"/>
+          <p:cNvSpPr txBox="1"/>
+          <p:nvPr/>
+        </p:nvSpPr>
+        <p:spPr>
+          <a:xfrm>
+            <a:off x="4338218" y="5596128"/>
+            <a:ext cx="3515258" cy="548640"/>
+          </a:xfrm>
+          <a:prstGeom prst="rect">
+            <a:avLst/>
+          </a:prstGeom>
+          <a:solidFill>
+            <a:schemeClr val="bg1"/>
+          </a:solidFill>
+          <a:ln w="25400">
+            <a:solidFill>
+              <a:schemeClr val="accent4"/>
+            </a:solidFill>
+          </a:ln>
+        </p:spPr>
+        <p:txBody>
+          <a:bodyPr wrap="square" lIns="38100" tIns="76200" rIns="76200" bIns="38100" rtlCol="0" anchor="ctr"/>
+          <a:lstStyle/>
+          <a:p>
+            <a:pPr indent="0" marL="0">
+              <a:buNone/>
+            </a:pPr>
+            <a:r>
+              <a:rPr lang="en-US" sz="1000" dirty="0">
+                <a:solidFill>
+                  <a:schemeClr val="tx1"/>
+                </a:solidFill>
+                <a:latin typeface="Raleway SemiBold" pitchFamily="34" charset="0"/>
+                <a:ea typeface="Raleway SemiBold" pitchFamily="34" charset="-122"/>
+                <a:cs typeface="Raleway SemiBold" pitchFamily="34" charset="-120"/>
+              </a:rPr>
+              <a:t>TO CONFIRM  </a:t>
+            </a:r>
+            <a:pPr indent="0" marL="0">
+              <a:buNone/>
+            </a:pPr>
+            <a:r>
+              <a:rPr lang="en-US" sz="1000" dirty="0">
+                <a:solidFill>
+                  <a:schemeClr val="tx1"/>
+                </a:solidFill>
+              </a:rPr>
+              <a:t>Prize draw: UK prize draw rules, CAP, Portman Group, short terms.</a:t>
+            </a:r>
+            <a:endParaRPr lang="en-US" sz="1000" dirty="0"/>
+          </a:p>
+        </p:txBody>
+      </p:sp>
+      <p:sp>
+        <p:nvSpPr>
+          <p:cNvPr id="19" name="FLAG — delete before sharing"/>
+          <p:cNvSpPr txBox="1"/>
+          <p:nvPr/>
+        </p:nvSpPr>
+        <p:spPr>
+          <a:xfrm>
+            <a:off x="8127797" y="5596128"/>
+            <a:ext cx="3515258" cy="548640"/>
+          </a:xfrm>
+          <a:prstGeom prst="rect">
+            <a:avLst/>
+          </a:prstGeom>
+          <a:solidFill>
+            <a:schemeClr val="bg1"/>
+          </a:solidFill>
+          <a:ln w="25400">
+            <a:solidFill>
+              <a:schemeClr val="accent4"/>
+            </a:solidFill>
+          </a:ln>
+        </p:spPr>
+        <p:txBody>
+          <a:bodyPr wrap="square" lIns="38100" tIns="76200" rIns="76200" bIns="38100" rtlCol="0" anchor="ctr"/>
+          <a:lstStyle/>
+          <a:p>
+            <a:pPr indent="0" marL="0">
+              <a:buNone/>
+            </a:pPr>
+            <a:r>
+              <a:rPr lang="en-US" sz="1000" dirty="0">
+                <a:solidFill>
+                  <a:schemeClr val="tx1"/>
+                </a:solidFill>
+                <a:latin typeface="Raleway SemiBold" pitchFamily="34" charset="0"/>
+                <a:ea typeface="Raleway SemiBold" pitchFamily="34" charset="-122"/>
+                <a:cs typeface="Raleway SemiBold" pitchFamily="34" charset="-120"/>
+              </a:rPr>
               <a:t>TO DECIDE  </a:t>
             </a:r>
             <a:pPr indent="0" marL="0">
               <a:buNone/>
             </a:pPr>
             <a:r>
-              <a:rPr lang="en-US" sz="1100" dirty="0">
-                <a:solidFill>
-                  <a:schemeClr val="tx1"/>
-                </a:solidFill>
-              </a:rPr>
-              <a:t>'By default' and 'automatic' suggest exceptions. Keep, or make absolute?</a:t>
-            </a:r>
-            <a:endParaRPr lang="en-US" sz="1100" dirty="0"/>
+              <a:rPr lang="en-US" sz="1000" dirty="0">
+                <a:solidFill>
+                  <a:schemeClr val="tx1"/>
+                </a:solidFill>
+              </a:rPr>
+              <a:t>Reporting crowns to producers (see slide 7). Report screen still to build.</a:t>
+            </a:r>
+            <a:endParaRPr lang="en-US" sz="1000" dirty="0"/>
           </a:p>
         </p:txBody>
       </p:sp>
@@ -11409,7 +12320,7 @@
                 <a:ea typeface="Raleway Light" pitchFamily="34" charset="-122"/>
                 <a:cs typeface="Raleway Light" pitchFamily="34" charset="-120"/>
               </a:rPr>
-              <a:t>What a partnership might include</a:t>
+              <a:t>Honest insight starts with trust</a:t>
             </a:r>
             <a:endParaRPr lang="en-US" sz="3600" dirty="0"/>
           </a:p>
@@ -11450,7 +12361,7 @@
                 <a:ea typeface="Raleway Light" pitchFamily="34" charset="-122"/>
                 <a:cs typeface="Raleway Light" pitchFamily="34" charset="-120"/>
               </a:rPr>
-              <a:t>A possible year-round relationship across your events.</a:t>
+              <a:t>People only say what they really think when it's safe to.</a:t>
             </a:r>
             <a:endParaRPr lang="en-US" sz="1800" dirty="0"/>
           </a:p>
@@ -11501,18 +12412,18 @@
       </p:sp>
       <p:sp>
         <p:nvSpPr>
-          <p:cNvPr id="5" name="Card: DIGITAL"/>
+          <p:cNvPr id="5" name="Promise: Consent first"/>
           <p:cNvSpPr/>
           <p:nvPr/>
         </p:nvSpPr>
         <p:spPr>
           <a:xfrm>
             <a:off x="548640" y="1783080"/>
-            <a:ext cx="3515258" cy="2194560"/>
+            <a:ext cx="7680960" cy="603504"/>
           </a:xfrm>
           <a:prstGeom prst="roundRect">
             <a:avLst>
-              <a:gd name="adj" fmla="val 5000"/>
+              <a:gd name="adj" fmla="val 18182"/>
             </a:avLst>
           </a:prstGeom>
           <a:solidFill>
@@ -11541,8 +12452,8 @@
         </p:nvSpPr>
         <p:spPr>
           <a:xfrm>
-            <a:off x="777240" y="2011680"/>
-            <a:ext cx="3058058" cy="1828800"/>
+            <a:off x="822960" y="1783080"/>
+            <a:ext cx="7223760" cy="603504"/>
           </a:xfrm>
           <a:prstGeom prst="rect">
             <a:avLst/>
@@ -11551,7 +12462,7 @@
           <a:ln/>
         </p:spPr>
         <p:txBody>
-          <a:bodyPr wrap="square" lIns="0" tIns="0" rIns="0" bIns="0" rtlCol="0" anchor="t"/>
+          <a:bodyPr wrap="square" lIns="0" tIns="0" rIns="0" bIns="0" rtlCol="0" anchor="ctr"/>
           <a:lstStyle/>
           <a:p>
             <a:pPr indent="0" marL="0">
@@ -11561,7 +12472,7 @@
               <a:buNone/>
             </a:pPr>
             <a:r>
-              <a:rPr lang="en-US" sz="1200" spc="150" kern="0" dirty="0">
+              <a:rPr lang="en-US" sz="1400" dirty="0">
                 <a:solidFill>
                   <a:schemeClr val="tx1"/>
                 </a:solidFill>
@@ -11569,11 +12480,8 @@
                 <a:ea typeface="Raleway SemiBold" pitchFamily="34" charset="-122"/>
                 <a:cs typeface="Raleway SemiBold" pitchFamily="34" charset="-120"/>
               </a:rPr>
-              <a:t>DIGITAL</a:t>
-            </a:r>
-            <a:endParaRPr lang="en-US" sz="1500" dirty="0"/>
-          </a:p>
-          <a:p>
+              <a:t>Consent first  </a:t>
+            </a:r>
             <a:pPr indent="0" marL="0">
               <a:spcAft>
                 <a:spcPts val="400"/>
@@ -11581,48 +12489,31 @@
               <a:buNone/>
             </a:pPr>
             <a:r>
-              <a:rPr lang="en-US" sz="600" dirty="0">
-                <a:solidFill>
-                  <a:schemeClr val="tx1"/>
-                </a:solidFill>
-              </a:rPr>
-              <a:t> </a:t>
-            </a:r>
-            <a:endParaRPr lang="en-US" sz="1500" dirty="0"/>
-          </a:p>
-          <a:p>
-            <a:pPr indent="0" marL="0">
-              <a:spcAft>
-                <a:spcPts val="400"/>
-              </a:spcAft>
-              <a:buNone/>
-            </a:pPr>
-            <a:r>
-              <a:rPr lang="en-US" sz="1500" dirty="0">
-                <a:solidFill>
-                  <a:schemeClr val="tx1"/>
-                </a:solidFill>
-              </a:rPr>
-              <a:t>The visitor experience, your producers' content, saved discoveries, polls, consent journeys and reporting.</a:t>
-            </a:r>
-            <a:endParaRPr lang="en-US" sz="1500" dirty="0"/>
-          </a:p>
-        </p:txBody>
-      </p:sp>
-      <p:sp>
-        <p:nvSpPr>
-          <p:cNvPr id="7" name="Card: AT THE EVENT"/>
+              <a:rPr lang="en-US" sz="1400" dirty="0">
+                <a:solidFill>
+                  <a:schemeClr val="tx1"/>
+                </a:solidFill>
+              </a:rPr>
+              <a:t>Nothing is collected for your insight without clear, informed consent.</a:t>
+            </a:r>
+            <a:endParaRPr lang="en-US" sz="1400" dirty="0"/>
+          </a:p>
+        </p:txBody>
+      </p:sp>
+      <p:sp>
+        <p:nvSpPr>
+          <p:cNvPr id="7" name="Promise: Anonymised"/>
           <p:cNvSpPr/>
           <p:nvPr/>
         </p:nvSpPr>
         <p:spPr>
           <a:xfrm>
-            <a:off x="4338218" y="1783080"/>
-            <a:ext cx="3515258" cy="2194560"/>
+            <a:off x="548640" y="2496312"/>
+            <a:ext cx="7680960" cy="603504"/>
           </a:xfrm>
           <a:prstGeom prst="roundRect">
             <a:avLst>
-              <a:gd name="adj" fmla="val 5000"/>
+              <a:gd name="adj" fmla="val 18182"/>
             </a:avLst>
           </a:prstGeom>
           <a:solidFill>
@@ -11651,8 +12542,8 @@
         </p:nvSpPr>
         <p:spPr>
           <a:xfrm>
-            <a:off x="4566818" y="2011680"/>
-            <a:ext cx="3058058" cy="1828800"/>
+            <a:off x="822960" y="2496312"/>
+            <a:ext cx="7223760" cy="603504"/>
           </a:xfrm>
           <a:prstGeom prst="rect">
             <a:avLst/>
@@ -11661,7 +12552,7 @@
           <a:ln/>
         </p:spPr>
         <p:txBody>
-          <a:bodyPr wrap="square" lIns="0" tIns="0" rIns="0" bIns="0" rtlCol="0" anchor="t"/>
+          <a:bodyPr wrap="square" lIns="0" tIns="0" rIns="0" bIns="0" rtlCol="0" anchor="ctr"/>
           <a:lstStyle/>
           <a:p>
             <a:pPr indent="0" marL="0">
@@ -11671,7 +12562,7 @@
               <a:buNone/>
             </a:pPr>
             <a:r>
-              <a:rPr lang="en-US" sz="1200" spc="150" kern="0" dirty="0">
+              <a:rPr lang="en-US" sz="1400" dirty="0">
                 <a:solidFill>
                   <a:schemeClr val="tx1"/>
                 </a:solidFill>
@@ -11679,11 +12570,8 @@
                 <a:ea typeface="Raleway SemiBold" pitchFamily="34" charset="-122"/>
                 <a:cs typeface="Raleway SemiBold" pitchFamily="34" charset="-120"/>
               </a:rPr>
-              <a:t>AT THE EVENT</a:t>
-            </a:r>
-            <a:endParaRPr lang="en-US" sz="1500" dirty="0"/>
-          </a:p>
-          <a:p>
+              <a:t>Anonymised  </a:t>
+            </a:r>
             <a:pPr indent="0" marL="0">
               <a:spcAft>
                 <a:spcPts val="400"/>
@@ -11691,48 +12579,31 @@
               <a:buNone/>
             </a:pPr>
             <a:r>
-              <a:rPr lang="en-US" sz="600" dirty="0">
-                <a:solidFill>
-                  <a:schemeClr val="tx1"/>
-                </a:solidFill>
-              </a:rPr>
-              <a:t> </a:t>
-            </a:r>
-            <a:endParaRPr lang="en-US" sz="1500" dirty="0"/>
-          </a:p>
-          <a:p>
-            <a:pPr indent="0" marL="0">
-              <a:spcAft>
-                <a:spcPts val="400"/>
-              </a:spcAft>
-              <a:buNone/>
-            </a:pPr>
-            <a:r>
-              <a:rPr lang="en-US" sz="1500" dirty="0">
-                <a:solidFill>
-                  <a:schemeClr val="tx1"/>
-                </a:solidFill>
-              </a:rPr>
-              <a:t>A small Entre Amis corner and scheduled moments on your main screen, fully costed.</a:t>
-            </a:r>
-            <a:endParaRPr lang="en-US" sz="1500" dirty="0"/>
-          </a:p>
-        </p:txBody>
-      </p:sp>
-      <p:sp>
-        <p:nvSpPr>
-          <p:cNvPr id="9" name="Card: AFTER THE EVENT"/>
+              <a:rPr lang="en-US" sz="1400" dirty="0">
+                <a:solidFill>
+                  <a:schemeClr val="tx1"/>
+                </a:solidFill>
+              </a:rPr>
+              <a:t>Opinions and responses are combined and anonymised, never linked to a name.</a:t>
+            </a:r>
+            <a:endParaRPr lang="en-US" sz="1400" dirty="0"/>
+          </a:p>
+        </p:txBody>
+      </p:sp>
+      <p:sp>
+        <p:nvSpPr>
+          <p:cNvPr id="9" name="Promise: Never sold"/>
           <p:cNvSpPr/>
           <p:nvPr/>
         </p:nvSpPr>
         <p:spPr>
           <a:xfrm>
-            <a:off x="8127797" y="1783080"/>
-            <a:ext cx="3515258" cy="2194560"/>
+            <a:off x="548640" y="3209544"/>
+            <a:ext cx="7680960" cy="603504"/>
           </a:xfrm>
           <a:prstGeom prst="roundRect">
             <a:avLst>
-              <a:gd name="adj" fmla="val 5000"/>
+              <a:gd name="adj" fmla="val 18182"/>
             </a:avLst>
           </a:prstGeom>
           <a:solidFill>
@@ -11761,8 +12632,8 @@
         </p:nvSpPr>
         <p:spPr>
           <a:xfrm>
-            <a:off x="8356397" y="2011680"/>
-            <a:ext cx="3058058" cy="1828800"/>
+            <a:off x="822960" y="3209544"/>
+            <a:ext cx="7223760" cy="603504"/>
           </a:xfrm>
           <a:prstGeom prst="rect">
             <a:avLst/>
@@ -11771,7 +12642,7 @@
           <a:ln/>
         </p:spPr>
         <p:txBody>
-          <a:bodyPr wrap="square" lIns="0" tIns="0" rIns="0" bIns="0" rtlCol="0" anchor="t"/>
+          <a:bodyPr wrap="square" lIns="0" tIns="0" rIns="0" bIns="0" rtlCol="0" anchor="ctr"/>
           <a:lstStyle/>
           <a:p>
             <a:pPr indent="0" marL="0">
@@ -11781,7 +12652,7 @@
               <a:buNone/>
             </a:pPr>
             <a:r>
-              <a:rPr lang="en-US" sz="1200" spc="150" kern="0" dirty="0">
+              <a:rPr lang="en-US" sz="1400" dirty="0">
                 <a:solidFill>
                   <a:schemeClr val="tx1"/>
                 </a:solidFill>
@@ -11789,11 +12660,8 @@
                 <a:ea typeface="Raleway SemiBold" pitchFamily="34" charset="-122"/>
                 <a:cs typeface="Raleway SemiBold" pitchFamily="34" charset="-120"/>
               </a:rPr>
-              <a:t>AFTER THE EVENT</a:t>
-            </a:r>
-            <a:endParaRPr lang="en-US" sz="1500" dirty="0"/>
-          </a:p>
-          <a:p>
+              <a:t>Never sold  </a:t>
+            </a:r>
             <a:pPr indent="0" marL="0">
               <a:spcAft>
                 <a:spcPts val="400"/>
@@ -11801,14 +12669,280 @@
               <a:buNone/>
             </a:pPr>
             <a:r>
-              <a:rPr lang="en-US" sz="600" dirty="0">
-                <a:solidFill>
-                  <a:schemeClr val="tx1"/>
+              <a:rPr lang="en-US" sz="1400" dirty="0">
+                <a:solidFill>
+                  <a:schemeClr val="tx1"/>
+                </a:solidFill>
+              </a:rPr>
+              <a:t>What someone says is never sold or passed on as individual data.</a:t>
+            </a:r>
+            <a:endParaRPr lang="en-US" sz="1400" dirty="0"/>
+          </a:p>
+        </p:txBody>
+      </p:sp>
+      <p:sp>
+        <p:nvSpPr>
+          <p:cNvPr id="11" name="Promise: Personal crowns stay personal"/>
+          <p:cNvSpPr/>
+          <p:nvPr/>
+        </p:nvSpPr>
+        <p:spPr>
+          <a:xfrm>
+            <a:off x="548640" y="3922776"/>
+            <a:ext cx="7680960" cy="603504"/>
+          </a:xfrm>
+          <a:prstGeom prst="roundRect">
+            <a:avLst>
+              <a:gd name="adj" fmla="val 18182"/>
+            </a:avLst>
+          </a:prstGeom>
+          <a:solidFill>
+            <a:schemeClr val="bg1"/>
+          </a:solidFill>
+          <a:ln w="12700">
+            <a:solidFill>
+              <a:schemeClr val="bg1"/>
+            </a:solidFill>
+            <a:prstDash val="solid"/>
+          </a:ln>
+          <a:effectLst>
+            <a:outerShdw sx="100000" sy="100000" kx="0" ky="0" algn="bl" rotWithShape="0" blurRad="76200" dist="25400" dir="5400000">
+              <a:srgbClr val="565A32">
+                <a:alpha val="12000"/>
+              </a:srgbClr>
+            </a:outerShdw>
+          </a:effectLst>
+        </p:spPr>
+      </p:sp>
+      <p:sp>
+        <p:nvSpPr>
+          <p:cNvPr id="12" name="Text 10"/>
+          <p:cNvSpPr txBox="1"/>
+          <p:nvPr/>
+        </p:nvSpPr>
+        <p:spPr>
+          <a:xfrm>
+            <a:off x="822960" y="3922776"/>
+            <a:ext cx="7223760" cy="603504"/>
+          </a:xfrm>
+          <a:prstGeom prst="rect">
+            <a:avLst/>
+          </a:prstGeom>
+          <a:noFill/>
+          <a:ln/>
+        </p:spPr>
+        <p:txBody>
+          <a:bodyPr wrap="square" lIns="0" tIns="0" rIns="0" bIns="0" rtlCol="0" anchor="ctr"/>
+          <a:lstStyle/>
+          <a:p>
+            <a:pPr indent="0" marL="0">
+              <a:spcAft>
+                <a:spcPts val="400"/>
+              </a:spcAft>
+              <a:buNone/>
+            </a:pPr>
+            <a:r>
+              <a:rPr lang="en-US" sz="1400" dirty="0">
+                <a:solidFill>
+                  <a:schemeClr val="tx1"/>
+                </a:solidFill>
+                <a:latin typeface="Raleway SemiBold" pitchFamily="34" charset="0"/>
+                <a:ea typeface="Raleway SemiBold" pitchFamily="34" charset="-122"/>
+                <a:cs typeface="Raleway SemiBold" pitchFamily="34" charset="-120"/>
+              </a:rPr>
+              <a:t>Personal crowns stay personal  </a:t>
+            </a:r>
+            <a:pPr indent="0" marL="0">
+              <a:spcAft>
+                <a:spcPts val="400"/>
+              </a:spcAft>
+              <a:buNone/>
+            </a:pPr>
+            <a:r>
+              <a:rPr lang="en-US" sz="1400" dirty="0">
+                <a:solidFill>
+                  <a:schemeClr val="tx1"/>
+                </a:solidFill>
+              </a:rPr>
+              <a:t>No public ranking of producers by default.</a:t>
+            </a:r>
+            <a:endParaRPr lang="en-US" sz="1400" dirty="0"/>
+          </a:p>
+        </p:txBody>
+      </p:sp>
+      <p:sp>
+        <p:nvSpPr>
+          <p:cNvPr id="13" name="Promise: No re-identification"/>
+          <p:cNvSpPr/>
+          <p:nvPr/>
+        </p:nvSpPr>
+        <p:spPr>
+          <a:xfrm>
+            <a:off x="548640" y="4636008"/>
+            <a:ext cx="7680960" cy="603504"/>
+          </a:xfrm>
+          <a:prstGeom prst="roundRect">
+            <a:avLst>
+              <a:gd name="adj" fmla="val 18182"/>
+            </a:avLst>
+          </a:prstGeom>
+          <a:solidFill>
+            <a:schemeClr val="bg1"/>
+          </a:solidFill>
+          <a:ln w="12700">
+            <a:solidFill>
+              <a:schemeClr val="bg1"/>
+            </a:solidFill>
+            <a:prstDash val="solid"/>
+          </a:ln>
+          <a:effectLst>
+            <a:outerShdw sx="100000" sy="100000" kx="0" ky="0" algn="bl" rotWithShape="0" blurRad="76200" dist="25400" dir="5400000">
+              <a:srgbClr val="565A32">
+                <a:alpha val="12000"/>
+              </a:srgbClr>
+            </a:outerShdw>
+          </a:effectLst>
+        </p:spPr>
+      </p:sp>
+      <p:sp>
+        <p:nvSpPr>
+          <p:cNvPr id="14" name="Text 12"/>
+          <p:cNvSpPr txBox="1"/>
+          <p:nvPr/>
+        </p:nvSpPr>
+        <p:spPr>
+          <a:xfrm>
+            <a:off x="822960" y="4636008"/>
+            <a:ext cx="7223760" cy="603504"/>
+          </a:xfrm>
+          <a:prstGeom prst="rect">
+            <a:avLst/>
+          </a:prstGeom>
+          <a:noFill/>
+          <a:ln/>
+        </p:spPr>
+        <p:txBody>
+          <a:bodyPr wrap="square" lIns="0" tIns="0" rIns="0" bIns="0" rtlCol="0" anchor="ctr"/>
+          <a:lstStyle/>
+          <a:p>
+            <a:pPr indent="0" marL="0">
+              <a:spcAft>
+                <a:spcPts val="400"/>
+              </a:spcAft>
+              <a:buNone/>
+            </a:pPr>
+            <a:r>
+              <a:rPr lang="en-US" sz="1400" dirty="0">
+                <a:solidFill>
+                  <a:schemeClr val="tx1"/>
+                </a:solidFill>
+                <a:latin typeface="Raleway SemiBold" pitchFamily="34" charset="0"/>
+                <a:ea typeface="Raleway SemiBold" pitchFamily="34" charset="-122"/>
+                <a:cs typeface="Raleway SemiBold" pitchFamily="34" charset="-120"/>
+              </a:rPr>
+              <a:t>No re-identification  </a:t>
+            </a:r>
+            <a:pPr indent="0" marL="0">
+              <a:spcAft>
+                <a:spcPts val="400"/>
+              </a:spcAft>
+              <a:buNone/>
+            </a:pPr>
+            <a:r>
+              <a:rPr lang="en-US" sz="1400" dirty="0">
+                <a:solidFill>
+                  <a:schemeClr val="tx1"/>
+                </a:solidFill>
+              </a:rPr>
+              <a:t>No automatic data sharing across platforms.</a:t>
+            </a:r>
+            <a:endParaRPr lang="en-US" sz="1400" dirty="0"/>
+          </a:p>
+        </p:txBody>
+      </p:sp>
+      <p:sp>
+        <p:nvSpPr>
+          <p:cNvPr id="15" name="Why it matters"/>
+          <p:cNvSpPr/>
+          <p:nvPr/>
+        </p:nvSpPr>
+        <p:spPr>
+          <a:xfrm>
+            <a:off x="8503920" y="1783080"/>
+            <a:ext cx="3139135" cy="3456432"/>
+          </a:xfrm>
+          <a:prstGeom prst="roundRect">
+            <a:avLst>
+              <a:gd name="adj" fmla="val 3495"/>
+            </a:avLst>
+          </a:prstGeom>
+          <a:solidFill>
+            <a:schemeClr val="tx1"/>
+          </a:solidFill>
+          <a:ln w="12700">
+            <a:solidFill>
+              <a:schemeClr val="tx1"/>
+            </a:solidFill>
+            <a:prstDash val="solid"/>
+          </a:ln>
+        </p:spPr>
+      </p:sp>
+      <p:sp>
+        <p:nvSpPr>
+          <p:cNvPr id="16" name="Text 14"/>
+          <p:cNvSpPr txBox="1"/>
+          <p:nvPr/>
+        </p:nvSpPr>
+        <p:spPr>
+          <a:xfrm>
+            <a:off x="8778240" y="2011680"/>
+            <a:ext cx="2590495" cy="3017520"/>
+          </a:xfrm>
+          <a:prstGeom prst="rect">
+            <a:avLst/>
+          </a:prstGeom>
+          <a:noFill/>
+          <a:ln/>
+        </p:spPr>
+        <p:txBody>
+          <a:bodyPr wrap="square" lIns="0" tIns="0" rIns="0" bIns="0" rtlCol="0" anchor="t"/>
+          <a:lstStyle/>
+          <a:p>
+            <a:pPr indent="0" marL="0">
+              <a:spcAft>
+                <a:spcPts val="400"/>
+              </a:spcAft>
+              <a:buNone/>
+            </a:pPr>
+            <a:r>
+              <a:rPr lang="en-US" sz="1300" spc="150" kern="0" dirty="0">
+                <a:solidFill>
+                  <a:schemeClr val="bg2"/>
+                </a:solidFill>
+                <a:latin typeface="Raleway SemiBold" pitchFamily="34" charset="0"/>
+                <a:ea typeface="Raleway SemiBold" pitchFamily="34" charset="-122"/>
+                <a:cs typeface="Raleway SemiBold" pitchFamily="34" charset="-120"/>
+              </a:rPr>
+              <a:t>WHY IT MATTERS</a:t>
+            </a:r>
+            <a:endParaRPr lang="en-US" sz="1700" dirty="0"/>
+          </a:p>
+          <a:p>
+            <a:pPr indent="0" marL="0">
+              <a:spcAft>
+                <a:spcPts val="400"/>
+              </a:spcAft>
+              <a:buNone/>
+            </a:pPr>
+            <a:r>
+              <a:rPr lang="en-US" sz="800" dirty="0">
+                <a:solidFill>
+                  <a:schemeClr val="bg2"/>
                 </a:solidFill>
               </a:rPr>
               <a:t> </a:t>
             </a:r>
-            <a:endParaRPr lang="en-US" sz="1500" dirty="0"/>
+            <a:endParaRPr lang="en-US" sz="1700" dirty="0"/>
           </a:p>
           <a:p>
             <a:pPr indent="0" marL="0">
@@ -11818,27 +12952,27 @@
               <a:buNone/>
             </a:pPr>
             <a:r>
-              <a:rPr lang="en-US" sz="1500" dirty="0">
-                <a:solidFill>
-                  <a:schemeClr val="tx1"/>
-                </a:solidFill>
-              </a:rPr>
-              <a:t>The post-event visitor experience, combined insight reports, a partner review and a potential Christmas activation.</a:t>
-            </a:r>
-            <a:endParaRPr lang="en-US" sz="1500" dirty="0"/>
-          </a:p>
-        </p:txBody>
-      </p:sp>
-      <p:sp>
-        <p:nvSpPr>
-          <p:cNvPr id="11" name="FLAG — delete before sharing"/>
+              <a:rPr lang="en-US" sz="1700" dirty="0">
+                <a:solidFill>
+                  <a:schemeClr val="bg2"/>
+                </a:solidFill>
+              </a:rPr>
+              <a:t>Say what you really think. It only works if people are safe to. That trust is what makes the insight worth having.</a:t>
+            </a:r>
+            <a:endParaRPr lang="en-US" sz="1700" dirty="0"/>
+          </a:p>
+        </p:txBody>
+      </p:sp>
+      <p:sp>
+        <p:nvSpPr>
+          <p:cNvPr id="17" name="FLAG — delete before sharing"/>
           <p:cNvSpPr txBox="1"/>
           <p:nvPr/>
         </p:nvSpPr>
         <p:spPr>
           <a:xfrm>
-            <a:off x="548640" y="4251960"/>
-            <a:ext cx="11094415" cy="640080"/>
+            <a:off x="548640" y="5440680"/>
+            <a:ext cx="11094415" cy="502920"/>
           </a:xfrm>
           <a:prstGeom prst="rect">
             <a:avLst/>
@@ -11879,7 +13013,7 @@
                   <a:schemeClr val="tx1"/>
                 </a:solidFill>
               </a:rPr>
-              <a:t>The indicative price line is removed: nothing may be priced until confirmed. Pricing belongs in each organiser's proposal.</a:t>
+              <a:t>'By default' and 'automatic' suggest exceptions. Keep, or make absolute?</a:t>
             </a:r>
             <a:endParaRPr lang="en-US" sz="1100" dirty="0"/>
           </a:p>

--- a/decks/Entre Amis - Event Mode pack - DRAFT.pptx
+++ b/decks/Entre Amis - Event Mode pack - DRAFT.pptx
@@ -122,13 +122,13 @@
   <p:extLst>
     <p:ext uri="{521415D9-36F7-43E2-AB2F-B90AF26B5E84}">
       <p14:sectionLst xmlns:p14="http://schemas.microsoft.com/office/powerpoint/2010/main">
-        <p14:section name="Introduction" id="{231fa06a-da83-813b-1cc3-4700338607b8}">
+        <p14:section name="Introduction" id="{38a1325b-fa65-05b1-da29-3985533423f3}">
           <p14:sldIdLst>
             <p14:sldId id="256"/>
             <p14:sldId id="257"/>
           </p14:sldIdLst>
         </p14:section>
-        <p14:section name="Event Mode" id="{3fd6c50b-7362-1760-63cd-bb1354b68a6a}">
+        <p14:section name="Event Mode" id="{7ad6dd89-8f95-a226-3212-39341f44cc17}">
           <p14:sldIdLst>
             <p14:sldId id="258"/>
             <p14:sldId id="259"/>
@@ -139,21 +139,21 @@
             <p14:sldId id="264"/>
           </p14:sldIdLst>
         </p14:section>
-        <p14:section name="Working together" id="{fd52be1b-a8ac-77b1-d5e5-1d0e6a20daf2}">
+        <p14:section name="Working together" id="{9d2c15b2-d6fd-5bb5-ea73-b29c2c9947cd}">
           <p14:sldIdLst>
             <p14:sldId id="265"/>
             <p14:sldId id="266"/>
             <p14:sldId id="267"/>
           </p14:sldIdLst>
         </p14:section>
-        <p14:section name="About us" id="{8a5df74b-f990-643c-8a1c-1e2cbe147219}">
+        <p14:section name="About us" id="{4580eee1-6252-6400-2aa9-440bf9e97a85}">
           <p14:sldIdLst>
             <p14:sldId id="268"/>
             <p14:sldId id="269"/>
             <p14:sldId id="270"/>
           </p14:sldIdLst>
         </p14:section>
-        <p14:section name="Working notes — delete before sharing" id="{19b45441-f726-735b-ac80-03e11f0fd809}">
+        <p14:section name="Working notes — delete before sharing" id="{67b20c2b-1bf4-4b06-cf76-b696ef123b07}">
           <p14:sldIdLst>
             <p14:sldId id="271"/>
           </p14:sldIdLst>
@@ -1442,7 +1442,7 @@
           <a:p>
             <a:r>
               <a:rPr lang="en-US" dirty="0"/>
-              <a:t>New spine for the pack, as you suggested. Visitor side from the October 'During / Personal / After' slide. Quizzes and prizes left off until decided: quizzes need to fit 'no wrong answers', and prizes near alcohol need checking against CAP and Portman Group rules. 'Save wines in seconds' isn't used: it's a speed claim and suggests wine recognition, which isn't claimable yet.</a:t>
+              <a:t>New spine for the pack, as you suggested. Visitor side from the October 'During / Personal / After' slide. Quizzes and prizes left off until decided: quizzes need to fit 'no wrong answers', and prizes near alcohol need checking against CAP and Portman Group rules. 'Save wines in seconds' isn't used: it's a speed claim.</a:t>
             </a:r>
             <a:endParaRPr lang="en-US" dirty="0"/>
           </a:p>
@@ -1794,7 +1794,7 @@
           <a:p>
             <a:r>
               <a:rPr lang="en-US" dirty="0"/>
-              <a:t>New slide, 16 October: the benefits for wine businesses, from the app as built to 15 October 2026 (Event Mode prototype: visitor and organiser screens, stand QR cards, one question per wine, crowning and prize draw). Producer totals are recorded but the screen that shows them is not built yet. Contacts follow the proposed Brand Brain rule: one tick box per producer, never pre-ticked, no opinions attached. Event Mode's stage is still to confirm, so this slide is draft-only.</a:t>
+              <a:t>New slide, 16 October: the benefits for wine businesses, from the app as built to 15 October 2026 (Event Mode prototype: visitor and organiser screens, stand QR cards, one question per wine, crowning and prize draw). Producer totals are recorded but the screen that shows them is not built yet. Contacts follow the proposed Brand Brain rule: one tick box per producer, never pre-ticked, no opinions attached. Event Mode may be described as in development (Brand Brain, 16 October); the prize draw, reports and contact details are not claimable yet, hence the flags.</a:t>
             </a:r>
             <a:endParaRPr lang="en-US" dirty="0"/>
           </a:p>
@@ -2749,7 +2749,7 @@
                   <a:schemeClr val="tx1"/>
                 </a:solidFill>
               </a:rPr>
-              <a:t>Event Mode's stage, and its detailed differences from Partner Mode.</a:t>
+              <a:t>Event Mode's detailed differences from Partner Mode.</a:t>
             </a:r>
             <a:endParaRPr lang="en-US" sz="1100" dirty="0"/>
           </a:p>
@@ -4580,7 +4580,7 @@
                   <a:schemeClr val="tx1"/>
                 </a:solidFill>
               </a:rPr>
-              <a:t>Where each is today (15 October): prototype built and working, with visitor and organiser screens and stand QR cards. Example report: totals recorded, report screen in progress. First pilot: planned. Event Mode's stage still to confirm.</a:t>
+              <a:t>Where each is today (15 October): prototype built and working, with visitor and organiser screens and stand QR cards. Example report: totals recorded, report screen in progress. First pilot: planned.</a:t>
             </a:r>
             <a:endParaRPr lang="en-US" sz="1100" dirty="0"/>
           </a:p>
@@ -6314,7 +6314,7 @@
                   <a:schemeClr val="tx1"/>
                 </a:solidFill>
               </a:rPr>
-              <a:t>Event Mode: its stage and how it differs from Partner Mode</a:t>
+              <a:t>Event Mode: how it differs from Partner Mode</a:t>
             </a:r>
             <a:endParaRPr lang="en-US" sz="1400" dirty="0"/>
           </a:p>
